--- a/TechnicalDocs/Text2Image_grader_JaneH_0126.pptx
+++ b/TechnicalDocs/Text2Image_grader_JaneH_0126.pptx
@@ -13,11 +13,11 @@
     <p:sldId id="266" r:id="rId4"/>
     <p:sldId id="276" r:id="rId5"/>
     <p:sldId id="270" r:id="rId6"/>
-    <p:sldId id="261" r:id="rId7"/>
-    <p:sldId id="278" r:id="rId8"/>
-    <p:sldId id="279" r:id="rId9"/>
-    <p:sldId id="277" r:id="rId10"/>
-    <p:sldId id="280" r:id="rId11"/>
+    <p:sldId id="278" r:id="rId7"/>
+    <p:sldId id="279" r:id="rId8"/>
+    <p:sldId id="277" r:id="rId9"/>
+    <p:sldId id="280" r:id="rId10"/>
+    <p:sldId id="261" r:id="rId11"/>
     <p:sldId id="273" r:id="rId12"/>
   </p:sldIdLst>
   <p:sldSz cx="9144000" cy="5400675"/>
@@ -139,7 +139,7 @@
 <file path=ppt/revisionInfo.xml><?xml version="1.0" encoding="utf-8"?>
 <p1510:revInfo xmlns:a="http://schemas.openxmlformats.org/drawingml/2006/main" xmlns:r="http://schemas.openxmlformats.org/officeDocument/2006/relationships" xmlns:p1510="http://schemas.microsoft.com/office/powerpoint/2015/10/main">
   <p1510:revLst>
-    <p1510:client id="{E0159075-E9B0-47C1-A198-881015670DF2}" v="196" dt="2026-01-22T20:51:23.617"/>
+    <p1510:client id="{0B68B1B1-7C14-45D1-9F3A-36A136995855}" v="42" dt="2026-02-21T07:12:51.777"/>
   </p1510:revLst>
 </p1510:revInfo>
 </file>
@@ -149,368 +149,31 @@
   <pc:docChgLst>
     <pc:chgData name="Jane huang" userId="a5d43ce04888ed0d" providerId="LiveId" clId="{00FA1A45-4AAD-46DF-B7B0-174E362B8709}"/>
     <pc:docChg chg="undo custSel addSld delSld modSld sldOrd">
-      <pc:chgData name="Jane huang" userId="a5d43ce04888ed0d" providerId="LiveId" clId="{00FA1A45-4AAD-46DF-B7B0-174E362B8709}" dt="2026-01-22T20:51:16.559" v="1157" actId="1076"/>
+      <pc:chgData name="Jane huang" userId="a5d43ce04888ed0d" providerId="LiveId" clId="{00FA1A45-4AAD-46DF-B7B0-174E362B8709}" dt="2026-02-21T08:16:28.312" v="1337" actId="20577"/>
       <pc:docMkLst>
         <pc:docMk/>
       </pc:docMkLst>
-      <pc:sldChg chg="delSp modSp del mod ord">
-        <pc:chgData name="Jane huang" userId="a5d43ce04888ed0d" providerId="LiveId" clId="{00FA1A45-4AAD-46DF-B7B0-174E362B8709}" dt="2026-01-21T20:58:17.737" v="45" actId="47"/>
-        <pc:sldMkLst>
-          <pc:docMk/>
-          <pc:sldMk cId="0" sldId="256"/>
-        </pc:sldMkLst>
-        <pc:spChg chg="mod">
-          <ac:chgData name="Jane huang" userId="a5d43ce04888ed0d" providerId="LiveId" clId="{00FA1A45-4AAD-46DF-B7B0-174E362B8709}" dt="2026-01-21T20:50:47.854" v="29" actId="20577"/>
-          <ac:spMkLst>
-            <pc:docMk/>
-            <pc:sldMk cId="0" sldId="256"/>
-            <ac:spMk id="3" creationId="{00000000-0000-0000-0000-000000000000}"/>
-          </ac:spMkLst>
-        </pc:spChg>
-        <pc:picChg chg="del">
-          <ac:chgData name="Jane huang" userId="a5d43ce04888ed0d" providerId="LiveId" clId="{00FA1A45-4AAD-46DF-B7B0-174E362B8709}" dt="2026-01-21T20:47:53.323" v="0" actId="478"/>
-          <ac:picMkLst>
-            <pc:docMk/>
-            <pc:sldMk cId="0" sldId="256"/>
-            <ac:picMk id="4" creationId="{00000000-0000-0000-0000-000000000000}"/>
-          </ac:picMkLst>
-        </pc:picChg>
-      </pc:sldChg>
-      <pc:sldChg chg="addSp modSp mod setBg">
-        <pc:chgData name="Jane huang" userId="a5d43ce04888ed0d" providerId="LiveId" clId="{00FA1A45-4AAD-46DF-B7B0-174E362B8709}" dt="2026-01-21T20:58:27.605" v="47" actId="1076"/>
-        <pc:sldMkLst>
-          <pc:docMk/>
-          <pc:sldMk cId="0" sldId="257"/>
-        </pc:sldMkLst>
-        <pc:spChg chg="mod">
-          <ac:chgData name="Jane huang" userId="a5d43ce04888ed0d" providerId="LiveId" clId="{00FA1A45-4AAD-46DF-B7B0-174E362B8709}" dt="2026-01-21T20:58:27.605" v="47" actId="1076"/>
-          <ac:spMkLst>
-            <pc:docMk/>
-            <pc:sldMk cId="0" sldId="257"/>
-            <ac:spMk id="2" creationId="{00000000-0000-0000-0000-000000000000}"/>
-          </ac:spMkLst>
-        </pc:spChg>
-        <pc:spChg chg="mod">
-          <ac:chgData name="Jane huang" userId="a5d43ce04888ed0d" providerId="LiveId" clId="{00FA1A45-4AAD-46DF-B7B0-174E362B8709}" dt="2026-01-21T20:58:05.031" v="44" actId="207"/>
-          <ac:spMkLst>
-            <pc:docMk/>
-            <pc:sldMk cId="0" sldId="257"/>
-            <ac:spMk id="3" creationId="{00000000-0000-0000-0000-000000000000}"/>
-          </ac:spMkLst>
-        </pc:spChg>
-        <pc:spChg chg="add">
-          <ac:chgData name="Jane huang" userId="a5d43ce04888ed0d" providerId="LiveId" clId="{00FA1A45-4AAD-46DF-B7B0-174E362B8709}" dt="2026-01-21T20:57:27.964" v="31" actId="26606"/>
-          <ac:spMkLst>
-            <pc:docMk/>
-            <pc:sldMk cId="0" sldId="257"/>
-            <ac:spMk id="9" creationId="{C0763A76-9F1C-4FC5-82B7-DD475DA461B2}"/>
-          </ac:spMkLst>
-        </pc:spChg>
-        <pc:spChg chg="add">
-          <ac:chgData name="Jane huang" userId="a5d43ce04888ed0d" providerId="LiveId" clId="{00FA1A45-4AAD-46DF-B7B0-174E362B8709}" dt="2026-01-21T20:57:27.964" v="31" actId="26606"/>
-          <ac:spMkLst>
-            <pc:docMk/>
-            <pc:sldMk cId="0" sldId="257"/>
-            <ac:spMk id="11" creationId="{E81BF4F6-F2CF-4984-9D14-D6966D92F99F}"/>
-          </ac:spMkLst>
-        </pc:spChg>
-        <pc:picChg chg="add">
-          <ac:chgData name="Jane huang" userId="a5d43ce04888ed0d" providerId="LiveId" clId="{00FA1A45-4AAD-46DF-B7B0-174E362B8709}" dt="2026-01-21T20:57:27.964" v="31" actId="26606"/>
-          <ac:picMkLst>
-            <pc:docMk/>
-            <pc:sldMk cId="0" sldId="257"/>
-            <ac:picMk id="5" creationId="{C727E689-16F4-D327-7DF1-1CD96B5817CE}"/>
-          </ac:picMkLst>
-        </pc:picChg>
-      </pc:sldChg>
-      <pc:sldChg chg="del">
-        <pc:chgData name="Jane huang" userId="a5d43ce04888ed0d" providerId="LiveId" clId="{00FA1A45-4AAD-46DF-B7B0-174E362B8709}" dt="2026-01-21T22:06:01.431" v="497" actId="47"/>
-        <pc:sldMkLst>
-          <pc:docMk/>
-          <pc:sldMk cId="0" sldId="258"/>
-        </pc:sldMkLst>
-      </pc:sldChg>
-      <pc:sldChg chg="del">
-        <pc:chgData name="Jane huang" userId="a5d43ce04888ed0d" providerId="LiveId" clId="{00FA1A45-4AAD-46DF-B7B0-174E362B8709}" dt="2026-01-21T22:06:10.217" v="498" actId="47"/>
-        <pc:sldMkLst>
-          <pc:docMk/>
-          <pc:sldMk cId="0" sldId="259"/>
-        </pc:sldMkLst>
-      </pc:sldChg>
-      <pc:sldChg chg="del">
-        <pc:chgData name="Jane huang" userId="a5d43ce04888ed0d" providerId="LiveId" clId="{00FA1A45-4AAD-46DF-B7B0-174E362B8709}" dt="2026-01-21T22:06:12.318" v="499" actId="47"/>
-        <pc:sldMkLst>
-          <pc:docMk/>
-          <pc:sldMk cId="0" sldId="260"/>
-        </pc:sldMkLst>
-      </pc:sldChg>
-      <pc:sldChg chg="addSp delSp modSp mod ord">
-        <pc:chgData name="Jane huang" userId="a5d43ce04888ed0d" providerId="LiveId" clId="{00FA1A45-4AAD-46DF-B7B0-174E362B8709}" dt="2026-01-21T22:44:55.686" v="667" actId="1076"/>
+      <pc:sldChg chg="ord">
+        <pc:chgData name="Jane huang" userId="a5d43ce04888ed0d" providerId="LiveId" clId="{00FA1A45-4AAD-46DF-B7B0-174E362B8709}" dt="2026-02-21T06:51:25.474" v="1181"/>
         <pc:sldMkLst>
           <pc:docMk/>
           <pc:sldMk cId="0" sldId="261"/>
         </pc:sldMkLst>
-        <pc:spChg chg="mod">
-          <ac:chgData name="Jane huang" userId="a5d43ce04888ed0d" providerId="LiveId" clId="{00FA1A45-4AAD-46DF-B7B0-174E362B8709}" dt="2026-01-21T22:44:47.022" v="664" actId="1076"/>
-          <ac:spMkLst>
-            <pc:docMk/>
-            <pc:sldMk cId="0" sldId="261"/>
-            <ac:spMk id="2" creationId="{00000000-0000-0000-0000-000000000000}"/>
-          </ac:spMkLst>
-        </pc:spChg>
-        <pc:spChg chg="add del mod">
-          <ac:chgData name="Jane huang" userId="a5d43ce04888ed0d" providerId="LiveId" clId="{00FA1A45-4AAD-46DF-B7B0-174E362B8709}" dt="2026-01-21T22:35:18.693" v="590" actId="478"/>
-          <ac:spMkLst>
-            <pc:docMk/>
-            <pc:sldMk cId="0" sldId="261"/>
-            <ac:spMk id="5" creationId="{5B5C591F-CED1-A067-5682-9B2B83C9A73F}"/>
-          </ac:spMkLst>
-        </pc:spChg>
-        <pc:spChg chg="add mod">
-          <ac:chgData name="Jane huang" userId="a5d43ce04888ed0d" providerId="LiveId" clId="{00FA1A45-4AAD-46DF-B7B0-174E362B8709}" dt="2026-01-21T22:37:45.075" v="599" actId="20577"/>
-          <ac:spMkLst>
-            <pc:docMk/>
-            <pc:sldMk cId="0" sldId="261"/>
-            <ac:spMk id="6" creationId="{D24BB8E7-FB16-388C-BCD1-33A23739A8F0}"/>
-          </ac:spMkLst>
-        </pc:spChg>
-        <pc:graphicFrameChg chg="mod modGraphic">
-          <ac:chgData name="Jane huang" userId="a5d43ce04888ed0d" providerId="LiveId" clId="{00FA1A45-4AAD-46DF-B7B0-174E362B8709}" dt="2026-01-21T22:44:48.630" v="665" actId="1076"/>
-          <ac:graphicFrameMkLst>
-            <pc:docMk/>
-            <pc:sldMk cId="0" sldId="261"/>
-            <ac:graphicFrameMk id="3" creationId="{00000000-0000-0000-0000-000000000000}"/>
-          </ac:graphicFrameMkLst>
-        </pc:graphicFrameChg>
-        <pc:picChg chg="add mod">
-          <ac:chgData name="Jane huang" userId="a5d43ce04888ed0d" providerId="LiveId" clId="{00FA1A45-4AAD-46DF-B7B0-174E362B8709}" dt="2026-01-21T22:44:55.686" v="667" actId="1076"/>
-          <ac:picMkLst>
-            <pc:docMk/>
-            <pc:sldMk cId="0" sldId="261"/>
-            <ac:picMk id="4098" creationId="{E2AE2CD7-DAF4-DE97-4944-44993644596C}"/>
-          </ac:picMkLst>
-        </pc:picChg>
-      </pc:sldChg>
-      <pc:sldChg chg="del">
-        <pc:chgData name="Jane huang" userId="a5d43ce04888ed0d" providerId="LiveId" clId="{00FA1A45-4AAD-46DF-B7B0-174E362B8709}" dt="2026-01-21T22:39:08.585" v="600" actId="47"/>
-        <pc:sldMkLst>
-          <pc:docMk/>
-          <pc:sldMk cId="0" sldId="262"/>
-        </pc:sldMkLst>
-      </pc:sldChg>
-      <pc:sldChg chg="del">
-        <pc:chgData name="Jane huang" userId="a5d43ce04888ed0d" providerId="LiveId" clId="{00FA1A45-4AAD-46DF-B7B0-174E362B8709}" dt="2026-01-21T22:39:19.538" v="601" actId="47"/>
-        <pc:sldMkLst>
-          <pc:docMk/>
-          <pc:sldMk cId="0" sldId="263"/>
-        </pc:sldMkLst>
-      </pc:sldChg>
-      <pc:sldChg chg="delSp modSp del mod">
-        <pc:chgData name="Jane huang" userId="a5d43ce04888ed0d" providerId="LiveId" clId="{00FA1A45-4AAD-46DF-B7B0-174E362B8709}" dt="2026-01-21T22:07:20.184" v="513" actId="47"/>
-        <pc:sldMkLst>
-          <pc:docMk/>
-          <pc:sldMk cId="0" sldId="264"/>
-        </pc:sldMkLst>
-        <pc:spChg chg="del mod">
-          <ac:chgData name="Jane huang" userId="a5d43ce04888ed0d" providerId="LiveId" clId="{00FA1A45-4AAD-46DF-B7B0-174E362B8709}" dt="2026-01-21T22:06:56.996" v="509"/>
-          <ac:spMkLst>
-            <pc:docMk/>
-            <pc:sldMk cId="0" sldId="264"/>
-            <ac:spMk id="3" creationId="{00000000-0000-0000-0000-000000000000}"/>
-          </ac:spMkLst>
-        </pc:spChg>
-      </pc:sldChg>
-      <pc:sldChg chg="add del">
-        <pc:chgData name="Jane huang" userId="a5d43ce04888ed0d" providerId="LiveId" clId="{00FA1A45-4AAD-46DF-B7B0-174E362B8709}" dt="2026-01-21T21:13:09.452" v="69" actId="47"/>
-        <pc:sldMkLst>
-          <pc:docMk/>
-          <pc:sldMk cId="0" sldId="265"/>
-        </pc:sldMkLst>
       </pc:sldChg>
       <pc:sldChg chg="addSp delSp modSp add mod">
-        <pc:chgData name="Jane huang" userId="a5d43ce04888ed0d" providerId="LiveId" clId="{00FA1A45-4AAD-46DF-B7B0-174E362B8709}" dt="2026-01-21T21:32:11.182" v="186" actId="1076"/>
+        <pc:chgData name="Jane huang" userId="a5d43ce04888ed0d" providerId="LiveId" clId="{00FA1A45-4AAD-46DF-B7B0-174E362B8709}" dt="2026-02-21T08:16:28.312" v="1337" actId="20577"/>
         <pc:sldMkLst>
           <pc:docMk/>
           <pc:sldMk cId="0" sldId="266"/>
         </pc:sldMkLst>
-        <pc:spChg chg="mod">
-          <ac:chgData name="Jane huang" userId="a5d43ce04888ed0d" providerId="LiveId" clId="{00FA1A45-4AAD-46DF-B7B0-174E362B8709}" dt="2026-01-21T21:32:11.182" v="186" actId="1076"/>
-          <ac:spMkLst>
-            <pc:docMk/>
-            <pc:sldMk cId="0" sldId="266"/>
-            <ac:spMk id="2" creationId="{00000000-0000-0000-0000-000000000000}"/>
-          </ac:spMkLst>
-        </pc:spChg>
-        <pc:spChg chg="del mod">
-          <ac:chgData name="Jane huang" userId="a5d43ce04888ed0d" providerId="LiveId" clId="{00FA1A45-4AAD-46DF-B7B0-174E362B8709}" dt="2026-01-21T21:01:07.085" v="49" actId="478"/>
-          <ac:spMkLst>
-            <pc:docMk/>
-            <pc:sldMk cId="0" sldId="266"/>
-            <ac:spMk id="3" creationId="{00000000-0000-0000-0000-000000000000}"/>
-          </ac:spMkLst>
-        </pc:spChg>
-        <pc:spChg chg="add">
-          <ac:chgData name="Jane huang" userId="a5d43ce04888ed0d" providerId="LiveId" clId="{00FA1A45-4AAD-46DF-B7B0-174E362B8709}" dt="2026-01-21T21:31:07.058" v="171"/>
-          <ac:spMkLst>
-            <pc:docMk/>
-            <pc:sldMk cId="0" sldId="266"/>
-            <ac:spMk id="5" creationId="{E4B0A474-3478-9795-EBBC-32479B290D1C}"/>
-          </ac:spMkLst>
-        </pc:spChg>
-        <pc:spChg chg="add mod">
-          <ac:chgData name="Jane huang" userId="a5d43ce04888ed0d" providerId="LiveId" clId="{00FA1A45-4AAD-46DF-B7B0-174E362B8709}" dt="2026-01-21T21:31:12.753" v="172"/>
-          <ac:spMkLst>
-            <pc:docMk/>
-            <pc:sldMk cId="0" sldId="266"/>
-            <ac:spMk id="6" creationId="{A79A4D3E-91C8-B2E8-5B39-7EB8D6D841BE}"/>
-          </ac:spMkLst>
-        </pc:spChg>
         <pc:graphicFrameChg chg="add mod modGraphic">
-          <ac:chgData name="Jane huang" userId="a5d43ce04888ed0d" providerId="LiveId" clId="{00FA1A45-4AAD-46DF-B7B0-174E362B8709}" dt="2026-01-21T21:31:05.626" v="170" actId="1076"/>
+          <ac:chgData name="Jane huang" userId="a5d43ce04888ed0d" providerId="LiveId" clId="{00FA1A45-4AAD-46DF-B7B0-174E362B8709}" dt="2026-02-21T08:16:28.312" v="1337" actId="20577"/>
           <ac:graphicFrameMkLst>
             <pc:docMk/>
             <pc:sldMk cId="0" sldId="266"/>
             <ac:graphicFrameMk id="4" creationId="{025EE001-A32E-F655-D7B7-715523637FEB}"/>
           </ac:graphicFrameMkLst>
         </pc:graphicFrameChg>
-        <pc:picChg chg="add mod modCrop">
-          <ac:chgData name="Jane huang" userId="a5d43ce04888ed0d" providerId="LiveId" clId="{00FA1A45-4AAD-46DF-B7B0-174E362B8709}" dt="2026-01-21T21:32:00.186" v="185" actId="732"/>
-          <ac:picMkLst>
-            <pc:docMk/>
-            <pc:sldMk cId="0" sldId="266"/>
-            <ac:picMk id="8" creationId="{D94EDA54-4AC8-0D12-6AA3-CB0F5133664F}"/>
-          </ac:picMkLst>
-        </pc:picChg>
-      </pc:sldChg>
-      <pc:sldChg chg="addSp delSp modSp add del mod ord">
-        <pc:chgData name="Jane huang" userId="a5d43ce04888ed0d" providerId="LiveId" clId="{00FA1A45-4AAD-46DF-B7B0-174E362B8709}" dt="2026-01-21T22:04:35.221" v="481" actId="47"/>
-        <pc:sldMkLst>
-          <pc:docMk/>
-          <pc:sldMk cId="0" sldId="267"/>
-        </pc:sldMkLst>
-        <pc:spChg chg="mod">
-          <ac:chgData name="Jane huang" userId="a5d43ce04888ed0d" providerId="LiveId" clId="{00FA1A45-4AAD-46DF-B7B0-174E362B8709}" dt="2026-01-21T22:01:00.968" v="427"/>
-          <ac:spMkLst>
-            <pc:docMk/>
-            <pc:sldMk cId="0" sldId="267"/>
-            <ac:spMk id="3" creationId="{00000000-0000-0000-0000-000000000000}"/>
-          </ac:spMkLst>
-        </pc:spChg>
-        <pc:spChg chg="add">
-          <ac:chgData name="Jane huang" userId="a5d43ce04888ed0d" providerId="LiveId" clId="{00FA1A45-4AAD-46DF-B7B0-174E362B8709}" dt="2026-01-21T21:57:46.574" v="383"/>
-          <ac:spMkLst>
-            <pc:docMk/>
-            <pc:sldMk cId="0" sldId="267"/>
-            <ac:spMk id="5" creationId="{D9635950-1899-1845-B03A-12C74D767143}"/>
-          </ac:spMkLst>
-        </pc:spChg>
-        <pc:graphicFrameChg chg="add del mod modGraphic">
-          <ac:chgData name="Jane huang" userId="a5d43ce04888ed0d" providerId="LiveId" clId="{00FA1A45-4AAD-46DF-B7B0-174E362B8709}" dt="2026-01-21T21:42:46.561" v="269" actId="478"/>
-          <ac:graphicFrameMkLst>
-            <pc:docMk/>
-            <pc:sldMk cId="0" sldId="267"/>
-            <ac:graphicFrameMk id="4" creationId="{187043FA-E7F7-BD39-961D-1B5119CEFF8E}"/>
-          </ac:graphicFrameMkLst>
-        </pc:graphicFrameChg>
-      </pc:sldChg>
-      <pc:sldChg chg="add del ord">
-        <pc:chgData name="Jane huang" userId="a5d43ce04888ed0d" providerId="LiveId" clId="{00FA1A45-4AAD-46DF-B7B0-174E362B8709}" dt="2026-01-21T22:29:26.617" v="572" actId="47"/>
-        <pc:sldMkLst>
-          <pc:docMk/>
-          <pc:sldMk cId="0" sldId="268"/>
-        </pc:sldMkLst>
-      </pc:sldChg>
-      <pc:sldChg chg="add del ord">
-        <pc:chgData name="Jane huang" userId="a5d43ce04888ed0d" providerId="LiveId" clId="{00FA1A45-4AAD-46DF-B7B0-174E362B8709}" dt="2026-01-21T22:12:03.176" v="514" actId="47"/>
-        <pc:sldMkLst>
-          <pc:docMk/>
-          <pc:sldMk cId="0" sldId="269"/>
-        </pc:sldMkLst>
-      </pc:sldChg>
-      <pc:sldChg chg="addSp delSp modSp add mod ord">
-        <pc:chgData name="Jane huang" userId="a5d43ce04888ed0d" providerId="LiveId" clId="{00FA1A45-4AAD-46DF-B7B0-174E362B8709}" dt="2026-01-21T22:19:45.222" v="560" actId="1076"/>
-        <pc:sldMkLst>
-          <pc:docMk/>
-          <pc:sldMk cId="0" sldId="270"/>
-        </pc:sldMkLst>
-        <pc:spChg chg="mod">
-          <ac:chgData name="Jane huang" userId="a5d43ce04888ed0d" providerId="LiveId" clId="{00FA1A45-4AAD-46DF-B7B0-174E362B8709}" dt="2026-01-21T22:14:07.145" v="532" actId="1076"/>
-          <ac:spMkLst>
-            <pc:docMk/>
-            <pc:sldMk cId="0" sldId="270"/>
-            <ac:spMk id="2" creationId="{00000000-0000-0000-0000-000000000000}"/>
-          </ac:spMkLst>
-        </pc:spChg>
-        <pc:spChg chg="del mod">
-          <ac:chgData name="Jane huang" userId="a5d43ce04888ed0d" providerId="LiveId" clId="{00FA1A45-4AAD-46DF-B7B0-174E362B8709}" dt="2026-01-21T22:14:01.041" v="530" actId="478"/>
-          <ac:spMkLst>
-            <pc:docMk/>
-            <pc:sldMk cId="0" sldId="270"/>
-            <ac:spMk id="3" creationId="{00000000-0000-0000-0000-000000000000}"/>
-          </ac:spMkLst>
-        </pc:spChg>
-        <pc:spChg chg="add mod">
-          <ac:chgData name="Jane huang" userId="a5d43ce04888ed0d" providerId="LiveId" clId="{00FA1A45-4AAD-46DF-B7B0-174E362B8709}" dt="2026-01-21T22:19:42.321" v="559" actId="1076"/>
-          <ac:spMkLst>
-            <pc:docMk/>
-            <pc:sldMk cId="0" sldId="270"/>
-            <ac:spMk id="7" creationId="{D5A806C2-E140-A002-882F-D21BCFA55699}"/>
-          </ac:spMkLst>
-        </pc:spChg>
-        <pc:graphicFrameChg chg="add mod modGraphic">
-          <ac:chgData name="Jane huang" userId="a5d43ce04888ed0d" providerId="LiveId" clId="{00FA1A45-4AAD-46DF-B7B0-174E362B8709}" dt="2026-01-21T22:19:45.222" v="560" actId="1076"/>
-          <ac:graphicFrameMkLst>
-            <pc:docMk/>
-            <pc:sldMk cId="0" sldId="270"/>
-            <ac:graphicFrameMk id="4" creationId="{829A985F-5099-F7E9-2921-60014897C2BE}"/>
-          </ac:graphicFrameMkLst>
-        </pc:graphicFrameChg>
-        <pc:graphicFrameChg chg="add del modGraphic">
-          <ac:chgData name="Jane huang" userId="a5d43ce04888ed0d" providerId="LiveId" clId="{00FA1A45-4AAD-46DF-B7B0-174E362B8709}" dt="2026-01-21T22:15:25.774" v="536" actId="478"/>
-          <ac:graphicFrameMkLst>
-            <pc:docMk/>
-            <pc:sldMk cId="0" sldId="270"/>
-            <ac:graphicFrameMk id="5" creationId="{129083EE-F0B9-3E51-EA30-6D97C4BF7752}"/>
-          </ac:graphicFrameMkLst>
-        </pc:graphicFrameChg>
-      </pc:sldChg>
-      <pc:sldChg chg="modSp add del mod ord">
-        <pc:chgData name="Jane huang" userId="a5d43ce04888ed0d" providerId="LiveId" clId="{00FA1A45-4AAD-46DF-B7B0-174E362B8709}" dt="2026-01-21T23:40:10.040" v="904" actId="47"/>
-        <pc:sldMkLst>
-          <pc:docMk/>
-          <pc:sldMk cId="0" sldId="271"/>
-        </pc:sldMkLst>
-        <pc:spChg chg="mod">
-          <ac:chgData name="Jane huang" userId="a5d43ce04888ed0d" providerId="LiveId" clId="{00FA1A45-4AAD-46DF-B7B0-174E362B8709}" dt="2026-01-21T23:35:21.309" v="819" actId="1076"/>
-          <ac:spMkLst>
-            <pc:docMk/>
-            <pc:sldMk cId="0" sldId="271"/>
-            <ac:spMk id="2" creationId="{00000000-0000-0000-0000-000000000000}"/>
-          </ac:spMkLst>
-        </pc:spChg>
-      </pc:sldChg>
-      <pc:sldChg chg="modSp add del mod ord">
-        <pc:chgData name="Jane huang" userId="a5d43ce04888ed0d" providerId="LiveId" clId="{00FA1A45-4AAD-46DF-B7B0-174E362B8709}" dt="2026-01-21T23:20:33.006" v="781" actId="47"/>
-        <pc:sldMkLst>
-          <pc:docMk/>
-          <pc:sldMk cId="0" sldId="272"/>
-        </pc:sldMkLst>
-        <pc:spChg chg="mod">
-          <ac:chgData name="Jane huang" userId="a5d43ce04888ed0d" providerId="LiveId" clId="{00FA1A45-4AAD-46DF-B7B0-174E362B8709}" dt="2026-01-21T23:16:06.102" v="731" actId="27636"/>
-          <ac:spMkLst>
-            <pc:docMk/>
-            <pc:sldMk cId="0" sldId="272"/>
-            <ac:spMk id="2" creationId="{00000000-0000-0000-0000-000000000000}"/>
-          </ac:spMkLst>
-        </pc:spChg>
-        <pc:spChg chg="mod">
-          <ac:chgData name="Jane huang" userId="a5d43ce04888ed0d" providerId="LiveId" clId="{00FA1A45-4AAD-46DF-B7B0-174E362B8709}" dt="2026-01-21T23:16:25.854" v="739" actId="14100"/>
-          <ac:spMkLst>
-            <pc:docMk/>
-            <pc:sldMk cId="0" sldId="272"/>
-            <ac:spMk id="3" creationId="{00000000-0000-0000-0000-000000000000}"/>
-          </ac:spMkLst>
-        </pc:spChg>
       </pc:sldChg>
       <pc:sldChg chg="addSp delSp modSp add mod ord">
         <pc:chgData name="Jane huang" userId="a5d43ce04888ed0d" providerId="LiveId" clId="{00FA1A45-4AAD-46DF-B7B0-174E362B8709}" dt="2026-01-22T08:21:11.367" v="950" actId="22"/>
@@ -518,62 +181,6 @@
           <pc:docMk/>
           <pc:sldMk cId="0" sldId="273"/>
         </pc:sldMkLst>
-        <pc:spChg chg="mod">
-          <ac:chgData name="Jane huang" userId="a5d43ce04888ed0d" providerId="LiveId" clId="{00FA1A45-4AAD-46DF-B7B0-174E362B8709}" dt="2026-01-21T23:32:05.819" v="808" actId="14100"/>
-          <ac:spMkLst>
-            <pc:docMk/>
-            <pc:sldMk cId="0" sldId="273"/>
-            <ac:spMk id="2" creationId="{00000000-0000-0000-0000-000000000000}"/>
-          </ac:spMkLst>
-        </pc:spChg>
-        <pc:spChg chg="del mod">
-          <ac:chgData name="Jane huang" userId="a5d43ce04888ed0d" providerId="LiveId" clId="{00FA1A45-4AAD-46DF-B7B0-174E362B8709}" dt="2026-01-21T23:31:06.958" v="801" actId="478"/>
-          <ac:spMkLst>
-            <pc:docMk/>
-            <pc:sldMk cId="0" sldId="273"/>
-            <ac:spMk id="3" creationId="{00000000-0000-0000-0000-000000000000}"/>
-          </ac:spMkLst>
-        </pc:spChg>
-        <pc:spChg chg="add del">
-          <ac:chgData name="Jane huang" userId="a5d43ce04888ed0d" providerId="LiveId" clId="{00FA1A45-4AAD-46DF-B7B0-174E362B8709}" dt="2026-01-21T23:25:24.862" v="786" actId="478"/>
-          <ac:spMkLst>
-            <pc:docMk/>
-            <pc:sldMk cId="0" sldId="273"/>
-            <ac:spMk id="5" creationId="{A7B0BC0B-DAD9-9663-EDE7-A099F32491EC}"/>
-          </ac:spMkLst>
-        </pc:spChg>
-        <pc:spChg chg="add">
-          <ac:chgData name="Jane huang" userId="a5d43ce04888ed0d" providerId="LiveId" clId="{00FA1A45-4AAD-46DF-B7B0-174E362B8709}" dt="2026-01-21T23:28:44.190" v="788"/>
-          <ac:spMkLst>
-            <pc:docMk/>
-            <pc:sldMk cId="0" sldId="273"/>
-            <ac:spMk id="6" creationId="{892332F7-EAE1-2DC4-7283-9ED910A05FFF}"/>
-          </ac:spMkLst>
-        </pc:spChg>
-        <pc:spChg chg="add">
-          <ac:chgData name="Jane huang" userId="a5d43ce04888ed0d" providerId="LiveId" clId="{00FA1A45-4AAD-46DF-B7B0-174E362B8709}" dt="2026-01-21T23:30:17.784" v="790"/>
-          <ac:spMkLst>
-            <pc:docMk/>
-            <pc:sldMk cId="0" sldId="273"/>
-            <ac:spMk id="7" creationId="{805EC648-818F-093E-32CC-EB83BEE04B1B}"/>
-          </ac:spMkLst>
-        </pc:spChg>
-        <pc:spChg chg="add del mod">
-          <ac:chgData name="Jane huang" userId="a5d43ce04888ed0d" providerId="LiveId" clId="{00FA1A45-4AAD-46DF-B7B0-174E362B8709}" dt="2026-01-21T23:31:12.638" v="802" actId="478"/>
-          <ac:spMkLst>
-            <pc:docMk/>
-            <pc:sldMk cId="0" sldId="273"/>
-            <ac:spMk id="10" creationId="{8F2E495A-E44A-253F-3246-90F5281E3181}"/>
-          </ac:spMkLst>
-        </pc:spChg>
-        <pc:graphicFrameChg chg="add mod modGraphic">
-          <ac:chgData name="Jane huang" userId="a5d43ce04888ed0d" providerId="LiveId" clId="{00FA1A45-4AAD-46DF-B7B0-174E362B8709}" dt="2026-01-21T23:31:35.002" v="806" actId="1076"/>
-          <ac:graphicFrameMkLst>
-            <pc:docMk/>
-            <pc:sldMk cId="0" sldId="273"/>
-            <ac:graphicFrameMk id="8" creationId="{C83B9697-E076-7F07-684D-A21308F5B12A}"/>
-          </ac:graphicFrameMkLst>
-        </pc:graphicFrameChg>
         <pc:picChg chg="add">
           <ac:chgData name="Jane huang" userId="a5d43ce04888ed0d" providerId="LiveId" clId="{00FA1A45-4AAD-46DF-B7B0-174E362B8709}" dt="2026-01-22T08:21:11.367" v="950" actId="22"/>
           <ac:picMkLst>
@@ -582,132 +189,13 @@
             <ac:picMk id="4" creationId="{0C96D5DD-5681-F9D9-0A92-FCB357F17E4E}"/>
           </ac:picMkLst>
         </pc:picChg>
-        <pc:picChg chg="add del mod">
-          <ac:chgData name="Jane huang" userId="a5d43ce04888ed0d" providerId="LiveId" clId="{00FA1A45-4AAD-46DF-B7B0-174E362B8709}" dt="2026-01-21T23:32:37.302" v="814" actId="478"/>
-          <ac:picMkLst>
-            <pc:docMk/>
-            <pc:sldMk cId="0" sldId="273"/>
-            <ac:picMk id="6148" creationId="{3879EB0D-F004-F382-30F9-413D68F551AA}"/>
-          </ac:picMkLst>
-        </pc:picChg>
-        <pc:picChg chg="add mod">
-          <ac:chgData name="Jane huang" userId="a5d43ce04888ed0d" providerId="LiveId" clId="{00FA1A45-4AAD-46DF-B7B0-174E362B8709}" dt="2026-01-21T23:32:41.374" v="816" actId="1076"/>
-          <ac:picMkLst>
-            <pc:docMk/>
-            <pc:sldMk cId="0" sldId="273"/>
-            <ac:picMk id="6150" creationId="{D8D71544-614C-AE52-5873-A666DE7C5AD1}"/>
-          </ac:picMkLst>
-        </pc:picChg>
       </pc:sldChg>
-      <pc:sldChg chg="addSp delSp modSp add mod setBg">
-        <pc:chgData name="Jane huang" userId="a5d43ce04888ed0d" providerId="LiveId" clId="{00FA1A45-4AAD-46DF-B7B0-174E362B8709}" dt="2026-01-21T21:21:08.125" v="125" actId="1076"/>
+      <pc:sldChg chg="addSp delSp modSp add mod ord setBg">
+        <pc:chgData name="Jane huang" userId="a5d43ce04888ed0d" providerId="LiveId" clId="{00FA1A45-4AAD-46DF-B7B0-174E362B8709}" dt="2026-01-27T21:18:42.781" v="1159"/>
         <pc:sldMkLst>
           <pc:docMk/>
           <pc:sldMk cId="2932471909" sldId="274"/>
         </pc:sldMkLst>
-        <pc:spChg chg="mod">
-          <ac:chgData name="Jane huang" userId="a5d43ce04888ed0d" providerId="LiveId" clId="{00FA1A45-4AAD-46DF-B7B0-174E362B8709}" dt="2026-01-21T21:20:39.164" v="118" actId="26606"/>
-          <ac:spMkLst>
-            <pc:docMk/>
-            <pc:sldMk cId="2932471909" sldId="274"/>
-            <ac:spMk id="2" creationId="{FF2D65C9-BF9D-7973-F5A6-55B85941E1AF}"/>
-          </ac:spMkLst>
-        </pc:spChg>
-        <pc:spChg chg="mod">
-          <ac:chgData name="Jane huang" userId="a5d43ce04888ed0d" providerId="LiveId" clId="{00FA1A45-4AAD-46DF-B7B0-174E362B8709}" dt="2026-01-21T21:20:39.164" v="118" actId="26606"/>
-          <ac:spMkLst>
-            <pc:docMk/>
-            <pc:sldMk cId="2932471909" sldId="274"/>
-            <ac:spMk id="3" creationId="{D4708416-7B01-7D9C-89F2-56FD73E14F1B}"/>
-          </ac:spMkLst>
-        </pc:spChg>
-        <pc:spChg chg="add del mod">
-          <ac:chgData name="Jane huang" userId="a5d43ce04888ed0d" providerId="LiveId" clId="{00FA1A45-4AAD-46DF-B7B0-174E362B8709}" dt="2026-01-21T21:13:00.596" v="68" actId="478"/>
-          <ac:spMkLst>
-            <pc:docMk/>
-            <pc:sldMk cId="2932471909" sldId="274"/>
-            <ac:spMk id="5" creationId="{EA785686-996A-A9D8-E279-A630970B5188}"/>
-          </ac:spMkLst>
-        </pc:spChg>
-        <pc:spChg chg="add">
-          <ac:chgData name="Jane huang" userId="a5d43ce04888ed0d" providerId="LiveId" clId="{00FA1A45-4AAD-46DF-B7B0-174E362B8709}" dt="2026-01-21T21:19:27.001" v="104"/>
-          <ac:spMkLst>
-            <pc:docMk/>
-            <pc:sldMk cId="2932471909" sldId="274"/>
-            <ac:spMk id="6" creationId="{D8464052-275E-2117-A706-0976A2042DDA}"/>
-          </ac:spMkLst>
-        </pc:spChg>
-        <pc:spChg chg="add mod">
-          <ac:chgData name="Jane huang" userId="a5d43ce04888ed0d" providerId="LiveId" clId="{00FA1A45-4AAD-46DF-B7B0-174E362B8709}" dt="2026-01-21T21:19:31.628" v="105"/>
-          <ac:spMkLst>
-            <pc:docMk/>
-            <pc:sldMk cId="2932471909" sldId="274"/>
-            <ac:spMk id="7" creationId="{2FC5E064-5DA4-A354-7EA9-03BEC82FF3B1}"/>
-          </ac:spMkLst>
-        </pc:spChg>
-        <pc:spChg chg="add">
-          <ac:chgData name="Jane huang" userId="a5d43ce04888ed0d" providerId="LiveId" clId="{00FA1A45-4AAD-46DF-B7B0-174E362B8709}" dt="2026-01-21T21:20:39.164" v="118" actId="26606"/>
-          <ac:spMkLst>
-            <pc:docMk/>
-            <pc:sldMk cId="2932471909" sldId="274"/>
-            <ac:spMk id="2055" creationId="{D2B783EE-0239-4717-BBEA-8C9EAC61C824}"/>
-          </ac:spMkLst>
-        </pc:spChg>
-        <pc:spChg chg="add">
-          <ac:chgData name="Jane huang" userId="a5d43ce04888ed0d" providerId="LiveId" clId="{00FA1A45-4AAD-46DF-B7B0-174E362B8709}" dt="2026-01-21T21:20:39.164" v="118" actId="26606"/>
-          <ac:spMkLst>
-            <pc:docMk/>
-            <pc:sldMk cId="2932471909" sldId="274"/>
-            <ac:spMk id="2057" creationId="{A7B99495-F43F-4D80-A44F-2CB4764EB90B}"/>
-          </ac:spMkLst>
-        </pc:spChg>
-        <pc:spChg chg="add">
-          <ac:chgData name="Jane huang" userId="a5d43ce04888ed0d" providerId="LiveId" clId="{00FA1A45-4AAD-46DF-B7B0-174E362B8709}" dt="2026-01-21T21:20:39.164" v="118" actId="26606"/>
-          <ac:spMkLst>
-            <pc:docMk/>
-            <pc:sldMk cId="2932471909" sldId="274"/>
-            <ac:spMk id="2059" creationId="{70BEB1E7-2F88-40BC-B73D-42E5B6F80BFC}"/>
-          </ac:spMkLst>
-        </pc:spChg>
-        <pc:graphicFrameChg chg="add del mod">
-          <ac:chgData name="Jane huang" userId="a5d43ce04888ed0d" providerId="LiveId" clId="{00FA1A45-4AAD-46DF-B7B0-174E362B8709}" dt="2026-01-21T21:01:55.838" v="59" actId="478"/>
-          <ac:graphicFrameMkLst>
-            <pc:docMk/>
-            <pc:sldMk cId="2932471909" sldId="274"/>
-            <ac:graphicFrameMk id="4" creationId="{C8042B4F-903A-A6C2-9814-222FCDC82A3E}"/>
-          </ac:graphicFrameMkLst>
-        </pc:graphicFrameChg>
-        <pc:picChg chg="add mod ord">
-          <ac:chgData name="Jane huang" userId="a5d43ce04888ed0d" providerId="LiveId" clId="{00FA1A45-4AAD-46DF-B7B0-174E362B8709}" dt="2026-01-21T21:20:43.517" v="119" actId="1076"/>
-          <ac:picMkLst>
-            <pc:docMk/>
-            <pc:sldMk cId="2932471909" sldId="274"/>
-            <ac:picMk id="9" creationId="{207B02C1-955D-1869-9151-5E1612E3BEC6}"/>
-          </ac:picMkLst>
-        </pc:picChg>
-        <pc:picChg chg="add mod">
-          <ac:chgData name="Jane huang" userId="a5d43ce04888ed0d" providerId="LiveId" clId="{00FA1A45-4AAD-46DF-B7B0-174E362B8709}" dt="2026-01-21T21:21:08.125" v="125" actId="1076"/>
-          <ac:picMkLst>
-            <pc:docMk/>
-            <pc:sldMk cId="2932471909" sldId="274"/>
-            <ac:picMk id="2050" creationId="{187E91D8-981F-880D-8B36-5D005BA504C0}"/>
-          </ac:picMkLst>
-        </pc:picChg>
-      </pc:sldChg>
-      <pc:sldChg chg="modSp new del">
-        <pc:chgData name="Jane huang" userId="a5d43ce04888ed0d" providerId="LiveId" clId="{00FA1A45-4AAD-46DF-B7B0-174E362B8709}" dt="2026-01-21T22:04:41.070" v="482" actId="47"/>
-        <pc:sldMkLst>
-          <pc:docMk/>
-          <pc:sldMk cId="1659156032" sldId="275"/>
-        </pc:sldMkLst>
-        <pc:spChg chg="mod">
-          <ac:chgData name="Jane huang" userId="a5d43ce04888ed0d" providerId="LiveId" clId="{00FA1A45-4AAD-46DF-B7B0-174E362B8709}" dt="2026-01-21T21:11:10.502" v="64"/>
-          <ac:spMkLst>
-            <pc:docMk/>
-            <pc:sldMk cId="1659156032" sldId="275"/>
-            <ac:spMk id="2" creationId="{5B280487-C4A1-D66F-83AC-08BA2E7DDDC5}"/>
-          </ac:spMkLst>
-        </pc:spChg>
       </pc:sldChg>
       <pc:sldChg chg="addSp delSp modSp add mod">
         <pc:chgData name="Jane huang" userId="a5d43ce04888ed0d" providerId="LiveId" clId="{00FA1A45-4AAD-46DF-B7B0-174E362B8709}" dt="2026-01-22T06:05:45.634" v="949" actId="20577"/>
@@ -715,22 +203,6 @@
           <pc:docMk/>
           <pc:sldMk cId="366162575" sldId="276"/>
         </pc:sldMkLst>
-        <pc:spChg chg="mod">
-          <ac:chgData name="Jane huang" userId="a5d43ce04888ed0d" providerId="LiveId" clId="{00FA1A45-4AAD-46DF-B7B0-174E362B8709}" dt="2026-01-21T22:02:59.211" v="466" actId="1076"/>
-          <ac:spMkLst>
-            <pc:docMk/>
-            <pc:sldMk cId="366162575" sldId="276"/>
-            <ac:spMk id="2" creationId="{3B054CA0-CA6D-9093-8EAA-B5D1D4917E62}"/>
-          </ac:spMkLst>
-        </pc:spChg>
-        <pc:spChg chg="del mod">
-          <ac:chgData name="Jane huang" userId="a5d43ce04888ed0d" providerId="LiveId" clId="{00FA1A45-4AAD-46DF-B7B0-174E362B8709}" dt="2026-01-21T22:02:43.509" v="461" actId="478"/>
-          <ac:spMkLst>
-            <pc:docMk/>
-            <pc:sldMk cId="366162575" sldId="276"/>
-            <ac:spMk id="3" creationId="{CA12EC77-3FA8-19A3-B8EA-F8DF58F95CE2}"/>
-          </ac:spMkLst>
-        </pc:spChg>
         <pc:graphicFrameChg chg="add mod modGraphic">
           <ac:chgData name="Jane huang" userId="a5d43ce04888ed0d" providerId="LiveId" clId="{00FA1A45-4AAD-46DF-B7B0-174E362B8709}" dt="2026-01-22T06:05:45.634" v="949" actId="20577"/>
           <ac:graphicFrameMkLst>
@@ -740,101 +212,45 @@
           </ac:graphicFrameMkLst>
         </pc:graphicFrameChg>
       </pc:sldChg>
-      <pc:sldChg chg="addSp delSp modSp new add del mod ord setBg">
-        <pc:chgData name="Jane huang" userId="a5d43ce04888ed0d" providerId="LiveId" clId="{00FA1A45-4AAD-46DF-B7B0-174E362B8709}" dt="2026-01-21T23:21:34.298" v="783"/>
+      <pc:sldChg chg="addSp modSp mod">
+        <pc:chgData name="Jane huang" userId="a5d43ce04888ed0d" providerId="LiveId" clId="{00FA1A45-4AAD-46DF-B7B0-174E362B8709}" dt="2026-02-21T07:54:53.719" v="1335" actId="20577"/>
         <pc:sldMkLst>
           <pc:docMk/>
           <pc:sldMk cId="804159891" sldId="277"/>
         </pc:sldMkLst>
-        <pc:spChg chg="mod">
-          <ac:chgData name="Jane huang" userId="a5d43ce04888ed0d" providerId="LiveId" clId="{00FA1A45-4AAD-46DF-B7B0-174E362B8709}" dt="2026-01-21T22:01:59.159" v="441" actId="113"/>
+        <pc:spChg chg="add mod">
+          <ac:chgData name="Jane huang" userId="a5d43ce04888ed0d" providerId="LiveId" clId="{00FA1A45-4AAD-46DF-B7B0-174E362B8709}" dt="2026-02-21T07:54:53.719" v="1335" actId="20577"/>
           <ac:spMkLst>
             <pc:docMk/>
             <pc:sldMk cId="804159891" sldId="277"/>
-            <ac:spMk id="2" creationId="{312A89B7-456F-0F31-B91C-F36329558422}"/>
+            <ac:spMk id="4" creationId="{A29B8D0F-749A-E4B8-07BA-DF35850FDC9A}"/>
           </ac:spMkLst>
         </pc:spChg>
-        <pc:spChg chg="del">
-          <ac:chgData name="Jane huang" userId="a5d43ce04888ed0d" providerId="LiveId" clId="{00FA1A45-4AAD-46DF-B7B0-174E362B8709}" dt="2026-01-21T22:01:27.726" v="435" actId="478"/>
-          <ac:spMkLst>
-            <pc:docMk/>
-            <pc:sldMk cId="804159891" sldId="277"/>
-            <ac:spMk id="3" creationId="{00538515-FC79-7687-FFCC-A9928EB9185E}"/>
-          </ac:spMkLst>
-        </pc:spChg>
-        <pc:spChg chg="add">
-          <ac:chgData name="Jane huang" userId="a5d43ce04888ed0d" providerId="LiveId" clId="{00FA1A45-4AAD-46DF-B7B0-174E362B8709}" dt="2026-01-21T22:01:44.566" v="437" actId="26606"/>
-          <ac:spMkLst>
-            <pc:docMk/>
-            <pc:sldMk cId="804159891" sldId="277"/>
-            <ac:spMk id="9" creationId="{A3363022-C969-41E9-8EB2-E4C94908C1FA}"/>
-          </ac:spMkLst>
-        </pc:spChg>
-        <pc:spChg chg="add">
-          <ac:chgData name="Jane huang" userId="a5d43ce04888ed0d" providerId="LiveId" clId="{00FA1A45-4AAD-46DF-B7B0-174E362B8709}" dt="2026-01-21T22:01:44.566" v="437" actId="26606"/>
-          <ac:spMkLst>
-            <pc:docMk/>
-            <pc:sldMk cId="804159891" sldId="277"/>
-            <ac:spMk id="11" creationId="{8D1AD6B3-BE88-4CEB-BA17-790657CC4729}"/>
-          </ac:spMkLst>
-        </pc:spChg>
-        <pc:grpChg chg="add">
-          <ac:chgData name="Jane huang" userId="a5d43ce04888ed0d" providerId="LiveId" clId="{00FA1A45-4AAD-46DF-B7B0-174E362B8709}" dt="2026-01-21T22:01:44.566" v="437" actId="26606"/>
-          <ac:grpSpMkLst>
-            <pc:docMk/>
-            <pc:sldMk cId="804159891" sldId="277"/>
-            <ac:grpSpMk id="13" creationId="{89D1390B-7E13-4B4F-9CB2-391063412E54}"/>
-          </ac:grpSpMkLst>
-        </pc:grpChg>
-        <pc:picChg chg="add">
-          <ac:chgData name="Jane huang" userId="a5d43ce04888ed0d" providerId="LiveId" clId="{00FA1A45-4AAD-46DF-B7B0-174E362B8709}" dt="2026-01-21T22:01:44.566" v="437" actId="26606"/>
-          <ac:picMkLst>
-            <pc:docMk/>
-            <pc:sldMk cId="804159891" sldId="277"/>
-            <ac:picMk id="6" creationId="{B8E85183-DD08-48C2-BB7B-585602C26A00}"/>
-          </ac:picMkLst>
-        </pc:picChg>
       </pc:sldChg>
-      <pc:sldChg chg="addSp delSp modSp add mod">
-        <pc:chgData name="Jane huang" userId="a5d43ce04888ed0d" providerId="LiveId" clId="{00FA1A45-4AAD-46DF-B7B0-174E362B8709}" dt="2026-01-21T23:20:25.029" v="780" actId="1076"/>
+      <pc:sldChg chg="modSp mod">
+        <pc:chgData name="Jane huang" userId="a5d43ce04888ed0d" providerId="LiveId" clId="{00FA1A45-4AAD-46DF-B7B0-174E362B8709}" dt="2026-02-21T07:12:51.777" v="1331" actId="1076"/>
         <pc:sldMkLst>
           <pc:docMk/>
           <pc:sldMk cId="608015383" sldId="278"/>
         </pc:sldMkLst>
-        <pc:spChg chg="del mod">
-          <ac:chgData name="Jane huang" userId="a5d43ce04888ed0d" providerId="LiveId" clId="{00FA1A45-4AAD-46DF-B7B0-174E362B8709}" dt="2026-01-21T23:17:30.635" v="752" actId="478"/>
+        <pc:spChg chg="mod">
+          <ac:chgData name="Jane huang" userId="a5d43ce04888ed0d" providerId="LiveId" clId="{00FA1A45-4AAD-46DF-B7B0-174E362B8709}" dt="2026-02-21T07:12:04.428" v="1321" actId="1076"/>
           <ac:spMkLst>
             <pc:docMk/>
             <pc:sldMk cId="608015383" sldId="278"/>
-            <ac:spMk id="3" creationId="{DBC293D5-E1F5-60C9-4D9C-357B1A8AC59B}"/>
+            <ac:spMk id="2" creationId="{A4110559-C569-F22E-F4CD-26001720885F}"/>
           </ac:spMkLst>
         </pc:spChg>
-        <pc:graphicFrameChg chg="add mod modGraphic">
-          <ac:chgData name="Jane huang" userId="a5d43ce04888ed0d" providerId="LiveId" clId="{00FA1A45-4AAD-46DF-B7B0-174E362B8709}" dt="2026-01-21T23:19:04.321" v="764" actId="1076"/>
+        <pc:graphicFrameChg chg="mod modGraphic">
+          <ac:chgData name="Jane huang" userId="a5d43ce04888ed0d" providerId="LiveId" clId="{00FA1A45-4AAD-46DF-B7B0-174E362B8709}" dt="2026-02-21T07:12:43.611" v="1328" actId="2711"/>
           <ac:graphicFrameMkLst>
             <pc:docMk/>
             <pc:sldMk cId="608015383" sldId="278"/>
             <ac:graphicFrameMk id="4" creationId="{8FDF5F55-C8D5-4BF8-7CA3-2FDF4342F588}"/>
           </ac:graphicFrameMkLst>
         </pc:graphicFrameChg>
-        <pc:picChg chg="add del mod">
-          <ac:chgData name="Jane huang" userId="a5d43ce04888ed0d" providerId="LiveId" clId="{00FA1A45-4AAD-46DF-B7B0-174E362B8709}" dt="2026-01-21T23:19:59.732" v="769" actId="478"/>
-          <ac:picMkLst>
-            <pc:docMk/>
-            <pc:sldMk cId="608015383" sldId="278"/>
-            <ac:picMk id="5122" creationId="{5F1F5E3F-0D8F-2881-5DB3-93D073BCB1D7}"/>
-          </ac:picMkLst>
-        </pc:picChg>
-        <pc:picChg chg="add">
-          <ac:chgData name="Jane huang" userId="a5d43ce04888ed0d" providerId="LiveId" clId="{00FA1A45-4AAD-46DF-B7B0-174E362B8709}" dt="2026-01-21T23:20:03.485" v="770"/>
-          <ac:picMkLst>
-            <pc:docMk/>
-            <pc:sldMk cId="608015383" sldId="278"/>
-            <ac:picMk id="5124" creationId="{4DB2B4C8-1090-4D3C-B171-A2CB33EF90FE}"/>
-          </ac:picMkLst>
-        </pc:picChg>
-        <pc:picChg chg="add mod">
-          <ac:chgData name="Jane huang" userId="a5d43ce04888ed0d" providerId="LiveId" clId="{00FA1A45-4AAD-46DF-B7B0-174E362B8709}" dt="2026-01-21T23:20:25.029" v="780" actId="1076"/>
+        <pc:picChg chg="mod">
+          <ac:chgData name="Jane huang" userId="a5d43ce04888ed0d" providerId="LiveId" clId="{00FA1A45-4AAD-46DF-B7B0-174E362B8709}" dt="2026-02-21T07:12:51.777" v="1331" actId="1076"/>
           <ac:picMkLst>
             <pc:docMk/>
             <pc:sldMk cId="608015383" sldId="278"/>
@@ -842,34 +258,12 @@
           </ac:picMkLst>
         </pc:picChg>
       </pc:sldChg>
-      <pc:sldChg chg="new del">
-        <pc:chgData name="Jane huang" userId="a5d43ce04888ed0d" providerId="LiveId" clId="{00FA1A45-4AAD-46DF-B7B0-174E362B8709}" dt="2026-01-21T23:14:57.502" v="723" actId="47"/>
-        <pc:sldMkLst>
-          <pc:docMk/>
-          <pc:sldMk cId="2796399206" sldId="278"/>
-        </pc:sldMkLst>
-      </pc:sldChg>
-      <pc:sldChg chg="add del">
-        <pc:chgData name="Jane huang" userId="a5d43ce04888ed0d" providerId="LiveId" clId="{00FA1A45-4AAD-46DF-B7B0-174E362B8709}" dt="2026-01-21T22:19:50.353" v="561" actId="47"/>
-        <pc:sldMkLst>
-          <pc:docMk/>
-          <pc:sldMk cId="3418983825" sldId="278"/>
-        </pc:sldMkLst>
-      </pc:sldChg>
       <pc:sldChg chg="addSp modSp add mod">
         <pc:chgData name="Jane huang" userId="a5d43ce04888ed0d" providerId="LiveId" clId="{00FA1A45-4AAD-46DF-B7B0-174E362B8709}" dt="2026-01-22T20:51:16.559" v="1157" actId="1076"/>
         <pc:sldMkLst>
           <pc:docMk/>
           <pc:sldMk cId="2756739193" sldId="279"/>
         </pc:sldMkLst>
-        <pc:spChg chg="mod">
-          <ac:chgData name="Jane huang" userId="a5d43ce04888ed0d" providerId="LiveId" clId="{00FA1A45-4AAD-46DF-B7B0-174E362B8709}" dt="2026-01-21T23:38:07.873" v="883" actId="1076"/>
-          <ac:spMkLst>
-            <pc:docMk/>
-            <pc:sldMk cId="2756739193" sldId="279"/>
-            <ac:spMk id="3" creationId="{0AF89F69-E143-6D56-9917-7034AF632080}"/>
-          </ac:spMkLst>
-        </pc:spChg>
         <pc:spChg chg="add mod">
           <ac:chgData name="Jane huang" userId="a5d43ce04888ed0d" providerId="LiveId" clId="{00FA1A45-4AAD-46DF-B7B0-174E362B8709}" dt="2026-01-22T20:42:28.617" v="1123" actId="1076"/>
           <ac:spMkLst>
@@ -918,14 +312,6 @@
             <ac:picMk id="1028" creationId="{0E2BABF5-F27A-EC34-7978-4857455252DA}"/>
           </ac:picMkLst>
         </pc:picChg>
-        <pc:picChg chg="add mod">
-          <ac:chgData name="Jane huang" userId="a5d43ce04888ed0d" providerId="LiveId" clId="{00FA1A45-4AAD-46DF-B7B0-174E362B8709}" dt="2026-01-21T23:38:13.075" v="887" actId="1076"/>
-          <ac:picMkLst>
-            <pc:docMk/>
-            <pc:sldMk cId="2756739193" sldId="279"/>
-            <ac:picMk id="7170" creationId="{EF493D13-66F9-1591-3D24-8FA5B8E6910D}"/>
-          </ac:picMkLst>
-        </pc:picChg>
       </pc:sldChg>
       <pc:sldChg chg="addSp delSp modSp new mod setBg">
         <pc:chgData name="Jane huang" userId="a5d43ce04888ed0d" providerId="LiveId" clId="{00FA1A45-4AAD-46DF-B7B0-174E362B8709}" dt="2026-01-22T08:21:35.754" v="963" actId="113"/>
@@ -939,14 +325,6 @@
             <pc:docMk/>
             <pc:sldMk cId="3847547106" sldId="280"/>
             <ac:spMk id="2" creationId="{26F81A4B-3A8D-0EF8-8FC0-34BAB1EE6F18}"/>
-          </ac:spMkLst>
-        </pc:spChg>
-        <pc:spChg chg="del">
-          <ac:chgData name="Jane huang" userId="a5d43ce04888ed0d" providerId="LiveId" clId="{00FA1A45-4AAD-46DF-B7B0-174E362B8709}" dt="2026-01-22T08:21:23.150" v="960" actId="478"/>
-          <ac:spMkLst>
-            <pc:docMk/>
-            <pc:sldMk cId="3847547106" sldId="280"/>
-            <ac:spMk id="3" creationId="{09EF5A7A-3C1D-B71E-B42A-7C39E6626D8B}"/>
           </ac:spMkLst>
         </pc:spChg>
         <pc:spChg chg="add">
@@ -5991,10 +5369,13 @@
             <a:buChar char="v"/>
           </a:pPr>
           <a:r>
-            <a:rPr lang="en-US" b="1"/>
-            <a:t>Tier 1 North Star Metrics: Soft-TIFA GM (sign-off)</a:t>
+            <a:rPr lang="en-US" b="1" dirty="0"/>
+            <a:t>Tier 1 North Star Metrics</a:t>
           </a:r>
-          <a:endParaRPr lang="en-US" dirty="0"/>
+          <a:r>
+            <a:rPr lang="en-US" dirty="0"/>
+            <a:t>(Final Sign-Off)</a:t>
+          </a:r>
         </a:p>
       </dgm:t>
     </dgm:pt>
@@ -6021,17 +5402,27 @@
       </dgm:t>
     </dgm:pt>
     <dgm:pt modelId="{3870FBD0-702A-4768-84ED-27E14D555522}">
-      <dgm:prSet/>
+      <dgm:prSet custT="1"/>
       <dgm:spPr/>
       <dgm:t>
         <a:bodyPr/>
         <a:lstStyle/>
         <a:p>
+          <a:pPr>
+            <a:buNone/>
+          </a:pPr>
           <a:r>
-            <a:rPr lang="en-US"/>
-            <a:t>Atomic decomposition with geometric mean aggregation</a:t>
+            <a:rPr lang="en-US" sz="1200" b="1" kern="1200" dirty="0">
+              <a:latin typeface="+mn-lt"/>
+            </a:rPr>
+            <a:t>Soft-TIFA GM </a:t>
           </a:r>
-          <a:endParaRPr lang="en-US" dirty="0"/>
+          <a:r>
+            <a:rPr lang="en-US" sz="1200" b="0" kern="1200" dirty="0">
+              <a:latin typeface="+mn-lt"/>
+            </a:rPr>
+            <a:t>(Primary Decision Metric)</a:t>
+          </a:r>
         </a:p>
       </dgm:t>
     </dgm:pt>
@@ -6047,117 +5438,6 @@
       </dgm:t>
     </dgm:pt>
     <dgm:pt modelId="{4E84A1B5-4C0C-42AD-A7B5-78D0EF95318B}" type="sibTrans" cxnId="{0DE4F1D5-77E3-4BD8-A653-4345D9C5089B}">
-      <dgm:prSet/>
-      <dgm:spPr/>
-      <dgm:t>
-        <a:bodyPr/>
-        <a:lstStyle/>
-        <a:p>
-          <a:endParaRPr lang="en-US"/>
-        </a:p>
-      </dgm:t>
-    </dgm:pt>
-    <dgm:pt modelId="{FEE15881-0EDA-4E6D-9FC1-005BE5D7A729}">
-      <dgm:prSet/>
-      <dgm:spPr/>
-      <dgm:t>
-        <a:bodyPr/>
-        <a:lstStyle/>
-        <a:p>
-          <a:r>
-            <a:rPr lang="en-US"/>
-            <a:t>Penalizes any single prompt violation</a:t>
-          </a:r>
-          <a:endParaRPr lang="en-US" dirty="0"/>
-        </a:p>
-      </dgm:t>
-    </dgm:pt>
-    <dgm:pt modelId="{F69F6729-15BD-4B31-AE8F-8DE24A386B5B}" type="parTrans" cxnId="{771C4795-9897-4297-856D-CCDE19F6A495}">
-      <dgm:prSet/>
-      <dgm:spPr/>
-      <dgm:t>
-        <a:bodyPr/>
-        <a:lstStyle/>
-        <a:p>
-          <a:endParaRPr lang="en-US"/>
-        </a:p>
-      </dgm:t>
-    </dgm:pt>
-    <dgm:pt modelId="{CD58DE6E-1844-4404-8383-39F0EFDCCDDA}" type="sibTrans" cxnId="{771C4795-9897-4297-856D-CCDE19F6A495}">
-      <dgm:prSet/>
-      <dgm:spPr/>
-      <dgm:t>
-        <a:bodyPr/>
-        <a:lstStyle/>
-        <a:p>
-          <a:endParaRPr lang="en-US"/>
-        </a:p>
-      </dgm:t>
-    </dgm:pt>
-    <dgm:pt modelId="{43F50E9D-80DE-48A4-8485-E0EFB2299E56}">
-      <dgm:prSet/>
-      <dgm:spPr/>
-      <dgm:t>
-        <a:bodyPr/>
-        <a:lstStyle/>
-        <a:p>
-          <a:r>
-            <a:rPr lang="en-US"/>
-            <a:t>94.5% AUROC vs human judgment</a:t>
-          </a:r>
-          <a:endParaRPr lang="en-US" dirty="0"/>
-        </a:p>
-      </dgm:t>
-    </dgm:pt>
-    <dgm:pt modelId="{28D3F592-763A-4F32-B2E7-D1B492AC18D9}" type="parTrans" cxnId="{5BB44BC4-1A37-4F29-A46C-383432BD8090}">
-      <dgm:prSet/>
-      <dgm:spPr/>
-      <dgm:t>
-        <a:bodyPr/>
-        <a:lstStyle/>
-        <a:p>
-          <a:endParaRPr lang="en-US"/>
-        </a:p>
-      </dgm:t>
-    </dgm:pt>
-    <dgm:pt modelId="{77DB7A21-C82D-4B9A-9957-4D8E55D662B1}" type="sibTrans" cxnId="{5BB44BC4-1A37-4F29-A46C-383432BD8090}">
-      <dgm:prSet/>
-      <dgm:spPr/>
-      <dgm:t>
-        <a:bodyPr/>
-        <a:lstStyle/>
-        <a:p>
-          <a:endParaRPr lang="en-US"/>
-        </a:p>
-      </dgm:t>
-    </dgm:pt>
-    <dgm:pt modelId="{F9802CFB-248A-4631-802E-5A87184BC315}">
-      <dgm:prSet/>
-      <dgm:spPr/>
-      <dgm:t>
-        <a:bodyPr/>
-        <a:lstStyle/>
-        <a:p>
-          <a:r>
-            <a:rPr lang="en-US"/>
-            <a:t>Robust to benchmark drift</a:t>
-          </a:r>
-          <a:endParaRPr lang="en-US" dirty="0"/>
-        </a:p>
-      </dgm:t>
-    </dgm:pt>
-    <dgm:pt modelId="{8419E832-9517-44AB-BB80-A7A32EC10C9E}" type="parTrans" cxnId="{62EB1590-B6FF-49E2-9B3E-1668EC53B9B6}">
-      <dgm:prSet/>
-      <dgm:spPr/>
-      <dgm:t>
-        <a:bodyPr/>
-        <a:lstStyle/>
-        <a:p>
-          <a:endParaRPr lang="en-US"/>
-        </a:p>
-      </dgm:t>
-    </dgm:pt>
-    <dgm:pt modelId="{D20BF303-0711-4D93-AF39-7F63AA9DA77F}" type="sibTrans" cxnId="{62EB1590-B6FF-49E2-9B3E-1668EC53B9B6}">
       <dgm:prSet/>
       <dgm:spPr/>
       <dgm:t>
@@ -6206,17 +5486,20 @@
       </dgm:t>
     </dgm:pt>
     <dgm:pt modelId="{FDF4A66E-41FD-426C-82F5-D08AE0124B66}">
-      <dgm:prSet/>
+      <dgm:prSet custT="1"/>
       <dgm:spPr/>
       <dgm:t>
         <a:bodyPr/>
         <a:lstStyle/>
         <a:p>
           <a:r>
-            <a:rPr lang="en-US"/>
-            <a:t>VQAScore: Optimized for low-latency production gatekeeping and real-time alignment screening</a:t>
+            <a:rPr lang="en-US" sz="1200" dirty="0" err="1"/>
+            <a:t>VQAScore</a:t>
           </a:r>
-          <a:endParaRPr lang="en-US" dirty="0"/>
+          <a:r>
+            <a:rPr lang="en-US" sz="1200" dirty="0"/>
+            <a:t>: Optimized for low-latency production gatekeeping and real-time alignment screening</a:t>
+          </a:r>
         </a:p>
       </dgm:t>
     </dgm:pt>
@@ -6242,56 +5525,19 @@
         </a:p>
       </dgm:t>
     </dgm:pt>
-    <dgm:pt modelId="{EC41D406-1F5D-4385-8FB9-4429346BC81D}">
-      <dgm:prSet/>
+    <dgm:pt modelId="{672EBBF1-4249-424A-AF99-65E6F250C7E8}">
+      <dgm:prSet custT="1"/>
       <dgm:spPr/>
       <dgm:t>
         <a:bodyPr/>
         <a:lstStyle/>
         <a:p>
           <a:r>
-            <a:rPr lang="en-US"/>
-            <a:t>DSGScore: Employed for validating complex relational logic with high structural robustness.</a:t>
-          </a:r>
-          <a:endParaRPr lang="en-US" dirty="0"/>
-        </a:p>
-      </dgm:t>
-    </dgm:pt>
-    <dgm:pt modelId="{3A5F02EC-168B-42A9-8AFC-01B8DFFBB1B7}" type="parTrans" cxnId="{2FB59BAB-2832-4510-A353-C57D83833D70}">
-      <dgm:prSet/>
-      <dgm:spPr/>
-      <dgm:t>
-        <a:bodyPr/>
-        <a:lstStyle/>
-        <a:p>
-          <a:endParaRPr lang="en-US"/>
-        </a:p>
-      </dgm:t>
-    </dgm:pt>
-    <dgm:pt modelId="{45904475-689D-408C-A073-88F78FB87AE6}" type="sibTrans" cxnId="{2FB59BAB-2832-4510-A353-C57D83833D70}">
-      <dgm:prSet/>
-      <dgm:spPr/>
-      <dgm:t>
-        <a:bodyPr/>
-        <a:lstStyle/>
-        <a:p>
-          <a:endParaRPr lang="en-US"/>
-        </a:p>
-      </dgm:t>
-    </dgm:pt>
-    <dgm:pt modelId="{672EBBF1-4249-424A-AF99-65E6F250C7E8}">
-      <dgm:prSet/>
-      <dgm:spPr/>
-      <dgm:t>
-        <a:bodyPr/>
-        <a:lstStyle/>
-        <a:p>
-          <a:r>
-            <a:rPr lang="en-US" b="0" dirty="0" err="1"/>
+            <a:rPr lang="en-US" sz="1200" b="0" dirty="0" err="1"/>
             <a:t>VPEval</a:t>
           </a:r>
           <a:r>
-            <a:rPr lang="en-US" b="0" dirty="0"/>
+            <a:rPr lang="en-US" sz="1200" b="0" dirty="0"/>
             <a:t>: Provides an Explainability Layer via visual programming, allowing developers to debug failures by tracing evaluation programs </a:t>
           </a:r>
         </a:p>
@@ -6320,14 +5566,14 @@
       </dgm:t>
     </dgm:pt>
     <dgm:pt modelId="{1DE7A25B-E889-4ABB-98FF-ABF05C3809CA}">
-      <dgm:prSet/>
+      <dgm:prSet custT="1"/>
       <dgm:spPr/>
       <dgm:t>
         <a:bodyPr/>
         <a:lstStyle/>
         <a:p>
           <a:r>
-            <a:rPr lang="en-US" dirty="0"/>
+            <a:rPr lang="en-US" sz="1200" dirty="0"/>
             <a:t>T2ISafety: Utilized for structured hierarchical audits of toxicity, fairness, and privacy dimensions </a:t>
           </a:r>
         </a:p>
@@ -6356,17 +5602,20 @@
       </dgm:t>
     </dgm:pt>
     <dgm:pt modelId="{4FAA404E-5DD9-4350-9620-28FC500B48DE}">
-      <dgm:prSet/>
+      <dgm:prSet custT="1"/>
       <dgm:spPr/>
       <dgm:t>
         <a:bodyPr/>
         <a:lstStyle/>
         <a:p>
           <a:r>
-            <a:rPr lang="en-US"/>
-            <a:t>AHEaD: The primary metric for cultural activity alignment and prevention of caricature exaggeration</a:t>
+            <a:rPr lang="en-US" sz="1200" dirty="0" err="1"/>
+            <a:t>AHEaD</a:t>
           </a:r>
-          <a:endParaRPr lang="en-US" dirty="0"/>
+          <a:r>
+            <a:rPr lang="en-US" sz="1200" dirty="0"/>
+            <a:t>: The primary metric for cultural activity alignment and prevention of caricature exaggeration</a:t>
+          </a:r>
         </a:p>
       </dgm:t>
     </dgm:pt>
@@ -6393,22 +5642,22 @@
       </dgm:t>
     </dgm:pt>
     <dgm:pt modelId="{9B0EF826-6C18-4334-8778-399F287098D6}">
-      <dgm:prSet/>
+      <dgm:prSet custT="1"/>
       <dgm:spPr/>
       <dgm:t>
         <a:bodyPr/>
         <a:lstStyle/>
         <a:p>
           <a:r>
-            <a:rPr lang="en-US" dirty="0"/>
+            <a:rPr lang="en-US" sz="1200" dirty="0"/>
             <a:t>VLM-as-a-Judge: Evaluates </a:t>
           </a:r>
           <a:r>
-            <a:rPr lang="en-US" i="1" dirty="0"/>
+            <a:rPr lang="en-US" sz="1200" i="1" dirty="0"/>
             <a:t>implicit reasoning</a:t>
           </a:r>
           <a:r>
-            <a:rPr lang="en-US" dirty="0"/>
+            <a:rPr lang="en-US" sz="1200" dirty="0"/>
             <a:t>, consistency, and commonsense</a:t>
           </a:r>
         </a:p>
@@ -6473,17 +5722,16 @@
       </dgm:t>
     </dgm:pt>
     <dgm:pt modelId="{17461D41-7964-4B8C-8983-BD4B6E856CF3}">
-      <dgm:prSet/>
+      <dgm:prSet custT="1"/>
       <dgm:spPr/>
       <dgm:t>
         <a:bodyPr/>
         <a:lstStyle/>
         <a:p>
           <a:r>
-            <a:rPr lang="en-US"/>
-            <a:t>The "meta-evaluation" layer of the autograder. </a:t>
+            <a:rPr lang="en-US" sz="1200" dirty="0"/>
+            <a:t>This tier functions as the meta-evaluation layer of the system.</a:t>
           </a:r>
-          <a:endParaRPr lang="en-US" dirty="0"/>
         </a:p>
       </dgm:t>
     </dgm:pt>
@@ -6510,17 +5758,16 @@
       </dgm:t>
     </dgm:pt>
     <dgm:pt modelId="{5E3A4649-7FFE-405E-9267-1452A63C2A7B}">
-      <dgm:prSet/>
+      <dgm:prSet custT="1"/>
       <dgm:spPr/>
       <dgm:t>
         <a:bodyPr/>
         <a:lstStyle/>
         <a:p>
           <a:r>
-            <a:rPr lang="en-US"/>
-            <a:t>Its purpose is not to evaluate images, but to evaluate the automated judge itself.</a:t>
+            <a:rPr lang="en-US" sz="1200" dirty="0"/>
+            <a:t>Its objective is not to assess model outputs directly, but to continuously evaluate and calibrate the automated judge itself — ensuring Stability across backbone updates, Calibration consistency, Drift detection and Robustness against evaluator bias.</a:t>
           </a:r>
-          <a:endParaRPr lang="en-US" dirty="0"/>
         </a:p>
       </dgm:t>
     </dgm:pt>
@@ -6536,6 +5783,220 @@
       </dgm:t>
     </dgm:pt>
     <dgm:pt modelId="{7AF99458-7B0A-4521-95A8-2433AFAF35B5}" type="sibTrans" cxnId="{900B4096-0E94-4BDE-9360-13FDFCF14F67}">
+      <dgm:prSet/>
+      <dgm:spPr/>
+      <dgm:t>
+        <a:bodyPr/>
+        <a:lstStyle/>
+        <a:p>
+          <a:endParaRPr lang="en-US"/>
+        </a:p>
+      </dgm:t>
+    </dgm:pt>
+    <dgm:pt modelId="{22649628-0205-42A1-98C1-76ABF253E2A3}">
+      <dgm:prSet custT="1"/>
+      <dgm:spPr/>
+      <dgm:t>
+        <a:bodyPr/>
+        <a:lstStyle/>
+        <a:p>
+          <a:r>
+            <a:rPr lang="en-US" sz="1200" kern="1200" dirty="0">
+              <a:latin typeface="+mn-lt"/>
+            </a:rPr>
+            <a:t>DSG Score: Employed for validating complex relational logic with high structural robustness.</a:t>
+          </a:r>
+        </a:p>
+      </dgm:t>
+    </dgm:pt>
+    <dgm:pt modelId="{AE3B1B7A-2ED6-43E9-A0EC-F8D5A4DEBEF1}" type="parTrans" cxnId="{C62B3DCE-0251-4066-8803-9F16B364796E}">
+      <dgm:prSet/>
+      <dgm:spPr/>
+      <dgm:t>
+        <a:bodyPr/>
+        <a:lstStyle/>
+        <a:p>
+          <a:endParaRPr lang="en-US"/>
+        </a:p>
+      </dgm:t>
+    </dgm:pt>
+    <dgm:pt modelId="{3BAB4A8A-5C3C-49C6-8C2B-3688A89D1D86}" type="sibTrans" cxnId="{C62B3DCE-0251-4066-8803-9F16B364796E}">
+      <dgm:prSet/>
+      <dgm:spPr/>
+      <dgm:t>
+        <a:bodyPr/>
+        <a:lstStyle/>
+        <a:p>
+          <a:endParaRPr lang="en-US"/>
+        </a:p>
+      </dgm:t>
+    </dgm:pt>
+    <dgm:pt modelId="{864BACC7-CCF3-4DB2-9F67-27BF178D32EF}">
+      <dgm:prSet custT="1"/>
+      <dgm:spPr/>
+      <dgm:t>
+        <a:bodyPr/>
+        <a:lstStyle/>
+        <a:p>
+          <a:r>
+            <a:rPr lang="en-US" sz="1200" kern="1200" dirty="0">
+              <a:solidFill>
+                <a:prstClr val="black">
+                  <a:hueOff val="0"/>
+                  <a:satOff val="0"/>
+                  <a:lumOff val="0"/>
+                  <a:alphaOff val="0"/>
+                </a:prstClr>
+              </a:solidFill>
+              <a:latin typeface="+mn-lt"/>
+              <a:ea typeface="+mn-ea"/>
+              <a:cs typeface="+mn-cs"/>
+            </a:rPr>
+            <a:t>PSG Score: A fine-grained visual metric that constructs scene graphs from panoptic segmentation outputs to assess object identities, attributes, and relational consistency. </a:t>
+          </a:r>
+          <a:endParaRPr lang="en-US" sz="1200" kern="1200" dirty="0">
+            <a:latin typeface="+mn-lt"/>
+          </a:endParaRPr>
+        </a:p>
+      </dgm:t>
+    </dgm:pt>
+    <dgm:pt modelId="{5E86A7CD-786C-4807-B21D-6F48AEF5D995}" type="parTrans" cxnId="{AD7EF0EF-EC7B-445D-9F09-1CA4CA4FC6E1}">
+      <dgm:prSet/>
+      <dgm:spPr/>
+      <dgm:t>
+        <a:bodyPr/>
+        <a:lstStyle/>
+        <a:p>
+          <a:endParaRPr lang="en-US"/>
+        </a:p>
+      </dgm:t>
+    </dgm:pt>
+    <dgm:pt modelId="{CAE7E758-826A-48DA-9535-E13BECE15A4A}" type="sibTrans" cxnId="{AD7EF0EF-EC7B-445D-9F09-1CA4CA4FC6E1}">
+      <dgm:prSet/>
+      <dgm:spPr/>
+      <dgm:t>
+        <a:bodyPr/>
+        <a:lstStyle/>
+        <a:p>
+          <a:endParaRPr lang="en-US"/>
+        </a:p>
+      </dgm:t>
+    </dgm:pt>
+    <dgm:pt modelId="{AFEA00BE-7E69-4A33-B3F1-D780D8B65B6B}">
+      <dgm:prSet custT="1"/>
+      <dgm:spPr/>
+      <dgm:t>
+        <a:bodyPr/>
+        <a:lstStyle/>
+        <a:p>
+          <a:r>
+            <a:rPr lang="en-US" sz="1200" kern="1200" dirty="0">
+              <a:latin typeface="+mn-lt"/>
+            </a:rPr>
+            <a:t> Atomic decomposition with geometric mean aggregation, Penalizes any single prompt violation, 94.5% AUROC vs human judgment</a:t>
+          </a:r>
+        </a:p>
+      </dgm:t>
+    </dgm:pt>
+    <dgm:pt modelId="{2E6680EB-7FB9-44D7-AF02-6D836A041D41}" type="parTrans" cxnId="{59B2EEC5-AEBB-495E-9154-99222F290886}">
+      <dgm:prSet/>
+      <dgm:spPr/>
+      <dgm:t>
+        <a:bodyPr/>
+        <a:lstStyle/>
+        <a:p>
+          <a:endParaRPr lang="en-US"/>
+        </a:p>
+      </dgm:t>
+    </dgm:pt>
+    <dgm:pt modelId="{BC51F044-6384-4AFC-9AA9-0FFE88EB85E4}" type="sibTrans" cxnId="{59B2EEC5-AEBB-495E-9154-99222F290886}">
+      <dgm:prSet/>
+      <dgm:spPr/>
+      <dgm:t>
+        <a:bodyPr/>
+        <a:lstStyle/>
+        <a:p>
+          <a:endParaRPr lang="en-US"/>
+        </a:p>
+      </dgm:t>
+    </dgm:pt>
+    <dgm:pt modelId="{B2652540-C181-4D45-8ACF-872AF8F42753}">
+      <dgm:prSet custT="1"/>
+      <dgm:spPr/>
+      <dgm:t>
+        <a:bodyPr/>
+        <a:lstStyle/>
+        <a:p>
+          <a:pPr>
+            <a:buNone/>
+          </a:pPr>
+          <a:r>
+            <a:rPr lang="en-US" sz="1200" b="1" kern="1200" dirty="0">
+              <a:latin typeface="+mn-lt"/>
+            </a:rPr>
+            <a:t>Structural Validation </a:t>
+          </a:r>
+          <a:r>
+            <a:rPr lang="en-US" sz="1200" b="0" kern="1200" dirty="0">
+              <a:latin typeface="+mn-lt"/>
+            </a:rPr>
+            <a:t>References (Used as complementary validation layers)</a:t>
+          </a:r>
+        </a:p>
+      </dgm:t>
+    </dgm:pt>
+    <dgm:pt modelId="{E04D66C2-F0FE-4366-93CA-66AF4023E250}" type="parTrans" cxnId="{E6AD2BB5-D7EC-4977-A54C-5233DA990659}">
+      <dgm:prSet/>
+      <dgm:spPr/>
+      <dgm:t>
+        <a:bodyPr/>
+        <a:lstStyle/>
+        <a:p>
+          <a:endParaRPr lang="en-US"/>
+        </a:p>
+      </dgm:t>
+    </dgm:pt>
+    <dgm:pt modelId="{86B56FA6-F6B5-43DC-9CE8-77D132F1FF36}" type="sibTrans" cxnId="{E6AD2BB5-D7EC-4977-A54C-5233DA990659}">
+      <dgm:prSet/>
+      <dgm:spPr/>
+      <dgm:t>
+        <a:bodyPr/>
+        <a:lstStyle/>
+        <a:p>
+          <a:endParaRPr lang="en-US"/>
+        </a:p>
+      </dgm:t>
+    </dgm:pt>
+    <dgm:pt modelId="{269C1D35-9CA6-4477-9240-F5D967C1C953}">
+      <dgm:prSet custT="1"/>
+      <dgm:spPr/>
+      <dgm:t>
+        <a:bodyPr/>
+        <a:lstStyle/>
+        <a:p>
+          <a:r>
+            <a:rPr lang="en-US" sz="1200" dirty="0"/>
+            <a:t>This tier safeguards long-term reliability and prevents evaluator drift from compromising system integrity</a:t>
+          </a:r>
+          <a:r>
+            <a:rPr lang="en-US" sz="1300" dirty="0"/>
+            <a:t>.</a:t>
+          </a:r>
+        </a:p>
+      </dgm:t>
+    </dgm:pt>
+    <dgm:pt modelId="{082BED73-7FC9-429C-8D30-FC00EB75646F}" type="parTrans" cxnId="{F3C9BF96-9212-4FAC-ADF1-A02966AFDFC2}">
+      <dgm:prSet/>
+      <dgm:spPr/>
+      <dgm:t>
+        <a:bodyPr/>
+        <a:lstStyle/>
+        <a:p>
+          <a:endParaRPr lang="en-US"/>
+        </a:p>
+      </dgm:t>
+    </dgm:pt>
+    <dgm:pt modelId="{7527C7FF-C5A8-4007-B808-D1F231922674}" type="sibTrans" cxnId="{F3C9BF96-9212-4FAC-ADF1-A02966AFDFC2}">
       <dgm:prSet/>
       <dgm:spPr/>
       <dgm:t>
@@ -6608,43 +6069,45 @@
     </dgm:pt>
   </dgm:ptLst>
   <dgm:cxnLst>
-    <dgm:cxn modelId="{018E5909-AD41-4481-8474-00D674980195}" type="presOf" srcId="{1DE7A25B-E889-4ABB-98FF-ABF05C3809CA}" destId="{2E945BEC-1936-4E90-9F21-8EF956DBD9B1}" srcOrd="0" destOrd="3" presId="urn:microsoft.com/office/officeart/2005/8/layout/vList2"/>
+    <dgm:cxn modelId="{20ABD801-A68E-4A79-8990-F167943FD980}" type="presOf" srcId="{17461D41-7964-4B8C-8983-BD4B6E856CF3}" destId="{96C6DDC1-45F3-401C-907D-0ECF9B4A5849}" srcOrd="0" destOrd="0" presId="urn:microsoft.com/office/officeart/2005/8/layout/vList2"/>
     <dgm:cxn modelId="{D8B6E509-AC49-4459-BCA1-4135E0DB5D7E}" srcId="{AB1FEA84-EA72-4E05-A4F7-6796491632A0}" destId="{FDF4A66E-41FD-426C-82F5-D08AE0124B66}" srcOrd="0" destOrd="0" parTransId="{35D20BE7-653A-4C84-B277-4116E124964B}" sibTransId="{F4D64E31-9C0C-4F60-90CD-49C717AFF2B8}"/>
+    <dgm:cxn modelId="{4E61600C-1290-412A-94A1-46AEA7F04603}" type="presOf" srcId="{5E3A4649-7FFE-405E-9267-1452A63C2A7B}" destId="{96C6DDC1-45F3-401C-907D-0ECF9B4A5849}" srcOrd="0" destOrd="1" presId="urn:microsoft.com/office/officeart/2005/8/layout/vList2"/>
     <dgm:cxn modelId="{47BD5711-95DE-4901-9AA8-17EF84F78165}" srcId="{4B0B9CFB-7213-4DCF-8C66-943EDDCE7DC5}" destId="{4046A81B-8743-45ED-8B10-4C745D18632F}" srcOrd="0" destOrd="0" parTransId="{6C82E632-B179-41F5-9724-3507858CD374}" sibTransId="{CFAF8413-72E9-4EEA-906F-78B78EDBBC25}"/>
-    <dgm:cxn modelId="{CA5AF01B-2A95-41CD-8A90-D84EA47F15BB}" type="presOf" srcId="{4046A81B-8743-45ED-8B10-4C745D18632F}" destId="{9325FB6D-24E4-4AF4-98C9-80B9789E15B9}" srcOrd="0" destOrd="0" presId="urn:microsoft.com/office/officeart/2005/8/layout/vList2"/>
     <dgm:cxn modelId="{34449C1C-59AB-4805-B54E-DBAD7EFA0863}" srcId="{09C20541-9021-47E1-BBEB-B4DDE0BBFC70}" destId="{17461D41-7964-4B8C-8983-BD4B6E856CF3}" srcOrd="0" destOrd="0" parTransId="{0E74569A-BFE6-409A-A2FD-6EFFD8970882}" sibTransId="{1889DA48-F42C-4EA4-AB59-7A476BD4C8EB}"/>
-    <dgm:cxn modelId="{CBFB7E37-14D9-48E1-91F5-9AF5F02C4213}" srcId="{AB1FEA84-EA72-4E05-A4F7-6796491632A0}" destId="{1DE7A25B-E889-4ABB-98FF-ABF05C3809CA}" srcOrd="3" destOrd="0" parTransId="{9BF9969D-A22D-4ED9-8A1A-3A80E912D2B6}" sibTransId="{52617B82-7BF3-4F48-8F80-2A05475E5711}"/>
-    <dgm:cxn modelId="{F26C7E3D-36D4-4AC8-9058-6F181D742B2C}" type="presOf" srcId="{17461D41-7964-4B8C-8983-BD4B6E856CF3}" destId="{96C6DDC1-45F3-401C-907D-0ECF9B4A5849}" srcOrd="0" destOrd="0" presId="urn:microsoft.com/office/officeart/2005/8/layout/vList2"/>
-    <dgm:cxn modelId="{70BC8445-69D3-4C70-AA20-6813DE95CF17}" type="presOf" srcId="{F9802CFB-248A-4631-802E-5A87184BC315}" destId="{FFEC1FCC-B733-4AFC-BD03-56F48A59476F}" srcOrd="0" destOrd="3" presId="urn:microsoft.com/office/officeart/2005/8/layout/vList2"/>
-    <dgm:cxn modelId="{5F2A6469-961F-4866-BC3E-25915B022EEC}" type="presOf" srcId="{FDF4A66E-41FD-426C-82F5-D08AE0124B66}" destId="{2E945BEC-1936-4E90-9F21-8EF956DBD9B1}" srcOrd="0" destOrd="0" presId="urn:microsoft.com/office/officeart/2005/8/layout/vList2"/>
-    <dgm:cxn modelId="{2327EA71-99C9-4F37-8837-76CD037DB93C}" type="presOf" srcId="{5E3A4649-7FFE-405E-9267-1452A63C2A7B}" destId="{96C6DDC1-45F3-401C-907D-0ECF9B4A5849}" srcOrd="0" destOrd="1" presId="urn:microsoft.com/office/officeart/2005/8/layout/vList2"/>
-    <dgm:cxn modelId="{F80FD354-A188-4BFA-99E7-706E8A6B3F19}" type="presOf" srcId="{EC41D406-1F5D-4385-8FB9-4429346BC81D}" destId="{2E945BEC-1936-4E90-9F21-8EF956DBD9B1}" srcOrd="0" destOrd="1" presId="urn:microsoft.com/office/officeart/2005/8/layout/vList2"/>
+    <dgm:cxn modelId="{A7BF0C28-E49F-4EC2-9F17-1AAED3ED852A}" type="presOf" srcId="{4046A81B-8743-45ED-8B10-4C745D18632F}" destId="{9325FB6D-24E4-4AF4-98C9-80B9789E15B9}" srcOrd="0" destOrd="0" presId="urn:microsoft.com/office/officeart/2005/8/layout/vList2"/>
+    <dgm:cxn modelId="{C73A4435-4F28-48C6-8FCB-C0BC0F3171A7}" type="presOf" srcId="{AFEA00BE-7E69-4A33-B3F1-D780D8B65B6B}" destId="{FFEC1FCC-B733-4AFC-BD03-56F48A59476F}" srcOrd="0" destOrd="1" presId="urn:microsoft.com/office/officeart/2005/8/layout/vList2"/>
+    <dgm:cxn modelId="{CBFB7E37-14D9-48E1-91F5-9AF5F02C4213}" srcId="{AB1FEA84-EA72-4E05-A4F7-6796491632A0}" destId="{1DE7A25B-E889-4ABB-98FF-ABF05C3809CA}" srcOrd="2" destOrd="0" parTransId="{9BF9969D-A22D-4ED9-8A1A-3A80E912D2B6}" sibTransId="{52617B82-7BF3-4F48-8F80-2A05475E5711}"/>
+    <dgm:cxn modelId="{5554F341-AFD8-405C-B033-E33E492AD373}" type="presOf" srcId="{1DE7A25B-E889-4ABB-98FF-ABF05C3809CA}" destId="{2E945BEC-1936-4E90-9F21-8EF956DBD9B1}" srcOrd="0" destOrd="2" presId="urn:microsoft.com/office/officeart/2005/8/layout/vList2"/>
+    <dgm:cxn modelId="{E41BC349-1FCF-4AD9-A9A4-BCA8C093E56D}" type="presOf" srcId="{AB1FEA84-EA72-4E05-A4F7-6796491632A0}" destId="{05D73472-0A4B-4075-95FF-3F6BA487A705}" srcOrd="0" destOrd="0" presId="urn:microsoft.com/office/officeart/2005/8/layout/vList2"/>
     <dgm:cxn modelId="{4A0CCC75-9002-4AF2-B3EF-DC3ED184843E}" srcId="{4B0B9CFB-7213-4DCF-8C66-943EDDCE7DC5}" destId="{AB1FEA84-EA72-4E05-A4F7-6796491632A0}" srcOrd="1" destOrd="0" parTransId="{80105A73-79BC-48D4-9BED-833FD83702DF}" sibTransId="{8989AF2B-24DD-4A22-8B1E-FCE9AB7E3338}"/>
-    <dgm:cxn modelId="{E1369A56-4424-49E8-B89C-7777A1FBC546}" srcId="{AB1FEA84-EA72-4E05-A4F7-6796491632A0}" destId="{672EBBF1-4249-424A-AF99-65E6F250C7E8}" srcOrd="2" destOrd="0" parTransId="{7C9052AF-A367-4588-A090-6E293E730CD7}" sibTransId="{4C6715F6-6C26-447F-BE3F-6A8C64F01527}"/>
-    <dgm:cxn modelId="{3C32E282-FF71-4B78-B124-25485BB9E2D0}" type="presOf" srcId="{3870FBD0-702A-4768-84ED-27E14D555522}" destId="{FFEC1FCC-B733-4AFC-BD03-56F48A59476F}" srcOrd="0" destOrd="0" presId="urn:microsoft.com/office/officeart/2005/8/layout/vList2"/>
-    <dgm:cxn modelId="{62EB1590-B6FF-49E2-9B3E-1668EC53B9B6}" srcId="{4046A81B-8743-45ED-8B10-4C745D18632F}" destId="{F9802CFB-248A-4631-802E-5A87184BC315}" srcOrd="3" destOrd="0" parTransId="{8419E832-9517-44AB-BB80-A7A32EC10C9E}" sibTransId="{D20BF303-0711-4D93-AF39-7F63AA9DA77F}"/>
-    <dgm:cxn modelId="{771C4795-9897-4297-856D-CCDE19F6A495}" srcId="{4046A81B-8743-45ED-8B10-4C745D18632F}" destId="{FEE15881-0EDA-4E6D-9FC1-005BE5D7A729}" srcOrd="1" destOrd="0" parTransId="{F69F6729-15BD-4B31-AE8F-8DE24A386B5B}" sibTransId="{CD58DE6E-1844-4404-8383-39F0EFDCCDDA}"/>
+    <dgm:cxn modelId="{9BE28356-D8B3-4ED6-8E9A-BBA086A4D98F}" type="presOf" srcId="{09C20541-9021-47E1-BBEB-B4DDE0BBFC70}" destId="{B3EFFC59-19D9-41C4-8339-874F0FAFA761}" srcOrd="0" destOrd="0" presId="urn:microsoft.com/office/officeart/2005/8/layout/vList2"/>
+    <dgm:cxn modelId="{E1369A56-4424-49E8-B89C-7777A1FBC546}" srcId="{AB1FEA84-EA72-4E05-A4F7-6796491632A0}" destId="{672EBBF1-4249-424A-AF99-65E6F250C7E8}" srcOrd="1" destOrd="0" parTransId="{7C9052AF-A367-4588-A090-6E293E730CD7}" sibTransId="{4C6715F6-6C26-447F-BE3F-6A8C64F01527}"/>
+    <dgm:cxn modelId="{7954C891-E08E-41F2-A027-6B3804A45149}" type="presOf" srcId="{672EBBF1-4249-424A-AF99-65E6F250C7E8}" destId="{2E945BEC-1936-4E90-9F21-8EF956DBD9B1}" srcOrd="0" destOrd="1" presId="urn:microsoft.com/office/officeart/2005/8/layout/vList2"/>
     <dgm:cxn modelId="{900B4096-0E94-4BDE-9360-13FDFCF14F67}" srcId="{09C20541-9021-47E1-BBEB-B4DDE0BBFC70}" destId="{5E3A4649-7FFE-405E-9267-1452A63C2A7B}" srcOrd="1" destOrd="0" parTransId="{173CB345-3D37-4A89-8FAE-CAC90DD4B859}" sibTransId="{7AF99458-7B0A-4521-95A8-2433AFAF35B5}"/>
-    <dgm:cxn modelId="{B5D80F9F-9B8E-43BB-A433-7EA59B34E974}" type="presOf" srcId="{AB1FEA84-EA72-4E05-A4F7-6796491632A0}" destId="{05D73472-0A4B-4075-95FF-3F6BA487A705}" srcOrd="0" destOrd="0" presId="urn:microsoft.com/office/officeart/2005/8/layout/vList2"/>
-    <dgm:cxn modelId="{2FB59BAB-2832-4510-A353-C57D83833D70}" srcId="{AB1FEA84-EA72-4E05-A4F7-6796491632A0}" destId="{EC41D406-1F5D-4385-8FB9-4429346BC81D}" srcOrd="1" destOrd="0" parTransId="{3A5F02EC-168B-42A9-8AFC-01B8DFFBB1B7}" sibTransId="{45904475-689D-408C-A073-88F78FB87AE6}"/>
-    <dgm:cxn modelId="{0FEF7CB2-769D-45A7-A038-0C66EED2312D}" type="presOf" srcId="{43F50E9D-80DE-48A4-8485-E0EFB2299E56}" destId="{FFEC1FCC-B733-4AFC-BD03-56F48A59476F}" srcOrd="0" destOrd="2" presId="urn:microsoft.com/office/officeart/2005/8/layout/vList2"/>
-    <dgm:cxn modelId="{B3E4C5B4-F1FD-4DC2-B949-20EC64D234E6}" type="presOf" srcId="{FEE15881-0EDA-4E6D-9FC1-005BE5D7A729}" destId="{FFEC1FCC-B733-4AFC-BD03-56F48A59476F}" srcOrd="0" destOrd="1" presId="urn:microsoft.com/office/officeart/2005/8/layout/vList2"/>
-    <dgm:cxn modelId="{E5E381C3-E813-40EC-9F24-B0DB0AE08C86}" type="presOf" srcId="{4FAA404E-5DD9-4350-9620-28FC500B48DE}" destId="{2E945BEC-1936-4E90-9F21-8EF956DBD9B1}" srcOrd="0" destOrd="4" presId="urn:microsoft.com/office/officeart/2005/8/layout/vList2"/>
-    <dgm:cxn modelId="{5BB44BC4-1A37-4F29-A46C-383432BD8090}" srcId="{4046A81B-8743-45ED-8B10-4C745D18632F}" destId="{43F50E9D-80DE-48A4-8485-E0EFB2299E56}" srcOrd="2" destOrd="0" parTransId="{28D3F592-763A-4F32-B2E7-D1B492AC18D9}" sibTransId="{77DB7A21-C82D-4B9A-9957-4D8E55D662B1}"/>
-    <dgm:cxn modelId="{58D3FBC6-00FE-49D6-B762-BDB2F21D6CE1}" type="presOf" srcId="{09C20541-9021-47E1-BBEB-B4DDE0BBFC70}" destId="{B3EFFC59-19D9-41C4-8339-874F0FAFA761}" srcOrd="0" destOrd="0" presId="urn:microsoft.com/office/officeart/2005/8/layout/vList2"/>
-    <dgm:cxn modelId="{8A84EBC9-6655-4F6D-B3E5-E6441A4EEB42}" type="presOf" srcId="{672EBBF1-4249-424A-AF99-65E6F250C7E8}" destId="{2E945BEC-1936-4E90-9F21-8EF956DBD9B1}" srcOrd="0" destOrd="2" presId="urn:microsoft.com/office/officeart/2005/8/layout/vList2"/>
+    <dgm:cxn modelId="{F3C9BF96-9212-4FAC-ADF1-A02966AFDFC2}" srcId="{09C20541-9021-47E1-BBEB-B4DDE0BBFC70}" destId="{269C1D35-9CA6-4477-9240-F5D967C1C953}" srcOrd="2" destOrd="0" parTransId="{082BED73-7FC9-429C-8D30-FC00EB75646F}" sibTransId="{7527C7FF-C5A8-4007-B808-D1F231922674}"/>
+    <dgm:cxn modelId="{E581E6AC-1B34-462E-BCFD-6197B330A9FD}" type="presOf" srcId="{269C1D35-9CA6-4477-9240-F5D967C1C953}" destId="{96C6DDC1-45F3-401C-907D-0ECF9B4A5849}" srcOrd="0" destOrd="2" presId="urn:microsoft.com/office/officeart/2005/8/layout/vList2"/>
+    <dgm:cxn modelId="{E6AD2BB5-D7EC-4977-A54C-5233DA990659}" srcId="{4046A81B-8743-45ED-8B10-4C745D18632F}" destId="{B2652540-C181-4D45-8ACF-872AF8F42753}" srcOrd="1" destOrd="0" parTransId="{E04D66C2-F0FE-4366-93CA-66AF4023E250}" sibTransId="{86B56FA6-F6B5-43DC-9CE8-77D132F1FF36}"/>
+    <dgm:cxn modelId="{9A1D43BA-41C1-4796-AB80-ED1D2A2CBE36}" type="presOf" srcId="{B2652540-C181-4D45-8ACF-872AF8F42753}" destId="{FFEC1FCC-B733-4AFC-BD03-56F48A59476F}" srcOrd="0" destOrd="2" presId="urn:microsoft.com/office/officeart/2005/8/layout/vList2"/>
+    <dgm:cxn modelId="{AD68D9BC-97A6-406E-BCDF-5EDA835A831E}" type="presOf" srcId="{9B0EF826-6C18-4334-8778-399F287098D6}" destId="{2E945BEC-1936-4E90-9F21-8EF956DBD9B1}" srcOrd="0" destOrd="4" presId="urn:microsoft.com/office/officeart/2005/8/layout/vList2"/>
+    <dgm:cxn modelId="{59B2EEC5-AEBB-495E-9154-99222F290886}" srcId="{3870FBD0-702A-4768-84ED-27E14D555522}" destId="{AFEA00BE-7E69-4A33-B3F1-D780D8B65B6B}" srcOrd="0" destOrd="0" parTransId="{2E6680EB-7FB9-44D7-AF02-6D836A041D41}" sibTransId="{BC51F044-6384-4AFC-9AA9-0FFE88EB85E4}"/>
+    <dgm:cxn modelId="{61F3E5CD-7C2D-48AD-9C86-8C5CF48212FE}" type="presOf" srcId="{3870FBD0-702A-4768-84ED-27E14D555522}" destId="{FFEC1FCC-B733-4AFC-BD03-56F48A59476F}" srcOrd="0" destOrd="0" presId="urn:microsoft.com/office/officeart/2005/8/layout/vList2"/>
+    <dgm:cxn modelId="{C62B3DCE-0251-4066-8803-9F16B364796E}" srcId="{B2652540-C181-4D45-8ACF-872AF8F42753}" destId="{22649628-0205-42A1-98C1-76ABF253E2A3}" srcOrd="0" destOrd="0" parTransId="{AE3B1B7A-2ED6-43E9-A0EC-F8D5A4DEBEF1}" sibTransId="{3BAB4A8A-5C3C-49C6-8C2B-3688A89D1D86}"/>
+    <dgm:cxn modelId="{6B0D9ED1-C9E6-4817-8268-055E27FD9B76}" type="presOf" srcId="{22649628-0205-42A1-98C1-76ABF253E2A3}" destId="{FFEC1FCC-B733-4AFC-BD03-56F48A59476F}" srcOrd="0" destOrd="3" presId="urn:microsoft.com/office/officeart/2005/8/layout/vList2"/>
+    <dgm:cxn modelId="{D1BB5BD2-F478-4CDB-A741-C7D24F262B0F}" type="presOf" srcId="{864BACC7-CCF3-4DB2-9F67-27BF178D32EF}" destId="{FFEC1FCC-B733-4AFC-BD03-56F48A59476F}" srcOrd="0" destOrd="4" presId="urn:microsoft.com/office/officeart/2005/8/layout/vList2"/>
+    <dgm:cxn modelId="{A1B0E4D4-11D0-461A-ABAB-E3B5D7C928C4}" type="presOf" srcId="{4FAA404E-5DD9-4350-9620-28FC500B48DE}" destId="{2E945BEC-1936-4E90-9F21-8EF956DBD9B1}" srcOrd="0" destOrd="3" presId="urn:microsoft.com/office/officeart/2005/8/layout/vList2"/>
     <dgm:cxn modelId="{0DE4F1D5-77E3-4BD8-A653-4345D9C5089B}" srcId="{4046A81B-8743-45ED-8B10-4C745D18632F}" destId="{3870FBD0-702A-4768-84ED-27E14D555522}" srcOrd="0" destOrd="0" parTransId="{1B002953-C80C-4F15-9C13-B5AB40FCB9C6}" sibTransId="{4E84A1B5-4C0C-42AD-A7B5-78D0EF95318B}"/>
     <dgm:cxn modelId="{308D36DB-B1F1-4805-B475-4AFFEA24C804}" type="presOf" srcId="{4B0B9CFB-7213-4DCF-8C66-943EDDCE7DC5}" destId="{BA9F011E-7DAB-456D-81AC-78D519BF0025}" srcOrd="0" destOrd="0" presId="urn:microsoft.com/office/officeart/2005/8/layout/vList2"/>
-    <dgm:cxn modelId="{1AE625DF-9B68-4225-B3D5-EFD1D075D3B1}" srcId="{AB1FEA84-EA72-4E05-A4F7-6796491632A0}" destId="{4FAA404E-5DD9-4350-9620-28FC500B48DE}" srcOrd="4" destOrd="0" parTransId="{6DC7D298-25EE-49BB-8375-F5251307BF1B}" sibTransId="{2B3F5F63-6EF9-4FA1-AEEE-EFD552AB953C}"/>
+    <dgm:cxn modelId="{1AE625DF-9B68-4225-B3D5-EFD1D075D3B1}" srcId="{AB1FEA84-EA72-4E05-A4F7-6796491632A0}" destId="{4FAA404E-5DD9-4350-9620-28FC500B48DE}" srcOrd="3" destOrd="0" parTransId="{6DC7D298-25EE-49BB-8375-F5251307BF1B}" sibTransId="{2B3F5F63-6EF9-4FA1-AEEE-EFD552AB953C}"/>
     <dgm:cxn modelId="{062630E8-BDED-4ED0-B33D-5D07712C8092}" srcId="{4B0B9CFB-7213-4DCF-8C66-943EDDCE7DC5}" destId="{09C20541-9021-47E1-BBEB-B4DDE0BBFC70}" srcOrd="2" destOrd="0" parTransId="{D61EB323-A120-478A-B9AD-1F0E5AD3D0D7}" sibTransId="{222E2A71-C7F2-4793-ADAA-48F7127CF073}"/>
-    <dgm:cxn modelId="{8023EFEA-D0AA-4392-9310-35D929B7B6E1}" type="presOf" srcId="{9B0EF826-6C18-4334-8778-399F287098D6}" destId="{2E945BEC-1936-4E90-9F21-8EF956DBD9B1}" srcOrd="0" destOrd="5" presId="urn:microsoft.com/office/officeart/2005/8/layout/vList2"/>
-    <dgm:cxn modelId="{6421AFF5-CBCE-4816-AF04-9CA7CBE4B060}" srcId="{AB1FEA84-EA72-4E05-A4F7-6796491632A0}" destId="{9B0EF826-6C18-4334-8778-399F287098D6}" srcOrd="5" destOrd="0" parTransId="{5E806915-3281-4C8A-9660-8A7C405E67F8}" sibTransId="{867FB53D-151D-4141-8051-4315CF98FF6A}"/>
-    <dgm:cxn modelId="{A36A5C8B-55A0-49DD-B4A8-E1EF4636564C}" type="presParOf" srcId="{BA9F011E-7DAB-456D-81AC-78D519BF0025}" destId="{9325FB6D-24E4-4AF4-98C9-80B9789E15B9}" srcOrd="0" destOrd="0" presId="urn:microsoft.com/office/officeart/2005/8/layout/vList2"/>
-    <dgm:cxn modelId="{CF719439-FE79-4F03-AD7C-F85132B950D6}" type="presParOf" srcId="{BA9F011E-7DAB-456D-81AC-78D519BF0025}" destId="{FFEC1FCC-B733-4AFC-BD03-56F48A59476F}" srcOrd="1" destOrd="0" presId="urn:microsoft.com/office/officeart/2005/8/layout/vList2"/>
-    <dgm:cxn modelId="{A043F517-9566-4714-A863-14A51A01153F}" type="presParOf" srcId="{BA9F011E-7DAB-456D-81AC-78D519BF0025}" destId="{05D73472-0A4B-4075-95FF-3F6BA487A705}" srcOrd="2" destOrd="0" presId="urn:microsoft.com/office/officeart/2005/8/layout/vList2"/>
-    <dgm:cxn modelId="{25138630-4739-42F9-AE56-37DCE9E2A34B}" type="presParOf" srcId="{BA9F011E-7DAB-456D-81AC-78D519BF0025}" destId="{2E945BEC-1936-4E90-9F21-8EF956DBD9B1}" srcOrd="3" destOrd="0" presId="urn:microsoft.com/office/officeart/2005/8/layout/vList2"/>
-    <dgm:cxn modelId="{E6D4FE1F-4DC7-47F0-BC49-313AD84E8529}" type="presParOf" srcId="{BA9F011E-7DAB-456D-81AC-78D519BF0025}" destId="{B3EFFC59-19D9-41C4-8339-874F0FAFA761}" srcOrd="4" destOrd="0" presId="urn:microsoft.com/office/officeart/2005/8/layout/vList2"/>
-    <dgm:cxn modelId="{EBC4A495-7365-4B03-BFE0-811F3C11FA50}" type="presParOf" srcId="{BA9F011E-7DAB-456D-81AC-78D519BF0025}" destId="{96C6DDC1-45F3-401C-907D-0ECF9B4A5849}" srcOrd="5" destOrd="0" presId="urn:microsoft.com/office/officeart/2005/8/layout/vList2"/>
+    <dgm:cxn modelId="{AD7EF0EF-EC7B-445D-9F09-1CA4CA4FC6E1}" srcId="{B2652540-C181-4D45-8ACF-872AF8F42753}" destId="{864BACC7-CCF3-4DB2-9F67-27BF178D32EF}" srcOrd="1" destOrd="0" parTransId="{5E86A7CD-786C-4807-B21D-6F48AEF5D995}" sibTransId="{CAE7E758-826A-48DA-9535-E13BECE15A4A}"/>
+    <dgm:cxn modelId="{6421AFF5-CBCE-4816-AF04-9CA7CBE4B060}" srcId="{AB1FEA84-EA72-4E05-A4F7-6796491632A0}" destId="{9B0EF826-6C18-4334-8778-399F287098D6}" srcOrd="4" destOrd="0" parTransId="{5E806915-3281-4C8A-9660-8A7C405E67F8}" sibTransId="{867FB53D-151D-4141-8051-4315CF98FF6A}"/>
+    <dgm:cxn modelId="{DAE433F7-58F1-46B6-B5E8-DCB950A7DA6D}" type="presOf" srcId="{FDF4A66E-41FD-426C-82F5-D08AE0124B66}" destId="{2E945BEC-1936-4E90-9F21-8EF956DBD9B1}" srcOrd="0" destOrd="0" presId="urn:microsoft.com/office/officeart/2005/8/layout/vList2"/>
+    <dgm:cxn modelId="{F113AC1C-A5DB-4D51-AEDE-C43EC192FA1C}" type="presParOf" srcId="{BA9F011E-7DAB-456D-81AC-78D519BF0025}" destId="{9325FB6D-24E4-4AF4-98C9-80B9789E15B9}" srcOrd="0" destOrd="0" presId="urn:microsoft.com/office/officeart/2005/8/layout/vList2"/>
+    <dgm:cxn modelId="{13CB2C9C-70F9-45FF-B8E5-90B7FBC92217}" type="presParOf" srcId="{BA9F011E-7DAB-456D-81AC-78D519BF0025}" destId="{FFEC1FCC-B733-4AFC-BD03-56F48A59476F}" srcOrd="1" destOrd="0" presId="urn:microsoft.com/office/officeart/2005/8/layout/vList2"/>
+    <dgm:cxn modelId="{BF275B30-CB6E-4B19-B6B7-8505103E1A26}" type="presParOf" srcId="{BA9F011E-7DAB-456D-81AC-78D519BF0025}" destId="{05D73472-0A4B-4075-95FF-3F6BA487A705}" srcOrd="2" destOrd="0" presId="urn:microsoft.com/office/officeart/2005/8/layout/vList2"/>
+    <dgm:cxn modelId="{F121B429-C055-4BA7-B288-EB988FECCB0C}" type="presParOf" srcId="{BA9F011E-7DAB-456D-81AC-78D519BF0025}" destId="{2E945BEC-1936-4E90-9F21-8EF956DBD9B1}" srcOrd="3" destOrd="0" presId="urn:microsoft.com/office/officeart/2005/8/layout/vList2"/>
+    <dgm:cxn modelId="{54E4F317-664E-45C4-BCB7-5B9C2CE91892}" type="presParOf" srcId="{BA9F011E-7DAB-456D-81AC-78D519BF0025}" destId="{B3EFFC59-19D9-41C4-8339-874F0FAFA761}" srcOrd="4" destOrd="0" presId="urn:microsoft.com/office/officeart/2005/8/layout/vList2"/>
+    <dgm:cxn modelId="{E67F4578-3370-4121-8BAE-7739F91C6022}" type="presParOf" srcId="{BA9F011E-7DAB-456D-81AC-78D519BF0025}" destId="{96C6DDC1-45F3-401C-907D-0ECF9B4A5849}" srcOrd="5" destOrd="0" presId="urn:microsoft.com/office/officeart/2005/8/layout/vList2"/>
   </dgm:cxnLst>
   <dgm:bg/>
   <dgm:whole/>
@@ -9114,8 +8577,8 @@
       </dsp:nvSpPr>
       <dsp:spPr>
         <a:xfrm>
-          <a:off x="0" y="62190"/>
-          <a:ext cx="8910320" cy="393120"/>
+          <a:off x="0" y="8978"/>
+          <a:ext cx="8910320" cy="442260"/>
         </a:xfrm>
         <a:prstGeom prst="roundRect">
           <a:avLst/>
@@ -9157,12 +8620,12 @@
         </a:fontRef>
       </dsp:style>
       <dsp:txBody>
-        <a:bodyPr spcFirstLastPara="0" vert="horz" wrap="square" lIns="60960" tIns="60960" rIns="60960" bIns="60960" numCol="1" spcCol="1270" anchor="ctr" anchorCtr="0">
+        <a:bodyPr spcFirstLastPara="0" vert="horz" wrap="square" lIns="68580" tIns="68580" rIns="68580" bIns="68580" numCol="1" spcCol="1270" anchor="ctr" anchorCtr="0">
           <a:noAutofit/>
         </a:bodyPr>
         <a:lstStyle/>
         <a:p>
-          <a:pPr marL="0" lvl="0" indent="0" algn="l" defTabSz="711200">
+          <a:pPr marL="0" lvl="0" indent="0" algn="l" defTabSz="800100">
             <a:lnSpc>
               <a:spcPct val="90000"/>
             </a:lnSpc>
@@ -9176,15 +8639,18 @@
             <a:buNone/>
           </a:pPr>
           <a:r>
-            <a:rPr lang="en-US" sz="1600" b="1" kern="1200"/>
-            <a:t>Tier 1 North Star Metrics: Soft-TIFA GM (sign-off)</a:t>
+            <a:rPr lang="en-US" sz="1800" b="1" kern="1200" dirty="0"/>
+            <a:t>Tier 1 North Star Metrics</a:t>
           </a:r>
-          <a:endParaRPr lang="en-US" sz="1600" kern="1200" dirty="0"/>
+          <a:r>
+            <a:rPr lang="en-US" sz="1800" kern="1200" dirty="0"/>
+            <a:t>(Final Sign-Off)</a:t>
+          </a:r>
         </a:p>
       </dsp:txBody>
       <dsp:txXfrm>
-        <a:off x="19191" y="81381"/>
-        <a:ext cx="8871938" cy="354738"/>
+        <a:off x="21589" y="30567"/>
+        <a:ext cx="8867142" cy="399082"/>
       </dsp:txXfrm>
     </dsp:sp>
     <dsp:sp modelId="{FFEC1FCC-B733-4AFC-BD03-56F48A59476F}">
@@ -9194,8 +8660,8 @@
       </dsp:nvSpPr>
       <dsp:spPr>
         <a:xfrm>
-          <a:off x="0" y="455310"/>
-          <a:ext cx="8910320" cy="828000"/>
+          <a:off x="0" y="451238"/>
+          <a:ext cx="8910320" cy="1378620"/>
         </a:xfrm>
         <a:prstGeom prst="rect">
           <a:avLst/>
@@ -9219,7 +8685,7 @@
         <a:fontRef idx="minor"/>
       </dsp:style>
       <dsp:txBody>
-        <a:bodyPr spcFirstLastPara="0" vert="horz" wrap="square" lIns="282903" tIns="20320" rIns="113792" bIns="20320" numCol="1" spcCol="1270" anchor="t" anchorCtr="0">
+        <a:bodyPr spcFirstLastPara="0" vert="horz" wrap="square" lIns="282903" tIns="15240" rIns="85344" bIns="15240" numCol="1" spcCol="1270" anchor="t" anchorCtr="0">
           <a:noAutofit/>
         </a:bodyPr>
         <a:lstStyle/>
@@ -9234,13 +8700,40 @@
             <a:spcAft>
               <a:spcPct val="20000"/>
             </a:spcAft>
+            <a:buNone/>
+          </a:pPr>
+          <a:r>
+            <a:rPr lang="en-US" sz="1200" b="1" kern="1200" dirty="0">
+              <a:latin typeface="+mn-lt"/>
+            </a:rPr>
+            <a:t>Soft-TIFA GM </a:t>
+          </a:r>
+          <a:r>
+            <a:rPr lang="en-US" sz="1200" b="0" kern="1200" dirty="0">
+              <a:latin typeface="+mn-lt"/>
+            </a:rPr>
+            <a:t>(Primary Decision Metric)</a:t>
+          </a:r>
+        </a:p>
+        <a:p>
+          <a:pPr marL="228600" lvl="2" indent="-114300" algn="l" defTabSz="533400">
+            <a:lnSpc>
+              <a:spcPct val="90000"/>
+            </a:lnSpc>
+            <a:spcBef>
+              <a:spcPct val="0"/>
+            </a:spcBef>
+            <a:spcAft>
+              <a:spcPct val="20000"/>
+            </a:spcAft>
             <a:buChar char="•"/>
           </a:pPr>
           <a:r>
-            <a:rPr lang="en-US" sz="1200" kern="1200"/>
-            <a:t>Atomic decomposition with geometric mean aggregation</a:t>
+            <a:rPr lang="en-US" sz="1200" kern="1200" dirty="0">
+              <a:latin typeface="+mn-lt"/>
+            </a:rPr>
+            <a:t> Atomic decomposition with geometric mean aggregation, Penalizes any single prompt violation, 94.5% AUROC vs human judgment</a:t>
           </a:r>
-          <a:endParaRPr lang="en-US" sz="1200" kern="1200" dirty="0"/>
         </a:p>
         <a:p>
           <a:pPr marL="114300" lvl="1" indent="-114300" algn="l" defTabSz="533400">
@@ -9253,16 +8746,23 @@
             <a:spcAft>
               <a:spcPct val="20000"/>
             </a:spcAft>
-            <a:buChar char="•"/>
+            <a:buNone/>
           </a:pPr>
           <a:r>
-            <a:rPr lang="en-US" sz="1200" kern="1200"/>
-            <a:t>Penalizes any single prompt violation</a:t>
+            <a:rPr lang="en-US" sz="1200" b="1" kern="1200" dirty="0">
+              <a:latin typeface="+mn-lt"/>
+            </a:rPr>
+            <a:t>Structural Validation </a:t>
           </a:r>
-          <a:endParaRPr lang="en-US" sz="1200" kern="1200" dirty="0"/>
+          <a:r>
+            <a:rPr lang="en-US" sz="1200" b="0" kern="1200" dirty="0">
+              <a:latin typeface="+mn-lt"/>
+            </a:rPr>
+            <a:t>References (Used as complementary validation layers)</a:t>
+          </a:r>
         </a:p>
         <a:p>
-          <a:pPr marL="114300" lvl="1" indent="-114300" algn="l" defTabSz="533400">
+          <a:pPr marL="228600" lvl="2" indent="-114300" algn="l" defTabSz="533400">
             <a:lnSpc>
               <a:spcPct val="90000"/>
             </a:lnSpc>
@@ -9275,13 +8775,14 @@
             <a:buChar char="•"/>
           </a:pPr>
           <a:r>
-            <a:rPr lang="en-US" sz="1200" kern="1200"/>
-            <a:t>94.5% AUROC vs human judgment</a:t>
+            <a:rPr lang="en-US" sz="1200" kern="1200" dirty="0">
+              <a:latin typeface="+mn-lt"/>
+            </a:rPr>
+            <a:t>DSG Score: Employed for validating complex relational logic with high structural robustness.</a:t>
           </a:r>
-          <a:endParaRPr lang="en-US" sz="1200" kern="1200" dirty="0"/>
         </a:p>
         <a:p>
-          <a:pPr marL="114300" lvl="1" indent="-114300" algn="l" defTabSz="533400">
+          <a:pPr marL="228600" lvl="2" indent="-114300" algn="l" defTabSz="533400">
             <a:lnSpc>
               <a:spcPct val="90000"/>
             </a:lnSpc>
@@ -9294,15 +8795,29 @@
             <a:buChar char="•"/>
           </a:pPr>
           <a:r>
-            <a:rPr lang="en-US" sz="1200" kern="1200"/>
-            <a:t>Robust to benchmark drift</a:t>
+            <a:rPr lang="en-US" sz="1200" kern="1200" dirty="0">
+              <a:solidFill>
+                <a:prstClr val="black">
+                  <a:hueOff val="0"/>
+                  <a:satOff val="0"/>
+                  <a:lumOff val="0"/>
+                  <a:alphaOff val="0"/>
+                </a:prstClr>
+              </a:solidFill>
+              <a:latin typeface="+mn-lt"/>
+              <a:ea typeface="+mn-ea"/>
+              <a:cs typeface="+mn-cs"/>
+            </a:rPr>
+            <a:t>PSG Score: A fine-grained visual metric that constructs scene graphs from panoptic segmentation outputs to assess object identities, attributes, and relational consistency. </a:t>
           </a:r>
-          <a:endParaRPr lang="en-US" sz="1200" kern="1200" dirty="0"/>
+          <a:endParaRPr lang="en-US" sz="1200" kern="1200" dirty="0">
+            <a:latin typeface="+mn-lt"/>
+          </a:endParaRPr>
         </a:p>
       </dsp:txBody>
       <dsp:txXfrm>
-        <a:off x="0" y="455310"/>
-        <a:ext cx="8910320" cy="828000"/>
+        <a:off x="0" y="451238"/>
+        <a:ext cx="8910320" cy="1378620"/>
       </dsp:txXfrm>
     </dsp:sp>
     <dsp:sp modelId="{05D73472-0A4B-4075-95FF-3F6BA487A705}">
@@ -9312,8 +8827,8 @@
       </dsp:nvSpPr>
       <dsp:spPr>
         <a:xfrm>
-          <a:off x="0" y="1283310"/>
-          <a:ext cx="8910320" cy="393120"/>
+          <a:off x="0" y="1829858"/>
+          <a:ext cx="8910320" cy="442260"/>
         </a:xfrm>
         <a:prstGeom prst="roundRect">
           <a:avLst/>
@@ -9355,12 +8870,12 @@
         </a:fontRef>
       </dsp:style>
       <dsp:txBody>
-        <a:bodyPr spcFirstLastPara="0" vert="horz" wrap="square" lIns="60960" tIns="60960" rIns="60960" bIns="60960" numCol="1" spcCol="1270" anchor="ctr" anchorCtr="0">
+        <a:bodyPr spcFirstLastPara="0" vert="horz" wrap="square" lIns="68580" tIns="68580" rIns="68580" bIns="68580" numCol="1" spcCol="1270" anchor="ctr" anchorCtr="0">
           <a:noAutofit/>
         </a:bodyPr>
         <a:lstStyle/>
         <a:p>
-          <a:pPr marL="0" lvl="0" indent="0" algn="l" defTabSz="711200">
+          <a:pPr marL="0" lvl="0" indent="0" algn="l" defTabSz="800100">
             <a:lnSpc>
               <a:spcPct val="90000"/>
             </a:lnSpc>
@@ -9373,15 +8888,15 @@
             <a:buNone/>
           </a:pPr>
           <a:r>
-            <a:rPr lang="en-US" sz="1600" b="1" kern="1200"/>
+            <a:rPr lang="en-US" sz="1800" b="1" kern="1200"/>
             <a:t>Tier 2 Supporting Metrics: </a:t>
           </a:r>
-          <a:endParaRPr lang="en-US" sz="1600" b="1" kern="1200" dirty="0"/>
+          <a:endParaRPr lang="en-US" sz="1800" b="1" kern="1200" dirty="0"/>
         </a:p>
       </dsp:txBody>
       <dsp:txXfrm>
-        <a:off x="19191" y="1302501"/>
-        <a:ext cx="8871938" cy="354738"/>
+        <a:off x="21589" y="1851447"/>
+        <a:ext cx="8867142" cy="399082"/>
       </dsp:txXfrm>
     </dsp:sp>
     <dsp:sp modelId="{2E945BEC-1936-4E90-9F21-8EF956DBD9B1}">
@@ -9391,8 +8906,8 @@
       </dsp:nvSpPr>
       <dsp:spPr>
         <a:xfrm>
-          <a:off x="0" y="1676431"/>
-          <a:ext cx="8910320" cy="1424160"/>
+          <a:off x="0" y="2272118"/>
+          <a:ext cx="8910320" cy="1192320"/>
         </a:xfrm>
         <a:prstGeom prst="rect">
           <a:avLst/>
@@ -9416,7 +8931,7 @@
         <a:fontRef idx="minor"/>
       </dsp:style>
       <dsp:txBody>
-        <a:bodyPr spcFirstLastPara="0" vert="horz" wrap="square" lIns="282903" tIns="20320" rIns="113792" bIns="20320" numCol="1" spcCol="1270" anchor="t" anchorCtr="0">
+        <a:bodyPr spcFirstLastPara="0" vert="horz" wrap="square" lIns="282903" tIns="15240" rIns="85344" bIns="15240" numCol="1" spcCol="1270" anchor="t" anchorCtr="0">
           <a:noAutofit/>
         </a:bodyPr>
         <a:lstStyle/>
@@ -9434,29 +8949,13 @@
             <a:buChar char="•"/>
           </a:pPr>
           <a:r>
-            <a:rPr lang="en-US" sz="1200" kern="1200"/>
-            <a:t>VQAScore: Optimized for low-latency production gatekeeping and real-time alignment screening</a:t>
+            <a:rPr lang="en-US" sz="1200" kern="1200" dirty="0" err="1"/>
+            <a:t>VQAScore</a:t>
           </a:r>
-          <a:endParaRPr lang="en-US" sz="1200" kern="1200" dirty="0"/>
-        </a:p>
-        <a:p>
-          <a:pPr marL="114300" lvl="1" indent="-114300" algn="l" defTabSz="533400">
-            <a:lnSpc>
-              <a:spcPct val="90000"/>
-            </a:lnSpc>
-            <a:spcBef>
-              <a:spcPct val="0"/>
-            </a:spcBef>
-            <a:spcAft>
-              <a:spcPct val="20000"/>
-            </a:spcAft>
-            <a:buChar char="•"/>
-          </a:pPr>
           <a:r>
-            <a:rPr lang="en-US" sz="1200" kern="1200"/>
-            <a:t>DSGScore: Employed for validating complex relational logic with high structural robustness.</a:t>
+            <a:rPr lang="en-US" sz="1200" kern="1200" dirty="0"/>
+            <a:t>: Optimized for low-latency production gatekeeping and real-time alignment screening</a:t>
           </a:r>
-          <a:endParaRPr lang="en-US" sz="1200" kern="1200" dirty="0"/>
         </a:p>
         <a:p>
           <a:pPr marL="114300" lvl="1" indent="-114300" algn="l" defTabSz="533400">
@@ -9512,10 +9011,13 @@
             <a:buChar char="•"/>
           </a:pPr>
           <a:r>
-            <a:rPr lang="en-US" sz="1200" kern="1200"/>
-            <a:t>AHEaD: The primary metric for cultural activity alignment and prevention of caricature exaggeration</a:t>
+            <a:rPr lang="en-US" sz="1200" kern="1200" dirty="0" err="1"/>
+            <a:t>AHEaD</a:t>
           </a:r>
-          <a:endParaRPr lang="en-US" sz="1200" kern="1200" dirty="0"/>
+          <a:r>
+            <a:rPr lang="en-US" sz="1200" kern="1200" dirty="0"/>
+            <a:t>: The primary metric for cultural activity alignment and prevention of caricature exaggeration</a:t>
+          </a:r>
         </a:p>
         <a:p>
           <a:pPr marL="114300" lvl="1" indent="-114300" algn="l" defTabSz="533400">
@@ -9545,8 +9047,8 @@
         </a:p>
       </dsp:txBody>
       <dsp:txXfrm>
-        <a:off x="0" y="1676431"/>
-        <a:ext cx="8910320" cy="1424160"/>
+        <a:off x="0" y="2272118"/>
+        <a:ext cx="8910320" cy="1192320"/>
       </dsp:txXfrm>
     </dsp:sp>
     <dsp:sp modelId="{B3EFFC59-19D9-41C4-8339-874F0FAFA761}">
@@ -9556,8 +9058,8 @@
       </dsp:nvSpPr>
       <dsp:spPr>
         <a:xfrm>
-          <a:off x="0" y="3100590"/>
-          <a:ext cx="8910320" cy="393120"/>
+          <a:off x="0" y="3464438"/>
+          <a:ext cx="8910320" cy="442260"/>
         </a:xfrm>
         <a:prstGeom prst="roundRect">
           <a:avLst/>
@@ -9599,12 +9101,12 @@
         </a:fontRef>
       </dsp:style>
       <dsp:txBody>
-        <a:bodyPr spcFirstLastPara="0" vert="horz" wrap="square" lIns="60960" tIns="60960" rIns="60960" bIns="60960" numCol="1" spcCol="1270" anchor="ctr" anchorCtr="0">
+        <a:bodyPr spcFirstLastPara="0" vert="horz" wrap="square" lIns="68580" tIns="68580" rIns="68580" bIns="68580" numCol="1" spcCol="1270" anchor="ctr" anchorCtr="0">
           <a:noAutofit/>
         </a:bodyPr>
         <a:lstStyle/>
         <a:p>
-          <a:pPr marL="0" lvl="0" indent="0" algn="l" defTabSz="711200">
+          <a:pPr marL="0" lvl="0" indent="0" algn="l" defTabSz="800100">
             <a:lnSpc>
               <a:spcPct val="90000"/>
             </a:lnSpc>
@@ -9617,14 +9119,14 @@
             <a:buNone/>
           </a:pPr>
           <a:r>
-            <a:rPr lang="en-US" sz="1600" b="1" kern="1200" dirty="0"/>
+            <a:rPr lang="en-US" sz="1800" b="1" kern="1200" dirty="0"/>
             <a:t>Tier 3: The Calibration Core (Judge Integrity)</a:t>
           </a:r>
         </a:p>
       </dsp:txBody>
       <dsp:txXfrm>
-        <a:off x="19191" y="3119781"/>
-        <a:ext cx="8871938" cy="354738"/>
+        <a:off x="21589" y="3486027"/>
+        <a:ext cx="8867142" cy="399082"/>
       </dsp:txXfrm>
     </dsp:sp>
     <dsp:sp modelId="{96C6DDC1-45F3-401C-907D-0ECF9B4A5849}">
@@ -9634,8 +9136,8 @@
       </dsp:nvSpPr>
       <dsp:spPr>
         <a:xfrm>
-          <a:off x="0" y="3493711"/>
-          <a:ext cx="8910320" cy="414000"/>
+          <a:off x="0" y="3906698"/>
+          <a:ext cx="8910320" cy="801090"/>
         </a:xfrm>
         <a:prstGeom prst="rect">
           <a:avLst/>
@@ -9659,7 +9161,7 @@
         <a:fontRef idx="minor"/>
       </dsp:style>
       <dsp:txBody>
-        <a:bodyPr spcFirstLastPara="0" vert="horz" wrap="square" lIns="282903" tIns="20320" rIns="113792" bIns="20320" numCol="1" spcCol="1270" anchor="t" anchorCtr="0">
+        <a:bodyPr spcFirstLastPara="0" vert="horz" wrap="square" lIns="282903" tIns="15240" rIns="85344" bIns="15240" numCol="1" spcCol="1270" anchor="t" anchorCtr="0">
           <a:noAutofit/>
         </a:bodyPr>
         <a:lstStyle/>
@@ -9677,10 +9179,9 @@
             <a:buChar char="•"/>
           </a:pPr>
           <a:r>
-            <a:rPr lang="en-US" sz="1200" kern="1200"/>
-            <a:t>The "meta-evaluation" layer of the autograder. </a:t>
+            <a:rPr lang="en-US" sz="1200" kern="1200" dirty="0"/>
+            <a:t>This tier functions as the meta-evaluation layer of the system.</a:t>
           </a:r>
-          <a:endParaRPr lang="en-US" sz="1200" kern="1200" dirty="0"/>
         </a:p>
         <a:p>
           <a:pPr marL="114300" lvl="1" indent="-114300" algn="l" defTabSz="533400">
@@ -9696,15 +9197,36 @@
             <a:buChar char="•"/>
           </a:pPr>
           <a:r>
-            <a:rPr lang="en-US" sz="1200" kern="1200"/>
-            <a:t>Its purpose is not to evaluate images, but to evaluate the automated judge itself.</a:t>
+            <a:rPr lang="en-US" sz="1200" kern="1200" dirty="0"/>
+            <a:t>Its objective is not to assess model outputs directly, but to continuously evaluate and calibrate the automated judge itself — ensuring Stability across backbone updates, Calibration consistency, Drift detection and Robustness against evaluator bias.</a:t>
           </a:r>
-          <a:endParaRPr lang="en-US" sz="1200" kern="1200" dirty="0"/>
+        </a:p>
+        <a:p>
+          <a:pPr marL="114300" lvl="1" indent="-114300" algn="l" defTabSz="533400">
+            <a:lnSpc>
+              <a:spcPct val="90000"/>
+            </a:lnSpc>
+            <a:spcBef>
+              <a:spcPct val="0"/>
+            </a:spcBef>
+            <a:spcAft>
+              <a:spcPct val="20000"/>
+            </a:spcAft>
+            <a:buChar char="•"/>
+          </a:pPr>
+          <a:r>
+            <a:rPr lang="en-US" sz="1200" kern="1200" dirty="0"/>
+            <a:t>This tier safeguards long-term reliability and prevents evaluator drift from compromising system integrity</a:t>
+          </a:r>
+          <a:r>
+            <a:rPr lang="en-US" sz="1300" kern="1200" dirty="0"/>
+            <a:t>.</a:t>
+          </a:r>
         </a:p>
       </dsp:txBody>
       <dsp:txXfrm>
-        <a:off x="0" y="3493711"/>
-        <a:ext cx="8910320" cy="414000"/>
+        <a:off x="0" y="3906698"/>
+        <a:ext cx="8910320" cy="801090"/>
       </dsp:txXfrm>
     </dsp:sp>
   </dsp:spTree>
@@ -16541,7 +16063,7 @@
           <a:p>
             <a:fld id="{20B8BD5F-4FA8-4FD7-A259-569559E62F79}" type="datetimeFigureOut">
               <a:rPr lang="en-US" smtClean="0"/>
-              <a:t>1/27/2026</a:t>
+              <a:t>2/20/2026</a:t>
             </a:fld>
             <a:endParaRPr lang="en-US"/>
           </a:p>
@@ -17213,7 +16735,7 @@
           <a:p>
             <a:fld id="{5BCAD085-E8A6-8845-BD4E-CB4CCA059FC4}" type="datetimeFigureOut">
               <a:rPr lang="en-US" smtClean="0"/>
-              <a:t>1/27/2026</a:t>
+              <a:t>2/20/2026</a:t>
             </a:fld>
             <a:endParaRPr lang="en-US"/>
           </a:p>
@@ -17411,7 +16933,7 @@
           <a:p>
             <a:fld id="{5BCAD085-E8A6-8845-BD4E-CB4CCA059FC4}" type="datetimeFigureOut">
               <a:rPr lang="en-US" smtClean="0"/>
-              <a:t>1/27/2026</a:t>
+              <a:t>2/20/2026</a:t>
             </a:fld>
             <a:endParaRPr lang="en-US"/>
           </a:p>
@@ -17619,7 +17141,7 @@
           <a:p>
             <a:fld id="{5BCAD085-E8A6-8845-BD4E-CB4CCA059FC4}" type="datetimeFigureOut">
               <a:rPr lang="en-US" smtClean="0"/>
-              <a:t>1/27/2026</a:t>
+              <a:t>2/20/2026</a:t>
             </a:fld>
             <a:endParaRPr lang="en-US"/>
           </a:p>
@@ -17817,7 +17339,7 @@
           <a:p>
             <a:fld id="{5BCAD085-E8A6-8845-BD4E-CB4CCA059FC4}" type="datetimeFigureOut">
               <a:rPr lang="en-US" smtClean="0"/>
-              <a:t>1/27/2026</a:t>
+              <a:t>2/20/2026</a:t>
             </a:fld>
             <a:endParaRPr lang="en-US"/>
           </a:p>
@@ -18092,7 +17614,7 @@
           <a:p>
             <a:fld id="{5BCAD085-E8A6-8845-BD4E-CB4CCA059FC4}" type="datetimeFigureOut">
               <a:rPr lang="en-US" smtClean="0"/>
-              <a:t>1/27/2026</a:t>
+              <a:t>2/20/2026</a:t>
             </a:fld>
             <a:endParaRPr lang="en-US"/>
           </a:p>
@@ -18357,7 +17879,7 @@
           <a:p>
             <a:fld id="{5BCAD085-E8A6-8845-BD4E-CB4CCA059FC4}" type="datetimeFigureOut">
               <a:rPr lang="en-US" smtClean="0"/>
-              <a:t>1/27/2026</a:t>
+              <a:t>2/20/2026</a:t>
             </a:fld>
             <a:endParaRPr lang="en-US"/>
           </a:p>
@@ -18769,7 +18291,7 @@
           <a:p>
             <a:fld id="{5BCAD085-E8A6-8845-BD4E-CB4CCA059FC4}" type="datetimeFigureOut">
               <a:rPr lang="en-US" smtClean="0"/>
-              <a:t>1/27/2026</a:t>
+              <a:t>2/20/2026</a:t>
             </a:fld>
             <a:endParaRPr lang="en-US"/>
           </a:p>
@@ -18910,7 +18432,7 @@
           <a:p>
             <a:fld id="{5BCAD085-E8A6-8845-BD4E-CB4CCA059FC4}" type="datetimeFigureOut">
               <a:rPr lang="en-US" smtClean="0"/>
-              <a:t>1/27/2026</a:t>
+              <a:t>2/20/2026</a:t>
             </a:fld>
             <a:endParaRPr lang="en-US"/>
           </a:p>
@@ -19023,7 +18545,7 @@
           <a:p>
             <a:fld id="{5BCAD085-E8A6-8845-BD4E-CB4CCA059FC4}" type="datetimeFigureOut">
               <a:rPr lang="en-US" smtClean="0"/>
-              <a:t>1/27/2026</a:t>
+              <a:t>2/20/2026</a:t>
             </a:fld>
             <a:endParaRPr lang="en-US"/>
           </a:p>
@@ -19334,7 +18856,7 @@
           <a:p>
             <a:fld id="{5BCAD085-E8A6-8845-BD4E-CB4CCA059FC4}" type="datetimeFigureOut">
               <a:rPr lang="en-US" smtClean="0"/>
-              <a:t>1/27/2026</a:t>
+              <a:t>2/20/2026</a:t>
             </a:fld>
             <a:endParaRPr lang="en-US"/>
           </a:p>
@@ -19622,7 +19144,7 @@
           <a:p>
             <a:fld id="{5BCAD085-E8A6-8845-BD4E-CB4CCA059FC4}" type="datetimeFigureOut">
               <a:rPr lang="en-US" smtClean="0"/>
-              <a:t>1/27/2026</a:t>
+              <a:t>2/20/2026</a:t>
             </a:fld>
             <a:endParaRPr lang="en-US"/>
           </a:p>
@@ -19863,7 +19385,7 @@
           <a:p>
             <a:fld id="{5BCAD085-E8A6-8845-BD4E-CB4CCA059FC4}" type="datetimeFigureOut">
               <a:rPr lang="en-US" smtClean="0"/>
-              <a:t>1/27/2026</a:t>
+              <a:t>2/20/2026</a:t>
             </a:fld>
             <a:endParaRPr lang="en-US"/>
           </a:p>
@@ -20717,7 +20239,7 @@
     <p:bg>
       <p:bgPr>
         <a:solidFill>
-          <a:schemeClr val="bg1"/>
+          <a:srgbClr val="F8F9FA"/>
         </a:solidFill>
         <a:effectLst/>
       </p:bgPr>
@@ -20736,2297 +20258,521 @@
           <a:chExt cx="0" cy="0"/>
         </a:xfrm>
       </p:grpSpPr>
-      <p:sp useBgFill="1">
+      <p:sp>
         <p:nvSpPr>
-          <p:cNvPr id="9" name="Rectangle 8">
-            <a:extLst>
-              <a:ext uri="{FF2B5EF4-FFF2-40B4-BE49-F238E27FC236}">
-                <a16:creationId xmlns:a16="http://schemas.microsoft.com/office/drawing/2014/main" id="{A3363022-C969-41E9-8EB2-E4C94908C1FA}"/>
-              </a:ext>
-              <a:ext uri="{C183D7F6-B498-43B3-948B-1728B52AA6E4}">
-                <adec:decorative xmlns:adec="http://schemas.microsoft.com/office/drawing/2017/decorative" val="1"/>
-              </a:ext>
-            </a:extLst>
-          </p:cNvPr>
-          <p:cNvSpPr>
-            <a:spLocks noGrp="1" noRot="1" noChangeAspect="1" noMove="1" noResize="1" noEditPoints="1" noAdjustHandles="1" noChangeArrowheads="1" noChangeShapeType="1" noTextEdit="1"/>
-          </p:cNvSpPr>
-          <p:nvPr>
-            <p:extLst>
-              <p:ext uri="{386F3935-93C4-4BCD-93E2-E3B085C9AB24}">
-                <p16:designElem xmlns:p16="http://schemas.microsoft.com/office/powerpoint/2015/main" val="1"/>
-              </p:ext>
-            </p:extLst>
-          </p:nvPr>
+          <p:cNvPr id="2" name="TextBox 1"/>
+          <p:cNvSpPr txBox="1"/>
+          <p:nvPr/>
         </p:nvSpPr>
         <p:spPr>
           <a:xfrm>
-            <a:off x="0" y="0"/>
-            <a:ext cx="9143771" cy="5395968"/>
+            <a:off x="111760" y="127204"/>
+            <a:ext cx="6878743" cy="400110"/>
           </a:xfrm>
           <a:prstGeom prst="rect">
             <a:avLst/>
           </a:prstGeom>
-          <a:ln>
-            <a:noFill/>
-          </a:ln>
+          <a:noFill/>
         </p:spPr>
-        <p:style>
-          <a:lnRef idx="2">
-            <a:schemeClr val="accent1">
-              <a:shade val="50000"/>
-            </a:schemeClr>
-          </a:lnRef>
-          <a:fillRef idx="1">
-            <a:schemeClr val="accent1"/>
-          </a:fillRef>
-          <a:effectRef idx="0">
-            <a:schemeClr val="accent1"/>
-          </a:effectRef>
-          <a:fontRef idx="minor">
-            <a:schemeClr val="lt1"/>
-          </a:fontRef>
-        </p:style>
         <p:txBody>
-          <a:bodyPr rtlCol="0" anchor="ctr"/>
+          <a:bodyPr wrap="none">
+            <a:spAutoFit/>
+          </a:bodyPr>
           <a:lstStyle/>
           <a:p>
-            <a:pPr algn="ctr"/>
-            <a:endParaRPr lang="en-US"/>
+            <a:pPr>
+              <a:defRPr sz="2800" b="1">
+                <a:solidFill>
+                  <a:srgbClr val="2A3A5A"/>
+                </a:solidFill>
+              </a:defRPr>
+            </a:pPr>
+            <a:r>
+              <a:rPr lang="en-US" sz="2000" b="1" dirty="0"/>
+              <a:t>Sample Evaluation Prompts for Autograder Benchmarking</a:t>
+            </a:r>
+            <a:endParaRPr sz="2000" dirty="0"/>
           </a:p>
         </p:txBody>
       </p:sp>
+      <p:graphicFrame>
+        <p:nvGraphicFramePr>
+          <p:cNvPr id="3" name="Table 2"/>
+          <p:cNvGraphicFramePr>
+            <a:graphicFrameLocks noGrp="1"/>
+          </p:cNvGraphicFramePr>
+          <p:nvPr>
+            <p:extLst>
+              <p:ext uri="{D42A27DB-BD31-4B8C-83A1-F6EECF244321}">
+                <p14:modId xmlns:p14="http://schemas.microsoft.com/office/powerpoint/2010/main" val="1920519598"/>
+              </p:ext>
+            </p:extLst>
+          </p:nvPr>
+        </p:nvGraphicFramePr>
+        <p:xfrm>
+          <a:off x="355600" y="598232"/>
+          <a:ext cx="8229600" cy="3660865"/>
+        </p:xfrm>
+        <a:graphic>
+          <a:graphicData uri="http://schemas.openxmlformats.org/drawingml/2006/table">
+            <a:tbl>
+              <a:tblPr firstRow="1" bandRow="1">
+                <a:tableStyleId>{5C22544A-7EE6-4342-B048-85BDC9FD1C3A}</a:tableStyleId>
+              </a:tblPr>
+              <a:tblGrid>
+                <a:gridCol w="2062480">
+                  <a:extLst>
+                    <a:ext uri="{9D8B030D-6E8A-4147-A177-3AD203B41FA5}">
+                      <a16:colId xmlns:a16="http://schemas.microsoft.com/office/drawing/2014/main" val="20000"/>
+                    </a:ext>
+                  </a:extLst>
+                </a:gridCol>
+                <a:gridCol w="3637280">
+                  <a:extLst>
+                    <a:ext uri="{9D8B030D-6E8A-4147-A177-3AD203B41FA5}">
+                      <a16:colId xmlns:a16="http://schemas.microsoft.com/office/drawing/2014/main" val="20001"/>
+                    </a:ext>
+                  </a:extLst>
+                </a:gridCol>
+                <a:gridCol w="2529840">
+                  <a:extLst>
+                    <a:ext uri="{9D8B030D-6E8A-4147-A177-3AD203B41FA5}">
+                      <a16:colId xmlns:a16="http://schemas.microsoft.com/office/drawing/2014/main" val="20002"/>
+                    </a:ext>
+                  </a:extLst>
+                </a:gridCol>
+              </a:tblGrid>
+              <a:tr h="391885">
+                <a:tc>
+                  <a:txBody>
+                    <a:bodyPr/>
+                    <a:lstStyle/>
+                    <a:p>
+                      <a:pPr>
+                        <a:buNone/>
+                      </a:pPr>
+                      <a:r>
+                        <a:rPr lang="en-US" b="1"/>
+                        <a:t>Category</a:t>
+                      </a:r>
+                      <a:endParaRPr lang="en-US"/>
+                    </a:p>
+                  </a:txBody>
+                  <a:tcPr anchor="ctr"/>
+                </a:tc>
+                <a:tc>
+                  <a:txBody>
+                    <a:bodyPr/>
+                    <a:lstStyle/>
+                    <a:p>
+                      <a:pPr>
+                        <a:buNone/>
+                      </a:pPr>
+                      <a:r>
+                        <a:rPr lang="en-US" b="1" dirty="0"/>
+                        <a:t>Description</a:t>
+                      </a:r>
+                      <a:endParaRPr lang="en-US" dirty="0"/>
+                    </a:p>
+                  </a:txBody>
+                  <a:tcPr anchor="ctr"/>
+                </a:tc>
+                <a:tc>
+                  <a:txBody>
+                    <a:bodyPr/>
+                    <a:lstStyle/>
+                    <a:p>
+                      <a:pPr>
+                        <a:buNone/>
+                      </a:pPr>
+                      <a:r>
+                        <a:rPr lang="en-US" b="1"/>
+                        <a:t>Example</a:t>
+                      </a:r>
+                      <a:endParaRPr lang="en-US"/>
+                    </a:p>
+                  </a:txBody>
+                  <a:tcPr anchor="ctr"/>
+                </a:tc>
+                <a:extLst>
+                  <a:ext uri="{0D108BD9-81ED-4DB2-BD59-A6C34878D82A}">
+                    <a16:rowId xmlns:a16="http://schemas.microsoft.com/office/drawing/2014/main" val="10000"/>
+                  </a:ext>
+                </a:extLst>
+              </a:tr>
+              <a:tr h="391885">
+                <a:tc>
+                  <a:txBody>
+                    <a:bodyPr/>
+                    <a:lstStyle/>
+                    <a:p>
+                      <a:pPr>
+                        <a:buNone/>
+                      </a:pPr>
+                      <a:r>
+                        <a:rPr lang="en-US" b="1"/>
+                        <a:t>Anatomical Accuracy</a:t>
+                      </a:r>
+                      <a:endParaRPr lang="en-US"/>
+                    </a:p>
+                  </a:txBody>
+                  <a:tcPr anchor="ctr"/>
+                </a:tc>
+                <a:tc>
+                  <a:txBody>
+                    <a:bodyPr/>
+                    <a:lstStyle/>
+                    <a:p>
+                      <a:pPr>
+                        <a:buNone/>
+                      </a:pPr>
+                      <a:r>
+                        <a:rPr lang="en-US" sz="1200" dirty="0"/>
+                        <a:t>Correct depiction of human and animal anatomy, including body parts, proportions, and plausible physical structure.</a:t>
+                      </a:r>
+                    </a:p>
+                  </a:txBody>
+                  <a:tcPr anchor="ctr"/>
+                </a:tc>
+                <a:tc>
+                  <a:txBody>
+                    <a:bodyPr/>
+                    <a:lstStyle/>
+                    <a:p>
+                      <a:pPr>
+                        <a:buNone/>
+                      </a:pPr>
+                      <a:r>
+                        <a:rPr lang="en-US" sz="1200"/>
+                        <a:t>Hands with the correct number of fingers; realistic joint bending in a human pose.</a:t>
+                      </a:r>
+                    </a:p>
+                  </a:txBody>
+                  <a:tcPr anchor="ctr"/>
+                </a:tc>
+                <a:extLst>
+                  <a:ext uri="{0D108BD9-81ED-4DB2-BD59-A6C34878D82A}">
+                    <a16:rowId xmlns:a16="http://schemas.microsoft.com/office/drawing/2014/main" val="10001"/>
+                  </a:ext>
+                </a:extLst>
+              </a:tr>
+              <a:tr h="391885">
+                <a:tc>
+                  <a:txBody>
+                    <a:bodyPr/>
+                    <a:lstStyle/>
+                    <a:p>
+                      <a:pPr>
+                        <a:buNone/>
+                      </a:pPr>
+                      <a:r>
+                        <a:rPr lang="en-US" b="1"/>
+                        <a:t>Compositional Logic &amp; Spatial Relations</a:t>
+                      </a:r>
+                      <a:endParaRPr lang="en-US"/>
+                    </a:p>
+                  </a:txBody>
+                  <a:tcPr anchor="ctr"/>
+                </a:tc>
+                <a:tc>
+                  <a:txBody>
+                    <a:bodyPr/>
+                    <a:lstStyle/>
+                    <a:p>
+                      <a:pPr>
+                        <a:buNone/>
+                      </a:pPr>
+                      <a:r>
+                        <a:rPr lang="en-US" sz="1200" dirty="0"/>
+                        <a:t>Faithful representation of object counts, spatial relationships, and compositional constraints specified or implied by the prompt.</a:t>
+                      </a:r>
+                    </a:p>
+                  </a:txBody>
+                  <a:tcPr anchor="ctr"/>
+                </a:tc>
+                <a:tc>
+                  <a:txBody>
+                    <a:bodyPr/>
+                    <a:lstStyle/>
+                    <a:p>
+                      <a:pPr>
+                        <a:buNone/>
+                      </a:pPr>
+                      <a:r>
+                        <a:rPr lang="en-US" sz="1200" dirty="0"/>
+                        <a:t>“A red cube on top of a blue sphere” with correct ordering and positioning.</a:t>
+                      </a:r>
+                    </a:p>
+                  </a:txBody>
+                  <a:tcPr anchor="ctr"/>
+                </a:tc>
+                <a:extLst>
+                  <a:ext uri="{0D108BD9-81ED-4DB2-BD59-A6C34878D82A}">
+                    <a16:rowId xmlns:a16="http://schemas.microsoft.com/office/drawing/2014/main" val="10002"/>
+                  </a:ext>
+                </a:extLst>
+              </a:tr>
+              <a:tr h="391885">
+                <a:tc>
+                  <a:txBody>
+                    <a:bodyPr/>
+                    <a:lstStyle/>
+                    <a:p>
+                      <a:pPr>
+                        <a:buNone/>
+                      </a:pPr>
+                      <a:r>
+                        <a:rPr lang="en-US" b="1"/>
+                        <a:t>Cultural Nuance &amp; Competence</a:t>
+                      </a:r>
+                      <a:endParaRPr lang="en-US"/>
+                    </a:p>
+                  </a:txBody>
+                  <a:tcPr anchor="ctr"/>
+                </a:tc>
+                <a:tc>
+                  <a:txBody>
+                    <a:bodyPr/>
+                    <a:lstStyle/>
+                    <a:p>
+                      <a:pPr>
+                        <a:buNone/>
+                      </a:pPr>
+                      <a:r>
+                        <a:rPr lang="en-US" sz="1200" dirty="0"/>
+                        <a:t>Accurate and respectful rendering of culturally implied elements without hallucination, stereotyping, or exaggeration.</a:t>
+                      </a:r>
+                    </a:p>
+                  </a:txBody>
+                  <a:tcPr anchor="ctr"/>
+                </a:tc>
+                <a:tc>
+                  <a:txBody>
+                    <a:bodyPr/>
+                    <a:lstStyle/>
+                    <a:p>
+                      <a:pPr>
+                        <a:buNone/>
+                      </a:pPr>
+                      <a:r>
+                        <a:rPr lang="en-US" sz="1200" dirty="0"/>
+                        <a:t>A traditional wedding scene that reflects region-specific attire and customs correctly.</a:t>
+                      </a:r>
+                    </a:p>
+                  </a:txBody>
+                  <a:tcPr anchor="ctr"/>
+                </a:tc>
+                <a:extLst>
+                  <a:ext uri="{0D108BD9-81ED-4DB2-BD59-A6C34878D82A}">
+                    <a16:rowId xmlns:a16="http://schemas.microsoft.com/office/drawing/2014/main" val="10003"/>
+                  </a:ext>
+                </a:extLst>
+              </a:tr>
+              <a:tr h="391885">
+                <a:tc>
+                  <a:txBody>
+                    <a:bodyPr/>
+                    <a:lstStyle/>
+                    <a:p>
+                      <a:pPr>
+                        <a:buNone/>
+                      </a:pPr>
+                      <a:r>
+                        <a:rPr lang="en-US" b="1"/>
+                        <a:t>Professional &amp; Scientific Fidelity</a:t>
+                      </a:r>
+                      <a:endParaRPr lang="en-US"/>
+                    </a:p>
+                  </a:txBody>
+                  <a:tcPr anchor="ctr"/>
+                </a:tc>
+                <a:tc>
+                  <a:txBody>
+                    <a:bodyPr/>
+                    <a:lstStyle/>
+                    <a:p>
+                      <a:pPr>
+                        <a:buNone/>
+                      </a:pPr>
+                      <a:r>
+                        <a:rPr lang="en-US" sz="1200" dirty="0"/>
+                        <a:t>Domain-specific correctness for technical, medical, or scientific imagery, including symbols, diagrams, and spatial precision.</a:t>
+                      </a:r>
+                    </a:p>
+                  </a:txBody>
+                  <a:tcPr anchor="ctr"/>
+                </a:tc>
+                <a:tc>
+                  <a:txBody>
+                    <a:bodyPr/>
+                    <a:lstStyle/>
+                    <a:p>
+                      <a:pPr>
+                        <a:buNone/>
+                      </a:pPr>
+                      <a:r>
+                        <a:rPr lang="en-US" sz="1200" dirty="0"/>
+                        <a:t>An electrical circuit diagram with correct component symbols and connections.</a:t>
+                      </a:r>
+                    </a:p>
+                  </a:txBody>
+                  <a:tcPr anchor="ctr"/>
+                </a:tc>
+                <a:extLst>
+                  <a:ext uri="{0D108BD9-81ED-4DB2-BD59-A6C34878D82A}">
+                    <a16:rowId xmlns:a16="http://schemas.microsoft.com/office/drawing/2014/main" val="10004"/>
+                  </a:ext>
+                </a:extLst>
+              </a:tr>
+              <a:tr h="489135">
+                <a:tc>
+                  <a:txBody>
+                    <a:bodyPr/>
+                    <a:lstStyle/>
+                    <a:p>
+                      <a:pPr>
+                        <a:buNone/>
+                      </a:pPr>
+                      <a:r>
+                        <a:rPr lang="en-US" b="1"/>
+                        <a:t>Responsible AI – Fairness, Toxicity &amp; Privacy</a:t>
+                      </a:r>
+                      <a:endParaRPr lang="en-US"/>
+                    </a:p>
+                  </a:txBody>
+                  <a:tcPr anchor="ctr"/>
+                </a:tc>
+                <a:tc>
+                  <a:txBody>
+                    <a:bodyPr/>
+                    <a:lstStyle/>
+                    <a:p>
+                      <a:pPr>
+                        <a:buNone/>
+                      </a:pPr>
+                      <a:r>
+                        <a:rPr lang="en-US" sz="1200"/>
+                        <a:t>Evaluation of safety, bias, and compliance, ensuring outputs avoid harmful content, represent groups fairly, and respect privacy and IP.</a:t>
+                      </a:r>
+                    </a:p>
+                  </a:txBody>
+                  <a:tcPr anchor="ctr"/>
+                </a:tc>
+                <a:tc>
+                  <a:txBody>
+                    <a:bodyPr/>
+                    <a:lstStyle/>
+                    <a:p>
+                      <a:pPr>
+                        <a:buNone/>
+                      </a:pPr>
+                      <a:r>
+                        <a:rPr lang="en-US" sz="1200" dirty="0"/>
+                        <a:t>Avoiding demographic stereotyping in occupational depictions; no copyrighted characters.</a:t>
+                      </a:r>
+                    </a:p>
+                  </a:txBody>
+                  <a:tcPr anchor="ctr"/>
+                </a:tc>
+                <a:extLst>
+                  <a:ext uri="{0D108BD9-81ED-4DB2-BD59-A6C34878D82A}">
+                    <a16:rowId xmlns:a16="http://schemas.microsoft.com/office/drawing/2014/main" val="10005"/>
+                  </a:ext>
+                </a:extLst>
+              </a:tr>
+            </a:tbl>
+          </a:graphicData>
+        </a:graphic>
+      </p:graphicFrame>
       <p:sp>
         <p:nvSpPr>
-          <p:cNvPr id="11" name="Rectangle 10">
+          <p:cNvPr id="6" name="TextBox 5">
             <a:extLst>
               <a:ext uri="{FF2B5EF4-FFF2-40B4-BE49-F238E27FC236}">
-                <a16:creationId xmlns:a16="http://schemas.microsoft.com/office/drawing/2014/main" id="{8D1AD6B3-BE88-4CEB-BA17-790657CC4729}"/>
-              </a:ext>
-              <a:ext uri="{C183D7F6-B498-43B3-948B-1728B52AA6E4}">
-                <adec:decorative xmlns:adec="http://schemas.microsoft.com/office/drawing/2017/decorative" val="1"/>
+                <a16:creationId xmlns:a16="http://schemas.microsoft.com/office/drawing/2014/main" id="{D24BB8E7-FB16-388C-BCD1-33A23739A8F0}"/>
               </a:ext>
             </a:extLst>
           </p:cNvPr>
-          <p:cNvSpPr>
-            <a:spLocks noGrp="1" noRot="1" noChangeAspect="1" noMove="1" noResize="1" noEditPoints="1" noAdjustHandles="1" noChangeArrowheads="1" noChangeShapeType="1" noTextEdit="1"/>
-          </p:cNvSpPr>
-          <p:nvPr>
-            <p:extLst>
-              <p:ext uri="{386F3935-93C4-4BCD-93E2-E3B085C9AB24}">
-                <p16:designElem xmlns:p16="http://schemas.microsoft.com/office/powerpoint/2015/main" val="1"/>
-              </p:ext>
-            </p:extLst>
-          </p:nvPr>
+          <p:cNvSpPr txBox="1"/>
+          <p:nvPr/>
         </p:nvSpPr>
         <p:spPr>
           <a:xfrm>
-            <a:off x="228" y="0"/>
-            <a:ext cx="9143772" cy="5400675"/>
+            <a:off x="497840" y="4815840"/>
+            <a:ext cx="639919" cy="369332"/>
           </a:xfrm>
           <a:prstGeom prst="rect">
             <a:avLst/>
           </a:prstGeom>
-          <a:solidFill>
-            <a:schemeClr val="bg1"/>
-          </a:solidFill>
-          <a:ln>
-            <a:noFill/>
-          </a:ln>
-        </p:spPr>
-        <p:style>
-          <a:lnRef idx="2">
-            <a:schemeClr val="accent1">
-              <a:shade val="50000"/>
-            </a:schemeClr>
-          </a:lnRef>
-          <a:fillRef idx="1">
-            <a:schemeClr val="accent1"/>
-          </a:fillRef>
-          <a:effectRef idx="0">
-            <a:schemeClr val="accent1"/>
-          </a:effectRef>
-          <a:fontRef idx="minor">
-            <a:schemeClr val="lt1"/>
-          </a:fontRef>
-        </p:style>
-        <p:txBody>
-          <a:bodyPr rtlCol="0" anchor="ctr"/>
-          <a:lstStyle/>
-          <a:p>
-            <a:pPr algn="ctr"/>
-            <a:endParaRPr lang="en-US"/>
-          </a:p>
-        </p:txBody>
-      </p:sp>
-      <p:sp>
-        <p:nvSpPr>
-          <p:cNvPr id="2" name="Title 1">
-            <a:extLst>
-              <a:ext uri="{FF2B5EF4-FFF2-40B4-BE49-F238E27FC236}">
-                <a16:creationId xmlns:a16="http://schemas.microsoft.com/office/drawing/2014/main" id="{26F81A4B-3A8D-0EF8-8FC0-34BAB1EE6F18}"/>
-              </a:ext>
-            </a:extLst>
-          </p:cNvPr>
-          <p:cNvSpPr>
-            <a:spLocks noGrp="1"/>
-          </p:cNvSpPr>
-          <p:nvPr>
-            <p:ph type="title"/>
-          </p:nvPr>
-        </p:nvSpPr>
-        <p:spPr>
-          <a:xfrm>
-            <a:off x="4977646" y="1148069"/>
-            <a:ext cx="3604497" cy="1021478"/>
-          </a:xfrm>
+          <a:noFill/>
         </p:spPr>
         <p:txBody>
-          <a:bodyPr vert="horz" lIns="91440" tIns="45720" rIns="91440" bIns="45720" rtlCol="0" anchor="t">
-            <a:normAutofit/>
+          <a:bodyPr wrap="none" rtlCol="0">
+            <a:spAutoFit/>
           </a:bodyPr>
           <a:lstStyle/>
           <a:p>
-            <a:pPr defTabSz="914400"/>
             <a:r>
-              <a:rPr lang="en-US" sz="3000" b="1" kern="1200" dirty="0">
-                <a:solidFill>
-                  <a:schemeClr val="tx2"/>
-                </a:solidFill>
-                <a:latin typeface="+mj-lt"/>
-                <a:ea typeface="+mj-ea"/>
-                <a:cs typeface="+mj-cs"/>
+              <a:rPr lang="en-US" dirty="0">
+                <a:hlinkClick r:id="rId2"/>
               </a:rPr>
-              <a:t>Appendix</a:t>
+              <a:t>Link</a:t>
+            </a:r>
+            <a:r>
+              <a:rPr lang="en-US" dirty="0"/>
+              <a:t> </a:t>
             </a:r>
           </a:p>
         </p:txBody>
       </p:sp>
       <p:pic>
         <p:nvPicPr>
-          <p:cNvPr id="6" name="Graphic 5" descr="Open Folder">
+          <p:cNvPr id="4098" name="Picture 2" descr="9 golden rules for solid user testing ...">
             <a:extLst>
               <a:ext uri="{FF2B5EF4-FFF2-40B4-BE49-F238E27FC236}">
-                <a16:creationId xmlns:a16="http://schemas.microsoft.com/office/drawing/2014/main" id="{124707F1-A8A4-9BC7-E84F-EEFBA8C36925}"/>
+                <a16:creationId xmlns:a16="http://schemas.microsoft.com/office/drawing/2014/main" id="{E2AE2CD7-DAF4-DE97-4944-44993644596C}"/>
               </a:ext>
             </a:extLst>
           </p:cNvPr>
           <p:cNvPicPr>
-            <a:picLocks noChangeAspect="1"/>
+            <a:picLocks noChangeAspect="1" noChangeArrowheads="1"/>
           </p:cNvPicPr>
           <p:nvPr/>
         </p:nvPicPr>
         <p:blipFill>
-          <a:blip r:embed="rId2">
+          <a:blip r:embed="rId3">
             <a:extLst>
               <a:ext uri="{28A0092B-C50C-407E-A947-70E740481C1C}">
                 <a14:useLocalDpi xmlns:a14="http://schemas.microsoft.com/office/drawing/2010/main" val="0"/>
               </a:ext>
-              <a:ext uri="{96DAC541-7B7A-43D3-8B79-37D633B846F1}">
-                <asvg:svgBlip xmlns:asvg="http://schemas.microsoft.com/office/drawing/2016/SVG/main" r:embed="rId3"/>
-              </a:ext>
             </a:extLst>
           </a:blip>
+          <a:srcRect/>
           <a:stretch>
             <a:fillRect/>
           </a:stretch>
         </p:blipFill>
-        <p:spPr>
+        <p:spPr bwMode="auto">
           <a:xfrm>
-            <a:off x="255352" y="1507222"/>
-            <a:ext cx="3106320" cy="3106320"/>
+            <a:off x="6990503" y="4394547"/>
+            <a:ext cx="1929765" cy="940910"/>
           </a:xfrm>
-          <a:custGeom>
+          <a:prstGeom prst="rect">
             <a:avLst/>
-            <a:gdLst/>
-            <a:ahLst/>
-            <a:cxnLst/>
-            <a:rect l="l" t="t" r="r" b="b"/>
-            <a:pathLst>
-              <a:path w="4141760" h="4377846">
-                <a:moveTo>
-                  <a:pt x="0" y="0"/>
-                </a:moveTo>
-                <a:lnTo>
-                  <a:pt x="4141760" y="0"/>
-                </a:lnTo>
-                <a:lnTo>
-                  <a:pt x="4141760" y="4377846"/>
-                </a:lnTo>
-                <a:lnTo>
-                  <a:pt x="0" y="4377846"/>
-                </a:lnTo>
-                <a:close/>
-              </a:path>
-            </a:pathLst>
-          </a:custGeom>
+          </a:prstGeom>
+          <a:noFill/>
+          <a:extLst>
+            <a:ext uri="{909E8E84-426E-40DD-AFC4-6F175D3DCCD1}">
+              <a14:hiddenFill xmlns:a14="http://schemas.microsoft.com/office/drawing/2010/main">
+                <a:solidFill>
+                  <a:srgbClr val="FFFFFF"/>
+                </a:solidFill>
+              </a14:hiddenFill>
+            </a:ext>
+          </a:extLst>
         </p:spPr>
       </p:pic>
-      <p:grpSp>
-        <p:nvGrpSpPr>
-          <p:cNvPr id="13" name="Group 12">
-            <a:extLst>
-              <a:ext uri="{FF2B5EF4-FFF2-40B4-BE49-F238E27FC236}">
-                <a16:creationId xmlns:a16="http://schemas.microsoft.com/office/drawing/2014/main" id="{89D1390B-7E13-4B4F-9CB2-391063412E54}"/>
-              </a:ext>
-              <a:ext uri="{C183D7F6-B498-43B3-948B-1728B52AA6E4}">
-                <adec:decorative xmlns:adec="http://schemas.microsoft.com/office/drawing/2017/decorative" val="1"/>
-              </a:ext>
-            </a:extLst>
-          </p:cNvPr>
-          <p:cNvGrpSpPr>
-            <a:grpSpLocks noGrp="1" noUngrp="1" noRot="1" noChangeAspect="1" noMove="1" noResize="1"/>
-          </p:cNvGrpSpPr>
-          <p:nvPr>
-            <p:extLst>
-              <p:ext uri="{386F3935-93C4-4BCD-93E2-E3B085C9AB24}">
-                <p16:designElem xmlns:p16="http://schemas.microsoft.com/office/powerpoint/2015/main" val="1"/>
-              </p:ext>
-            </p:extLst>
-          </p:nvPr>
-        </p:nvGrpSpPr>
-        <p:grpSpPr>
-          <a:xfrm>
-            <a:off x="-3189" y="-4707"/>
-            <a:ext cx="4679005" cy="5405382"/>
-            <a:chOff x="305" y="-5977"/>
-            <a:chExt cx="6238675" cy="6863979"/>
-          </a:xfrm>
-        </p:grpSpPr>
-        <p:sp>
-          <p:nvSpPr>
-            <p:cNvPr id="14" name="Freeform: Shape 13">
-              <a:extLst>
-                <a:ext uri="{FF2B5EF4-FFF2-40B4-BE49-F238E27FC236}">
-                  <a16:creationId xmlns:a16="http://schemas.microsoft.com/office/drawing/2014/main" id="{9E720206-AA49-4786-A932-A2650DE09183}"/>
-                </a:ext>
-                <a:ext uri="{C183D7F6-B498-43B3-948B-1728B52AA6E4}">
-                  <adec:decorative xmlns:adec="http://schemas.microsoft.com/office/drawing/2017/decorative" val="1"/>
-                </a:ext>
-              </a:extLst>
-            </p:cNvPr>
-            <p:cNvSpPr/>
-            <p:nvPr>
-              <p:extLst>
-                <p:ext uri="{386F3935-93C4-4BCD-93E2-E3B085C9AB24}">
-                  <p16:designElem xmlns:p16="http://schemas.microsoft.com/office/powerpoint/2015/main" val="1"/>
-                </p:ext>
-              </p:extLst>
-            </p:nvPr>
-          </p:nvSpPr>
-          <p:spPr>
-            <a:xfrm flipH="1">
-              <a:off x="305" y="34854"/>
-              <a:ext cx="6028697" cy="6817170"/>
-            </a:xfrm>
-            <a:custGeom>
-              <a:avLst/>
-              <a:gdLst>
-                <a:gd name="connsiteX0" fmla="*/ 6028697 w 6028697"/>
-                <a:gd name="connsiteY0" fmla="*/ 6155323 h 6817170"/>
-                <a:gd name="connsiteX1" fmla="*/ 6028697 w 6028697"/>
-                <a:gd name="connsiteY1" fmla="*/ 6817170 h 6817170"/>
-                <a:gd name="connsiteX2" fmla="*/ 5157862 w 6028697"/>
-                <a:gd name="connsiteY2" fmla="*/ 6817170 h 6817170"/>
-                <a:gd name="connsiteX3" fmla="*/ 5347156 w 6028697"/>
-                <a:gd name="connsiteY3" fmla="*/ 6687553 h 6817170"/>
-                <a:gd name="connsiteX4" fmla="*/ 5487470 w 6028697"/>
-                <a:gd name="connsiteY4" fmla="*/ 6581714 h 6817170"/>
-                <a:gd name="connsiteX5" fmla="*/ 5627642 w 6028697"/>
-                <a:gd name="connsiteY5" fmla="*/ 6472328 h 6817170"/>
-                <a:gd name="connsiteX6" fmla="*/ 5911392 w 6028697"/>
-                <a:gd name="connsiteY6" fmla="*/ 6245328 h 6817170"/>
-                <a:gd name="connsiteX7" fmla="*/ 4481066 w 6028697"/>
-                <a:gd name="connsiteY7" fmla="*/ 478 h 6817170"/>
-                <a:gd name="connsiteX8" fmla="*/ 4672258 w 6028697"/>
-                <a:gd name="connsiteY8" fmla="*/ 7519 h 6817170"/>
-                <a:gd name="connsiteX9" fmla="*/ 5429869 w 6028697"/>
-                <a:gd name="connsiteY9" fmla="*/ 125134 h 6817170"/>
-                <a:gd name="connsiteX10" fmla="*/ 5976319 w 6028697"/>
-                <a:gd name="connsiteY10" fmla="*/ 314893 h 6817170"/>
-                <a:gd name="connsiteX11" fmla="*/ 6028697 w 6028697"/>
-                <a:gd name="connsiteY11" fmla="*/ 339901 h 6817170"/>
-                <a:gd name="connsiteX12" fmla="*/ 6028697 w 6028697"/>
-                <a:gd name="connsiteY12" fmla="*/ 732458 h 6817170"/>
-                <a:gd name="connsiteX13" fmla="*/ 5990985 w 6028697"/>
-                <a:gd name="connsiteY13" fmla="*/ 712211 h 6817170"/>
-                <a:gd name="connsiteX14" fmla="*/ 5341339 w 6028697"/>
-                <a:gd name="connsiteY14" fmla="*/ 475281 h 6817170"/>
-                <a:gd name="connsiteX15" fmla="*/ 4651969 w 6028697"/>
-                <a:gd name="connsiteY15" fmla="*/ 377104 h 6817170"/>
-                <a:gd name="connsiteX16" fmla="*/ 3953093 w 6028697"/>
-                <a:gd name="connsiteY16" fmla="*/ 402498 h 6817170"/>
-                <a:gd name="connsiteX17" fmla="*/ 3267413 w 6028697"/>
-                <a:gd name="connsiteY17" fmla="*/ 546643 h 6817170"/>
-                <a:gd name="connsiteX18" fmla="*/ 1439498 w 6028697"/>
-                <a:gd name="connsiteY18" fmla="*/ 1568141 h 6817170"/>
-                <a:gd name="connsiteX19" fmla="*/ 960671 w 6028697"/>
-                <a:gd name="connsiteY19" fmla="*/ 2082013 h 6817170"/>
-                <a:gd name="connsiteX20" fmla="*/ 581866 w 6028697"/>
-                <a:gd name="connsiteY20" fmla="*/ 2672638 h 6817170"/>
-                <a:gd name="connsiteX21" fmla="*/ 324789 w 6028697"/>
-                <a:gd name="connsiteY21" fmla="*/ 3325262 h 6817170"/>
-                <a:gd name="connsiteX22" fmla="*/ 231151 w 6028697"/>
-                <a:gd name="connsiteY22" fmla="*/ 4022292 h 6817170"/>
-                <a:gd name="connsiteX23" fmla="*/ 270592 w 6028697"/>
-                <a:gd name="connsiteY23" fmla="*/ 4362792 h 6817170"/>
-                <a:gd name="connsiteX24" fmla="*/ 387213 w 6028697"/>
-                <a:gd name="connsiteY24" fmla="*/ 4681585 h 6817170"/>
-                <a:gd name="connsiteX25" fmla="*/ 468507 w 6028697"/>
-                <a:gd name="connsiteY25" fmla="*/ 4831546 h 6817170"/>
-                <a:gd name="connsiteX26" fmla="*/ 561862 w 6028697"/>
-                <a:gd name="connsiteY26" fmla="*/ 4976826 h 6817170"/>
-                <a:gd name="connsiteX27" fmla="*/ 777511 w 6028697"/>
-                <a:gd name="connsiteY27" fmla="*/ 5257597 h 6817170"/>
-                <a:gd name="connsiteX28" fmla="*/ 1010895 w 6028697"/>
-                <a:gd name="connsiteY28" fmla="*/ 5540494 h 6817170"/>
-                <a:gd name="connsiteX29" fmla="*/ 1126948 w 6028697"/>
-                <a:gd name="connsiteY29" fmla="*/ 5688186 h 6817170"/>
-                <a:gd name="connsiteX30" fmla="*/ 1182706 w 6028697"/>
-                <a:gd name="connsiteY30" fmla="*/ 5760543 h 6817170"/>
-                <a:gd name="connsiteX31" fmla="*/ 1237327 w 6028697"/>
-                <a:gd name="connsiteY31" fmla="*/ 5830060 h 6817170"/>
-                <a:gd name="connsiteX32" fmla="*/ 1706649 w 6028697"/>
-                <a:gd name="connsiteY32" fmla="*/ 6342797 h 6817170"/>
-                <a:gd name="connsiteX33" fmla="*/ 1956207 w 6028697"/>
-                <a:gd name="connsiteY33" fmla="*/ 6573484 h 6817170"/>
-                <a:gd name="connsiteX34" fmla="*/ 2217681 w 6028697"/>
-                <a:gd name="connsiteY34" fmla="*/ 6786297 h 6817170"/>
-                <a:gd name="connsiteX35" fmla="*/ 2260820 w 6028697"/>
-                <a:gd name="connsiteY35" fmla="*/ 6817170 h 6817170"/>
-                <a:gd name="connsiteX36" fmla="*/ 1429497 w 6028697"/>
-                <a:gd name="connsiteY36" fmla="*/ 6817170 h 6817170"/>
-                <a:gd name="connsiteX37" fmla="*/ 1327275 w 6028697"/>
-                <a:gd name="connsiteY37" fmla="*/ 6713800 h 6817170"/>
-                <a:gd name="connsiteX38" fmla="*/ 1080556 w 6028697"/>
-                <a:gd name="connsiteY38" fmla="*/ 6414443 h 6817170"/>
-                <a:gd name="connsiteX39" fmla="*/ 865189 w 6028697"/>
-                <a:gd name="connsiteY39" fmla="*/ 6097496 h 6817170"/>
-                <a:gd name="connsiteX40" fmla="*/ 814823 w 6028697"/>
-                <a:gd name="connsiteY40" fmla="*/ 6016911 h 6817170"/>
-                <a:gd name="connsiteX41" fmla="*/ 766729 w 6028697"/>
-                <a:gd name="connsiteY41" fmla="*/ 5938453 h 6817170"/>
-                <a:gd name="connsiteX42" fmla="*/ 671672 w 6028697"/>
-                <a:gd name="connsiteY42" fmla="*/ 5786648 h 6817170"/>
-                <a:gd name="connsiteX43" fmla="*/ 474608 w 6028697"/>
-                <a:gd name="connsiteY43" fmla="*/ 5474664 h 6817170"/>
-                <a:gd name="connsiteX44" fmla="*/ 282652 w 6028697"/>
-                <a:gd name="connsiteY44" fmla="*/ 5146508 h 6817170"/>
-                <a:gd name="connsiteX45" fmla="*/ 196108 w 6028697"/>
-                <a:gd name="connsiteY45" fmla="*/ 4972712 h 6817170"/>
-                <a:gd name="connsiteX46" fmla="*/ 122474 w 6028697"/>
-                <a:gd name="connsiteY46" fmla="*/ 4791821 h 6817170"/>
-                <a:gd name="connsiteX47" fmla="*/ 65724 w 6028697"/>
-                <a:gd name="connsiteY47" fmla="*/ 4603129 h 6817170"/>
-                <a:gd name="connsiteX48" fmla="*/ 44727 w 6028697"/>
-                <a:gd name="connsiteY48" fmla="*/ 4506937 h 6817170"/>
-                <a:gd name="connsiteX49" fmla="*/ 35505 w 6028697"/>
-                <a:gd name="connsiteY49" fmla="*/ 4458699 h 6817170"/>
-                <a:gd name="connsiteX50" fmla="*/ 27845 w 6028697"/>
-                <a:gd name="connsiteY50" fmla="*/ 4410320 h 6817170"/>
-                <a:gd name="connsiteX51" fmla="*/ 37 w 6028697"/>
-                <a:gd name="connsiteY51" fmla="*/ 4022292 h 6817170"/>
-                <a:gd name="connsiteX52" fmla="*/ 78777 w 6028697"/>
-                <a:gd name="connsiteY52" fmla="*/ 3267236 h 6817170"/>
-                <a:gd name="connsiteX53" fmla="*/ 315424 w 6028697"/>
-                <a:gd name="connsiteY53" fmla="*/ 2543673 h 6817170"/>
-                <a:gd name="connsiteX54" fmla="*/ 1202710 w 6028697"/>
-                <a:gd name="connsiteY54" fmla="*/ 1314895 h 6817170"/>
-                <a:gd name="connsiteX55" fmla="*/ 1791065 w 6028697"/>
-                <a:gd name="connsiteY55" fmla="*/ 833514 h 6817170"/>
-                <a:gd name="connsiteX56" fmla="*/ 3908404 w 6028697"/>
-                <a:gd name="connsiteY56" fmla="*/ 29794 h 6817170"/>
-                <a:gd name="connsiteX57" fmla="*/ 4481066 w 6028697"/>
-                <a:gd name="connsiteY57" fmla="*/ 478 h 6817170"/>
-              </a:gdLst>
-              <a:ahLst/>
-              <a:cxnLst>
-                <a:cxn ang="0">
-                  <a:pos x="connsiteX0" y="connsiteY0"/>
-                </a:cxn>
-                <a:cxn ang="0">
-                  <a:pos x="connsiteX1" y="connsiteY1"/>
-                </a:cxn>
-                <a:cxn ang="0">
-                  <a:pos x="connsiteX2" y="connsiteY2"/>
-                </a:cxn>
-                <a:cxn ang="0">
-                  <a:pos x="connsiteX3" y="connsiteY3"/>
-                </a:cxn>
-                <a:cxn ang="0">
-                  <a:pos x="connsiteX4" y="connsiteY4"/>
-                </a:cxn>
-                <a:cxn ang="0">
-                  <a:pos x="connsiteX5" y="connsiteY5"/>
-                </a:cxn>
-                <a:cxn ang="0">
-                  <a:pos x="connsiteX6" y="connsiteY6"/>
-                </a:cxn>
-                <a:cxn ang="0">
-                  <a:pos x="connsiteX7" y="connsiteY7"/>
-                </a:cxn>
-                <a:cxn ang="0">
-                  <a:pos x="connsiteX8" y="connsiteY8"/>
-                </a:cxn>
-                <a:cxn ang="0">
-                  <a:pos x="connsiteX9" y="connsiteY9"/>
-                </a:cxn>
-                <a:cxn ang="0">
-                  <a:pos x="connsiteX10" y="connsiteY10"/>
-                </a:cxn>
-                <a:cxn ang="0">
-                  <a:pos x="connsiteX11" y="connsiteY11"/>
-                </a:cxn>
-                <a:cxn ang="0">
-                  <a:pos x="connsiteX12" y="connsiteY12"/>
-                </a:cxn>
-                <a:cxn ang="0">
-                  <a:pos x="connsiteX13" y="connsiteY13"/>
-                </a:cxn>
-                <a:cxn ang="0">
-                  <a:pos x="connsiteX14" y="connsiteY14"/>
-                </a:cxn>
-                <a:cxn ang="0">
-                  <a:pos x="connsiteX15" y="connsiteY15"/>
-                </a:cxn>
-                <a:cxn ang="0">
-                  <a:pos x="connsiteX16" y="connsiteY16"/>
-                </a:cxn>
-                <a:cxn ang="0">
-                  <a:pos x="connsiteX17" y="connsiteY17"/>
-                </a:cxn>
-                <a:cxn ang="0">
-                  <a:pos x="connsiteX18" y="connsiteY18"/>
-                </a:cxn>
-                <a:cxn ang="0">
-                  <a:pos x="connsiteX19" y="connsiteY19"/>
-                </a:cxn>
-                <a:cxn ang="0">
-                  <a:pos x="connsiteX20" y="connsiteY20"/>
-                </a:cxn>
-                <a:cxn ang="0">
-                  <a:pos x="connsiteX21" y="connsiteY21"/>
-                </a:cxn>
-                <a:cxn ang="0">
-                  <a:pos x="connsiteX22" y="connsiteY22"/>
-                </a:cxn>
-                <a:cxn ang="0">
-                  <a:pos x="connsiteX23" y="connsiteY23"/>
-                </a:cxn>
-                <a:cxn ang="0">
-                  <a:pos x="connsiteX24" y="connsiteY24"/>
-                </a:cxn>
-                <a:cxn ang="0">
-                  <a:pos x="connsiteX25" y="connsiteY25"/>
-                </a:cxn>
-                <a:cxn ang="0">
-                  <a:pos x="connsiteX26" y="connsiteY26"/>
-                </a:cxn>
-                <a:cxn ang="0">
-                  <a:pos x="connsiteX27" y="connsiteY27"/>
-                </a:cxn>
-                <a:cxn ang="0">
-                  <a:pos x="connsiteX28" y="connsiteY28"/>
-                </a:cxn>
-                <a:cxn ang="0">
-                  <a:pos x="connsiteX29" y="connsiteY29"/>
-                </a:cxn>
-                <a:cxn ang="0">
-                  <a:pos x="connsiteX30" y="connsiteY30"/>
-                </a:cxn>
-                <a:cxn ang="0">
-                  <a:pos x="connsiteX31" y="connsiteY31"/>
-                </a:cxn>
-                <a:cxn ang="0">
-                  <a:pos x="connsiteX32" y="connsiteY32"/>
-                </a:cxn>
-                <a:cxn ang="0">
-                  <a:pos x="connsiteX33" y="connsiteY33"/>
-                </a:cxn>
-                <a:cxn ang="0">
-                  <a:pos x="connsiteX34" y="connsiteY34"/>
-                </a:cxn>
-                <a:cxn ang="0">
-                  <a:pos x="connsiteX35" y="connsiteY35"/>
-                </a:cxn>
-                <a:cxn ang="0">
-                  <a:pos x="connsiteX36" y="connsiteY36"/>
-                </a:cxn>
-                <a:cxn ang="0">
-                  <a:pos x="connsiteX37" y="connsiteY37"/>
-                </a:cxn>
-                <a:cxn ang="0">
-                  <a:pos x="connsiteX38" y="connsiteY38"/>
-                </a:cxn>
-                <a:cxn ang="0">
-                  <a:pos x="connsiteX39" y="connsiteY39"/>
-                </a:cxn>
-                <a:cxn ang="0">
-                  <a:pos x="connsiteX40" y="connsiteY40"/>
-                </a:cxn>
-                <a:cxn ang="0">
-                  <a:pos x="connsiteX41" y="connsiteY41"/>
-                </a:cxn>
-                <a:cxn ang="0">
-                  <a:pos x="connsiteX42" y="connsiteY42"/>
-                </a:cxn>
-                <a:cxn ang="0">
-                  <a:pos x="connsiteX43" y="connsiteY43"/>
-                </a:cxn>
-                <a:cxn ang="0">
-                  <a:pos x="connsiteX44" y="connsiteY44"/>
-                </a:cxn>
-                <a:cxn ang="0">
-                  <a:pos x="connsiteX45" y="connsiteY45"/>
-                </a:cxn>
-                <a:cxn ang="0">
-                  <a:pos x="connsiteX46" y="connsiteY46"/>
-                </a:cxn>
-                <a:cxn ang="0">
-                  <a:pos x="connsiteX47" y="connsiteY47"/>
-                </a:cxn>
-                <a:cxn ang="0">
-                  <a:pos x="connsiteX48" y="connsiteY48"/>
-                </a:cxn>
-                <a:cxn ang="0">
-                  <a:pos x="connsiteX49" y="connsiteY49"/>
-                </a:cxn>
-                <a:cxn ang="0">
-                  <a:pos x="connsiteX50" y="connsiteY50"/>
-                </a:cxn>
-                <a:cxn ang="0">
-                  <a:pos x="connsiteX51" y="connsiteY51"/>
-                </a:cxn>
-                <a:cxn ang="0">
-                  <a:pos x="connsiteX52" y="connsiteY52"/>
-                </a:cxn>
-                <a:cxn ang="0">
-                  <a:pos x="connsiteX53" y="connsiteY53"/>
-                </a:cxn>
-                <a:cxn ang="0">
-                  <a:pos x="connsiteX54" y="connsiteY54"/>
-                </a:cxn>
-                <a:cxn ang="0">
-                  <a:pos x="connsiteX55" y="connsiteY55"/>
-                </a:cxn>
-                <a:cxn ang="0">
-                  <a:pos x="connsiteX56" y="connsiteY56"/>
-                </a:cxn>
-                <a:cxn ang="0">
-                  <a:pos x="connsiteX57" y="connsiteY57"/>
-                </a:cxn>
-              </a:cxnLst>
-              <a:rect l="l" t="t" r="r" b="b"/>
-              <a:pathLst>
-                <a:path w="6028697" h="6817170">
-                  <a:moveTo>
-                    <a:pt x="6028697" y="6155323"/>
-                  </a:moveTo>
-                  <a:lnTo>
-                    <a:pt x="6028697" y="6817170"/>
-                  </a:lnTo>
-                  <a:lnTo>
-                    <a:pt x="5157862" y="6817170"/>
-                  </a:lnTo>
-                  <a:lnTo>
-                    <a:pt x="5347156" y="6687553"/>
-                  </a:lnTo>
-                  <a:cubicBezTo>
-                    <a:pt x="5394117" y="6653219"/>
-                    <a:pt x="5440793" y="6617608"/>
-                    <a:pt x="5487470" y="6581714"/>
-                  </a:cubicBezTo>
-                  <a:cubicBezTo>
-                    <a:pt x="5534147" y="6545820"/>
-                    <a:pt x="5580966" y="6509358"/>
-                    <a:pt x="5627642" y="6472328"/>
-                  </a:cubicBezTo>
-                  <a:lnTo>
-                    <a:pt x="5911392" y="6245328"/>
-                  </a:lnTo>
-                  <a:close/>
-                  <a:moveTo>
-                    <a:pt x="4481066" y="478"/>
-                  </a:moveTo>
-                  <a:cubicBezTo>
-                    <a:pt x="4544817" y="1422"/>
-                    <a:pt x="4608563" y="3769"/>
-                    <a:pt x="4672258" y="7519"/>
-                  </a:cubicBezTo>
-                  <a:cubicBezTo>
-                    <a:pt x="4927973" y="22364"/>
-                    <a:pt x="5181687" y="61751"/>
-                    <a:pt x="5429869" y="125134"/>
-                  </a:cubicBezTo>
-                  <a:cubicBezTo>
-                    <a:pt x="5617090" y="173104"/>
-                    <a:pt x="5799867" y="236595"/>
-                    <a:pt x="5976319" y="314893"/>
-                  </a:cubicBezTo>
-                  <a:lnTo>
-                    <a:pt x="6028697" y="339901"/>
-                  </a:lnTo>
-                  <a:lnTo>
-                    <a:pt x="6028697" y="732458"/>
-                  </a:lnTo>
-                  <a:lnTo>
-                    <a:pt x="5990985" y="712211"/>
-                  </a:lnTo>
-                  <a:cubicBezTo>
-                    <a:pt x="5783917" y="609342"/>
-                    <a:pt x="5566013" y="529876"/>
-                    <a:pt x="5341339" y="475281"/>
-                  </a:cubicBezTo>
-                  <a:cubicBezTo>
-                    <a:pt x="5115233" y="420503"/>
-                    <a:pt x="4884375" y="387624"/>
-                    <a:pt x="4651969" y="377104"/>
-                  </a:cubicBezTo>
-                  <a:cubicBezTo>
-                    <a:pt x="4418713" y="365171"/>
-                    <a:pt x="4184861" y="373670"/>
-                    <a:pt x="3953093" y="402498"/>
-                  </a:cubicBezTo>
-                  <a:cubicBezTo>
-                    <a:pt x="3721001" y="431832"/>
-                    <a:pt x="3491675" y="480040"/>
-                    <a:pt x="3267413" y="546643"/>
-                  </a:cubicBezTo>
-                  <a:cubicBezTo>
-                    <a:pt x="2591323" y="750761"/>
-                    <a:pt x="1967642" y="1099289"/>
-                    <a:pt x="1439498" y="1568141"/>
-                  </a:cubicBezTo>
-                  <a:cubicBezTo>
-                    <a:pt x="1265589" y="1725523"/>
-                    <a:pt x="1105393" y="1897434"/>
-                    <a:pt x="960671" y="2082013"/>
-                  </a:cubicBezTo>
-                  <a:cubicBezTo>
-                    <a:pt x="815775" y="2266294"/>
-                    <a:pt x="688923" y="2464081"/>
-                    <a:pt x="581866" y="2672638"/>
-                  </a:cubicBezTo>
-                  <a:cubicBezTo>
-                    <a:pt x="473765" y="2880669"/>
-                    <a:pt x="387610" y="3099397"/>
-                    <a:pt x="324789" y="3325262"/>
-                  </a:cubicBezTo>
-                  <a:cubicBezTo>
-                    <a:pt x="262714" y="3552403"/>
-                    <a:pt x="231223" y="3786822"/>
-                    <a:pt x="231151" y="4022292"/>
-                  </a:cubicBezTo>
-                  <a:cubicBezTo>
-                    <a:pt x="231413" y="4136912"/>
-                    <a:pt x="244645" y="4251136"/>
-                    <a:pt x="270592" y="4362792"/>
-                  </a:cubicBezTo>
-                  <a:cubicBezTo>
-                    <a:pt x="297885" y="4472943"/>
-                    <a:pt x="336983" y="4579833"/>
-                    <a:pt x="387213" y="4681585"/>
-                  </a:cubicBezTo>
-                  <a:cubicBezTo>
-                    <a:pt x="412042" y="4732517"/>
-                    <a:pt x="439423" y="4782457"/>
-                    <a:pt x="468507" y="4831546"/>
-                  </a:cubicBezTo>
-                  <a:cubicBezTo>
-                    <a:pt x="497591" y="4880636"/>
-                    <a:pt x="529230" y="4929015"/>
-                    <a:pt x="561862" y="4976826"/>
-                  </a:cubicBezTo>
-                  <a:cubicBezTo>
-                    <a:pt x="627975" y="5072166"/>
-                    <a:pt x="701466" y="5164668"/>
-                    <a:pt x="777511" y="5257597"/>
-                  </a:cubicBezTo>
-                  <a:cubicBezTo>
-                    <a:pt x="853556" y="5350524"/>
-                    <a:pt x="933574" y="5443594"/>
-                    <a:pt x="1010895" y="5540494"/>
-                  </a:cubicBezTo>
-                  <a:cubicBezTo>
-                    <a:pt x="1049957" y="5588732"/>
-                    <a:pt x="1088642" y="5637963"/>
-                    <a:pt x="1126948" y="5688186"/>
-                  </a:cubicBezTo>
-                  <a:lnTo>
-                    <a:pt x="1182706" y="5760543"/>
-                  </a:lnTo>
-                  <a:cubicBezTo>
-                    <a:pt x="1201007" y="5783669"/>
-                    <a:pt x="1218458" y="5807503"/>
-                    <a:pt x="1237327" y="5830060"/>
-                  </a:cubicBezTo>
-                  <a:cubicBezTo>
-                    <a:pt x="1383714" y="6009916"/>
-                    <a:pt x="1540413" y="6181116"/>
-                    <a:pt x="1706649" y="6342797"/>
-                  </a:cubicBezTo>
-                  <a:cubicBezTo>
-                    <a:pt x="1788084" y="6422531"/>
-                    <a:pt x="1871265" y="6499427"/>
-                    <a:pt x="1956207" y="6573484"/>
-                  </a:cubicBezTo>
-                  <a:cubicBezTo>
-                    <a:pt x="2041332" y="6647402"/>
-                    <a:pt x="2127733" y="6718907"/>
-                    <a:pt x="2217681" y="6786297"/>
-                  </a:cubicBezTo>
-                  <a:lnTo>
-                    <a:pt x="2260820" y="6817170"/>
-                  </a:lnTo>
-                  <a:lnTo>
-                    <a:pt x="1429497" y="6817170"/>
-                  </a:lnTo>
-                  <a:lnTo>
-                    <a:pt x="1327275" y="6713800"/>
-                  </a:lnTo>
-                  <a:cubicBezTo>
-                    <a:pt x="1239186" y="6618984"/>
-                    <a:pt x="1156797" y="6519019"/>
-                    <a:pt x="1080556" y="6414443"/>
-                  </a:cubicBezTo>
-                  <a:cubicBezTo>
-                    <a:pt x="1004653" y="6310734"/>
-                    <a:pt x="932439" y="6205177"/>
-                    <a:pt x="865189" y="6097496"/>
-                  </a:cubicBezTo>
-                  <a:cubicBezTo>
-                    <a:pt x="847881" y="6070823"/>
-                    <a:pt x="831565" y="6043725"/>
-                    <a:pt x="814823" y="6016911"/>
-                  </a:cubicBezTo>
-                  <a:lnTo>
-                    <a:pt x="766729" y="5938453"/>
-                  </a:lnTo>
-                  <a:cubicBezTo>
-                    <a:pt x="735941" y="5887947"/>
-                    <a:pt x="703878" y="5837581"/>
-                    <a:pt x="671672" y="5786648"/>
-                  </a:cubicBezTo>
-                  <a:lnTo>
-                    <a:pt x="474608" y="5474664"/>
-                  </a:lnTo>
-                  <a:cubicBezTo>
-                    <a:pt x="408778" y="5368968"/>
-                    <a:pt x="343516" y="5260008"/>
-                    <a:pt x="282652" y="5146508"/>
-                  </a:cubicBezTo>
-                  <a:cubicBezTo>
-                    <a:pt x="252290" y="5089759"/>
-                    <a:pt x="223065" y="5032015"/>
-                    <a:pt x="196108" y="4972712"/>
-                  </a:cubicBezTo>
-                  <a:cubicBezTo>
-                    <a:pt x="169152" y="4913408"/>
-                    <a:pt x="144607" y="4853111"/>
-                    <a:pt x="122474" y="4791821"/>
-                  </a:cubicBezTo>
-                  <a:cubicBezTo>
-                    <a:pt x="100342" y="4730532"/>
-                    <a:pt x="81757" y="4666830"/>
-                    <a:pt x="65724" y="4603129"/>
-                  </a:cubicBezTo>
-                  <a:cubicBezTo>
-                    <a:pt x="58205" y="4571064"/>
-                    <a:pt x="50828" y="4539143"/>
-                    <a:pt x="44727" y="4506937"/>
-                  </a:cubicBezTo>
-                  <a:lnTo>
-                    <a:pt x="35505" y="4458699"/>
-                  </a:lnTo>
-                  <a:lnTo>
-                    <a:pt x="27845" y="4410320"/>
-                  </a:lnTo>
-                  <a:cubicBezTo>
-                    <a:pt x="8635" y="4281881"/>
-                    <a:pt x="-661" y="4152150"/>
-                    <a:pt x="37" y="4022292"/>
-                  </a:cubicBezTo>
-                  <a:cubicBezTo>
-                    <a:pt x="712" y="3768592"/>
-                    <a:pt x="27094" y="3515615"/>
-                    <a:pt x="78777" y="3267236"/>
-                  </a:cubicBezTo>
-                  <a:cubicBezTo>
-                    <a:pt x="130048" y="3017876"/>
-                    <a:pt x="209439" y="2775142"/>
-                    <a:pt x="315424" y="2543673"/>
-                  </a:cubicBezTo>
-                  <a:cubicBezTo>
-                    <a:pt x="528236" y="2081161"/>
-                    <a:pt x="838234" y="1667312"/>
-                    <a:pt x="1202710" y="1314895"/>
-                  </a:cubicBezTo>
-                  <a:cubicBezTo>
-                    <a:pt x="1385514" y="1138814"/>
-                    <a:pt x="1582282" y="977831"/>
-                    <a:pt x="1791065" y="833514"/>
-                  </a:cubicBezTo>
-                  <a:cubicBezTo>
-                    <a:pt x="2420037" y="395614"/>
-                    <a:pt x="3147288" y="119557"/>
-                    <a:pt x="3908404" y="29794"/>
-                  </a:cubicBezTo>
-                  <a:cubicBezTo>
-                    <a:pt x="4098509" y="7429"/>
-                    <a:pt x="4289811" y="-2355"/>
-                    <a:pt x="4481066" y="478"/>
-                  </a:cubicBezTo>
-                  <a:close/>
-                </a:path>
-              </a:pathLst>
-            </a:custGeom>
-            <a:gradFill>
-              <a:gsLst>
-                <a:gs pos="2000">
-                  <a:schemeClr val="bg1">
-                    <a:alpha val="10000"/>
-                  </a:schemeClr>
-                </a:gs>
-                <a:gs pos="16000">
-                  <a:schemeClr val="accent6">
-                    <a:alpha val="10000"/>
-                  </a:schemeClr>
-                </a:gs>
-                <a:gs pos="100000">
-                  <a:schemeClr val="bg1">
-                    <a:alpha val="10000"/>
-                  </a:schemeClr>
-                </a:gs>
-                <a:gs pos="85000">
-                  <a:schemeClr val="accent1">
-                    <a:alpha val="10000"/>
-                  </a:schemeClr>
-                </a:gs>
-              </a:gsLst>
-              <a:lin ang="12000000" scaled="0"/>
-            </a:gradFill>
-            <a:ln>
-              <a:noFill/>
-            </a:ln>
-          </p:spPr>
-          <p:style>
-            <a:lnRef idx="2">
-              <a:schemeClr val="accent1">
-                <a:shade val="50000"/>
-              </a:schemeClr>
-            </a:lnRef>
-            <a:fillRef idx="1">
-              <a:schemeClr val="accent1"/>
-            </a:fillRef>
-            <a:effectRef idx="0">
-              <a:schemeClr val="accent1"/>
-            </a:effectRef>
-            <a:fontRef idx="minor">
-              <a:schemeClr val="lt1"/>
-            </a:fontRef>
-          </p:style>
-          <p:txBody>
-            <a:bodyPr rtlCol="0" anchor="ctr"/>
-            <a:lstStyle/>
-            <a:p>
-              <a:pPr algn="ctr"/>
-              <a:endParaRPr lang="en-US" dirty="0"/>
-            </a:p>
-          </p:txBody>
-        </p:sp>
-        <p:sp>
-          <p:nvSpPr>
-            <p:cNvPr id="15" name="Freeform: Shape 14">
-              <a:extLst>
-                <a:ext uri="{FF2B5EF4-FFF2-40B4-BE49-F238E27FC236}">
-                  <a16:creationId xmlns:a16="http://schemas.microsoft.com/office/drawing/2014/main" id="{C72F6EE6-EDE9-45A5-8F6D-02B9B7CB2C2F}"/>
-                </a:ext>
-                <a:ext uri="{C183D7F6-B498-43B3-948B-1728B52AA6E4}">
-                  <adec:decorative xmlns:adec="http://schemas.microsoft.com/office/drawing/2017/decorative" val="1"/>
-                </a:ext>
-              </a:extLst>
-            </p:cNvPr>
-            <p:cNvSpPr/>
-            <p:nvPr>
-              <p:extLst>
-                <p:ext uri="{386F3935-93C4-4BCD-93E2-E3B085C9AB24}">
-                  <p16:designElem xmlns:p16="http://schemas.microsoft.com/office/powerpoint/2015/main" val="1"/>
-                </p:ext>
-              </p:extLst>
-            </p:nvPr>
-          </p:nvSpPr>
-          <p:spPr>
-            <a:xfrm flipH="1">
-              <a:off x="305" y="1"/>
-              <a:ext cx="6165116" cy="6858001"/>
-            </a:xfrm>
-            <a:custGeom>
-              <a:avLst/>
-              <a:gdLst>
-                <a:gd name="connsiteX0" fmla="*/ 6264586 w 6264586"/>
-                <a:gd name="connsiteY0" fmla="*/ 6646464 h 6858001"/>
-                <a:gd name="connsiteX1" fmla="*/ 6264586 w 6264586"/>
-                <a:gd name="connsiteY1" fmla="*/ 6858001 h 6858001"/>
-                <a:gd name="connsiteX2" fmla="*/ 5997170 w 6264586"/>
-                <a:gd name="connsiteY2" fmla="*/ 6858001 h 6858001"/>
-                <a:gd name="connsiteX3" fmla="*/ 6121512 w 6264586"/>
-                <a:gd name="connsiteY3" fmla="*/ 6761029 h 6858001"/>
-                <a:gd name="connsiteX4" fmla="*/ 2693206 w 6264586"/>
-                <a:gd name="connsiteY4" fmla="*/ 0 h 6858001"/>
-                <a:gd name="connsiteX5" fmla="*/ 5872285 w 6264586"/>
-                <a:gd name="connsiteY5" fmla="*/ 0 h 6858001"/>
-                <a:gd name="connsiteX6" fmla="*/ 6024875 w 6264586"/>
-                <a:gd name="connsiteY6" fmla="*/ 68385 h 6858001"/>
-                <a:gd name="connsiteX7" fmla="*/ 6206432 w 6264586"/>
-                <a:gd name="connsiteY7" fmla="*/ 162336 h 6858001"/>
-                <a:gd name="connsiteX8" fmla="*/ 6264586 w 6264586"/>
-                <a:gd name="connsiteY8" fmla="*/ 196704 h 6858001"/>
-                <a:gd name="connsiteX9" fmla="*/ 6264586 w 6264586"/>
-                <a:gd name="connsiteY9" fmla="*/ 537242 h 6858001"/>
-                <a:gd name="connsiteX10" fmla="*/ 6230189 w 6264586"/>
-                <a:gd name="connsiteY10" fmla="*/ 517260 h 6858001"/>
-                <a:gd name="connsiteX11" fmla="*/ 5540536 w 6264586"/>
-                <a:gd name="connsiteY11" fmla="*/ 249543 h 6858001"/>
-                <a:gd name="connsiteX12" fmla="*/ 5178896 w 6264586"/>
-                <a:gd name="connsiteY12" fmla="*/ 178606 h 6858001"/>
-                <a:gd name="connsiteX13" fmla="*/ 4814279 w 6264586"/>
-                <a:gd name="connsiteY13" fmla="*/ 146683 h 6858001"/>
-                <a:gd name="connsiteX14" fmla="*/ 4655095 w 6264586"/>
-                <a:gd name="connsiteY14" fmla="*/ 143421 h 6858001"/>
-                <a:gd name="connsiteX15" fmla="*/ 4081069 w 6264586"/>
-                <a:gd name="connsiteY15" fmla="*/ 185983 h 6858001"/>
-                <a:gd name="connsiteX16" fmla="*/ 3720566 w 6264586"/>
-                <a:gd name="connsiteY16" fmla="*/ 256921 h 6858001"/>
-                <a:gd name="connsiteX17" fmla="*/ 3365879 w 6264586"/>
-                <a:gd name="connsiteY17" fmla="*/ 357651 h 6858001"/>
-                <a:gd name="connsiteX18" fmla="*/ 3020555 w 6264586"/>
-                <a:gd name="connsiteY18" fmla="*/ 486190 h 6858001"/>
-                <a:gd name="connsiteX19" fmla="*/ 2685163 w 6264586"/>
-                <a:gd name="connsiteY19" fmla="*/ 641542 h 6858001"/>
-                <a:gd name="connsiteX20" fmla="*/ 2047720 w 6264586"/>
-                <a:gd name="connsiteY20" fmla="*/ 1025030 h 6858001"/>
-                <a:gd name="connsiteX21" fmla="*/ 1897333 w 6264586"/>
-                <a:gd name="connsiteY21" fmla="*/ 1134983 h 6858001"/>
-                <a:gd name="connsiteX22" fmla="*/ 1835758 w 6264586"/>
-                <a:gd name="connsiteY22" fmla="*/ 1182227 h 6858001"/>
-                <a:gd name="connsiteX23" fmla="*/ 1823273 w 6264586"/>
-                <a:gd name="connsiteY23" fmla="*/ 1192016 h 6858001"/>
-                <a:gd name="connsiteX24" fmla="*/ 1750918 w 6264586"/>
-                <a:gd name="connsiteY24" fmla="*/ 1249760 h 6858001"/>
-                <a:gd name="connsiteX25" fmla="*/ 1469297 w 6264586"/>
-                <a:gd name="connsiteY25" fmla="*/ 1496906 h 6858001"/>
-                <a:gd name="connsiteX26" fmla="*/ 967769 w 6264586"/>
-                <a:gd name="connsiteY26" fmla="*/ 2056602 h 6858001"/>
-                <a:gd name="connsiteX27" fmla="*/ 754105 w 6264586"/>
-                <a:gd name="connsiteY27" fmla="*/ 2368727 h 6858001"/>
-                <a:gd name="connsiteX28" fmla="*/ 572364 w 6264586"/>
-                <a:gd name="connsiteY28" fmla="*/ 2701140 h 6858001"/>
-                <a:gd name="connsiteX29" fmla="*/ 532497 w 6264586"/>
-                <a:gd name="connsiteY29" fmla="*/ 2786265 h 6858001"/>
-                <a:gd name="connsiteX30" fmla="*/ 512918 w 6264586"/>
-                <a:gd name="connsiteY30" fmla="*/ 2828827 h 6858001"/>
-                <a:gd name="connsiteX31" fmla="*/ 494475 w 6264586"/>
-                <a:gd name="connsiteY31" fmla="*/ 2872240 h 6858001"/>
-                <a:gd name="connsiteX32" fmla="*/ 491637 w 6264586"/>
-                <a:gd name="connsiteY32" fmla="*/ 2878908 h 6858001"/>
-                <a:gd name="connsiteX33" fmla="*/ 459290 w 6264586"/>
-                <a:gd name="connsiteY33" fmla="*/ 2959635 h 6858001"/>
-                <a:gd name="connsiteX34" fmla="*/ 446805 w 6264586"/>
-                <a:gd name="connsiteY34" fmla="*/ 2992408 h 6858001"/>
-                <a:gd name="connsiteX35" fmla="*/ 426090 w 6264586"/>
-                <a:gd name="connsiteY35" fmla="*/ 3049158 h 6858001"/>
-                <a:gd name="connsiteX36" fmla="*/ 426090 w 6264586"/>
-                <a:gd name="connsiteY36" fmla="*/ 3049867 h 6858001"/>
-                <a:gd name="connsiteX37" fmla="*/ 318124 w 6264586"/>
-                <a:gd name="connsiteY37" fmla="*/ 3414202 h 6858001"/>
-                <a:gd name="connsiteX38" fmla="*/ 230729 w 6264586"/>
-                <a:gd name="connsiteY38" fmla="*/ 4169260 h 6858001"/>
-                <a:gd name="connsiteX39" fmla="*/ 268893 w 6264586"/>
-                <a:gd name="connsiteY39" fmla="*/ 4544236 h 6858001"/>
-                <a:gd name="connsiteX40" fmla="*/ 379840 w 6264586"/>
-                <a:gd name="connsiteY40" fmla="*/ 4900056 h 6858001"/>
-                <a:gd name="connsiteX41" fmla="*/ 406512 w 6264586"/>
-                <a:gd name="connsiteY41" fmla="*/ 4960211 h 6858001"/>
-                <a:gd name="connsiteX42" fmla="*/ 417862 w 6264586"/>
-                <a:gd name="connsiteY42" fmla="*/ 4984613 h 6858001"/>
-                <a:gd name="connsiteX43" fmla="*/ 428077 w 6264586"/>
-                <a:gd name="connsiteY43" fmla="*/ 5005043 h 6858001"/>
-                <a:gd name="connsiteX44" fmla="*/ 460140 w 6264586"/>
-                <a:gd name="connsiteY44" fmla="*/ 5067327 h 6858001"/>
-                <a:gd name="connsiteX45" fmla="*/ 555197 w 6264586"/>
-                <a:gd name="connsiteY45" fmla="*/ 5229773 h 6858001"/>
-                <a:gd name="connsiteX46" fmla="*/ 660611 w 6264586"/>
-                <a:gd name="connsiteY46" fmla="*/ 5387396 h 6858001"/>
-                <a:gd name="connsiteX47" fmla="*/ 774110 w 6264586"/>
-                <a:gd name="connsiteY47" fmla="*/ 5542182 h 6858001"/>
-                <a:gd name="connsiteX48" fmla="*/ 917829 w 6264586"/>
-                <a:gd name="connsiteY48" fmla="*/ 5727896 h 6858001"/>
-                <a:gd name="connsiteX49" fmla="*/ 1012885 w 6264586"/>
-                <a:gd name="connsiteY49" fmla="*/ 5849767 h 6858001"/>
-                <a:gd name="connsiteX50" fmla="*/ 1133053 w 6264586"/>
-                <a:gd name="connsiteY50" fmla="*/ 6006822 h 6858001"/>
-                <a:gd name="connsiteX51" fmla="*/ 1194343 w 6264586"/>
-                <a:gd name="connsiteY51" fmla="*/ 6090245 h 6858001"/>
-                <a:gd name="connsiteX52" fmla="*/ 1249390 w 6264586"/>
-                <a:gd name="connsiteY52" fmla="*/ 6165155 h 6858001"/>
-                <a:gd name="connsiteX53" fmla="*/ 1345724 w 6264586"/>
-                <a:gd name="connsiteY53" fmla="*/ 6292132 h 6858001"/>
-                <a:gd name="connsiteX54" fmla="*/ 1364310 w 6264586"/>
-                <a:gd name="connsiteY54" fmla="*/ 6316251 h 6858001"/>
-                <a:gd name="connsiteX55" fmla="*/ 1373673 w 6264586"/>
-                <a:gd name="connsiteY55" fmla="*/ 6327885 h 6858001"/>
-                <a:gd name="connsiteX56" fmla="*/ 1484619 w 6264586"/>
-                <a:gd name="connsiteY56" fmla="*/ 6462240 h 6858001"/>
-                <a:gd name="connsiteX57" fmla="*/ 1739000 w 6264586"/>
-                <a:gd name="connsiteY57" fmla="*/ 6737335 h 6858001"/>
-                <a:gd name="connsiteX58" fmla="*/ 1866801 w 6264586"/>
-                <a:gd name="connsiteY58" fmla="*/ 6858001 h 6858001"/>
-                <a:gd name="connsiteX59" fmla="*/ 1144149 w 6264586"/>
-                <a:gd name="connsiteY59" fmla="*/ 6858001 h 6858001"/>
-                <a:gd name="connsiteX60" fmla="*/ 1058349 w 6264586"/>
-                <a:gd name="connsiteY60" fmla="*/ 6766452 h 6858001"/>
-                <a:gd name="connsiteX61" fmla="*/ 580309 w 6264586"/>
-                <a:gd name="connsiteY61" fmla="*/ 6105000 h 6858001"/>
-                <a:gd name="connsiteX62" fmla="*/ 1 w 6264586"/>
-                <a:gd name="connsiteY62" fmla="*/ 3960094 h 6858001"/>
-                <a:gd name="connsiteX63" fmla="*/ 2599292 w 6264586"/>
-                <a:gd name="connsiteY63" fmla="*/ 37050 h 6858001"/>
-              </a:gdLst>
-              <a:ahLst/>
-              <a:cxnLst>
-                <a:cxn ang="0">
-                  <a:pos x="connsiteX0" y="connsiteY0"/>
-                </a:cxn>
-                <a:cxn ang="0">
-                  <a:pos x="connsiteX1" y="connsiteY1"/>
-                </a:cxn>
-                <a:cxn ang="0">
-                  <a:pos x="connsiteX2" y="connsiteY2"/>
-                </a:cxn>
-                <a:cxn ang="0">
-                  <a:pos x="connsiteX3" y="connsiteY3"/>
-                </a:cxn>
-                <a:cxn ang="0">
-                  <a:pos x="connsiteX4" y="connsiteY4"/>
-                </a:cxn>
-                <a:cxn ang="0">
-                  <a:pos x="connsiteX5" y="connsiteY5"/>
-                </a:cxn>
-                <a:cxn ang="0">
-                  <a:pos x="connsiteX6" y="connsiteY6"/>
-                </a:cxn>
-                <a:cxn ang="0">
-                  <a:pos x="connsiteX7" y="connsiteY7"/>
-                </a:cxn>
-                <a:cxn ang="0">
-                  <a:pos x="connsiteX8" y="connsiteY8"/>
-                </a:cxn>
-                <a:cxn ang="0">
-                  <a:pos x="connsiteX9" y="connsiteY9"/>
-                </a:cxn>
-                <a:cxn ang="0">
-                  <a:pos x="connsiteX10" y="connsiteY10"/>
-                </a:cxn>
-                <a:cxn ang="0">
-                  <a:pos x="connsiteX11" y="connsiteY11"/>
-                </a:cxn>
-                <a:cxn ang="0">
-                  <a:pos x="connsiteX12" y="connsiteY12"/>
-                </a:cxn>
-                <a:cxn ang="0">
-                  <a:pos x="connsiteX13" y="connsiteY13"/>
-                </a:cxn>
-                <a:cxn ang="0">
-                  <a:pos x="connsiteX14" y="connsiteY14"/>
-                </a:cxn>
-                <a:cxn ang="0">
-                  <a:pos x="connsiteX15" y="connsiteY15"/>
-                </a:cxn>
-                <a:cxn ang="0">
-                  <a:pos x="connsiteX16" y="connsiteY16"/>
-                </a:cxn>
-                <a:cxn ang="0">
-                  <a:pos x="connsiteX17" y="connsiteY17"/>
-                </a:cxn>
-                <a:cxn ang="0">
-                  <a:pos x="connsiteX18" y="connsiteY18"/>
-                </a:cxn>
-                <a:cxn ang="0">
-                  <a:pos x="connsiteX19" y="connsiteY19"/>
-                </a:cxn>
-                <a:cxn ang="0">
-                  <a:pos x="connsiteX20" y="connsiteY20"/>
-                </a:cxn>
-                <a:cxn ang="0">
-                  <a:pos x="connsiteX21" y="connsiteY21"/>
-                </a:cxn>
-                <a:cxn ang="0">
-                  <a:pos x="connsiteX22" y="connsiteY22"/>
-                </a:cxn>
-                <a:cxn ang="0">
-                  <a:pos x="connsiteX23" y="connsiteY23"/>
-                </a:cxn>
-                <a:cxn ang="0">
-                  <a:pos x="connsiteX24" y="connsiteY24"/>
-                </a:cxn>
-                <a:cxn ang="0">
-                  <a:pos x="connsiteX25" y="connsiteY25"/>
-                </a:cxn>
-                <a:cxn ang="0">
-                  <a:pos x="connsiteX26" y="connsiteY26"/>
-                </a:cxn>
-                <a:cxn ang="0">
-                  <a:pos x="connsiteX27" y="connsiteY27"/>
-                </a:cxn>
-                <a:cxn ang="0">
-                  <a:pos x="connsiteX28" y="connsiteY28"/>
-                </a:cxn>
-                <a:cxn ang="0">
-                  <a:pos x="connsiteX29" y="connsiteY29"/>
-                </a:cxn>
-                <a:cxn ang="0">
-                  <a:pos x="connsiteX30" y="connsiteY30"/>
-                </a:cxn>
-                <a:cxn ang="0">
-                  <a:pos x="connsiteX31" y="connsiteY31"/>
-                </a:cxn>
-                <a:cxn ang="0">
-                  <a:pos x="connsiteX32" y="connsiteY32"/>
-                </a:cxn>
-                <a:cxn ang="0">
-                  <a:pos x="connsiteX33" y="connsiteY33"/>
-                </a:cxn>
-                <a:cxn ang="0">
-                  <a:pos x="connsiteX34" y="connsiteY34"/>
-                </a:cxn>
-                <a:cxn ang="0">
-                  <a:pos x="connsiteX35" y="connsiteY35"/>
-                </a:cxn>
-                <a:cxn ang="0">
-                  <a:pos x="connsiteX36" y="connsiteY36"/>
-                </a:cxn>
-                <a:cxn ang="0">
-                  <a:pos x="connsiteX37" y="connsiteY37"/>
-                </a:cxn>
-                <a:cxn ang="0">
-                  <a:pos x="connsiteX38" y="connsiteY38"/>
-                </a:cxn>
-                <a:cxn ang="0">
-                  <a:pos x="connsiteX39" y="connsiteY39"/>
-                </a:cxn>
-                <a:cxn ang="0">
-                  <a:pos x="connsiteX40" y="connsiteY40"/>
-                </a:cxn>
-                <a:cxn ang="0">
-                  <a:pos x="connsiteX41" y="connsiteY41"/>
-                </a:cxn>
-                <a:cxn ang="0">
-                  <a:pos x="connsiteX42" y="connsiteY42"/>
-                </a:cxn>
-                <a:cxn ang="0">
-                  <a:pos x="connsiteX43" y="connsiteY43"/>
-                </a:cxn>
-                <a:cxn ang="0">
-                  <a:pos x="connsiteX44" y="connsiteY44"/>
-                </a:cxn>
-                <a:cxn ang="0">
-                  <a:pos x="connsiteX45" y="connsiteY45"/>
-                </a:cxn>
-                <a:cxn ang="0">
-                  <a:pos x="connsiteX46" y="connsiteY46"/>
-                </a:cxn>
-                <a:cxn ang="0">
-                  <a:pos x="connsiteX47" y="connsiteY47"/>
-                </a:cxn>
-                <a:cxn ang="0">
-                  <a:pos x="connsiteX48" y="connsiteY48"/>
-                </a:cxn>
-                <a:cxn ang="0">
-                  <a:pos x="connsiteX49" y="connsiteY49"/>
-                </a:cxn>
-                <a:cxn ang="0">
-                  <a:pos x="connsiteX50" y="connsiteY50"/>
-                </a:cxn>
-                <a:cxn ang="0">
-                  <a:pos x="connsiteX51" y="connsiteY51"/>
-                </a:cxn>
-                <a:cxn ang="0">
-                  <a:pos x="connsiteX52" y="connsiteY52"/>
-                </a:cxn>
-                <a:cxn ang="0">
-                  <a:pos x="connsiteX53" y="connsiteY53"/>
-                </a:cxn>
-                <a:cxn ang="0">
-                  <a:pos x="connsiteX54" y="connsiteY54"/>
-                </a:cxn>
-                <a:cxn ang="0">
-                  <a:pos x="connsiteX55" y="connsiteY55"/>
-                </a:cxn>
-                <a:cxn ang="0">
-                  <a:pos x="connsiteX56" y="connsiteY56"/>
-                </a:cxn>
-                <a:cxn ang="0">
-                  <a:pos x="connsiteX57" y="connsiteY57"/>
-                </a:cxn>
-                <a:cxn ang="0">
-                  <a:pos x="connsiteX58" y="connsiteY58"/>
-                </a:cxn>
-                <a:cxn ang="0">
-                  <a:pos x="connsiteX59" y="connsiteY59"/>
-                </a:cxn>
-                <a:cxn ang="0">
-                  <a:pos x="connsiteX60" y="connsiteY60"/>
-                </a:cxn>
-                <a:cxn ang="0">
-                  <a:pos x="connsiteX61" y="connsiteY61"/>
-                </a:cxn>
-                <a:cxn ang="0">
-                  <a:pos x="connsiteX62" y="connsiteY62"/>
-                </a:cxn>
-                <a:cxn ang="0">
-                  <a:pos x="connsiteX63" y="connsiteY63"/>
-                </a:cxn>
-              </a:cxnLst>
-              <a:rect l="l" t="t" r="r" b="b"/>
-              <a:pathLst>
-                <a:path w="6264586" h="6858001">
-                  <a:moveTo>
-                    <a:pt x="6264586" y="6646464"/>
-                  </a:moveTo>
-                  <a:lnTo>
-                    <a:pt x="6264586" y="6858001"/>
-                  </a:lnTo>
-                  <a:lnTo>
-                    <a:pt x="5997170" y="6858001"/>
-                  </a:lnTo>
-                  <a:lnTo>
-                    <a:pt x="6121512" y="6761029"/>
-                  </a:lnTo>
-                  <a:close/>
-                  <a:moveTo>
-                    <a:pt x="2693206" y="0"/>
-                  </a:moveTo>
-                  <a:lnTo>
-                    <a:pt x="5872285" y="0"/>
-                  </a:lnTo>
-                  <a:lnTo>
-                    <a:pt x="6024875" y="68385"/>
-                  </a:lnTo>
-                  <a:cubicBezTo>
-                    <a:pt x="6086250" y="97989"/>
-                    <a:pt x="6146793" y="129318"/>
-                    <a:pt x="6206432" y="162336"/>
-                  </a:cubicBezTo>
-                  <a:lnTo>
-                    <a:pt x="6264586" y="196704"/>
-                  </a:lnTo>
-                  <a:lnTo>
-                    <a:pt x="6264586" y="537242"/>
-                  </a:lnTo>
-                  <a:lnTo>
-                    <a:pt x="6230189" y="517260"/>
-                  </a:lnTo>
-                  <a:cubicBezTo>
-                    <a:pt x="6012226" y="399931"/>
-                    <a:pt x="5780573" y="310008"/>
-                    <a:pt x="5540536" y="249543"/>
-                  </a:cubicBezTo>
-                  <a:cubicBezTo>
-                    <a:pt x="5421375" y="219324"/>
-                    <a:pt x="5300641" y="195644"/>
-                    <a:pt x="5178896" y="178606"/>
-                  </a:cubicBezTo>
-                  <a:cubicBezTo>
-                    <a:pt x="5057977" y="161840"/>
-                    <a:pt x="4936276" y="151186"/>
-                    <a:pt x="4814279" y="146683"/>
-                  </a:cubicBezTo>
-                  <a:cubicBezTo>
-                    <a:pt x="4761501" y="144556"/>
-                    <a:pt x="4708015" y="143421"/>
-                    <a:pt x="4655095" y="143421"/>
-                  </a:cubicBezTo>
-                  <a:cubicBezTo>
-                    <a:pt x="4462968" y="143573"/>
-                    <a:pt x="4271111" y="157799"/>
-                    <a:pt x="4081069" y="185983"/>
-                  </a:cubicBezTo>
-                  <a:cubicBezTo>
-                    <a:pt x="3956361" y="205703"/>
-                    <a:pt x="3835058" y="229396"/>
-                    <a:pt x="3720566" y="256921"/>
-                  </a:cubicBezTo>
-                  <a:cubicBezTo>
-                    <a:pt x="3596708" y="286714"/>
-                    <a:pt x="3477677" y="320905"/>
-                    <a:pt x="3365879" y="357651"/>
-                  </a:cubicBezTo>
-                  <a:cubicBezTo>
-                    <a:pt x="3249257" y="395958"/>
-                    <a:pt x="3133487" y="438945"/>
-                    <a:pt x="3020555" y="486190"/>
-                  </a:cubicBezTo>
-                  <a:cubicBezTo>
-                    <a:pt x="2907623" y="533434"/>
-                    <a:pt x="2794832" y="585786"/>
-                    <a:pt x="2685163" y="641542"/>
-                  </a:cubicBezTo>
-                  <a:cubicBezTo>
-                    <a:pt x="2463995" y="754348"/>
-                    <a:pt x="2250998" y="882488"/>
-                    <a:pt x="2047720" y="1025030"/>
-                  </a:cubicBezTo>
-                  <a:cubicBezTo>
-                    <a:pt x="2006151" y="1054399"/>
-                    <a:pt x="1951528" y="1093415"/>
-                    <a:pt x="1897333" y="1134983"/>
-                  </a:cubicBezTo>
-                  <a:cubicBezTo>
-                    <a:pt x="1876761" y="1150164"/>
-                    <a:pt x="1855905" y="1166479"/>
-                    <a:pt x="1835758" y="1182227"/>
-                  </a:cubicBezTo>
-                  <a:lnTo>
-                    <a:pt x="1823273" y="1192016"/>
-                  </a:lnTo>
-                  <a:cubicBezTo>
-                    <a:pt x="1797027" y="1211879"/>
-                    <a:pt x="1772057" y="1232309"/>
-                    <a:pt x="1750918" y="1249760"/>
-                  </a:cubicBezTo>
-                  <a:cubicBezTo>
-                    <a:pt x="1645931" y="1335737"/>
-                    <a:pt x="1554422" y="1416605"/>
-                    <a:pt x="1469297" y="1496906"/>
-                  </a:cubicBezTo>
-                  <a:cubicBezTo>
-                    <a:pt x="1286595" y="1668957"/>
-                    <a:pt x="1118818" y="1856190"/>
-                    <a:pt x="967769" y="2056602"/>
-                  </a:cubicBezTo>
-                  <a:cubicBezTo>
-                    <a:pt x="890731" y="2159603"/>
-                    <a:pt x="818800" y="2264590"/>
-                    <a:pt x="754105" y="2368727"/>
-                  </a:cubicBezTo>
-                  <a:cubicBezTo>
-                    <a:pt x="681749" y="2488328"/>
-                    <a:pt x="622304" y="2596720"/>
-                    <a:pt x="572364" y="2701140"/>
-                  </a:cubicBezTo>
-                  <a:cubicBezTo>
-                    <a:pt x="557609" y="2730507"/>
-                    <a:pt x="543989" y="2760443"/>
-                    <a:pt x="532497" y="2786265"/>
-                  </a:cubicBezTo>
-                  <a:lnTo>
-                    <a:pt x="512918" y="2828827"/>
-                  </a:lnTo>
-                  <a:lnTo>
-                    <a:pt x="494475" y="2872240"/>
-                  </a:lnTo>
-                  <a:lnTo>
-                    <a:pt x="491637" y="2878908"/>
-                  </a:lnTo>
-                  <a:cubicBezTo>
-                    <a:pt x="480146" y="2906575"/>
-                    <a:pt x="469220" y="2932821"/>
-                    <a:pt x="459290" y="2959635"/>
-                  </a:cubicBezTo>
-                  <a:cubicBezTo>
-                    <a:pt x="455176" y="2970559"/>
-                    <a:pt x="451060" y="2981484"/>
-                    <a:pt x="446805" y="2992408"/>
-                  </a:cubicBezTo>
-                  <a:cubicBezTo>
-                    <a:pt x="439427" y="3012412"/>
-                    <a:pt x="432333" y="3030572"/>
-                    <a:pt x="426090" y="3049158"/>
-                  </a:cubicBezTo>
-                  <a:lnTo>
-                    <a:pt x="426090" y="3049867"/>
-                  </a:lnTo>
-                  <a:cubicBezTo>
-                    <a:pt x="383010" y="3169099"/>
-                    <a:pt x="346959" y="3290756"/>
-                    <a:pt x="318124" y="3414202"/>
-                  </a:cubicBezTo>
-                  <a:cubicBezTo>
-                    <a:pt x="260107" y="3661703"/>
-                    <a:pt x="230780" y="3915049"/>
-                    <a:pt x="230729" y="4169260"/>
-                  </a:cubicBezTo>
-                  <a:cubicBezTo>
-                    <a:pt x="231621" y="4295173"/>
-                    <a:pt x="244398" y="4420719"/>
-                    <a:pt x="268893" y="4544236"/>
-                  </a:cubicBezTo>
-                  <a:cubicBezTo>
-                    <a:pt x="293708" y="4666304"/>
-                    <a:pt x="330882" y="4785521"/>
-                    <a:pt x="379840" y="4900056"/>
-                  </a:cubicBezTo>
-                  <a:cubicBezTo>
-                    <a:pt x="387926" y="4919919"/>
-                    <a:pt x="397006" y="4939498"/>
-                    <a:pt x="406512" y="4960211"/>
-                  </a:cubicBezTo>
-                  <a:cubicBezTo>
-                    <a:pt x="410343" y="4968299"/>
-                    <a:pt x="414173" y="4976385"/>
-                    <a:pt x="417862" y="4984613"/>
-                  </a:cubicBezTo>
-                  <a:lnTo>
-                    <a:pt x="428077" y="5005043"/>
-                  </a:lnTo>
-                  <a:cubicBezTo>
-                    <a:pt x="438860" y="5026751"/>
-                    <a:pt x="449075" y="5047181"/>
-                    <a:pt x="460140" y="5067327"/>
-                  </a:cubicBezTo>
-                  <a:cubicBezTo>
-                    <a:pt x="485536" y="5116273"/>
-                    <a:pt x="514763" y="5165789"/>
-                    <a:pt x="555197" y="5229773"/>
-                  </a:cubicBezTo>
-                  <a:cubicBezTo>
-                    <a:pt x="586836" y="5280282"/>
-                    <a:pt x="620318" y="5329511"/>
-                    <a:pt x="660611" y="5387396"/>
-                  </a:cubicBezTo>
-                  <a:cubicBezTo>
-                    <a:pt x="698065" y="5440741"/>
-                    <a:pt x="737223" y="5493094"/>
-                    <a:pt x="774110" y="5542182"/>
-                  </a:cubicBezTo>
-                  <a:cubicBezTo>
-                    <a:pt x="821070" y="5604324"/>
-                    <a:pt x="870301" y="5667173"/>
-                    <a:pt x="917829" y="5727896"/>
-                  </a:cubicBezTo>
-                  <a:cubicBezTo>
-                    <a:pt x="949042" y="5767762"/>
-                    <a:pt x="979828" y="5807063"/>
-                    <a:pt x="1012885" y="5849767"/>
-                  </a:cubicBezTo>
-                  <a:cubicBezTo>
-                    <a:pt x="1045942" y="5892471"/>
-                    <a:pt x="1089497" y="5948796"/>
-                    <a:pt x="1133053" y="6006822"/>
-                  </a:cubicBezTo>
-                  <a:cubicBezTo>
-                    <a:pt x="1153624" y="6034345"/>
-                    <a:pt x="1175332" y="6063998"/>
-                    <a:pt x="1194343" y="6090245"/>
-                  </a:cubicBezTo>
-                  <a:cubicBezTo>
-                    <a:pt x="1213355" y="6116491"/>
-                    <a:pt x="1231372" y="6141178"/>
-                    <a:pt x="1249390" y="6165155"/>
-                  </a:cubicBezTo>
-                  <a:cubicBezTo>
-                    <a:pt x="1280461" y="6208000"/>
-                    <a:pt x="1313659" y="6250847"/>
-                    <a:pt x="1345724" y="6292132"/>
-                  </a:cubicBezTo>
-                  <a:lnTo>
-                    <a:pt x="1364310" y="6316251"/>
-                  </a:lnTo>
-                  <a:lnTo>
-                    <a:pt x="1373673" y="6327885"/>
-                  </a:lnTo>
-                  <a:cubicBezTo>
-                    <a:pt x="1409566" y="6372433"/>
-                    <a:pt x="1446738" y="6418542"/>
-                    <a:pt x="1484619" y="6462240"/>
-                  </a:cubicBezTo>
-                  <a:cubicBezTo>
-                    <a:pt x="1567899" y="6559850"/>
-                    <a:pt x="1653876" y="6652211"/>
-                    <a:pt x="1739000" y="6737335"/>
-                  </a:cubicBezTo>
-                  <a:lnTo>
-                    <a:pt x="1866801" y="6858001"/>
-                  </a:lnTo>
-                  <a:lnTo>
-                    <a:pt x="1144149" y="6858001"/>
-                  </a:lnTo>
-                  <a:lnTo>
-                    <a:pt x="1058349" y="6766452"/>
-                  </a:lnTo>
-                  <a:cubicBezTo>
-                    <a:pt x="878978" y="6562465"/>
-                    <a:pt x="718756" y="6341104"/>
-                    <a:pt x="580309" y="6105000"/>
-                  </a:cubicBezTo>
-                  <a:cubicBezTo>
-                    <a:pt x="200401" y="5454007"/>
-                    <a:pt x="146" y="4713831"/>
-                    <a:pt x="1" y="3960094"/>
-                  </a:cubicBezTo>
-                  <a:cubicBezTo>
-                    <a:pt x="-335" y="2196754"/>
-                    <a:pt x="1071479" y="683605"/>
-                    <a:pt x="2599292" y="37050"/>
-                  </a:cubicBezTo>
-                  <a:close/>
-                </a:path>
-              </a:pathLst>
-            </a:custGeom>
-            <a:gradFill>
-              <a:gsLst>
-                <a:gs pos="2000">
-                  <a:schemeClr val="bg1">
-                    <a:alpha val="10000"/>
-                  </a:schemeClr>
-                </a:gs>
-                <a:gs pos="16000">
-                  <a:schemeClr val="accent6">
-                    <a:alpha val="10000"/>
-                  </a:schemeClr>
-                </a:gs>
-                <a:gs pos="100000">
-                  <a:schemeClr val="bg1">
-                    <a:alpha val="10000"/>
-                  </a:schemeClr>
-                </a:gs>
-                <a:gs pos="85000">
-                  <a:schemeClr val="accent1">
-                    <a:alpha val="10000"/>
-                  </a:schemeClr>
-                </a:gs>
-              </a:gsLst>
-              <a:lin ang="12000000" scaled="0"/>
-            </a:gradFill>
-            <a:ln>
-              <a:noFill/>
-            </a:ln>
-          </p:spPr>
-          <p:style>
-            <a:lnRef idx="2">
-              <a:schemeClr val="accent1">
-                <a:shade val="50000"/>
-              </a:schemeClr>
-            </a:lnRef>
-            <a:fillRef idx="1">
-              <a:schemeClr val="accent1"/>
-            </a:fillRef>
-            <a:effectRef idx="0">
-              <a:schemeClr val="accent1"/>
-            </a:effectRef>
-            <a:fontRef idx="minor">
-              <a:schemeClr val="lt1"/>
-            </a:fontRef>
-          </p:style>
-          <p:txBody>
-            <a:bodyPr rtlCol="0" anchor="ctr"/>
-            <a:lstStyle/>
-            <a:p>
-              <a:pPr algn="ctr"/>
-              <a:endParaRPr lang="en-US" dirty="0"/>
-            </a:p>
-          </p:txBody>
-        </p:sp>
-        <p:sp>
-          <p:nvSpPr>
-            <p:cNvPr id="16" name="Freeform: Shape 15">
-              <a:extLst>
-                <a:ext uri="{FF2B5EF4-FFF2-40B4-BE49-F238E27FC236}">
-                  <a16:creationId xmlns:a16="http://schemas.microsoft.com/office/drawing/2014/main" id="{C093DC50-3BD7-46B1-A300-CD207E152FF4}"/>
-                </a:ext>
-                <a:ext uri="{C183D7F6-B498-43B3-948B-1728B52AA6E4}">
-                  <adec:decorative xmlns:adec="http://schemas.microsoft.com/office/drawing/2017/decorative" val="1"/>
-                </a:ext>
-              </a:extLst>
-            </p:cNvPr>
-            <p:cNvSpPr/>
-            <p:nvPr>
-              <p:extLst>
-                <p:ext uri="{386F3935-93C4-4BCD-93E2-E3B085C9AB24}">
-                  <p16:designElem xmlns:p16="http://schemas.microsoft.com/office/powerpoint/2015/main" val="1"/>
-                </p:ext>
-              </p:extLst>
-            </p:nvPr>
-          </p:nvSpPr>
-          <p:spPr>
-            <a:xfrm flipH="1">
-              <a:off x="305" y="-5977"/>
-              <a:ext cx="6238675" cy="6858001"/>
-            </a:xfrm>
-            <a:custGeom>
-              <a:avLst/>
-              <a:gdLst>
-                <a:gd name="connsiteX0" fmla="*/ 6264586 w 6264586"/>
-                <a:gd name="connsiteY0" fmla="*/ 6646464 h 6858001"/>
-                <a:gd name="connsiteX1" fmla="*/ 6264586 w 6264586"/>
-                <a:gd name="connsiteY1" fmla="*/ 6858001 h 6858001"/>
-                <a:gd name="connsiteX2" fmla="*/ 5997170 w 6264586"/>
-                <a:gd name="connsiteY2" fmla="*/ 6858001 h 6858001"/>
-                <a:gd name="connsiteX3" fmla="*/ 6121512 w 6264586"/>
-                <a:gd name="connsiteY3" fmla="*/ 6761029 h 6858001"/>
-                <a:gd name="connsiteX4" fmla="*/ 2693206 w 6264586"/>
-                <a:gd name="connsiteY4" fmla="*/ 0 h 6858001"/>
-                <a:gd name="connsiteX5" fmla="*/ 5872285 w 6264586"/>
-                <a:gd name="connsiteY5" fmla="*/ 0 h 6858001"/>
-                <a:gd name="connsiteX6" fmla="*/ 6024875 w 6264586"/>
-                <a:gd name="connsiteY6" fmla="*/ 68385 h 6858001"/>
-                <a:gd name="connsiteX7" fmla="*/ 6206432 w 6264586"/>
-                <a:gd name="connsiteY7" fmla="*/ 162336 h 6858001"/>
-                <a:gd name="connsiteX8" fmla="*/ 6264586 w 6264586"/>
-                <a:gd name="connsiteY8" fmla="*/ 196704 h 6858001"/>
-                <a:gd name="connsiteX9" fmla="*/ 6264586 w 6264586"/>
-                <a:gd name="connsiteY9" fmla="*/ 537242 h 6858001"/>
-                <a:gd name="connsiteX10" fmla="*/ 6230189 w 6264586"/>
-                <a:gd name="connsiteY10" fmla="*/ 517260 h 6858001"/>
-                <a:gd name="connsiteX11" fmla="*/ 5540536 w 6264586"/>
-                <a:gd name="connsiteY11" fmla="*/ 249543 h 6858001"/>
-                <a:gd name="connsiteX12" fmla="*/ 5178896 w 6264586"/>
-                <a:gd name="connsiteY12" fmla="*/ 178606 h 6858001"/>
-                <a:gd name="connsiteX13" fmla="*/ 4814279 w 6264586"/>
-                <a:gd name="connsiteY13" fmla="*/ 146683 h 6858001"/>
-                <a:gd name="connsiteX14" fmla="*/ 4655095 w 6264586"/>
-                <a:gd name="connsiteY14" fmla="*/ 143421 h 6858001"/>
-                <a:gd name="connsiteX15" fmla="*/ 4081069 w 6264586"/>
-                <a:gd name="connsiteY15" fmla="*/ 185983 h 6858001"/>
-                <a:gd name="connsiteX16" fmla="*/ 3720566 w 6264586"/>
-                <a:gd name="connsiteY16" fmla="*/ 256921 h 6858001"/>
-                <a:gd name="connsiteX17" fmla="*/ 3365879 w 6264586"/>
-                <a:gd name="connsiteY17" fmla="*/ 357651 h 6858001"/>
-                <a:gd name="connsiteX18" fmla="*/ 3020555 w 6264586"/>
-                <a:gd name="connsiteY18" fmla="*/ 486190 h 6858001"/>
-                <a:gd name="connsiteX19" fmla="*/ 2685163 w 6264586"/>
-                <a:gd name="connsiteY19" fmla="*/ 641542 h 6858001"/>
-                <a:gd name="connsiteX20" fmla="*/ 2047720 w 6264586"/>
-                <a:gd name="connsiteY20" fmla="*/ 1025030 h 6858001"/>
-                <a:gd name="connsiteX21" fmla="*/ 1897333 w 6264586"/>
-                <a:gd name="connsiteY21" fmla="*/ 1134983 h 6858001"/>
-                <a:gd name="connsiteX22" fmla="*/ 1835758 w 6264586"/>
-                <a:gd name="connsiteY22" fmla="*/ 1182227 h 6858001"/>
-                <a:gd name="connsiteX23" fmla="*/ 1823273 w 6264586"/>
-                <a:gd name="connsiteY23" fmla="*/ 1192016 h 6858001"/>
-                <a:gd name="connsiteX24" fmla="*/ 1750918 w 6264586"/>
-                <a:gd name="connsiteY24" fmla="*/ 1249760 h 6858001"/>
-                <a:gd name="connsiteX25" fmla="*/ 1469297 w 6264586"/>
-                <a:gd name="connsiteY25" fmla="*/ 1496906 h 6858001"/>
-                <a:gd name="connsiteX26" fmla="*/ 967769 w 6264586"/>
-                <a:gd name="connsiteY26" fmla="*/ 2056602 h 6858001"/>
-                <a:gd name="connsiteX27" fmla="*/ 754105 w 6264586"/>
-                <a:gd name="connsiteY27" fmla="*/ 2368727 h 6858001"/>
-                <a:gd name="connsiteX28" fmla="*/ 572364 w 6264586"/>
-                <a:gd name="connsiteY28" fmla="*/ 2701140 h 6858001"/>
-                <a:gd name="connsiteX29" fmla="*/ 532497 w 6264586"/>
-                <a:gd name="connsiteY29" fmla="*/ 2786265 h 6858001"/>
-                <a:gd name="connsiteX30" fmla="*/ 512918 w 6264586"/>
-                <a:gd name="connsiteY30" fmla="*/ 2828827 h 6858001"/>
-                <a:gd name="connsiteX31" fmla="*/ 494475 w 6264586"/>
-                <a:gd name="connsiteY31" fmla="*/ 2872240 h 6858001"/>
-                <a:gd name="connsiteX32" fmla="*/ 491637 w 6264586"/>
-                <a:gd name="connsiteY32" fmla="*/ 2878908 h 6858001"/>
-                <a:gd name="connsiteX33" fmla="*/ 459290 w 6264586"/>
-                <a:gd name="connsiteY33" fmla="*/ 2959635 h 6858001"/>
-                <a:gd name="connsiteX34" fmla="*/ 446805 w 6264586"/>
-                <a:gd name="connsiteY34" fmla="*/ 2992408 h 6858001"/>
-                <a:gd name="connsiteX35" fmla="*/ 426090 w 6264586"/>
-                <a:gd name="connsiteY35" fmla="*/ 3049158 h 6858001"/>
-                <a:gd name="connsiteX36" fmla="*/ 426090 w 6264586"/>
-                <a:gd name="connsiteY36" fmla="*/ 3049867 h 6858001"/>
-                <a:gd name="connsiteX37" fmla="*/ 318124 w 6264586"/>
-                <a:gd name="connsiteY37" fmla="*/ 3414202 h 6858001"/>
-                <a:gd name="connsiteX38" fmla="*/ 230729 w 6264586"/>
-                <a:gd name="connsiteY38" fmla="*/ 4169260 h 6858001"/>
-                <a:gd name="connsiteX39" fmla="*/ 268893 w 6264586"/>
-                <a:gd name="connsiteY39" fmla="*/ 4544236 h 6858001"/>
-                <a:gd name="connsiteX40" fmla="*/ 379840 w 6264586"/>
-                <a:gd name="connsiteY40" fmla="*/ 4900056 h 6858001"/>
-                <a:gd name="connsiteX41" fmla="*/ 406512 w 6264586"/>
-                <a:gd name="connsiteY41" fmla="*/ 4960211 h 6858001"/>
-                <a:gd name="connsiteX42" fmla="*/ 417862 w 6264586"/>
-                <a:gd name="connsiteY42" fmla="*/ 4984613 h 6858001"/>
-                <a:gd name="connsiteX43" fmla="*/ 428077 w 6264586"/>
-                <a:gd name="connsiteY43" fmla="*/ 5005043 h 6858001"/>
-                <a:gd name="connsiteX44" fmla="*/ 460140 w 6264586"/>
-                <a:gd name="connsiteY44" fmla="*/ 5067327 h 6858001"/>
-                <a:gd name="connsiteX45" fmla="*/ 555197 w 6264586"/>
-                <a:gd name="connsiteY45" fmla="*/ 5229773 h 6858001"/>
-                <a:gd name="connsiteX46" fmla="*/ 660611 w 6264586"/>
-                <a:gd name="connsiteY46" fmla="*/ 5387396 h 6858001"/>
-                <a:gd name="connsiteX47" fmla="*/ 774110 w 6264586"/>
-                <a:gd name="connsiteY47" fmla="*/ 5542182 h 6858001"/>
-                <a:gd name="connsiteX48" fmla="*/ 917829 w 6264586"/>
-                <a:gd name="connsiteY48" fmla="*/ 5727896 h 6858001"/>
-                <a:gd name="connsiteX49" fmla="*/ 1012885 w 6264586"/>
-                <a:gd name="connsiteY49" fmla="*/ 5849767 h 6858001"/>
-                <a:gd name="connsiteX50" fmla="*/ 1133053 w 6264586"/>
-                <a:gd name="connsiteY50" fmla="*/ 6006822 h 6858001"/>
-                <a:gd name="connsiteX51" fmla="*/ 1194343 w 6264586"/>
-                <a:gd name="connsiteY51" fmla="*/ 6090245 h 6858001"/>
-                <a:gd name="connsiteX52" fmla="*/ 1249390 w 6264586"/>
-                <a:gd name="connsiteY52" fmla="*/ 6165155 h 6858001"/>
-                <a:gd name="connsiteX53" fmla="*/ 1345724 w 6264586"/>
-                <a:gd name="connsiteY53" fmla="*/ 6292132 h 6858001"/>
-                <a:gd name="connsiteX54" fmla="*/ 1364310 w 6264586"/>
-                <a:gd name="connsiteY54" fmla="*/ 6316251 h 6858001"/>
-                <a:gd name="connsiteX55" fmla="*/ 1373673 w 6264586"/>
-                <a:gd name="connsiteY55" fmla="*/ 6327885 h 6858001"/>
-                <a:gd name="connsiteX56" fmla="*/ 1484619 w 6264586"/>
-                <a:gd name="connsiteY56" fmla="*/ 6462240 h 6858001"/>
-                <a:gd name="connsiteX57" fmla="*/ 1739000 w 6264586"/>
-                <a:gd name="connsiteY57" fmla="*/ 6737335 h 6858001"/>
-                <a:gd name="connsiteX58" fmla="*/ 1866801 w 6264586"/>
-                <a:gd name="connsiteY58" fmla="*/ 6858001 h 6858001"/>
-                <a:gd name="connsiteX59" fmla="*/ 1144149 w 6264586"/>
-                <a:gd name="connsiteY59" fmla="*/ 6858001 h 6858001"/>
-                <a:gd name="connsiteX60" fmla="*/ 1058349 w 6264586"/>
-                <a:gd name="connsiteY60" fmla="*/ 6766452 h 6858001"/>
-                <a:gd name="connsiteX61" fmla="*/ 580309 w 6264586"/>
-                <a:gd name="connsiteY61" fmla="*/ 6105000 h 6858001"/>
-                <a:gd name="connsiteX62" fmla="*/ 1 w 6264586"/>
-                <a:gd name="connsiteY62" fmla="*/ 3960094 h 6858001"/>
-                <a:gd name="connsiteX63" fmla="*/ 2599292 w 6264586"/>
-                <a:gd name="connsiteY63" fmla="*/ 37050 h 6858001"/>
-              </a:gdLst>
-              <a:ahLst/>
-              <a:cxnLst>
-                <a:cxn ang="0">
-                  <a:pos x="connsiteX0" y="connsiteY0"/>
-                </a:cxn>
-                <a:cxn ang="0">
-                  <a:pos x="connsiteX1" y="connsiteY1"/>
-                </a:cxn>
-                <a:cxn ang="0">
-                  <a:pos x="connsiteX2" y="connsiteY2"/>
-                </a:cxn>
-                <a:cxn ang="0">
-                  <a:pos x="connsiteX3" y="connsiteY3"/>
-                </a:cxn>
-                <a:cxn ang="0">
-                  <a:pos x="connsiteX4" y="connsiteY4"/>
-                </a:cxn>
-                <a:cxn ang="0">
-                  <a:pos x="connsiteX5" y="connsiteY5"/>
-                </a:cxn>
-                <a:cxn ang="0">
-                  <a:pos x="connsiteX6" y="connsiteY6"/>
-                </a:cxn>
-                <a:cxn ang="0">
-                  <a:pos x="connsiteX7" y="connsiteY7"/>
-                </a:cxn>
-                <a:cxn ang="0">
-                  <a:pos x="connsiteX8" y="connsiteY8"/>
-                </a:cxn>
-                <a:cxn ang="0">
-                  <a:pos x="connsiteX9" y="connsiteY9"/>
-                </a:cxn>
-                <a:cxn ang="0">
-                  <a:pos x="connsiteX10" y="connsiteY10"/>
-                </a:cxn>
-                <a:cxn ang="0">
-                  <a:pos x="connsiteX11" y="connsiteY11"/>
-                </a:cxn>
-                <a:cxn ang="0">
-                  <a:pos x="connsiteX12" y="connsiteY12"/>
-                </a:cxn>
-                <a:cxn ang="0">
-                  <a:pos x="connsiteX13" y="connsiteY13"/>
-                </a:cxn>
-                <a:cxn ang="0">
-                  <a:pos x="connsiteX14" y="connsiteY14"/>
-                </a:cxn>
-                <a:cxn ang="0">
-                  <a:pos x="connsiteX15" y="connsiteY15"/>
-                </a:cxn>
-                <a:cxn ang="0">
-                  <a:pos x="connsiteX16" y="connsiteY16"/>
-                </a:cxn>
-                <a:cxn ang="0">
-                  <a:pos x="connsiteX17" y="connsiteY17"/>
-                </a:cxn>
-                <a:cxn ang="0">
-                  <a:pos x="connsiteX18" y="connsiteY18"/>
-                </a:cxn>
-                <a:cxn ang="0">
-                  <a:pos x="connsiteX19" y="connsiteY19"/>
-                </a:cxn>
-                <a:cxn ang="0">
-                  <a:pos x="connsiteX20" y="connsiteY20"/>
-                </a:cxn>
-                <a:cxn ang="0">
-                  <a:pos x="connsiteX21" y="connsiteY21"/>
-                </a:cxn>
-                <a:cxn ang="0">
-                  <a:pos x="connsiteX22" y="connsiteY22"/>
-                </a:cxn>
-                <a:cxn ang="0">
-                  <a:pos x="connsiteX23" y="connsiteY23"/>
-                </a:cxn>
-                <a:cxn ang="0">
-                  <a:pos x="connsiteX24" y="connsiteY24"/>
-                </a:cxn>
-                <a:cxn ang="0">
-                  <a:pos x="connsiteX25" y="connsiteY25"/>
-                </a:cxn>
-                <a:cxn ang="0">
-                  <a:pos x="connsiteX26" y="connsiteY26"/>
-                </a:cxn>
-                <a:cxn ang="0">
-                  <a:pos x="connsiteX27" y="connsiteY27"/>
-                </a:cxn>
-                <a:cxn ang="0">
-                  <a:pos x="connsiteX28" y="connsiteY28"/>
-                </a:cxn>
-                <a:cxn ang="0">
-                  <a:pos x="connsiteX29" y="connsiteY29"/>
-                </a:cxn>
-                <a:cxn ang="0">
-                  <a:pos x="connsiteX30" y="connsiteY30"/>
-                </a:cxn>
-                <a:cxn ang="0">
-                  <a:pos x="connsiteX31" y="connsiteY31"/>
-                </a:cxn>
-                <a:cxn ang="0">
-                  <a:pos x="connsiteX32" y="connsiteY32"/>
-                </a:cxn>
-                <a:cxn ang="0">
-                  <a:pos x="connsiteX33" y="connsiteY33"/>
-                </a:cxn>
-                <a:cxn ang="0">
-                  <a:pos x="connsiteX34" y="connsiteY34"/>
-                </a:cxn>
-                <a:cxn ang="0">
-                  <a:pos x="connsiteX35" y="connsiteY35"/>
-                </a:cxn>
-                <a:cxn ang="0">
-                  <a:pos x="connsiteX36" y="connsiteY36"/>
-                </a:cxn>
-                <a:cxn ang="0">
-                  <a:pos x="connsiteX37" y="connsiteY37"/>
-                </a:cxn>
-                <a:cxn ang="0">
-                  <a:pos x="connsiteX38" y="connsiteY38"/>
-                </a:cxn>
-                <a:cxn ang="0">
-                  <a:pos x="connsiteX39" y="connsiteY39"/>
-                </a:cxn>
-                <a:cxn ang="0">
-                  <a:pos x="connsiteX40" y="connsiteY40"/>
-                </a:cxn>
-                <a:cxn ang="0">
-                  <a:pos x="connsiteX41" y="connsiteY41"/>
-                </a:cxn>
-                <a:cxn ang="0">
-                  <a:pos x="connsiteX42" y="connsiteY42"/>
-                </a:cxn>
-                <a:cxn ang="0">
-                  <a:pos x="connsiteX43" y="connsiteY43"/>
-                </a:cxn>
-                <a:cxn ang="0">
-                  <a:pos x="connsiteX44" y="connsiteY44"/>
-                </a:cxn>
-                <a:cxn ang="0">
-                  <a:pos x="connsiteX45" y="connsiteY45"/>
-                </a:cxn>
-                <a:cxn ang="0">
-                  <a:pos x="connsiteX46" y="connsiteY46"/>
-                </a:cxn>
-                <a:cxn ang="0">
-                  <a:pos x="connsiteX47" y="connsiteY47"/>
-                </a:cxn>
-                <a:cxn ang="0">
-                  <a:pos x="connsiteX48" y="connsiteY48"/>
-                </a:cxn>
-                <a:cxn ang="0">
-                  <a:pos x="connsiteX49" y="connsiteY49"/>
-                </a:cxn>
-                <a:cxn ang="0">
-                  <a:pos x="connsiteX50" y="connsiteY50"/>
-                </a:cxn>
-                <a:cxn ang="0">
-                  <a:pos x="connsiteX51" y="connsiteY51"/>
-                </a:cxn>
-                <a:cxn ang="0">
-                  <a:pos x="connsiteX52" y="connsiteY52"/>
-                </a:cxn>
-                <a:cxn ang="0">
-                  <a:pos x="connsiteX53" y="connsiteY53"/>
-                </a:cxn>
-                <a:cxn ang="0">
-                  <a:pos x="connsiteX54" y="connsiteY54"/>
-                </a:cxn>
-                <a:cxn ang="0">
-                  <a:pos x="connsiteX55" y="connsiteY55"/>
-                </a:cxn>
-                <a:cxn ang="0">
-                  <a:pos x="connsiteX56" y="connsiteY56"/>
-                </a:cxn>
-                <a:cxn ang="0">
-                  <a:pos x="connsiteX57" y="connsiteY57"/>
-                </a:cxn>
-                <a:cxn ang="0">
-                  <a:pos x="connsiteX58" y="connsiteY58"/>
-                </a:cxn>
-                <a:cxn ang="0">
-                  <a:pos x="connsiteX59" y="connsiteY59"/>
-                </a:cxn>
-                <a:cxn ang="0">
-                  <a:pos x="connsiteX60" y="connsiteY60"/>
-                </a:cxn>
-                <a:cxn ang="0">
-                  <a:pos x="connsiteX61" y="connsiteY61"/>
-                </a:cxn>
-                <a:cxn ang="0">
-                  <a:pos x="connsiteX62" y="connsiteY62"/>
-                </a:cxn>
-                <a:cxn ang="0">
-                  <a:pos x="connsiteX63" y="connsiteY63"/>
-                </a:cxn>
-              </a:cxnLst>
-              <a:rect l="l" t="t" r="r" b="b"/>
-              <a:pathLst>
-                <a:path w="6264586" h="6858001">
-                  <a:moveTo>
-                    <a:pt x="6264586" y="6646464"/>
-                  </a:moveTo>
-                  <a:lnTo>
-                    <a:pt x="6264586" y="6858001"/>
-                  </a:lnTo>
-                  <a:lnTo>
-                    <a:pt x="5997170" y="6858001"/>
-                  </a:lnTo>
-                  <a:lnTo>
-                    <a:pt x="6121512" y="6761029"/>
-                  </a:lnTo>
-                  <a:close/>
-                  <a:moveTo>
-                    <a:pt x="2693206" y="0"/>
-                  </a:moveTo>
-                  <a:lnTo>
-                    <a:pt x="5872285" y="0"/>
-                  </a:lnTo>
-                  <a:lnTo>
-                    <a:pt x="6024875" y="68385"/>
-                  </a:lnTo>
-                  <a:cubicBezTo>
-                    <a:pt x="6086250" y="97989"/>
-                    <a:pt x="6146793" y="129318"/>
-                    <a:pt x="6206432" y="162336"/>
-                  </a:cubicBezTo>
-                  <a:lnTo>
-                    <a:pt x="6264586" y="196704"/>
-                  </a:lnTo>
-                  <a:lnTo>
-                    <a:pt x="6264586" y="537242"/>
-                  </a:lnTo>
-                  <a:lnTo>
-                    <a:pt x="6230189" y="517260"/>
-                  </a:lnTo>
-                  <a:cubicBezTo>
-                    <a:pt x="6012226" y="399931"/>
-                    <a:pt x="5780573" y="310008"/>
-                    <a:pt x="5540536" y="249543"/>
-                  </a:cubicBezTo>
-                  <a:cubicBezTo>
-                    <a:pt x="5421375" y="219324"/>
-                    <a:pt x="5300641" y="195644"/>
-                    <a:pt x="5178896" y="178606"/>
-                  </a:cubicBezTo>
-                  <a:cubicBezTo>
-                    <a:pt x="5057977" y="161840"/>
-                    <a:pt x="4936276" y="151186"/>
-                    <a:pt x="4814279" y="146683"/>
-                  </a:cubicBezTo>
-                  <a:cubicBezTo>
-                    <a:pt x="4761501" y="144556"/>
-                    <a:pt x="4708015" y="143421"/>
-                    <a:pt x="4655095" y="143421"/>
-                  </a:cubicBezTo>
-                  <a:cubicBezTo>
-                    <a:pt x="4462968" y="143573"/>
-                    <a:pt x="4271111" y="157799"/>
-                    <a:pt x="4081069" y="185983"/>
-                  </a:cubicBezTo>
-                  <a:cubicBezTo>
-                    <a:pt x="3956361" y="205703"/>
-                    <a:pt x="3835058" y="229396"/>
-                    <a:pt x="3720566" y="256921"/>
-                  </a:cubicBezTo>
-                  <a:cubicBezTo>
-                    <a:pt x="3596708" y="286714"/>
-                    <a:pt x="3477677" y="320905"/>
-                    <a:pt x="3365879" y="357651"/>
-                  </a:cubicBezTo>
-                  <a:cubicBezTo>
-                    <a:pt x="3249257" y="395958"/>
-                    <a:pt x="3133487" y="438945"/>
-                    <a:pt x="3020555" y="486190"/>
-                  </a:cubicBezTo>
-                  <a:cubicBezTo>
-                    <a:pt x="2907623" y="533434"/>
-                    <a:pt x="2794832" y="585786"/>
-                    <a:pt x="2685163" y="641542"/>
-                  </a:cubicBezTo>
-                  <a:cubicBezTo>
-                    <a:pt x="2463995" y="754348"/>
-                    <a:pt x="2250998" y="882488"/>
-                    <a:pt x="2047720" y="1025030"/>
-                  </a:cubicBezTo>
-                  <a:cubicBezTo>
-                    <a:pt x="2006151" y="1054399"/>
-                    <a:pt x="1951528" y="1093415"/>
-                    <a:pt x="1897333" y="1134983"/>
-                  </a:cubicBezTo>
-                  <a:cubicBezTo>
-                    <a:pt x="1876761" y="1150164"/>
-                    <a:pt x="1855905" y="1166479"/>
-                    <a:pt x="1835758" y="1182227"/>
-                  </a:cubicBezTo>
-                  <a:lnTo>
-                    <a:pt x="1823273" y="1192016"/>
-                  </a:lnTo>
-                  <a:cubicBezTo>
-                    <a:pt x="1797027" y="1211879"/>
-                    <a:pt x="1772057" y="1232309"/>
-                    <a:pt x="1750918" y="1249760"/>
-                  </a:cubicBezTo>
-                  <a:cubicBezTo>
-                    <a:pt x="1645931" y="1335737"/>
-                    <a:pt x="1554422" y="1416605"/>
-                    <a:pt x="1469297" y="1496906"/>
-                  </a:cubicBezTo>
-                  <a:cubicBezTo>
-                    <a:pt x="1286595" y="1668957"/>
-                    <a:pt x="1118818" y="1856190"/>
-                    <a:pt x="967769" y="2056602"/>
-                  </a:cubicBezTo>
-                  <a:cubicBezTo>
-                    <a:pt x="890731" y="2159603"/>
-                    <a:pt x="818800" y="2264590"/>
-                    <a:pt x="754105" y="2368727"/>
-                  </a:cubicBezTo>
-                  <a:cubicBezTo>
-                    <a:pt x="681749" y="2488328"/>
-                    <a:pt x="622304" y="2596720"/>
-                    <a:pt x="572364" y="2701140"/>
-                  </a:cubicBezTo>
-                  <a:cubicBezTo>
-                    <a:pt x="557609" y="2730507"/>
-                    <a:pt x="543989" y="2760443"/>
-                    <a:pt x="532497" y="2786265"/>
-                  </a:cubicBezTo>
-                  <a:lnTo>
-                    <a:pt x="512918" y="2828827"/>
-                  </a:lnTo>
-                  <a:lnTo>
-                    <a:pt x="494475" y="2872240"/>
-                  </a:lnTo>
-                  <a:lnTo>
-                    <a:pt x="491637" y="2878908"/>
-                  </a:lnTo>
-                  <a:cubicBezTo>
-                    <a:pt x="480146" y="2906575"/>
-                    <a:pt x="469220" y="2932821"/>
-                    <a:pt x="459290" y="2959635"/>
-                  </a:cubicBezTo>
-                  <a:cubicBezTo>
-                    <a:pt x="455176" y="2970559"/>
-                    <a:pt x="451060" y="2981484"/>
-                    <a:pt x="446805" y="2992408"/>
-                  </a:cubicBezTo>
-                  <a:cubicBezTo>
-                    <a:pt x="439427" y="3012412"/>
-                    <a:pt x="432333" y="3030572"/>
-                    <a:pt x="426090" y="3049158"/>
-                  </a:cubicBezTo>
-                  <a:lnTo>
-                    <a:pt x="426090" y="3049867"/>
-                  </a:lnTo>
-                  <a:cubicBezTo>
-                    <a:pt x="383010" y="3169099"/>
-                    <a:pt x="346959" y="3290756"/>
-                    <a:pt x="318124" y="3414202"/>
-                  </a:cubicBezTo>
-                  <a:cubicBezTo>
-                    <a:pt x="260107" y="3661703"/>
-                    <a:pt x="230780" y="3915049"/>
-                    <a:pt x="230729" y="4169260"/>
-                  </a:cubicBezTo>
-                  <a:cubicBezTo>
-                    <a:pt x="231621" y="4295173"/>
-                    <a:pt x="244398" y="4420719"/>
-                    <a:pt x="268893" y="4544236"/>
-                  </a:cubicBezTo>
-                  <a:cubicBezTo>
-                    <a:pt x="293708" y="4666304"/>
-                    <a:pt x="330882" y="4785521"/>
-                    <a:pt x="379840" y="4900056"/>
-                  </a:cubicBezTo>
-                  <a:cubicBezTo>
-                    <a:pt x="387926" y="4919919"/>
-                    <a:pt x="397006" y="4939498"/>
-                    <a:pt x="406512" y="4960211"/>
-                  </a:cubicBezTo>
-                  <a:cubicBezTo>
-                    <a:pt x="410343" y="4968299"/>
-                    <a:pt x="414173" y="4976385"/>
-                    <a:pt x="417862" y="4984613"/>
-                  </a:cubicBezTo>
-                  <a:lnTo>
-                    <a:pt x="428077" y="5005043"/>
-                  </a:lnTo>
-                  <a:cubicBezTo>
-                    <a:pt x="438860" y="5026751"/>
-                    <a:pt x="449075" y="5047181"/>
-                    <a:pt x="460140" y="5067327"/>
-                  </a:cubicBezTo>
-                  <a:cubicBezTo>
-                    <a:pt x="485536" y="5116273"/>
-                    <a:pt x="514763" y="5165789"/>
-                    <a:pt x="555197" y="5229773"/>
-                  </a:cubicBezTo>
-                  <a:cubicBezTo>
-                    <a:pt x="586836" y="5280282"/>
-                    <a:pt x="620318" y="5329511"/>
-                    <a:pt x="660611" y="5387396"/>
-                  </a:cubicBezTo>
-                  <a:cubicBezTo>
-                    <a:pt x="698065" y="5440741"/>
-                    <a:pt x="737223" y="5493094"/>
-                    <a:pt x="774110" y="5542182"/>
-                  </a:cubicBezTo>
-                  <a:cubicBezTo>
-                    <a:pt x="821070" y="5604324"/>
-                    <a:pt x="870301" y="5667173"/>
-                    <a:pt x="917829" y="5727896"/>
-                  </a:cubicBezTo>
-                  <a:cubicBezTo>
-                    <a:pt x="949042" y="5767762"/>
-                    <a:pt x="979828" y="5807063"/>
-                    <a:pt x="1012885" y="5849767"/>
-                  </a:cubicBezTo>
-                  <a:cubicBezTo>
-                    <a:pt x="1045942" y="5892471"/>
-                    <a:pt x="1089497" y="5948796"/>
-                    <a:pt x="1133053" y="6006822"/>
-                  </a:cubicBezTo>
-                  <a:cubicBezTo>
-                    <a:pt x="1153624" y="6034345"/>
-                    <a:pt x="1175332" y="6063998"/>
-                    <a:pt x="1194343" y="6090245"/>
-                  </a:cubicBezTo>
-                  <a:cubicBezTo>
-                    <a:pt x="1213355" y="6116491"/>
-                    <a:pt x="1231372" y="6141178"/>
-                    <a:pt x="1249390" y="6165155"/>
-                  </a:cubicBezTo>
-                  <a:cubicBezTo>
-                    <a:pt x="1280461" y="6208000"/>
-                    <a:pt x="1313659" y="6250847"/>
-                    <a:pt x="1345724" y="6292132"/>
-                  </a:cubicBezTo>
-                  <a:lnTo>
-                    <a:pt x="1364310" y="6316251"/>
-                  </a:lnTo>
-                  <a:lnTo>
-                    <a:pt x="1373673" y="6327885"/>
-                  </a:lnTo>
-                  <a:cubicBezTo>
-                    <a:pt x="1409566" y="6372433"/>
-                    <a:pt x="1446738" y="6418542"/>
-                    <a:pt x="1484619" y="6462240"/>
-                  </a:cubicBezTo>
-                  <a:cubicBezTo>
-                    <a:pt x="1567899" y="6559850"/>
-                    <a:pt x="1653876" y="6652211"/>
-                    <a:pt x="1739000" y="6737335"/>
-                  </a:cubicBezTo>
-                  <a:lnTo>
-                    <a:pt x="1866801" y="6858001"/>
-                  </a:lnTo>
-                  <a:lnTo>
-                    <a:pt x="1144149" y="6858001"/>
-                  </a:lnTo>
-                  <a:lnTo>
-                    <a:pt x="1058349" y="6766452"/>
-                  </a:lnTo>
-                  <a:cubicBezTo>
-                    <a:pt x="878978" y="6562465"/>
-                    <a:pt x="718756" y="6341104"/>
-                    <a:pt x="580309" y="6105000"/>
-                  </a:cubicBezTo>
-                  <a:cubicBezTo>
-                    <a:pt x="200401" y="5454007"/>
-                    <a:pt x="146" y="4713831"/>
-                    <a:pt x="1" y="3960094"/>
-                  </a:cubicBezTo>
-                  <a:cubicBezTo>
-                    <a:pt x="-335" y="2196754"/>
-                    <a:pt x="1071479" y="683605"/>
-                    <a:pt x="2599292" y="37050"/>
-                  </a:cubicBezTo>
-                  <a:close/>
-                </a:path>
-              </a:pathLst>
-            </a:custGeom>
-            <a:gradFill>
-              <a:gsLst>
-                <a:gs pos="2000">
-                  <a:schemeClr val="bg1">
-                    <a:alpha val="10000"/>
-                  </a:schemeClr>
-                </a:gs>
-                <a:gs pos="16000">
-                  <a:schemeClr val="accent6">
-                    <a:alpha val="10000"/>
-                  </a:schemeClr>
-                </a:gs>
-                <a:gs pos="100000">
-                  <a:schemeClr val="bg1">
-                    <a:alpha val="10000"/>
-                  </a:schemeClr>
-                </a:gs>
-                <a:gs pos="85000">
-                  <a:schemeClr val="accent1">
-                    <a:alpha val="10000"/>
-                  </a:schemeClr>
-                </a:gs>
-              </a:gsLst>
-              <a:lin ang="12000000" scaled="0"/>
-            </a:gradFill>
-            <a:ln>
-              <a:noFill/>
-            </a:ln>
-          </p:spPr>
-          <p:style>
-            <a:lnRef idx="2">
-              <a:schemeClr val="accent1">
-                <a:shade val="50000"/>
-              </a:schemeClr>
-            </a:lnRef>
-            <a:fillRef idx="1">
-              <a:schemeClr val="accent1"/>
-            </a:fillRef>
-            <a:effectRef idx="0">
-              <a:schemeClr val="accent1"/>
-            </a:effectRef>
-            <a:fontRef idx="minor">
-              <a:schemeClr val="lt1"/>
-            </a:fontRef>
-          </p:style>
-          <p:txBody>
-            <a:bodyPr rtlCol="0" anchor="ctr"/>
-            <a:lstStyle/>
-            <a:p>
-              <a:pPr algn="ctr"/>
-              <a:endParaRPr lang="en-US" dirty="0"/>
-            </a:p>
-          </p:txBody>
-        </p:sp>
-      </p:grpSp>
     </p:spTree>
-    <p:extLst>
-      <p:ext uri="{BB962C8B-B14F-4D97-AF65-F5344CB8AC3E}">
-        <p14:creationId xmlns:p14="http://schemas.microsoft.com/office/powerpoint/2010/main" val="3847547106"/>
-      </p:ext>
-    </p:extLst>
   </p:cSld>
   <p:clrMapOvr>
     <a:masterClrMapping/>
@@ -23860,7 +21606,7 @@
           <p:nvPr>
             <p:extLst>
               <p:ext uri="{D42A27DB-BD31-4B8C-83A1-F6EECF244321}">
-                <p14:modId xmlns:p14="http://schemas.microsoft.com/office/powerpoint/2010/main" val="3940184862"/>
+                <p14:modId xmlns:p14="http://schemas.microsoft.com/office/powerpoint/2010/main" val="1817984773"/>
               </p:ext>
             </p:extLst>
           </p:nvPr>
@@ -24620,12 +22366,12 @@
                         <a:buNone/>
                       </a:pPr>
                       <a:r>
-                        <a:rPr lang="en-US" sz="1100">
+                        <a:rPr lang="en-US" sz="1100" dirty="0">
                           <a:effectLst/>
                         </a:rPr>
                         <a:t>End-to-end prompt satisfaction via multimodal reasoning</a:t>
                       </a:r>
-                      <a:endParaRPr lang="en-US" sz="1100">
+                      <a:endParaRPr lang="en-US" sz="1100" dirty="0">
                         <a:effectLst/>
                         <a:latin typeface="Arial" panose="020B0604020202020204" pitchFamily="34" charset="0"/>
                         <a:ea typeface="Arial" panose="020B0604020202020204" pitchFamily="34" charset="0"/>
@@ -24646,13 +22392,7 @@
                         <a:rPr lang="en-US" sz="1100" dirty="0">
                           <a:effectLst/>
                         </a:rPr>
-                        <a:t>Strong human correlation but requires calibration and determinism </a:t>
-                      </a:r>
-                      <a:r>
-                        <a:rPr lang="en-US" sz="1100" baseline="30000" dirty="0">
-                          <a:effectLst/>
-                        </a:rPr>
-                        <a:t>4</a:t>
+                        <a:t>Strong human correlation but requires calibration and determinism</a:t>
                       </a:r>
                       <a:endParaRPr lang="en-US" sz="1100" dirty="0">
                         <a:effectLst/>
@@ -24736,13 +22476,44 @@
                         <a:rPr lang="en-US" sz="1000" b="1" dirty="0">
                           <a:effectLst/>
                         </a:rPr>
-                        <a:t>T2ISafety</a:t>
+                        <a:t>T2ISafety,</a:t>
                       </a:r>
-                      <a:endParaRPr lang="en-US" sz="1000" b="1" dirty="0">
-                        <a:effectLst/>
-                        <a:latin typeface="Arial" panose="020B0604020202020204" pitchFamily="34" charset="0"/>
-                        <a:ea typeface="Arial" panose="020B0604020202020204" pitchFamily="34" charset="0"/>
-                      </a:endParaRPr>
+                      <a:r>
+                        <a:rPr lang="en-US" sz="1350" b="0" i="0" kern="1200" dirty="0">
+                          <a:solidFill>
+                            <a:schemeClr val="dk1"/>
+                          </a:solidFill>
+                          <a:effectLst/>
+                          <a:latin typeface="+mn-lt"/>
+                          <a:ea typeface="+mn-ea"/>
+                          <a:cs typeface="+mn-cs"/>
+                        </a:rPr>
+                        <a:t> </a:t>
+                      </a:r>
+                      <a:r>
+                        <a:rPr lang="en-US" sz="1000" b="1" kern="1200" dirty="0">
+                          <a:solidFill>
+                            <a:schemeClr val="dk1"/>
+                          </a:solidFill>
+                          <a:effectLst/>
+                          <a:latin typeface="+mn-lt"/>
+                          <a:ea typeface="+mn-ea"/>
+                          <a:cs typeface="+mn-cs"/>
+                        </a:rPr>
+                        <a:t>PSG-Score </a:t>
+                      </a:r>
+                      <a:r>
+                        <a:rPr lang="en-US" sz="1000" b="0" kern="1200" dirty="0">
+                          <a:solidFill>
+                            <a:schemeClr val="dk1"/>
+                          </a:solidFill>
+                          <a:effectLst/>
+                          <a:latin typeface="+mn-lt"/>
+                          <a:ea typeface="+mn-ea"/>
+                          <a:cs typeface="+mn-cs"/>
+                        </a:rPr>
+                        <a:t>(Panoptic Scene Graph Score)</a:t>
+                      </a:r>
                     </a:p>
                   </a:txBody>
                   <a:tcPr marL="82088" marR="82088" marT="54726" marB="54726"/>
@@ -24756,16 +22527,17 @@
                         <a:buNone/>
                       </a:pPr>
                       <a:r>
-                        <a:rPr lang="en-US" sz="1100">
+                        <a:rPr lang="en-US" sz="1100" kern="1200" dirty="0">
+                          <a:solidFill>
+                            <a:schemeClr val="dk1"/>
+                          </a:solidFill>
                           <a:effectLst/>
+                          <a:latin typeface="+mn-lt"/>
+                          <a:ea typeface="+mn-ea"/>
+                          <a:cs typeface="+mn-cs"/>
                         </a:rPr>
-                        <a:t>Probabilistic aggregation and robustness to benchmark drift</a:t>
+                        <a:t>Probabilistic aggregation and structural matching</a:t>
                       </a:r>
-                      <a:endParaRPr lang="en-US" sz="1100">
-                        <a:effectLst/>
-                        <a:latin typeface="Arial" panose="020B0604020202020204" pitchFamily="34" charset="0"/>
-                        <a:ea typeface="Arial" panose="020B0604020202020204" pitchFamily="34" charset="0"/>
-                      </a:endParaRPr>
                     </a:p>
                   </a:txBody>
                   <a:tcPr marL="82088" marR="82088" marT="54726" marB="54726"/>
@@ -24775,20 +22547,21 @@
                     <a:bodyPr/>
                     <a:lstStyle/>
                     <a:p>
-                      <a:pPr marL="0" marR="0">
+                      <a:pPr marL="0" marR="0" algn="l" defTabSz="685800" rtl="0" eaLnBrk="1" latinLnBrk="0" hangingPunct="1">
                         <a:buNone/>
                       </a:pPr>
                       <a:r>
-                        <a:rPr lang="en-US" sz="1100" dirty="0">
+                        <a:rPr lang="en-US" sz="1100" kern="1200" dirty="0">
+                          <a:solidFill>
+                            <a:schemeClr val="dk1"/>
+                          </a:solidFill>
                           <a:effectLst/>
+                          <a:latin typeface="+mn-lt"/>
+                          <a:ea typeface="+mn-ea"/>
+                          <a:cs typeface="+mn-cs"/>
                         </a:rPr>
-                        <a:t>Increased complexity; potential evaluator drift and model dependence</a:t>
+                        <a:t>Higher system complexity; evaluator drift risk</a:t>
                       </a:r>
-                      <a:endParaRPr lang="en-US" sz="1100" dirty="0">
-                        <a:effectLst/>
-                        <a:latin typeface="Arial" panose="020B0604020202020204" pitchFamily="34" charset="0"/>
-                        <a:ea typeface="Arial" panose="020B0604020202020204" pitchFamily="34" charset="0"/>
-                      </a:endParaRPr>
                     </a:p>
                   </a:txBody>
                   <a:tcPr marL="82088" marR="82088" marT="54726" marB="54726"/>
@@ -25164,553 +22937,6 @@
 <file path=ppt/slides/slide6.xml><?xml version="1.0" encoding="utf-8"?>
 <p:sld xmlns:a="http://schemas.openxmlformats.org/drawingml/2006/main" xmlns:r="http://schemas.openxmlformats.org/officeDocument/2006/relationships" xmlns:p="http://schemas.openxmlformats.org/presentationml/2006/main">
   <p:cSld>
-    <p:bg>
-      <p:bgPr>
-        <a:solidFill>
-          <a:srgbClr val="F8F9FA"/>
-        </a:solidFill>
-        <a:effectLst/>
-      </p:bgPr>
-    </p:bg>
-    <p:spTree>
-      <p:nvGrpSpPr>
-        <p:cNvPr id="1" name=""/>
-        <p:cNvGrpSpPr/>
-        <p:nvPr/>
-      </p:nvGrpSpPr>
-      <p:grpSpPr>
-        <a:xfrm>
-          <a:off x="0" y="0"/>
-          <a:ext cx="0" cy="0"/>
-          <a:chOff x="0" y="0"/>
-          <a:chExt cx="0" cy="0"/>
-        </a:xfrm>
-      </p:grpSpPr>
-      <p:sp>
-        <p:nvSpPr>
-          <p:cNvPr id="2" name="TextBox 1"/>
-          <p:cNvSpPr txBox="1"/>
-          <p:nvPr/>
-        </p:nvSpPr>
-        <p:spPr>
-          <a:xfrm>
-            <a:off x="111760" y="127204"/>
-            <a:ext cx="6878743" cy="400110"/>
-          </a:xfrm>
-          <a:prstGeom prst="rect">
-            <a:avLst/>
-          </a:prstGeom>
-          <a:noFill/>
-        </p:spPr>
-        <p:txBody>
-          <a:bodyPr wrap="none">
-            <a:spAutoFit/>
-          </a:bodyPr>
-          <a:lstStyle/>
-          <a:p>
-            <a:pPr>
-              <a:defRPr sz="2800" b="1">
-                <a:solidFill>
-                  <a:srgbClr val="2A3A5A"/>
-                </a:solidFill>
-              </a:defRPr>
-            </a:pPr>
-            <a:r>
-              <a:rPr lang="en-US" sz="2000" b="1" dirty="0"/>
-              <a:t>Sample Evaluation Prompts for Autograder Benchmarking</a:t>
-            </a:r>
-            <a:endParaRPr sz="2000" dirty="0"/>
-          </a:p>
-        </p:txBody>
-      </p:sp>
-      <p:graphicFrame>
-        <p:nvGraphicFramePr>
-          <p:cNvPr id="3" name="Table 2"/>
-          <p:cNvGraphicFramePr>
-            <a:graphicFrameLocks noGrp="1"/>
-          </p:cNvGraphicFramePr>
-          <p:nvPr>
-            <p:extLst>
-              <p:ext uri="{D42A27DB-BD31-4B8C-83A1-F6EECF244321}">
-                <p14:modId xmlns:p14="http://schemas.microsoft.com/office/powerpoint/2010/main" val="1920519598"/>
-              </p:ext>
-            </p:extLst>
-          </p:nvPr>
-        </p:nvGraphicFramePr>
-        <p:xfrm>
-          <a:off x="355600" y="598232"/>
-          <a:ext cx="8229600" cy="3660865"/>
-        </p:xfrm>
-        <a:graphic>
-          <a:graphicData uri="http://schemas.openxmlformats.org/drawingml/2006/table">
-            <a:tbl>
-              <a:tblPr firstRow="1" bandRow="1">
-                <a:tableStyleId>{5C22544A-7EE6-4342-B048-85BDC9FD1C3A}</a:tableStyleId>
-              </a:tblPr>
-              <a:tblGrid>
-                <a:gridCol w="2062480">
-                  <a:extLst>
-                    <a:ext uri="{9D8B030D-6E8A-4147-A177-3AD203B41FA5}">
-                      <a16:colId xmlns:a16="http://schemas.microsoft.com/office/drawing/2014/main" val="20000"/>
-                    </a:ext>
-                  </a:extLst>
-                </a:gridCol>
-                <a:gridCol w="3637280">
-                  <a:extLst>
-                    <a:ext uri="{9D8B030D-6E8A-4147-A177-3AD203B41FA5}">
-                      <a16:colId xmlns:a16="http://schemas.microsoft.com/office/drawing/2014/main" val="20001"/>
-                    </a:ext>
-                  </a:extLst>
-                </a:gridCol>
-                <a:gridCol w="2529840">
-                  <a:extLst>
-                    <a:ext uri="{9D8B030D-6E8A-4147-A177-3AD203B41FA5}">
-                      <a16:colId xmlns:a16="http://schemas.microsoft.com/office/drawing/2014/main" val="20002"/>
-                    </a:ext>
-                  </a:extLst>
-                </a:gridCol>
-              </a:tblGrid>
-              <a:tr h="391885">
-                <a:tc>
-                  <a:txBody>
-                    <a:bodyPr/>
-                    <a:lstStyle/>
-                    <a:p>
-                      <a:pPr>
-                        <a:buNone/>
-                      </a:pPr>
-                      <a:r>
-                        <a:rPr lang="en-US" b="1"/>
-                        <a:t>Category</a:t>
-                      </a:r>
-                      <a:endParaRPr lang="en-US"/>
-                    </a:p>
-                  </a:txBody>
-                  <a:tcPr anchor="ctr"/>
-                </a:tc>
-                <a:tc>
-                  <a:txBody>
-                    <a:bodyPr/>
-                    <a:lstStyle/>
-                    <a:p>
-                      <a:pPr>
-                        <a:buNone/>
-                      </a:pPr>
-                      <a:r>
-                        <a:rPr lang="en-US" b="1" dirty="0"/>
-                        <a:t>Description</a:t>
-                      </a:r>
-                      <a:endParaRPr lang="en-US" dirty="0"/>
-                    </a:p>
-                  </a:txBody>
-                  <a:tcPr anchor="ctr"/>
-                </a:tc>
-                <a:tc>
-                  <a:txBody>
-                    <a:bodyPr/>
-                    <a:lstStyle/>
-                    <a:p>
-                      <a:pPr>
-                        <a:buNone/>
-                      </a:pPr>
-                      <a:r>
-                        <a:rPr lang="en-US" b="1"/>
-                        <a:t>Example</a:t>
-                      </a:r>
-                      <a:endParaRPr lang="en-US"/>
-                    </a:p>
-                  </a:txBody>
-                  <a:tcPr anchor="ctr"/>
-                </a:tc>
-                <a:extLst>
-                  <a:ext uri="{0D108BD9-81ED-4DB2-BD59-A6C34878D82A}">
-                    <a16:rowId xmlns:a16="http://schemas.microsoft.com/office/drawing/2014/main" val="10000"/>
-                  </a:ext>
-                </a:extLst>
-              </a:tr>
-              <a:tr h="391885">
-                <a:tc>
-                  <a:txBody>
-                    <a:bodyPr/>
-                    <a:lstStyle/>
-                    <a:p>
-                      <a:pPr>
-                        <a:buNone/>
-                      </a:pPr>
-                      <a:r>
-                        <a:rPr lang="en-US" b="1"/>
-                        <a:t>Anatomical Accuracy</a:t>
-                      </a:r>
-                      <a:endParaRPr lang="en-US"/>
-                    </a:p>
-                  </a:txBody>
-                  <a:tcPr anchor="ctr"/>
-                </a:tc>
-                <a:tc>
-                  <a:txBody>
-                    <a:bodyPr/>
-                    <a:lstStyle/>
-                    <a:p>
-                      <a:pPr>
-                        <a:buNone/>
-                      </a:pPr>
-                      <a:r>
-                        <a:rPr lang="en-US" sz="1200" dirty="0"/>
-                        <a:t>Correct depiction of human and animal anatomy, including body parts, proportions, and plausible physical structure.</a:t>
-                      </a:r>
-                    </a:p>
-                  </a:txBody>
-                  <a:tcPr anchor="ctr"/>
-                </a:tc>
-                <a:tc>
-                  <a:txBody>
-                    <a:bodyPr/>
-                    <a:lstStyle/>
-                    <a:p>
-                      <a:pPr>
-                        <a:buNone/>
-                      </a:pPr>
-                      <a:r>
-                        <a:rPr lang="en-US" sz="1200"/>
-                        <a:t>Hands with the correct number of fingers; realistic joint bending in a human pose.</a:t>
-                      </a:r>
-                    </a:p>
-                  </a:txBody>
-                  <a:tcPr anchor="ctr"/>
-                </a:tc>
-                <a:extLst>
-                  <a:ext uri="{0D108BD9-81ED-4DB2-BD59-A6C34878D82A}">
-                    <a16:rowId xmlns:a16="http://schemas.microsoft.com/office/drawing/2014/main" val="10001"/>
-                  </a:ext>
-                </a:extLst>
-              </a:tr>
-              <a:tr h="391885">
-                <a:tc>
-                  <a:txBody>
-                    <a:bodyPr/>
-                    <a:lstStyle/>
-                    <a:p>
-                      <a:pPr>
-                        <a:buNone/>
-                      </a:pPr>
-                      <a:r>
-                        <a:rPr lang="en-US" b="1"/>
-                        <a:t>Compositional Logic &amp; Spatial Relations</a:t>
-                      </a:r>
-                      <a:endParaRPr lang="en-US"/>
-                    </a:p>
-                  </a:txBody>
-                  <a:tcPr anchor="ctr"/>
-                </a:tc>
-                <a:tc>
-                  <a:txBody>
-                    <a:bodyPr/>
-                    <a:lstStyle/>
-                    <a:p>
-                      <a:pPr>
-                        <a:buNone/>
-                      </a:pPr>
-                      <a:r>
-                        <a:rPr lang="en-US" sz="1200" dirty="0"/>
-                        <a:t>Faithful representation of object counts, spatial relationships, and compositional constraints specified or implied by the prompt.</a:t>
-                      </a:r>
-                    </a:p>
-                  </a:txBody>
-                  <a:tcPr anchor="ctr"/>
-                </a:tc>
-                <a:tc>
-                  <a:txBody>
-                    <a:bodyPr/>
-                    <a:lstStyle/>
-                    <a:p>
-                      <a:pPr>
-                        <a:buNone/>
-                      </a:pPr>
-                      <a:r>
-                        <a:rPr lang="en-US" sz="1200" dirty="0"/>
-                        <a:t>“A red cube on top of a blue sphere” with correct ordering and positioning.</a:t>
-                      </a:r>
-                    </a:p>
-                  </a:txBody>
-                  <a:tcPr anchor="ctr"/>
-                </a:tc>
-                <a:extLst>
-                  <a:ext uri="{0D108BD9-81ED-4DB2-BD59-A6C34878D82A}">
-                    <a16:rowId xmlns:a16="http://schemas.microsoft.com/office/drawing/2014/main" val="10002"/>
-                  </a:ext>
-                </a:extLst>
-              </a:tr>
-              <a:tr h="391885">
-                <a:tc>
-                  <a:txBody>
-                    <a:bodyPr/>
-                    <a:lstStyle/>
-                    <a:p>
-                      <a:pPr>
-                        <a:buNone/>
-                      </a:pPr>
-                      <a:r>
-                        <a:rPr lang="en-US" b="1"/>
-                        <a:t>Cultural Nuance &amp; Competence</a:t>
-                      </a:r>
-                      <a:endParaRPr lang="en-US"/>
-                    </a:p>
-                  </a:txBody>
-                  <a:tcPr anchor="ctr"/>
-                </a:tc>
-                <a:tc>
-                  <a:txBody>
-                    <a:bodyPr/>
-                    <a:lstStyle/>
-                    <a:p>
-                      <a:pPr>
-                        <a:buNone/>
-                      </a:pPr>
-                      <a:r>
-                        <a:rPr lang="en-US" sz="1200" dirty="0"/>
-                        <a:t>Accurate and respectful rendering of culturally implied elements without hallucination, stereotyping, or exaggeration.</a:t>
-                      </a:r>
-                    </a:p>
-                  </a:txBody>
-                  <a:tcPr anchor="ctr"/>
-                </a:tc>
-                <a:tc>
-                  <a:txBody>
-                    <a:bodyPr/>
-                    <a:lstStyle/>
-                    <a:p>
-                      <a:pPr>
-                        <a:buNone/>
-                      </a:pPr>
-                      <a:r>
-                        <a:rPr lang="en-US" sz="1200" dirty="0"/>
-                        <a:t>A traditional wedding scene that reflects region-specific attire and customs correctly.</a:t>
-                      </a:r>
-                    </a:p>
-                  </a:txBody>
-                  <a:tcPr anchor="ctr"/>
-                </a:tc>
-                <a:extLst>
-                  <a:ext uri="{0D108BD9-81ED-4DB2-BD59-A6C34878D82A}">
-                    <a16:rowId xmlns:a16="http://schemas.microsoft.com/office/drawing/2014/main" val="10003"/>
-                  </a:ext>
-                </a:extLst>
-              </a:tr>
-              <a:tr h="391885">
-                <a:tc>
-                  <a:txBody>
-                    <a:bodyPr/>
-                    <a:lstStyle/>
-                    <a:p>
-                      <a:pPr>
-                        <a:buNone/>
-                      </a:pPr>
-                      <a:r>
-                        <a:rPr lang="en-US" b="1"/>
-                        <a:t>Professional &amp; Scientific Fidelity</a:t>
-                      </a:r>
-                      <a:endParaRPr lang="en-US"/>
-                    </a:p>
-                  </a:txBody>
-                  <a:tcPr anchor="ctr"/>
-                </a:tc>
-                <a:tc>
-                  <a:txBody>
-                    <a:bodyPr/>
-                    <a:lstStyle/>
-                    <a:p>
-                      <a:pPr>
-                        <a:buNone/>
-                      </a:pPr>
-                      <a:r>
-                        <a:rPr lang="en-US" sz="1200" dirty="0"/>
-                        <a:t>Domain-specific correctness for technical, medical, or scientific imagery, including symbols, diagrams, and spatial precision.</a:t>
-                      </a:r>
-                    </a:p>
-                  </a:txBody>
-                  <a:tcPr anchor="ctr"/>
-                </a:tc>
-                <a:tc>
-                  <a:txBody>
-                    <a:bodyPr/>
-                    <a:lstStyle/>
-                    <a:p>
-                      <a:pPr>
-                        <a:buNone/>
-                      </a:pPr>
-                      <a:r>
-                        <a:rPr lang="en-US" sz="1200" dirty="0"/>
-                        <a:t>An electrical circuit diagram with correct component symbols and connections.</a:t>
-                      </a:r>
-                    </a:p>
-                  </a:txBody>
-                  <a:tcPr anchor="ctr"/>
-                </a:tc>
-                <a:extLst>
-                  <a:ext uri="{0D108BD9-81ED-4DB2-BD59-A6C34878D82A}">
-                    <a16:rowId xmlns:a16="http://schemas.microsoft.com/office/drawing/2014/main" val="10004"/>
-                  </a:ext>
-                </a:extLst>
-              </a:tr>
-              <a:tr h="489135">
-                <a:tc>
-                  <a:txBody>
-                    <a:bodyPr/>
-                    <a:lstStyle/>
-                    <a:p>
-                      <a:pPr>
-                        <a:buNone/>
-                      </a:pPr>
-                      <a:r>
-                        <a:rPr lang="en-US" b="1"/>
-                        <a:t>Responsible AI – Fairness, Toxicity &amp; Privacy</a:t>
-                      </a:r>
-                      <a:endParaRPr lang="en-US"/>
-                    </a:p>
-                  </a:txBody>
-                  <a:tcPr anchor="ctr"/>
-                </a:tc>
-                <a:tc>
-                  <a:txBody>
-                    <a:bodyPr/>
-                    <a:lstStyle/>
-                    <a:p>
-                      <a:pPr>
-                        <a:buNone/>
-                      </a:pPr>
-                      <a:r>
-                        <a:rPr lang="en-US" sz="1200"/>
-                        <a:t>Evaluation of safety, bias, and compliance, ensuring outputs avoid harmful content, represent groups fairly, and respect privacy and IP.</a:t>
-                      </a:r>
-                    </a:p>
-                  </a:txBody>
-                  <a:tcPr anchor="ctr"/>
-                </a:tc>
-                <a:tc>
-                  <a:txBody>
-                    <a:bodyPr/>
-                    <a:lstStyle/>
-                    <a:p>
-                      <a:pPr>
-                        <a:buNone/>
-                      </a:pPr>
-                      <a:r>
-                        <a:rPr lang="en-US" sz="1200" dirty="0"/>
-                        <a:t>Avoiding demographic stereotyping in occupational depictions; no copyrighted characters.</a:t>
-                      </a:r>
-                    </a:p>
-                  </a:txBody>
-                  <a:tcPr anchor="ctr"/>
-                </a:tc>
-                <a:extLst>
-                  <a:ext uri="{0D108BD9-81ED-4DB2-BD59-A6C34878D82A}">
-                    <a16:rowId xmlns:a16="http://schemas.microsoft.com/office/drawing/2014/main" val="10005"/>
-                  </a:ext>
-                </a:extLst>
-              </a:tr>
-            </a:tbl>
-          </a:graphicData>
-        </a:graphic>
-      </p:graphicFrame>
-      <p:sp>
-        <p:nvSpPr>
-          <p:cNvPr id="6" name="TextBox 5">
-            <a:extLst>
-              <a:ext uri="{FF2B5EF4-FFF2-40B4-BE49-F238E27FC236}">
-                <a16:creationId xmlns:a16="http://schemas.microsoft.com/office/drawing/2014/main" id="{D24BB8E7-FB16-388C-BCD1-33A23739A8F0}"/>
-              </a:ext>
-            </a:extLst>
-          </p:cNvPr>
-          <p:cNvSpPr txBox="1"/>
-          <p:nvPr/>
-        </p:nvSpPr>
-        <p:spPr>
-          <a:xfrm>
-            <a:off x="497840" y="4815840"/>
-            <a:ext cx="639919" cy="369332"/>
-          </a:xfrm>
-          <a:prstGeom prst="rect">
-            <a:avLst/>
-          </a:prstGeom>
-          <a:noFill/>
-        </p:spPr>
-        <p:txBody>
-          <a:bodyPr wrap="none" rtlCol="0">
-            <a:spAutoFit/>
-          </a:bodyPr>
-          <a:lstStyle/>
-          <a:p>
-            <a:r>
-              <a:rPr lang="en-US" dirty="0">
-                <a:hlinkClick r:id="rId2"/>
-              </a:rPr>
-              <a:t>Link</a:t>
-            </a:r>
-            <a:r>
-              <a:rPr lang="en-US" dirty="0"/>
-              <a:t> </a:t>
-            </a:r>
-          </a:p>
-        </p:txBody>
-      </p:sp>
-      <p:pic>
-        <p:nvPicPr>
-          <p:cNvPr id="4098" name="Picture 2" descr="9 golden rules for solid user testing ...">
-            <a:extLst>
-              <a:ext uri="{FF2B5EF4-FFF2-40B4-BE49-F238E27FC236}">
-                <a16:creationId xmlns:a16="http://schemas.microsoft.com/office/drawing/2014/main" id="{E2AE2CD7-DAF4-DE97-4944-44993644596C}"/>
-              </a:ext>
-            </a:extLst>
-          </p:cNvPr>
-          <p:cNvPicPr>
-            <a:picLocks noChangeAspect="1" noChangeArrowheads="1"/>
-          </p:cNvPicPr>
-          <p:nvPr/>
-        </p:nvPicPr>
-        <p:blipFill>
-          <a:blip r:embed="rId3">
-            <a:extLst>
-              <a:ext uri="{28A0092B-C50C-407E-A947-70E740481C1C}">
-                <a14:useLocalDpi xmlns:a14="http://schemas.microsoft.com/office/drawing/2010/main" val="0"/>
-              </a:ext>
-            </a:extLst>
-          </a:blip>
-          <a:srcRect/>
-          <a:stretch>
-            <a:fillRect/>
-          </a:stretch>
-        </p:blipFill>
-        <p:spPr bwMode="auto">
-          <a:xfrm>
-            <a:off x="6990503" y="4394547"/>
-            <a:ext cx="1929765" cy="940910"/>
-          </a:xfrm>
-          <a:prstGeom prst="rect">
-            <a:avLst/>
-          </a:prstGeom>
-          <a:noFill/>
-          <a:extLst>
-            <a:ext uri="{909E8E84-426E-40DD-AFC4-6F175D3DCCD1}">
-              <a14:hiddenFill xmlns:a14="http://schemas.microsoft.com/office/drawing/2010/main">
-                <a:solidFill>
-                  <a:srgbClr val="FFFFFF"/>
-                </a:solidFill>
-              </a14:hiddenFill>
-            </a:ext>
-          </a:extLst>
-        </p:spPr>
-      </p:pic>
-    </p:spTree>
-  </p:cSld>
-  <p:clrMapOvr>
-    <a:masterClrMapping/>
-  </p:clrMapOvr>
-</p:sld>
-</file>
-
-<file path=ppt/slides/slide7.xml><?xml version="1.0" encoding="utf-8"?>
-<p:sld xmlns:a="http://schemas.openxmlformats.org/drawingml/2006/main" xmlns:r="http://schemas.openxmlformats.org/officeDocument/2006/relationships" xmlns:p="http://schemas.openxmlformats.org/presentationml/2006/main">
-  <p:cSld>
     <p:spTree>
       <p:nvGrpSpPr>
         <p:cNvPr id="1" name="">
@@ -25749,7 +22975,7 @@
         </p:nvSpPr>
         <p:spPr>
           <a:xfrm>
-            <a:off x="201930" y="287537"/>
+            <a:off x="201930" y="87905"/>
             <a:ext cx="9053830" cy="443984"/>
           </a:xfrm>
         </p:spPr>
@@ -25780,14 +23006,14 @@
           <p:nvPr>
             <p:extLst>
               <p:ext uri="{D42A27DB-BD31-4B8C-83A1-F6EECF244321}">
-                <p14:modId xmlns:p14="http://schemas.microsoft.com/office/powerpoint/2010/main" val="2327787951"/>
+                <p14:modId xmlns:p14="http://schemas.microsoft.com/office/powerpoint/2010/main" val="3092935588"/>
               </p:ext>
             </p:extLst>
           </p:nvPr>
         </p:nvGraphicFramePr>
         <p:xfrm>
-          <a:off x="116840" y="815458"/>
-          <a:ext cx="8910320" cy="3969902"/>
+          <a:off x="47752" y="629388"/>
+          <a:ext cx="8910320" cy="4716767"/>
         </p:xfrm>
         <a:graphic>
           <a:graphicData uri="http://schemas.openxmlformats.org/drawingml/2006/diagram">
@@ -25824,8 +23050,8 @@
         </p:blipFill>
         <p:spPr bwMode="auto">
           <a:xfrm>
-            <a:off x="7800859" y="4352434"/>
-            <a:ext cx="1038341" cy="1033726"/>
+            <a:off x="8366443" y="54520"/>
+            <a:ext cx="591629" cy="589000"/>
           </a:xfrm>
           <a:prstGeom prst="rect">
             <a:avLst/>
@@ -25855,7 +23081,7 @@
 </p:sld>
 </file>
 
-<file path=ppt/slides/slide8.xml><?xml version="1.0" encoding="utf-8"?>
+<file path=ppt/slides/slide7.xml><?xml version="1.0" encoding="utf-8"?>
 <p:sld xmlns:a="http://schemas.openxmlformats.org/drawingml/2006/main" xmlns:r="http://schemas.openxmlformats.org/officeDocument/2006/relationships" xmlns:p="http://schemas.openxmlformats.org/presentationml/2006/main">
   <p:cSld>
     <p:spTree>
@@ -26498,7 +23724,7 @@
 </p:sld>
 </file>
 
-<file path=ppt/slides/slide9.xml><?xml version="1.0" encoding="utf-8"?>
+<file path=ppt/slides/slide8.xml><?xml version="1.0" encoding="utf-8"?>
 <p:sld xmlns:a="http://schemas.openxmlformats.org/drawingml/2006/main" xmlns:r="http://schemas.openxmlformats.org/officeDocument/2006/relationships" xmlns:p="http://schemas.openxmlformats.org/presentationml/2006/main">
   <p:cSld>
     <p:bg>
@@ -28808,10 +26034,2368 @@
           </p:txBody>
         </p:sp>
       </p:grpSp>
+      <p:sp>
+        <p:nvSpPr>
+          <p:cNvPr id="4" name="TextBox 3">
+            <a:extLst>
+              <a:ext uri="{FF2B5EF4-FFF2-40B4-BE49-F238E27FC236}">
+                <a16:creationId xmlns:a16="http://schemas.microsoft.com/office/drawing/2014/main" id="{A29B8D0F-749A-E4B8-07BA-DF35850FDC9A}"/>
+              </a:ext>
+            </a:extLst>
+          </p:cNvPr>
+          <p:cNvSpPr txBox="1"/>
+          <p:nvPr/>
+        </p:nvSpPr>
+        <p:spPr>
+          <a:xfrm>
+            <a:off x="4233672" y="2263450"/>
+            <a:ext cx="4572000" cy="646331"/>
+          </a:xfrm>
+          <a:prstGeom prst="rect">
+            <a:avLst/>
+          </a:prstGeom>
+          <a:noFill/>
+        </p:spPr>
+        <p:txBody>
+          <a:bodyPr wrap="square">
+            <a:spAutoFit/>
+          </a:bodyPr>
+          <a:lstStyle/>
+          <a:p>
+            <a:r>
+              <a:rPr lang="en-US" dirty="0"/>
+              <a:t>https://github.com/hshujuan/text_to_image_grader</a:t>
+            </a:r>
+          </a:p>
+        </p:txBody>
+      </p:sp>
     </p:spTree>
     <p:extLst>
       <p:ext uri="{BB962C8B-B14F-4D97-AF65-F5344CB8AC3E}">
         <p14:creationId xmlns:p14="http://schemas.microsoft.com/office/powerpoint/2010/main" val="804159891"/>
+      </p:ext>
+    </p:extLst>
+  </p:cSld>
+  <p:clrMapOvr>
+    <a:masterClrMapping/>
+  </p:clrMapOvr>
+</p:sld>
+</file>
+
+<file path=ppt/slides/slide9.xml><?xml version="1.0" encoding="utf-8"?>
+<p:sld xmlns:a="http://schemas.openxmlformats.org/drawingml/2006/main" xmlns:r="http://schemas.openxmlformats.org/officeDocument/2006/relationships" xmlns:p="http://schemas.openxmlformats.org/presentationml/2006/main">
+  <p:cSld>
+    <p:bg>
+      <p:bgPr>
+        <a:solidFill>
+          <a:schemeClr val="bg1"/>
+        </a:solidFill>
+        <a:effectLst/>
+      </p:bgPr>
+    </p:bg>
+    <p:spTree>
+      <p:nvGrpSpPr>
+        <p:cNvPr id="1" name=""/>
+        <p:cNvGrpSpPr/>
+        <p:nvPr/>
+      </p:nvGrpSpPr>
+      <p:grpSpPr>
+        <a:xfrm>
+          <a:off x="0" y="0"/>
+          <a:ext cx="0" cy="0"/>
+          <a:chOff x="0" y="0"/>
+          <a:chExt cx="0" cy="0"/>
+        </a:xfrm>
+      </p:grpSpPr>
+      <p:sp useBgFill="1">
+        <p:nvSpPr>
+          <p:cNvPr id="9" name="Rectangle 8">
+            <a:extLst>
+              <a:ext uri="{FF2B5EF4-FFF2-40B4-BE49-F238E27FC236}">
+                <a16:creationId xmlns:a16="http://schemas.microsoft.com/office/drawing/2014/main" id="{A3363022-C969-41E9-8EB2-E4C94908C1FA}"/>
+              </a:ext>
+              <a:ext uri="{C183D7F6-B498-43B3-948B-1728B52AA6E4}">
+                <adec:decorative xmlns:adec="http://schemas.microsoft.com/office/drawing/2017/decorative" val="1"/>
+              </a:ext>
+            </a:extLst>
+          </p:cNvPr>
+          <p:cNvSpPr>
+            <a:spLocks noGrp="1" noRot="1" noChangeAspect="1" noMove="1" noResize="1" noEditPoints="1" noAdjustHandles="1" noChangeArrowheads="1" noChangeShapeType="1" noTextEdit="1"/>
+          </p:cNvSpPr>
+          <p:nvPr>
+            <p:extLst>
+              <p:ext uri="{386F3935-93C4-4BCD-93E2-E3B085C9AB24}">
+                <p16:designElem xmlns:p16="http://schemas.microsoft.com/office/powerpoint/2015/main" val="1"/>
+              </p:ext>
+            </p:extLst>
+          </p:nvPr>
+        </p:nvSpPr>
+        <p:spPr>
+          <a:xfrm>
+            <a:off x="0" y="0"/>
+            <a:ext cx="9143771" cy="5395968"/>
+          </a:xfrm>
+          <a:prstGeom prst="rect">
+            <a:avLst/>
+          </a:prstGeom>
+          <a:ln>
+            <a:noFill/>
+          </a:ln>
+        </p:spPr>
+        <p:style>
+          <a:lnRef idx="2">
+            <a:schemeClr val="accent1">
+              <a:shade val="50000"/>
+            </a:schemeClr>
+          </a:lnRef>
+          <a:fillRef idx="1">
+            <a:schemeClr val="accent1"/>
+          </a:fillRef>
+          <a:effectRef idx="0">
+            <a:schemeClr val="accent1"/>
+          </a:effectRef>
+          <a:fontRef idx="minor">
+            <a:schemeClr val="lt1"/>
+          </a:fontRef>
+        </p:style>
+        <p:txBody>
+          <a:bodyPr rtlCol="0" anchor="ctr"/>
+          <a:lstStyle/>
+          <a:p>
+            <a:pPr algn="ctr"/>
+            <a:endParaRPr lang="en-US"/>
+          </a:p>
+        </p:txBody>
+      </p:sp>
+      <p:sp>
+        <p:nvSpPr>
+          <p:cNvPr id="11" name="Rectangle 10">
+            <a:extLst>
+              <a:ext uri="{FF2B5EF4-FFF2-40B4-BE49-F238E27FC236}">
+                <a16:creationId xmlns:a16="http://schemas.microsoft.com/office/drawing/2014/main" id="{8D1AD6B3-BE88-4CEB-BA17-790657CC4729}"/>
+              </a:ext>
+              <a:ext uri="{C183D7F6-B498-43B3-948B-1728B52AA6E4}">
+                <adec:decorative xmlns:adec="http://schemas.microsoft.com/office/drawing/2017/decorative" val="1"/>
+              </a:ext>
+            </a:extLst>
+          </p:cNvPr>
+          <p:cNvSpPr>
+            <a:spLocks noGrp="1" noRot="1" noChangeAspect="1" noMove="1" noResize="1" noEditPoints="1" noAdjustHandles="1" noChangeArrowheads="1" noChangeShapeType="1" noTextEdit="1"/>
+          </p:cNvSpPr>
+          <p:nvPr>
+            <p:extLst>
+              <p:ext uri="{386F3935-93C4-4BCD-93E2-E3B085C9AB24}">
+                <p16:designElem xmlns:p16="http://schemas.microsoft.com/office/powerpoint/2015/main" val="1"/>
+              </p:ext>
+            </p:extLst>
+          </p:nvPr>
+        </p:nvSpPr>
+        <p:spPr>
+          <a:xfrm>
+            <a:off x="228" y="0"/>
+            <a:ext cx="9143772" cy="5400675"/>
+          </a:xfrm>
+          <a:prstGeom prst="rect">
+            <a:avLst/>
+          </a:prstGeom>
+          <a:solidFill>
+            <a:schemeClr val="bg1"/>
+          </a:solidFill>
+          <a:ln>
+            <a:noFill/>
+          </a:ln>
+        </p:spPr>
+        <p:style>
+          <a:lnRef idx="2">
+            <a:schemeClr val="accent1">
+              <a:shade val="50000"/>
+            </a:schemeClr>
+          </a:lnRef>
+          <a:fillRef idx="1">
+            <a:schemeClr val="accent1"/>
+          </a:fillRef>
+          <a:effectRef idx="0">
+            <a:schemeClr val="accent1"/>
+          </a:effectRef>
+          <a:fontRef idx="minor">
+            <a:schemeClr val="lt1"/>
+          </a:fontRef>
+        </p:style>
+        <p:txBody>
+          <a:bodyPr rtlCol="0" anchor="ctr"/>
+          <a:lstStyle/>
+          <a:p>
+            <a:pPr algn="ctr"/>
+            <a:endParaRPr lang="en-US"/>
+          </a:p>
+        </p:txBody>
+      </p:sp>
+      <p:sp>
+        <p:nvSpPr>
+          <p:cNvPr id="2" name="Title 1">
+            <a:extLst>
+              <a:ext uri="{FF2B5EF4-FFF2-40B4-BE49-F238E27FC236}">
+                <a16:creationId xmlns:a16="http://schemas.microsoft.com/office/drawing/2014/main" id="{26F81A4B-3A8D-0EF8-8FC0-34BAB1EE6F18}"/>
+              </a:ext>
+            </a:extLst>
+          </p:cNvPr>
+          <p:cNvSpPr>
+            <a:spLocks noGrp="1"/>
+          </p:cNvSpPr>
+          <p:nvPr>
+            <p:ph type="title"/>
+          </p:nvPr>
+        </p:nvSpPr>
+        <p:spPr>
+          <a:xfrm>
+            <a:off x="4977646" y="1148069"/>
+            <a:ext cx="3604497" cy="1021478"/>
+          </a:xfrm>
+        </p:spPr>
+        <p:txBody>
+          <a:bodyPr vert="horz" lIns="91440" tIns="45720" rIns="91440" bIns="45720" rtlCol="0" anchor="t">
+            <a:normAutofit/>
+          </a:bodyPr>
+          <a:lstStyle/>
+          <a:p>
+            <a:pPr defTabSz="914400"/>
+            <a:r>
+              <a:rPr lang="en-US" sz="3000" b="1" kern="1200" dirty="0">
+                <a:solidFill>
+                  <a:schemeClr val="tx2"/>
+                </a:solidFill>
+                <a:latin typeface="+mj-lt"/>
+                <a:ea typeface="+mj-ea"/>
+                <a:cs typeface="+mj-cs"/>
+              </a:rPr>
+              <a:t>Appendix</a:t>
+            </a:r>
+          </a:p>
+        </p:txBody>
+      </p:sp>
+      <p:pic>
+        <p:nvPicPr>
+          <p:cNvPr id="6" name="Graphic 5" descr="Open Folder">
+            <a:extLst>
+              <a:ext uri="{FF2B5EF4-FFF2-40B4-BE49-F238E27FC236}">
+                <a16:creationId xmlns:a16="http://schemas.microsoft.com/office/drawing/2014/main" id="{124707F1-A8A4-9BC7-E84F-EEFBA8C36925}"/>
+              </a:ext>
+            </a:extLst>
+          </p:cNvPr>
+          <p:cNvPicPr>
+            <a:picLocks noChangeAspect="1"/>
+          </p:cNvPicPr>
+          <p:nvPr/>
+        </p:nvPicPr>
+        <p:blipFill>
+          <a:blip r:embed="rId2">
+            <a:extLst>
+              <a:ext uri="{28A0092B-C50C-407E-A947-70E740481C1C}">
+                <a14:useLocalDpi xmlns:a14="http://schemas.microsoft.com/office/drawing/2010/main" val="0"/>
+              </a:ext>
+              <a:ext uri="{96DAC541-7B7A-43D3-8B79-37D633B846F1}">
+                <asvg:svgBlip xmlns:asvg="http://schemas.microsoft.com/office/drawing/2016/SVG/main" r:embed="rId3"/>
+              </a:ext>
+            </a:extLst>
+          </a:blip>
+          <a:stretch>
+            <a:fillRect/>
+          </a:stretch>
+        </p:blipFill>
+        <p:spPr>
+          <a:xfrm>
+            <a:off x="255352" y="1507222"/>
+            <a:ext cx="3106320" cy="3106320"/>
+          </a:xfrm>
+          <a:custGeom>
+            <a:avLst/>
+            <a:gdLst/>
+            <a:ahLst/>
+            <a:cxnLst/>
+            <a:rect l="l" t="t" r="r" b="b"/>
+            <a:pathLst>
+              <a:path w="4141760" h="4377846">
+                <a:moveTo>
+                  <a:pt x="0" y="0"/>
+                </a:moveTo>
+                <a:lnTo>
+                  <a:pt x="4141760" y="0"/>
+                </a:lnTo>
+                <a:lnTo>
+                  <a:pt x="4141760" y="4377846"/>
+                </a:lnTo>
+                <a:lnTo>
+                  <a:pt x="0" y="4377846"/>
+                </a:lnTo>
+                <a:close/>
+              </a:path>
+            </a:pathLst>
+          </a:custGeom>
+        </p:spPr>
+      </p:pic>
+      <p:grpSp>
+        <p:nvGrpSpPr>
+          <p:cNvPr id="13" name="Group 12">
+            <a:extLst>
+              <a:ext uri="{FF2B5EF4-FFF2-40B4-BE49-F238E27FC236}">
+                <a16:creationId xmlns:a16="http://schemas.microsoft.com/office/drawing/2014/main" id="{89D1390B-7E13-4B4F-9CB2-391063412E54}"/>
+              </a:ext>
+              <a:ext uri="{C183D7F6-B498-43B3-948B-1728B52AA6E4}">
+                <adec:decorative xmlns:adec="http://schemas.microsoft.com/office/drawing/2017/decorative" val="1"/>
+              </a:ext>
+            </a:extLst>
+          </p:cNvPr>
+          <p:cNvGrpSpPr>
+            <a:grpSpLocks noGrp="1" noUngrp="1" noRot="1" noChangeAspect="1" noMove="1" noResize="1"/>
+          </p:cNvGrpSpPr>
+          <p:nvPr>
+            <p:extLst>
+              <p:ext uri="{386F3935-93C4-4BCD-93E2-E3B085C9AB24}">
+                <p16:designElem xmlns:p16="http://schemas.microsoft.com/office/powerpoint/2015/main" val="1"/>
+              </p:ext>
+            </p:extLst>
+          </p:nvPr>
+        </p:nvGrpSpPr>
+        <p:grpSpPr>
+          <a:xfrm>
+            <a:off x="-3189" y="-4707"/>
+            <a:ext cx="4679005" cy="5405382"/>
+            <a:chOff x="305" y="-5977"/>
+            <a:chExt cx="6238675" cy="6863979"/>
+          </a:xfrm>
+        </p:grpSpPr>
+        <p:sp>
+          <p:nvSpPr>
+            <p:cNvPr id="14" name="Freeform: Shape 13">
+              <a:extLst>
+                <a:ext uri="{FF2B5EF4-FFF2-40B4-BE49-F238E27FC236}">
+                  <a16:creationId xmlns:a16="http://schemas.microsoft.com/office/drawing/2014/main" id="{9E720206-AA49-4786-A932-A2650DE09183}"/>
+                </a:ext>
+                <a:ext uri="{C183D7F6-B498-43B3-948B-1728B52AA6E4}">
+                  <adec:decorative xmlns:adec="http://schemas.microsoft.com/office/drawing/2017/decorative" val="1"/>
+                </a:ext>
+              </a:extLst>
+            </p:cNvPr>
+            <p:cNvSpPr/>
+            <p:nvPr>
+              <p:extLst>
+                <p:ext uri="{386F3935-93C4-4BCD-93E2-E3B085C9AB24}">
+                  <p16:designElem xmlns:p16="http://schemas.microsoft.com/office/powerpoint/2015/main" val="1"/>
+                </p:ext>
+              </p:extLst>
+            </p:nvPr>
+          </p:nvSpPr>
+          <p:spPr>
+            <a:xfrm flipH="1">
+              <a:off x="305" y="34854"/>
+              <a:ext cx="6028697" cy="6817170"/>
+            </a:xfrm>
+            <a:custGeom>
+              <a:avLst/>
+              <a:gdLst>
+                <a:gd name="connsiteX0" fmla="*/ 6028697 w 6028697"/>
+                <a:gd name="connsiteY0" fmla="*/ 6155323 h 6817170"/>
+                <a:gd name="connsiteX1" fmla="*/ 6028697 w 6028697"/>
+                <a:gd name="connsiteY1" fmla="*/ 6817170 h 6817170"/>
+                <a:gd name="connsiteX2" fmla="*/ 5157862 w 6028697"/>
+                <a:gd name="connsiteY2" fmla="*/ 6817170 h 6817170"/>
+                <a:gd name="connsiteX3" fmla="*/ 5347156 w 6028697"/>
+                <a:gd name="connsiteY3" fmla="*/ 6687553 h 6817170"/>
+                <a:gd name="connsiteX4" fmla="*/ 5487470 w 6028697"/>
+                <a:gd name="connsiteY4" fmla="*/ 6581714 h 6817170"/>
+                <a:gd name="connsiteX5" fmla="*/ 5627642 w 6028697"/>
+                <a:gd name="connsiteY5" fmla="*/ 6472328 h 6817170"/>
+                <a:gd name="connsiteX6" fmla="*/ 5911392 w 6028697"/>
+                <a:gd name="connsiteY6" fmla="*/ 6245328 h 6817170"/>
+                <a:gd name="connsiteX7" fmla="*/ 4481066 w 6028697"/>
+                <a:gd name="connsiteY7" fmla="*/ 478 h 6817170"/>
+                <a:gd name="connsiteX8" fmla="*/ 4672258 w 6028697"/>
+                <a:gd name="connsiteY8" fmla="*/ 7519 h 6817170"/>
+                <a:gd name="connsiteX9" fmla="*/ 5429869 w 6028697"/>
+                <a:gd name="connsiteY9" fmla="*/ 125134 h 6817170"/>
+                <a:gd name="connsiteX10" fmla="*/ 5976319 w 6028697"/>
+                <a:gd name="connsiteY10" fmla="*/ 314893 h 6817170"/>
+                <a:gd name="connsiteX11" fmla="*/ 6028697 w 6028697"/>
+                <a:gd name="connsiteY11" fmla="*/ 339901 h 6817170"/>
+                <a:gd name="connsiteX12" fmla="*/ 6028697 w 6028697"/>
+                <a:gd name="connsiteY12" fmla="*/ 732458 h 6817170"/>
+                <a:gd name="connsiteX13" fmla="*/ 5990985 w 6028697"/>
+                <a:gd name="connsiteY13" fmla="*/ 712211 h 6817170"/>
+                <a:gd name="connsiteX14" fmla="*/ 5341339 w 6028697"/>
+                <a:gd name="connsiteY14" fmla="*/ 475281 h 6817170"/>
+                <a:gd name="connsiteX15" fmla="*/ 4651969 w 6028697"/>
+                <a:gd name="connsiteY15" fmla="*/ 377104 h 6817170"/>
+                <a:gd name="connsiteX16" fmla="*/ 3953093 w 6028697"/>
+                <a:gd name="connsiteY16" fmla="*/ 402498 h 6817170"/>
+                <a:gd name="connsiteX17" fmla="*/ 3267413 w 6028697"/>
+                <a:gd name="connsiteY17" fmla="*/ 546643 h 6817170"/>
+                <a:gd name="connsiteX18" fmla="*/ 1439498 w 6028697"/>
+                <a:gd name="connsiteY18" fmla="*/ 1568141 h 6817170"/>
+                <a:gd name="connsiteX19" fmla="*/ 960671 w 6028697"/>
+                <a:gd name="connsiteY19" fmla="*/ 2082013 h 6817170"/>
+                <a:gd name="connsiteX20" fmla="*/ 581866 w 6028697"/>
+                <a:gd name="connsiteY20" fmla="*/ 2672638 h 6817170"/>
+                <a:gd name="connsiteX21" fmla="*/ 324789 w 6028697"/>
+                <a:gd name="connsiteY21" fmla="*/ 3325262 h 6817170"/>
+                <a:gd name="connsiteX22" fmla="*/ 231151 w 6028697"/>
+                <a:gd name="connsiteY22" fmla="*/ 4022292 h 6817170"/>
+                <a:gd name="connsiteX23" fmla="*/ 270592 w 6028697"/>
+                <a:gd name="connsiteY23" fmla="*/ 4362792 h 6817170"/>
+                <a:gd name="connsiteX24" fmla="*/ 387213 w 6028697"/>
+                <a:gd name="connsiteY24" fmla="*/ 4681585 h 6817170"/>
+                <a:gd name="connsiteX25" fmla="*/ 468507 w 6028697"/>
+                <a:gd name="connsiteY25" fmla="*/ 4831546 h 6817170"/>
+                <a:gd name="connsiteX26" fmla="*/ 561862 w 6028697"/>
+                <a:gd name="connsiteY26" fmla="*/ 4976826 h 6817170"/>
+                <a:gd name="connsiteX27" fmla="*/ 777511 w 6028697"/>
+                <a:gd name="connsiteY27" fmla="*/ 5257597 h 6817170"/>
+                <a:gd name="connsiteX28" fmla="*/ 1010895 w 6028697"/>
+                <a:gd name="connsiteY28" fmla="*/ 5540494 h 6817170"/>
+                <a:gd name="connsiteX29" fmla="*/ 1126948 w 6028697"/>
+                <a:gd name="connsiteY29" fmla="*/ 5688186 h 6817170"/>
+                <a:gd name="connsiteX30" fmla="*/ 1182706 w 6028697"/>
+                <a:gd name="connsiteY30" fmla="*/ 5760543 h 6817170"/>
+                <a:gd name="connsiteX31" fmla="*/ 1237327 w 6028697"/>
+                <a:gd name="connsiteY31" fmla="*/ 5830060 h 6817170"/>
+                <a:gd name="connsiteX32" fmla="*/ 1706649 w 6028697"/>
+                <a:gd name="connsiteY32" fmla="*/ 6342797 h 6817170"/>
+                <a:gd name="connsiteX33" fmla="*/ 1956207 w 6028697"/>
+                <a:gd name="connsiteY33" fmla="*/ 6573484 h 6817170"/>
+                <a:gd name="connsiteX34" fmla="*/ 2217681 w 6028697"/>
+                <a:gd name="connsiteY34" fmla="*/ 6786297 h 6817170"/>
+                <a:gd name="connsiteX35" fmla="*/ 2260820 w 6028697"/>
+                <a:gd name="connsiteY35" fmla="*/ 6817170 h 6817170"/>
+                <a:gd name="connsiteX36" fmla="*/ 1429497 w 6028697"/>
+                <a:gd name="connsiteY36" fmla="*/ 6817170 h 6817170"/>
+                <a:gd name="connsiteX37" fmla="*/ 1327275 w 6028697"/>
+                <a:gd name="connsiteY37" fmla="*/ 6713800 h 6817170"/>
+                <a:gd name="connsiteX38" fmla="*/ 1080556 w 6028697"/>
+                <a:gd name="connsiteY38" fmla="*/ 6414443 h 6817170"/>
+                <a:gd name="connsiteX39" fmla="*/ 865189 w 6028697"/>
+                <a:gd name="connsiteY39" fmla="*/ 6097496 h 6817170"/>
+                <a:gd name="connsiteX40" fmla="*/ 814823 w 6028697"/>
+                <a:gd name="connsiteY40" fmla="*/ 6016911 h 6817170"/>
+                <a:gd name="connsiteX41" fmla="*/ 766729 w 6028697"/>
+                <a:gd name="connsiteY41" fmla="*/ 5938453 h 6817170"/>
+                <a:gd name="connsiteX42" fmla="*/ 671672 w 6028697"/>
+                <a:gd name="connsiteY42" fmla="*/ 5786648 h 6817170"/>
+                <a:gd name="connsiteX43" fmla="*/ 474608 w 6028697"/>
+                <a:gd name="connsiteY43" fmla="*/ 5474664 h 6817170"/>
+                <a:gd name="connsiteX44" fmla="*/ 282652 w 6028697"/>
+                <a:gd name="connsiteY44" fmla="*/ 5146508 h 6817170"/>
+                <a:gd name="connsiteX45" fmla="*/ 196108 w 6028697"/>
+                <a:gd name="connsiteY45" fmla="*/ 4972712 h 6817170"/>
+                <a:gd name="connsiteX46" fmla="*/ 122474 w 6028697"/>
+                <a:gd name="connsiteY46" fmla="*/ 4791821 h 6817170"/>
+                <a:gd name="connsiteX47" fmla="*/ 65724 w 6028697"/>
+                <a:gd name="connsiteY47" fmla="*/ 4603129 h 6817170"/>
+                <a:gd name="connsiteX48" fmla="*/ 44727 w 6028697"/>
+                <a:gd name="connsiteY48" fmla="*/ 4506937 h 6817170"/>
+                <a:gd name="connsiteX49" fmla="*/ 35505 w 6028697"/>
+                <a:gd name="connsiteY49" fmla="*/ 4458699 h 6817170"/>
+                <a:gd name="connsiteX50" fmla="*/ 27845 w 6028697"/>
+                <a:gd name="connsiteY50" fmla="*/ 4410320 h 6817170"/>
+                <a:gd name="connsiteX51" fmla="*/ 37 w 6028697"/>
+                <a:gd name="connsiteY51" fmla="*/ 4022292 h 6817170"/>
+                <a:gd name="connsiteX52" fmla="*/ 78777 w 6028697"/>
+                <a:gd name="connsiteY52" fmla="*/ 3267236 h 6817170"/>
+                <a:gd name="connsiteX53" fmla="*/ 315424 w 6028697"/>
+                <a:gd name="connsiteY53" fmla="*/ 2543673 h 6817170"/>
+                <a:gd name="connsiteX54" fmla="*/ 1202710 w 6028697"/>
+                <a:gd name="connsiteY54" fmla="*/ 1314895 h 6817170"/>
+                <a:gd name="connsiteX55" fmla="*/ 1791065 w 6028697"/>
+                <a:gd name="connsiteY55" fmla="*/ 833514 h 6817170"/>
+                <a:gd name="connsiteX56" fmla="*/ 3908404 w 6028697"/>
+                <a:gd name="connsiteY56" fmla="*/ 29794 h 6817170"/>
+                <a:gd name="connsiteX57" fmla="*/ 4481066 w 6028697"/>
+                <a:gd name="connsiteY57" fmla="*/ 478 h 6817170"/>
+              </a:gdLst>
+              <a:ahLst/>
+              <a:cxnLst>
+                <a:cxn ang="0">
+                  <a:pos x="connsiteX0" y="connsiteY0"/>
+                </a:cxn>
+                <a:cxn ang="0">
+                  <a:pos x="connsiteX1" y="connsiteY1"/>
+                </a:cxn>
+                <a:cxn ang="0">
+                  <a:pos x="connsiteX2" y="connsiteY2"/>
+                </a:cxn>
+                <a:cxn ang="0">
+                  <a:pos x="connsiteX3" y="connsiteY3"/>
+                </a:cxn>
+                <a:cxn ang="0">
+                  <a:pos x="connsiteX4" y="connsiteY4"/>
+                </a:cxn>
+                <a:cxn ang="0">
+                  <a:pos x="connsiteX5" y="connsiteY5"/>
+                </a:cxn>
+                <a:cxn ang="0">
+                  <a:pos x="connsiteX6" y="connsiteY6"/>
+                </a:cxn>
+                <a:cxn ang="0">
+                  <a:pos x="connsiteX7" y="connsiteY7"/>
+                </a:cxn>
+                <a:cxn ang="0">
+                  <a:pos x="connsiteX8" y="connsiteY8"/>
+                </a:cxn>
+                <a:cxn ang="0">
+                  <a:pos x="connsiteX9" y="connsiteY9"/>
+                </a:cxn>
+                <a:cxn ang="0">
+                  <a:pos x="connsiteX10" y="connsiteY10"/>
+                </a:cxn>
+                <a:cxn ang="0">
+                  <a:pos x="connsiteX11" y="connsiteY11"/>
+                </a:cxn>
+                <a:cxn ang="0">
+                  <a:pos x="connsiteX12" y="connsiteY12"/>
+                </a:cxn>
+                <a:cxn ang="0">
+                  <a:pos x="connsiteX13" y="connsiteY13"/>
+                </a:cxn>
+                <a:cxn ang="0">
+                  <a:pos x="connsiteX14" y="connsiteY14"/>
+                </a:cxn>
+                <a:cxn ang="0">
+                  <a:pos x="connsiteX15" y="connsiteY15"/>
+                </a:cxn>
+                <a:cxn ang="0">
+                  <a:pos x="connsiteX16" y="connsiteY16"/>
+                </a:cxn>
+                <a:cxn ang="0">
+                  <a:pos x="connsiteX17" y="connsiteY17"/>
+                </a:cxn>
+                <a:cxn ang="0">
+                  <a:pos x="connsiteX18" y="connsiteY18"/>
+                </a:cxn>
+                <a:cxn ang="0">
+                  <a:pos x="connsiteX19" y="connsiteY19"/>
+                </a:cxn>
+                <a:cxn ang="0">
+                  <a:pos x="connsiteX20" y="connsiteY20"/>
+                </a:cxn>
+                <a:cxn ang="0">
+                  <a:pos x="connsiteX21" y="connsiteY21"/>
+                </a:cxn>
+                <a:cxn ang="0">
+                  <a:pos x="connsiteX22" y="connsiteY22"/>
+                </a:cxn>
+                <a:cxn ang="0">
+                  <a:pos x="connsiteX23" y="connsiteY23"/>
+                </a:cxn>
+                <a:cxn ang="0">
+                  <a:pos x="connsiteX24" y="connsiteY24"/>
+                </a:cxn>
+                <a:cxn ang="0">
+                  <a:pos x="connsiteX25" y="connsiteY25"/>
+                </a:cxn>
+                <a:cxn ang="0">
+                  <a:pos x="connsiteX26" y="connsiteY26"/>
+                </a:cxn>
+                <a:cxn ang="0">
+                  <a:pos x="connsiteX27" y="connsiteY27"/>
+                </a:cxn>
+                <a:cxn ang="0">
+                  <a:pos x="connsiteX28" y="connsiteY28"/>
+                </a:cxn>
+                <a:cxn ang="0">
+                  <a:pos x="connsiteX29" y="connsiteY29"/>
+                </a:cxn>
+                <a:cxn ang="0">
+                  <a:pos x="connsiteX30" y="connsiteY30"/>
+                </a:cxn>
+                <a:cxn ang="0">
+                  <a:pos x="connsiteX31" y="connsiteY31"/>
+                </a:cxn>
+                <a:cxn ang="0">
+                  <a:pos x="connsiteX32" y="connsiteY32"/>
+                </a:cxn>
+                <a:cxn ang="0">
+                  <a:pos x="connsiteX33" y="connsiteY33"/>
+                </a:cxn>
+                <a:cxn ang="0">
+                  <a:pos x="connsiteX34" y="connsiteY34"/>
+                </a:cxn>
+                <a:cxn ang="0">
+                  <a:pos x="connsiteX35" y="connsiteY35"/>
+                </a:cxn>
+                <a:cxn ang="0">
+                  <a:pos x="connsiteX36" y="connsiteY36"/>
+                </a:cxn>
+                <a:cxn ang="0">
+                  <a:pos x="connsiteX37" y="connsiteY37"/>
+                </a:cxn>
+                <a:cxn ang="0">
+                  <a:pos x="connsiteX38" y="connsiteY38"/>
+                </a:cxn>
+                <a:cxn ang="0">
+                  <a:pos x="connsiteX39" y="connsiteY39"/>
+                </a:cxn>
+                <a:cxn ang="0">
+                  <a:pos x="connsiteX40" y="connsiteY40"/>
+                </a:cxn>
+                <a:cxn ang="0">
+                  <a:pos x="connsiteX41" y="connsiteY41"/>
+                </a:cxn>
+                <a:cxn ang="0">
+                  <a:pos x="connsiteX42" y="connsiteY42"/>
+                </a:cxn>
+                <a:cxn ang="0">
+                  <a:pos x="connsiteX43" y="connsiteY43"/>
+                </a:cxn>
+                <a:cxn ang="0">
+                  <a:pos x="connsiteX44" y="connsiteY44"/>
+                </a:cxn>
+                <a:cxn ang="0">
+                  <a:pos x="connsiteX45" y="connsiteY45"/>
+                </a:cxn>
+                <a:cxn ang="0">
+                  <a:pos x="connsiteX46" y="connsiteY46"/>
+                </a:cxn>
+                <a:cxn ang="0">
+                  <a:pos x="connsiteX47" y="connsiteY47"/>
+                </a:cxn>
+                <a:cxn ang="0">
+                  <a:pos x="connsiteX48" y="connsiteY48"/>
+                </a:cxn>
+                <a:cxn ang="0">
+                  <a:pos x="connsiteX49" y="connsiteY49"/>
+                </a:cxn>
+                <a:cxn ang="0">
+                  <a:pos x="connsiteX50" y="connsiteY50"/>
+                </a:cxn>
+                <a:cxn ang="0">
+                  <a:pos x="connsiteX51" y="connsiteY51"/>
+                </a:cxn>
+                <a:cxn ang="0">
+                  <a:pos x="connsiteX52" y="connsiteY52"/>
+                </a:cxn>
+                <a:cxn ang="0">
+                  <a:pos x="connsiteX53" y="connsiteY53"/>
+                </a:cxn>
+                <a:cxn ang="0">
+                  <a:pos x="connsiteX54" y="connsiteY54"/>
+                </a:cxn>
+                <a:cxn ang="0">
+                  <a:pos x="connsiteX55" y="connsiteY55"/>
+                </a:cxn>
+                <a:cxn ang="0">
+                  <a:pos x="connsiteX56" y="connsiteY56"/>
+                </a:cxn>
+                <a:cxn ang="0">
+                  <a:pos x="connsiteX57" y="connsiteY57"/>
+                </a:cxn>
+              </a:cxnLst>
+              <a:rect l="l" t="t" r="r" b="b"/>
+              <a:pathLst>
+                <a:path w="6028697" h="6817170">
+                  <a:moveTo>
+                    <a:pt x="6028697" y="6155323"/>
+                  </a:moveTo>
+                  <a:lnTo>
+                    <a:pt x="6028697" y="6817170"/>
+                  </a:lnTo>
+                  <a:lnTo>
+                    <a:pt x="5157862" y="6817170"/>
+                  </a:lnTo>
+                  <a:lnTo>
+                    <a:pt x="5347156" y="6687553"/>
+                  </a:lnTo>
+                  <a:cubicBezTo>
+                    <a:pt x="5394117" y="6653219"/>
+                    <a:pt x="5440793" y="6617608"/>
+                    <a:pt x="5487470" y="6581714"/>
+                  </a:cubicBezTo>
+                  <a:cubicBezTo>
+                    <a:pt x="5534147" y="6545820"/>
+                    <a:pt x="5580966" y="6509358"/>
+                    <a:pt x="5627642" y="6472328"/>
+                  </a:cubicBezTo>
+                  <a:lnTo>
+                    <a:pt x="5911392" y="6245328"/>
+                  </a:lnTo>
+                  <a:close/>
+                  <a:moveTo>
+                    <a:pt x="4481066" y="478"/>
+                  </a:moveTo>
+                  <a:cubicBezTo>
+                    <a:pt x="4544817" y="1422"/>
+                    <a:pt x="4608563" y="3769"/>
+                    <a:pt x="4672258" y="7519"/>
+                  </a:cubicBezTo>
+                  <a:cubicBezTo>
+                    <a:pt x="4927973" y="22364"/>
+                    <a:pt x="5181687" y="61751"/>
+                    <a:pt x="5429869" y="125134"/>
+                  </a:cubicBezTo>
+                  <a:cubicBezTo>
+                    <a:pt x="5617090" y="173104"/>
+                    <a:pt x="5799867" y="236595"/>
+                    <a:pt x="5976319" y="314893"/>
+                  </a:cubicBezTo>
+                  <a:lnTo>
+                    <a:pt x="6028697" y="339901"/>
+                  </a:lnTo>
+                  <a:lnTo>
+                    <a:pt x="6028697" y="732458"/>
+                  </a:lnTo>
+                  <a:lnTo>
+                    <a:pt x="5990985" y="712211"/>
+                  </a:lnTo>
+                  <a:cubicBezTo>
+                    <a:pt x="5783917" y="609342"/>
+                    <a:pt x="5566013" y="529876"/>
+                    <a:pt x="5341339" y="475281"/>
+                  </a:cubicBezTo>
+                  <a:cubicBezTo>
+                    <a:pt x="5115233" y="420503"/>
+                    <a:pt x="4884375" y="387624"/>
+                    <a:pt x="4651969" y="377104"/>
+                  </a:cubicBezTo>
+                  <a:cubicBezTo>
+                    <a:pt x="4418713" y="365171"/>
+                    <a:pt x="4184861" y="373670"/>
+                    <a:pt x="3953093" y="402498"/>
+                  </a:cubicBezTo>
+                  <a:cubicBezTo>
+                    <a:pt x="3721001" y="431832"/>
+                    <a:pt x="3491675" y="480040"/>
+                    <a:pt x="3267413" y="546643"/>
+                  </a:cubicBezTo>
+                  <a:cubicBezTo>
+                    <a:pt x="2591323" y="750761"/>
+                    <a:pt x="1967642" y="1099289"/>
+                    <a:pt x="1439498" y="1568141"/>
+                  </a:cubicBezTo>
+                  <a:cubicBezTo>
+                    <a:pt x="1265589" y="1725523"/>
+                    <a:pt x="1105393" y="1897434"/>
+                    <a:pt x="960671" y="2082013"/>
+                  </a:cubicBezTo>
+                  <a:cubicBezTo>
+                    <a:pt x="815775" y="2266294"/>
+                    <a:pt x="688923" y="2464081"/>
+                    <a:pt x="581866" y="2672638"/>
+                  </a:cubicBezTo>
+                  <a:cubicBezTo>
+                    <a:pt x="473765" y="2880669"/>
+                    <a:pt x="387610" y="3099397"/>
+                    <a:pt x="324789" y="3325262"/>
+                  </a:cubicBezTo>
+                  <a:cubicBezTo>
+                    <a:pt x="262714" y="3552403"/>
+                    <a:pt x="231223" y="3786822"/>
+                    <a:pt x="231151" y="4022292"/>
+                  </a:cubicBezTo>
+                  <a:cubicBezTo>
+                    <a:pt x="231413" y="4136912"/>
+                    <a:pt x="244645" y="4251136"/>
+                    <a:pt x="270592" y="4362792"/>
+                  </a:cubicBezTo>
+                  <a:cubicBezTo>
+                    <a:pt x="297885" y="4472943"/>
+                    <a:pt x="336983" y="4579833"/>
+                    <a:pt x="387213" y="4681585"/>
+                  </a:cubicBezTo>
+                  <a:cubicBezTo>
+                    <a:pt x="412042" y="4732517"/>
+                    <a:pt x="439423" y="4782457"/>
+                    <a:pt x="468507" y="4831546"/>
+                  </a:cubicBezTo>
+                  <a:cubicBezTo>
+                    <a:pt x="497591" y="4880636"/>
+                    <a:pt x="529230" y="4929015"/>
+                    <a:pt x="561862" y="4976826"/>
+                  </a:cubicBezTo>
+                  <a:cubicBezTo>
+                    <a:pt x="627975" y="5072166"/>
+                    <a:pt x="701466" y="5164668"/>
+                    <a:pt x="777511" y="5257597"/>
+                  </a:cubicBezTo>
+                  <a:cubicBezTo>
+                    <a:pt x="853556" y="5350524"/>
+                    <a:pt x="933574" y="5443594"/>
+                    <a:pt x="1010895" y="5540494"/>
+                  </a:cubicBezTo>
+                  <a:cubicBezTo>
+                    <a:pt x="1049957" y="5588732"/>
+                    <a:pt x="1088642" y="5637963"/>
+                    <a:pt x="1126948" y="5688186"/>
+                  </a:cubicBezTo>
+                  <a:lnTo>
+                    <a:pt x="1182706" y="5760543"/>
+                  </a:lnTo>
+                  <a:cubicBezTo>
+                    <a:pt x="1201007" y="5783669"/>
+                    <a:pt x="1218458" y="5807503"/>
+                    <a:pt x="1237327" y="5830060"/>
+                  </a:cubicBezTo>
+                  <a:cubicBezTo>
+                    <a:pt x="1383714" y="6009916"/>
+                    <a:pt x="1540413" y="6181116"/>
+                    <a:pt x="1706649" y="6342797"/>
+                  </a:cubicBezTo>
+                  <a:cubicBezTo>
+                    <a:pt x="1788084" y="6422531"/>
+                    <a:pt x="1871265" y="6499427"/>
+                    <a:pt x="1956207" y="6573484"/>
+                  </a:cubicBezTo>
+                  <a:cubicBezTo>
+                    <a:pt x="2041332" y="6647402"/>
+                    <a:pt x="2127733" y="6718907"/>
+                    <a:pt x="2217681" y="6786297"/>
+                  </a:cubicBezTo>
+                  <a:lnTo>
+                    <a:pt x="2260820" y="6817170"/>
+                  </a:lnTo>
+                  <a:lnTo>
+                    <a:pt x="1429497" y="6817170"/>
+                  </a:lnTo>
+                  <a:lnTo>
+                    <a:pt x="1327275" y="6713800"/>
+                  </a:lnTo>
+                  <a:cubicBezTo>
+                    <a:pt x="1239186" y="6618984"/>
+                    <a:pt x="1156797" y="6519019"/>
+                    <a:pt x="1080556" y="6414443"/>
+                  </a:cubicBezTo>
+                  <a:cubicBezTo>
+                    <a:pt x="1004653" y="6310734"/>
+                    <a:pt x="932439" y="6205177"/>
+                    <a:pt x="865189" y="6097496"/>
+                  </a:cubicBezTo>
+                  <a:cubicBezTo>
+                    <a:pt x="847881" y="6070823"/>
+                    <a:pt x="831565" y="6043725"/>
+                    <a:pt x="814823" y="6016911"/>
+                  </a:cubicBezTo>
+                  <a:lnTo>
+                    <a:pt x="766729" y="5938453"/>
+                  </a:lnTo>
+                  <a:cubicBezTo>
+                    <a:pt x="735941" y="5887947"/>
+                    <a:pt x="703878" y="5837581"/>
+                    <a:pt x="671672" y="5786648"/>
+                  </a:cubicBezTo>
+                  <a:lnTo>
+                    <a:pt x="474608" y="5474664"/>
+                  </a:lnTo>
+                  <a:cubicBezTo>
+                    <a:pt x="408778" y="5368968"/>
+                    <a:pt x="343516" y="5260008"/>
+                    <a:pt x="282652" y="5146508"/>
+                  </a:cubicBezTo>
+                  <a:cubicBezTo>
+                    <a:pt x="252290" y="5089759"/>
+                    <a:pt x="223065" y="5032015"/>
+                    <a:pt x="196108" y="4972712"/>
+                  </a:cubicBezTo>
+                  <a:cubicBezTo>
+                    <a:pt x="169152" y="4913408"/>
+                    <a:pt x="144607" y="4853111"/>
+                    <a:pt x="122474" y="4791821"/>
+                  </a:cubicBezTo>
+                  <a:cubicBezTo>
+                    <a:pt x="100342" y="4730532"/>
+                    <a:pt x="81757" y="4666830"/>
+                    <a:pt x="65724" y="4603129"/>
+                  </a:cubicBezTo>
+                  <a:cubicBezTo>
+                    <a:pt x="58205" y="4571064"/>
+                    <a:pt x="50828" y="4539143"/>
+                    <a:pt x="44727" y="4506937"/>
+                  </a:cubicBezTo>
+                  <a:lnTo>
+                    <a:pt x="35505" y="4458699"/>
+                  </a:lnTo>
+                  <a:lnTo>
+                    <a:pt x="27845" y="4410320"/>
+                  </a:lnTo>
+                  <a:cubicBezTo>
+                    <a:pt x="8635" y="4281881"/>
+                    <a:pt x="-661" y="4152150"/>
+                    <a:pt x="37" y="4022292"/>
+                  </a:cubicBezTo>
+                  <a:cubicBezTo>
+                    <a:pt x="712" y="3768592"/>
+                    <a:pt x="27094" y="3515615"/>
+                    <a:pt x="78777" y="3267236"/>
+                  </a:cubicBezTo>
+                  <a:cubicBezTo>
+                    <a:pt x="130048" y="3017876"/>
+                    <a:pt x="209439" y="2775142"/>
+                    <a:pt x="315424" y="2543673"/>
+                  </a:cubicBezTo>
+                  <a:cubicBezTo>
+                    <a:pt x="528236" y="2081161"/>
+                    <a:pt x="838234" y="1667312"/>
+                    <a:pt x="1202710" y="1314895"/>
+                  </a:cubicBezTo>
+                  <a:cubicBezTo>
+                    <a:pt x="1385514" y="1138814"/>
+                    <a:pt x="1582282" y="977831"/>
+                    <a:pt x="1791065" y="833514"/>
+                  </a:cubicBezTo>
+                  <a:cubicBezTo>
+                    <a:pt x="2420037" y="395614"/>
+                    <a:pt x="3147288" y="119557"/>
+                    <a:pt x="3908404" y="29794"/>
+                  </a:cubicBezTo>
+                  <a:cubicBezTo>
+                    <a:pt x="4098509" y="7429"/>
+                    <a:pt x="4289811" y="-2355"/>
+                    <a:pt x="4481066" y="478"/>
+                  </a:cubicBezTo>
+                  <a:close/>
+                </a:path>
+              </a:pathLst>
+            </a:custGeom>
+            <a:gradFill>
+              <a:gsLst>
+                <a:gs pos="2000">
+                  <a:schemeClr val="bg1">
+                    <a:alpha val="10000"/>
+                  </a:schemeClr>
+                </a:gs>
+                <a:gs pos="16000">
+                  <a:schemeClr val="accent6">
+                    <a:alpha val="10000"/>
+                  </a:schemeClr>
+                </a:gs>
+                <a:gs pos="100000">
+                  <a:schemeClr val="bg1">
+                    <a:alpha val="10000"/>
+                  </a:schemeClr>
+                </a:gs>
+                <a:gs pos="85000">
+                  <a:schemeClr val="accent1">
+                    <a:alpha val="10000"/>
+                  </a:schemeClr>
+                </a:gs>
+              </a:gsLst>
+              <a:lin ang="12000000" scaled="0"/>
+            </a:gradFill>
+            <a:ln>
+              <a:noFill/>
+            </a:ln>
+          </p:spPr>
+          <p:style>
+            <a:lnRef idx="2">
+              <a:schemeClr val="accent1">
+                <a:shade val="50000"/>
+              </a:schemeClr>
+            </a:lnRef>
+            <a:fillRef idx="1">
+              <a:schemeClr val="accent1"/>
+            </a:fillRef>
+            <a:effectRef idx="0">
+              <a:schemeClr val="accent1"/>
+            </a:effectRef>
+            <a:fontRef idx="minor">
+              <a:schemeClr val="lt1"/>
+            </a:fontRef>
+          </p:style>
+          <p:txBody>
+            <a:bodyPr rtlCol="0" anchor="ctr"/>
+            <a:lstStyle/>
+            <a:p>
+              <a:pPr algn="ctr"/>
+              <a:endParaRPr lang="en-US" dirty="0"/>
+            </a:p>
+          </p:txBody>
+        </p:sp>
+        <p:sp>
+          <p:nvSpPr>
+            <p:cNvPr id="15" name="Freeform: Shape 14">
+              <a:extLst>
+                <a:ext uri="{FF2B5EF4-FFF2-40B4-BE49-F238E27FC236}">
+                  <a16:creationId xmlns:a16="http://schemas.microsoft.com/office/drawing/2014/main" id="{C72F6EE6-EDE9-45A5-8F6D-02B9B7CB2C2F}"/>
+                </a:ext>
+                <a:ext uri="{C183D7F6-B498-43B3-948B-1728B52AA6E4}">
+                  <adec:decorative xmlns:adec="http://schemas.microsoft.com/office/drawing/2017/decorative" val="1"/>
+                </a:ext>
+              </a:extLst>
+            </p:cNvPr>
+            <p:cNvSpPr/>
+            <p:nvPr>
+              <p:extLst>
+                <p:ext uri="{386F3935-93C4-4BCD-93E2-E3B085C9AB24}">
+                  <p16:designElem xmlns:p16="http://schemas.microsoft.com/office/powerpoint/2015/main" val="1"/>
+                </p:ext>
+              </p:extLst>
+            </p:nvPr>
+          </p:nvSpPr>
+          <p:spPr>
+            <a:xfrm flipH="1">
+              <a:off x="305" y="1"/>
+              <a:ext cx="6165116" cy="6858001"/>
+            </a:xfrm>
+            <a:custGeom>
+              <a:avLst/>
+              <a:gdLst>
+                <a:gd name="connsiteX0" fmla="*/ 6264586 w 6264586"/>
+                <a:gd name="connsiteY0" fmla="*/ 6646464 h 6858001"/>
+                <a:gd name="connsiteX1" fmla="*/ 6264586 w 6264586"/>
+                <a:gd name="connsiteY1" fmla="*/ 6858001 h 6858001"/>
+                <a:gd name="connsiteX2" fmla="*/ 5997170 w 6264586"/>
+                <a:gd name="connsiteY2" fmla="*/ 6858001 h 6858001"/>
+                <a:gd name="connsiteX3" fmla="*/ 6121512 w 6264586"/>
+                <a:gd name="connsiteY3" fmla="*/ 6761029 h 6858001"/>
+                <a:gd name="connsiteX4" fmla="*/ 2693206 w 6264586"/>
+                <a:gd name="connsiteY4" fmla="*/ 0 h 6858001"/>
+                <a:gd name="connsiteX5" fmla="*/ 5872285 w 6264586"/>
+                <a:gd name="connsiteY5" fmla="*/ 0 h 6858001"/>
+                <a:gd name="connsiteX6" fmla="*/ 6024875 w 6264586"/>
+                <a:gd name="connsiteY6" fmla="*/ 68385 h 6858001"/>
+                <a:gd name="connsiteX7" fmla="*/ 6206432 w 6264586"/>
+                <a:gd name="connsiteY7" fmla="*/ 162336 h 6858001"/>
+                <a:gd name="connsiteX8" fmla="*/ 6264586 w 6264586"/>
+                <a:gd name="connsiteY8" fmla="*/ 196704 h 6858001"/>
+                <a:gd name="connsiteX9" fmla="*/ 6264586 w 6264586"/>
+                <a:gd name="connsiteY9" fmla="*/ 537242 h 6858001"/>
+                <a:gd name="connsiteX10" fmla="*/ 6230189 w 6264586"/>
+                <a:gd name="connsiteY10" fmla="*/ 517260 h 6858001"/>
+                <a:gd name="connsiteX11" fmla="*/ 5540536 w 6264586"/>
+                <a:gd name="connsiteY11" fmla="*/ 249543 h 6858001"/>
+                <a:gd name="connsiteX12" fmla="*/ 5178896 w 6264586"/>
+                <a:gd name="connsiteY12" fmla="*/ 178606 h 6858001"/>
+                <a:gd name="connsiteX13" fmla="*/ 4814279 w 6264586"/>
+                <a:gd name="connsiteY13" fmla="*/ 146683 h 6858001"/>
+                <a:gd name="connsiteX14" fmla="*/ 4655095 w 6264586"/>
+                <a:gd name="connsiteY14" fmla="*/ 143421 h 6858001"/>
+                <a:gd name="connsiteX15" fmla="*/ 4081069 w 6264586"/>
+                <a:gd name="connsiteY15" fmla="*/ 185983 h 6858001"/>
+                <a:gd name="connsiteX16" fmla="*/ 3720566 w 6264586"/>
+                <a:gd name="connsiteY16" fmla="*/ 256921 h 6858001"/>
+                <a:gd name="connsiteX17" fmla="*/ 3365879 w 6264586"/>
+                <a:gd name="connsiteY17" fmla="*/ 357651 h 6858001"/>
+                <a:gd name="connsiteX18" fmla="*/ 3020555 w 6264586"/>
+                <a:gd name="connsiteY18" fmla="*/ 486190 h 6858001"/>
+                <a:gd name="connsiteX19" fmla="*/ 2685163 w 6264586"/>
+                <a:gd name="connsiteY19" fmla="*/ 641542 h 6858001"/>
+                <a:gd name="connsiteX20" fmla="*/ 2047720 w 6264586"/>
+                <a:gd name="connsiteY20" fmla="*/ 1025030 h 6858001"/>
+                <a:gd name="connsiteX21" fmla="*/ 1897333 w 6264586"/>
+                <a:gd name="connsiteY21" fmla="*/ 1134983 h 6858001"/>
+                <a:gd name="connsiteX22" fmla="*/ 1835758 w 6264586"/>
+                <a:gd name="connsiteY22" fmla="*/ 1182227 h 6858001"/>
+                <a:gd name="connsiteX23" fmla="*/ 1823273 w 6264586"/>
+                <a:gd name="connsiteY23" fmla="*/ 1192016 h 6858001"/>
+                <a:gd name="connsiteX24" fmla="*/ 1750918 w 6264586"/>
+                <a:gd name="connsiteY24" fmla="*/ 1249760 h 6858001"/>
+                <a:gd name="connsiteX25" fmla="*/ 1469297 w 6264586"/>
+                <a:gd name="connsiteY25" fmla="*/ 1496906 h 6858001"/>
+                <a:gd name="connsiteX26" fmla="*/ 967769 w 6264586"/>
+                <a:gd name="connsiteY26" fmla="*/ 2056602 h 6858001"/>
+                <a:gd name="connsiteX27" fmla="*/ 754105 w 6264586"/>
+                <a:gd name="connsiteY27" fmla="*/ 2368727 h 6858001"/>
+                <a:gd name="connsiteX28" fmla="*/ 572364 w 6264586"/>
+                <a:gd name="connsiteY28" fmla="*/ 2701140 h 6858001"/>
+                <a:gd name="connsiteX29" fmla="*/ 532497 w 6264586"/>
+                <a:gd name="connsiteY29" fmla="*/ 2786265 h 6858001"/>
+                <a:gd name="connsiteX30" fmla="*/ 512918 w 6264586"/>
+                <a:gd name="connsiteY30" fmla="*/ 2828827 h 6858001"/>
+                <a:gd name="connsiteX31" fmla="*/ 494475 w 6264586"/>
+                <a:gd name="connsiteY31" fmla="*/ 2872240 h 6858001"/>
+                <a:gd name="connsiteX32" fmla="*/ 491637 w 6264586"/>
+                <a:gd name="connsiteY32" fmla="*/ 2878908 h 6858001"/>
+                <a:gd name="connsiteX33" fmla="*/ 459290 w 6264586"/>
+                <a:gd name="connsiteY33" fmla="*/ 2959635 h 6858001"/>
+                <a:gd name="connsiteX34" fmla="*/ 446805 w 6264586"/>
+                <a:gd name="connsiteY34" fmla="*/ 2992408 h 6858001"/>
+                <a:gd name="connsiteX35" fmla="*/ 426090 w 6264586"/>
+                <a:gd name="connsiteY35" fmla="*/ 3049158 h 6858001"/>
+                <a:gd name="connsiteX36" fmla="*/ 426090 w 6264586"/>
+                <a:gd name="connsiteY36" fmla="*/ 3049867 h 6858001"/>
+                <a:gd name="connsiteX37" fmla="*/ 318124 w 6264586"/>
+                <a:gd name="connsiteY37" fmla="*/ 3414202 h 6858001"/>
+                <a:gd name="connsiteX38" fmla="*/ 230729 w 6264586"/>
+                <a:gd name="connsiteY38" fmla="*/ 4169260 h 6858001"/>
+                <a:gd name="connsiteX39" fmla="*/ 268893 w 6264586"/>
+                <a:gd name="connsiteY39" fmla="*/ 4544236 h 6858001"/>
+                <a:gd name="connsiteX40" fmla="*/ 379840 w 6264586"/>
+                <a:gd name="connsiteY40" fmla="*/ 4900056 h 6858001"/>
+                <a:gd name="connsiteX41" fmla="*/ 406512 w 6264586"/>
+                <a:gd name="connsiteY41" fmla="*/ 4960211 h 6858001"/>
+                <a:gd name="connsiteX42" fmla="*/ 417862 w 6264586"/>
+                <a:gd name="connsiteY42" fmla="*/ 4984613 h 6858001"/>
+                <a:gd name="connsiteX43" fmla="*/ 428077 w 6264586"/>
+                <a:gd name="connsiteY43" fmla="*/ 5005043 h 6858001"/>
+                <a:gd name="connsiteX44" fmla="*/ 460140 w 6264586"/>
+                <a:gd name="connsiteY44" fmla="*/ 5067327 h 6858001"/>
+                <a:gd name="connsiteX45" fmla="*/ 555197 w 6264586"/>
+                <a:gd name="connsiteY45" fmla="*/ 5229773 h 6858001"/>
+                <a:gd name="connsiteX46" fmla="*/ 660611 w 6264586"/>
+                <a:gd name="connsiteY46" fmla="*/ 5387396 h 6858001"/>
+                <a:gd name="connsiteX47" fmla="*/ 774110 w 6264586"/>
+                <a:gd name="connsiteY47" fmla="*/ 5542182 h 6858001"/>
+                <a:gd name="connsiteX48" fmla="*/ 917829 w 6264586"/>
+                <a:gd name="connsiteY48" fmla="*/ 5727896 h 6858001"/>
+                <a:gd name="connsiteX49" fmla="*/ 1012885 w 6264586"/>
+                <a:gd name="connsiteY49" fmla="*/ 5849767 h 6858001"/>
+                <a:gd name="connsiteX50" fmla="*/ 1133053 w 6264586"/>
+                <a:gd name="connsiteY50" fmla="*/ 6006822 h 6858001"/>
+                <a:gd name="connsiteX51" fmla="*/ 1194343 w 6264586"/>
+                <a:gd name="connsiteY51" fmla="*/ 6090245 h 6858001"/>
+                <a:gd name="connsiteX52" fmla="*/ 1249390 w 6264586"/>
+                <a:gd name="connsiteY52" fmla="*/ 6165155 h 6858001"/>
+                <a:gd name="connsiteX53" fmla="*/ 1345724 w 6264586"/>
+                <a:gd name="connsiteY53" fmla="*/ 6292132 h 6858001"/>
+                <a:gd name="connsiteX54" fmla="*/ 1364310 w 6264586"/>
+                <a:gd name="connsiteY54" fmla="*/ 6316251 h 6858001"/>
+                <a:gd name="connsiteX55" fmla="*/ 1373673 w 6264586"/>
+                <a:gd name="connsiteY55" fmla="*/ 6327885 h 6858001"/>
+                <a:gd name="connsiteX56" fmla="*/ 1484619 w 6264586"/>
+                <a:gd name="connsiteY56" fmla="*/ 6462240 h 6858001"/>
+                <a:gd name="connsiteX57" fmla="*/ 1739000 w 6264586"/>
+                <a:gd name="connsiteY57" fmla="*/ 6737335 h 6858001"/>
+                <a:gd name="connsiteX58" fmla="*/ 1866801 w 6264586"/>
+                <a:gd name="connsiteY58" fmla="*/ 6858001 h 6858001"/>
+                <a:gd name="connsiteX59" fmla="*/ 1144149 w 6264586"/>
+                <a:gd name="connsiteY59" fmla="*/ 6858001 h 6858001"/>
+                <a:gd name="connsiteX60" fmla="*/ 1058349 w 6264586"/>
+                <a:gd name="connsiteY60" fmla="*/ 6766452 h 6858001"/>
+                <a:gd name="connsiteX61" fmla="*/ 580309 w 6264586"/>
+                <a:gd name="connsiteY61" fmla="*/ 6105000 h 6858001"/>
+                <a:gd name="connsiteX62" fmla="*/ 1 w 6264586"/>
+                <a:gd name="connsiteY62" fmla="*/ 3960094 h 6858001"/>
+                <a:gd name="connsiteX63" fmla="*/ 2599292 w 6264586"/>
+                <a:gd name="connsiteY63" fmla="*/ 37050 h 6858001"/>
+              </a:gdLst>
+              <a:ahLst/>
+              <a:cxnLst>
+                <a:cxn ang="0">
+                  <a:pos x="connsiteX0" y="connsiteY0"/>
+                </a:cxn>
+                <a:cxn ang="0">
+                  <a:pos x="connsiteX1" y="connsiteY1"/>
+                </a:cxn>
+                <a:cxn ang="0">
+                  <a:pos x="connsiteX2" y="connsiteY2"/>
+                </a:cxn>
+                <a:cxn ang="0">
+                  <a:pos x="connsiteX3" y="connsiteY3"/>
+                </a:cxn>
+                <a:cxn ang="0">
+                  <a:pos x="connsiteX4" y="connsiteY4"/>
+                </a:cxn>
+                <a:cxn ang="0">
+                  <a:pos x="connsiteX5" y="connsiteY5"/>
+                </a:cxn>
+                <a:cxn ang="0">
+                  <a:pos x="connsiteX6" y="connsiteY6"/>
+                </a:cxn>
+                <a:cxn ang="0">
+                  <a:pos x="connsiteX7" y="connsiteY7"/>
+                </a:cxn>
+                <a:cxn ang="0">
+                  <a:pos x="connsiteX8" y="connsiteY8"/>
+                </a:cxn>
+                <a:cxn ang="0">
+                  <a:pos x="connsiteX9" y="connsiteY9"/>
+                </a:cxn>
+                <a:cxn ang="0">
+                  <a:pos x="connsiteX10" y="connsiteY10"/>
+                </a:cxn>
+                <a:cxn ang="0">
+                  <a:pos x="connsiteX11" y="connsiteY11"/>
+                </a:cxn>
+                <a:cxn ang="0">
+                  <a:pos x="connsiteX12" y="connsiteY12"/>
+                </a:cxn>
+                <a:cxn ang="0">
+                  <a:pos x="connsiteX13" y="connsiteY13"/>
+                </a:cxn>
+                <a:cxn ang="0">
+                  <a:pos x="connsiteX14" y="connsiteY14"/>
+                </a:cxn>
+                <a:cxn ang="0">
+                  <a:pos x="connsiteX15" y="connsiteY15"/>
+                </a:cxn>
+                <a:cxn ang="0">
+                  <a:pos x="connsiteX16" y="connsiteY16"/>
+                </a:cxn>
+                <a:cxn ang="0">
+                  <a:pos x="connsiteX17" y="connsiteY17"/>
+                </a:cxn>
+                <a:cxn ang="0">
+                  <a:pos x="connsiteX18" y="connsiteY18"/>
+                </a:cxn>
+                <a:cxn ang="0">
+                  <a:pos x="connsiteX19" y="connsiteY19"/>
+                </a:cxn>
+                <a:cxn ang="0">
+                  <a:pos x="connsiteX20" y="connsiteY20"/>
+                </a:cxn>
+                <a:cxn ang="0">
+                  <a:pos x="connsiteX21" y="connsiteY21"/>
+                </a:cxn>
+                <a:cxn ang="0">
+                  <a:pos x="connsiteX22" y="connsiteY22"/>
+                </a:cxn>
+                <a:cxn ang="0">
+                  <a:pos x="connsiteX23" y="connsiteY23"/>
+                </a:cxn>
+                <a:cxn ang="0">
+                  <a:pos x="connsiteX24" y="connsiteY24"/>
+                </a:cxn>
+                <a:cxn ang="0">
+                  <a:pos x="connsiteX25" y="connsiteY25"/>
+                </a:cxn>
+                <a:cxn ang="0">
+                  <a:pos x="connsiteX26" y="connsiteY26"/>
+                </a:cxn>
+                <a:cxn ang="0">
+                  <a:pos x="connsiteX27" y="connsiteY27"/>
+                </a:cxn>
+                <a:cxn ang="0">
+                  <a:pos x="connsiteX28" y="connsiteY28"/>
+                </a:cxn>
+                <a:cxn ang="0">
+                  <a:pos x="connsiteX29" y="connsiteY29"/>
+                </a:cxn>
+                <a:cxn ang="0">
+                  <a:pos x="connsiteX30" y="connsiteY30"/>
+                </a:cxn>
+                <a:cxn ang="0">
+                  <a:pos x="connsiteX31" y="connsiteY31"/>
+                </a:cxn>
+                <a:cxn ang="0">
+                  <a:pos x="connsiteX32" y="connsiteY32"/>
+                </a:cxn>
+                <a:cxn ang="0">
+                  <a:pos x="connsiteX33" y="connsiteY33"/>
+                </a:cxn>
+                <a:cxn ang="0">
+                  <a:pos x="connsiteX34" y="connsiteY34"/>
+                </a:cxn>
+                <a:cxn ang="0">
+                  <a:pos x="connsiteX35" y="connsiteY35"/>
+                </a:cxn>
+                <a:cxn ang="0">
+                  <a:pos x="connsiteX36" y="connsiteY36"/>
+                </a:cxn>
+                <a:cxn ang="0">
+                  <a:pos x="connsiteX37" y="connsiteY37"/>
+                </a:cxn>
+                <a:cxn ang="0">
+                  <a:pos x="connsiteX38" y="connsiteY38"/>
+                </a:cxn>
+                <a:cxn ang="0">
+                  <a:pos x="connsiteX39" y="connsiteY39"/>
+                </a:cxn>
+                <a:cxn ang="0">
+                  <a:pos x="connsiteX40" y="connsiteY40"/>
+                </a:cxn>
+                <a:cxn ang="0">
+                  <a:pos x="connsiteX41" y="connsiteY41"/>
+                </a:cxn>
+                <a:cxn ang="0">
+                  <a:pos x="connsiteX42" y="connsiteY42"/>
+                </a:cxn>
+                <a:cxn ang="0">
+                  <a:pos x="connsiteX43" y="connsiteY43"/>
+                </a:cxn>
+                <a:cxn ang="0">
+                  <a:pos x="connsiteX44" y="connsiteY44"/>
+                </a:cxn>
+                <a:cxn ang="0">
+                  <a:pos x="connsiteX45" y="connsiteY45"/>
+                </a:cxn>
+                <a:cxn ang="0">
+                  <a:pos x="connsiteX46" y="connsiteY46"/>
+                </a:cxn>
+                <a:cxn ang="0">
+                  <a:pos x="connsiteX47" y="connsiteY47"/>
+                </a:cxn>
+                <a:cxn ang="0">
+                  <a:pos x="connsiteX48" y="connsiteY48"/>
+                </a:cxn>
+                <a:cxn ang="0">
+                  <a:pos x="connsiteX49" y="connsiteY49"/>
+                </a:cxn>
+                <a:cxn ang="0">
+                  <a:pos x="connsiteX50" y="connsiteY50"/>
+                </a:cxn>
+                <a:cxn ang="0">
+                  <a:pos x="connsiteX51" y="connsiteY51"/>
+                </a:cxn>
+                <a:cxn ang="0">
+                  <a:pos x="connsiteX52" y="connsiteY52"/>
+                </a:cxn>
+                <a:cxn ang="0">
+                  <a:pos x="connsiteX53" y="connsiteY53"/>
+                </a:cxn>
+                <a:cxn ang="0">
+                  <a:pos x="connsiteX54" y="connsiteY54"/>
+                </a:cxn>
+                <a:cxn ang="0">
+                  <a:pos x="connsiteX55" y="connsiteY55"/>
+                </a:cxn>
+                <a:cxn ang="0">
+                  <a:pos x="connsiteX56" y="connsiteY56"/>
+                </a:cxn>
+                <a:cxn ang="0">
+                  <a:pos x="connsiteX57" y="connsiteY57"/>
+                </a:cxn>
+                <a:cxn ang="0">
+                  <a:pos x="connsiteX58" y="connsiteY58"/>
+                </a:cxn>
+                <a:cxn ang="0">
+                  <a:pos x="connsiteX59" y="connsiteY59"/>
+                </a:cxn>
+                <a:cxn ang="0">
+                  <a:pos x="connsiteX60" y="connsiteY60"/>
+                </a:cxn>
+                <a:cxn ang="0">
+                  <a:pos x="connsiteX61" y="connsiteY61"/>
+                </a:cxn>
+                <a:cxn ang="0">
+                  <a:pos x="connsiteX62" y="connsiteY62"/>
+                </a:cxn>
+                <a:cxn ang="0">
+                  <a:pos x="connsiteX63" y="connsiteY63"/>
+                </a:cxn>
+              </a:cxnLst>
+              <a:rect l="l" t="t" r="r" b="b"/>
+              <a:pathLst>
+                <a:path w="6264586" h="6858001">
+                  <a:moveTo>
+                    <a:pt x="6264586" y="6646464"/>
+                  </a:moveTo>
+                  <a:lnTo>
+                    <a:pt x="6264586" y="6858001"/>
+                  </a:lnTo>
+                  <a:lnTo>
+                    <a:pt x="5997170" y="6858001"/>
+                  </a:lnTo>
+                  <a:lnTo>
+                    <a:pt x="6121512" y="6761029"/>
+                  </a:lnTo>
+                  <a:close/>
+                  <a:moveTo>
+                    <a:pt x="2693206" y="0"/>
+                  </a:moveTo>
+                  <a:lnTo>
+                    <a:pt x="5872285" y="0"/>
+                  </a:lnTo>
+                  <a:lnTo>
+                    <a:pt x="6024875" y="68385"/>
+                  </a:lnTo>
+                  <a:cubicBezTo>
+                    <a:pt x="6086250" y="97989"/>
+                    <a:pt x="6146793" y="129318"/>
+                    <a:pt x="6206432" y="162336"/>
+                  </a:cubicBezTo>
+                  <a:lnTo>
+                    <a:pt x="6264586" y="196704"/>
+                  </a:lnTo>
+                  <a:lnTo>
+                    <a:pt x="6264586" y="537242"/>
+                  </a:lnTo>
+                  <a:lnTo>
+                    <a:pt x="6230189" y="517260"/>
+                  </a:lnTo>
+                  <a:cubicBezTo>
+                    <a:pt x="6012226" y="399931"/>
+                    <a:pt x="5780573" y="310008"/>
+                    <a:pt x="5540536" y="249543"/>
+                  </a:cubicBezTo>
+                  <a:cubicBezTo>
+                    <a:pt x="5421375" y="219324"/>
+                    <a:pt x="5300641" y="195644"/>
+                    <a:pt x="5178896" y="178606"/>
+                  </a:cubicBezTo>
+                  <a:cubicBezTo>
+                    <a:pt x="5057977" y="161840"/>
+                    <a:pt x="4936276" y="151186"/>
+                    <a:pt x="4814279" y="146683"/>
+                  </a:cubicBezTo>
+                  <a:cubicBezTo>
+                    <a:pt x="4761501" y="144556"/>
+                    <a:pt x="4708015" y="143421"/>
+                    <a:pt x="4655095" y="143421"/>
+                  </a:cubicBezTo>
+                  <a:cubicBezTo>
+                    <a:pt x="4462968" y="143573"/>
+                    <a:pt x="4271111" y="157799"/>
+                    <a:pt x="4081069" y="185983"/>
+                  </a:cubicBezTo>
+                  <a:cubicBezTo>
+                    <a:pt x="3956361" y="205703"/>
+                    <a:pt x="3835058" y="229396"/>
+                    <a:pt x="3720566" y="256921"/>
+                  </a:cubicBezTo>
+                  <a:cubicBezTo>
+                    <a:pt x="3596708" y="286714"/>
+                    <a:pt x="3477677" y="320905"/>
+                    <a:pt x="3365879" y="357651"/>
+                  </a:cubicBezTo>
+                  <a:cubicBezTo>
+                    <a:pt x="3249257" y="395958"/>
+                    <a:pt x="3133487" y="438945"/>
+                    <a:pt x="3020555" y="486190"/>
+                  </a:cubicBezTo>
+                  <a:cubicBezTo>
+                    <a:pt x="2907623" y="533434"/>
+                    <a:pt x="2794832" y="585786"/>
+                    <a:pt x="2685163" y="641542"/>
+                  </a:cubicBezTo>
+                  <a:cubicBezTo>
+                    <a:pt x="2463995" y="754348"/>
+                    <a:pt x="2250998" y="882488"/>
+                    <a:pt x="2047720" y="1025030"/>
+                  </a:cubicBezTo>
+                  <a:cubicBezTo>
+                    <a:pt x="2006151" y="1054399"/>
+                    <a:pt x="1951528" y="1093415"/>
+                    <a:pt x="1897333" y="1134983"/>
+                  </a:cubicBezTo>
+                  <a:cubicBezTo>
+                    <a:pt x="1876761" y="1150164"/>
+                    <a:pt x="1855905" y="1166479"/>
+                    <a:pt x="1835758" y="1182227"/>
+                  </a:cubicBezTo>
+                  <a:lnTo>
+                    <a:pt x="1823273" y="1192016"/>
+                  </a:lnTo>
+                  <a:cubicBezTo>
+                    <a:pt x="1797027" y="1211879"/>
+                    <a:pt x="1772057" y="1232309"/>
+                    <a:pt x="1750918" y="1249760"/>
+                  </a:cubicBezTo>
+                  <a:cubicBezTo>
+                    <a:pt x="1645931" y="1335737"/>
+                    <a:pt x="1554422" y="1416605"/>
+                    <a:pt x="1469297" y="1496906"/>
+                  </a:cubicBezTo>
+                  <a:cubicBezTo>
+                    <a:pt x="1286595" y="1668957"/>
+                    <a:pt x="1118818" y="1856190"/>
+                    <a:pt x="967769" y="2056602"/>
+                  </a:cubicBezTo>
+                  <a:cubicBezTo>
+                    <a:pt x="890731" y="2159603"/>
+                    <a:pt x="818800" y="2264590"/>
+                    <a:pt x="754105" y="2368727"/>
+                  </a:cubicBezTo>
+                  <a:cubicBezTo>
+                    <a:pt x="681749" y="2488328"/>
+                    <a:pt x="622304" y="2596720"/>
+                    <a:pt x="572364" y="2701140"/>
+                  </a:cubicBezTo>
+                  <a:cubicBezTo>
+                    <a:pt x="557609" y="2730507"/>
+                    <a:pt x="543989" y="2760443"/>
+                    <a:pt x="532497" y="2786265"/>
+                  </a:cubicBezTo>
+                  <a:lnTo>
+                    <a:pt x="512918" y="2828827"/>
+                  </a:lnTo>
+                  <a:lnTo>
+                    <a:pt x="494475" y="2872240"/>
+                  </a:lnTo>
+                  <a:lnTo>
+                    <a:pt x="491637" y="2878908"/>
+                  </a:lnTo>
+                  <a:cubicBezTo>
+                    <a:pt x="480146" y="2906575"/>
+                    <a:pt x="469220" y="2932821"/>
+                    <a:pt x="459290" y="2959635"/>
+                  </a:cubicBezTo>
+                  <a:cubicBezTo>
+                    <a:pt x="455176" y="2970559"/>
+                    <a:pt x="451060" y="2981484"/>
+                    <a:pt x="446805" y="2992408"/>
+                  </a:cubicBezTo>
+                  <a:cubicBezTo>
+                    <a:pt x="439427" y="3012412"/>
+                    <a:pt x="432333" y="3030572"/>
+                    <a:pt x="426090" y="3049158"/>
+                  </a:cubicBezTo>
+                  <a:lnTo>
+                    <a:pt x="426090" y="3049867"/>
+                  </a:lnTo>
+                  <a:cubicBezTo>
+                    <a:pt x="383010" y="3169099"/>
+                    <a:pt x="346959" y="3290756"/>
+                    <a:pt x="318124" y="3414202"/>
+                  </a:cubicBezTo>
+                  <a:cubicBezTo>
+                    <a:pt x="260107" y="3661703"/>
+                    <a:pt x="230780" y="3915049"/>
+                    <a:pt x="230729" y="4169260"/>
+                  </a:cubicBezTo>
+                  <a:cubicBezTo>
+                    <a:pt x="231621" y="4295173"/>
+                    <a:pt x="244398" y="4420719"/>
+                    <a:pt x="268893" y="4544236"/>
+                  </a:cubicBezTo>
+                  <a:cubicBezTo>
+                    <a:pt x="293708" y="4666304"/>
+                    <a:pt x="330882" y="4785521"/>
+                    <a:pt x="379840" y="4900056"/>
+                  </a:cubicBezTo>
+                  <a:cubicBezTo>
+                    <a:pt x="387926" y="4919919"/>
+                    <a:pt x="397006" y="4939498"/>
+                    <a:pt x="406512" y="4960211"/>
+                  </a:cubicBezTo>
+                  <a:cubicBezTo>
+                    <a:pt x="410343" y="4968299"/>
+                    <a:pt x="414173" y="4976385"/>
+                    <a:pt x="417862" y="4984613"/>
+                  </a:cubicBezTo>
+                  <a:lnTo>
+                    <a:pt x="428077" y="5005043"/>
+                  </a:lnTo>
+                  <a:cubicBezTo>
+                    <a:pt x="438860" y="5026751"/>
+                    <a:pt x="449075" y="5047181"/>
+                    <a:pt x="460140" y="5067327"/>
+                  </a:cubicBezTo>
+                  <a:cubicBezTo>
+                    <a:pt x="485536" y="5116273"/>
+                    <a:pt x="514763" y="5165789"/>
+                    <a:pt x="555197" y="5229773"/>
+                  </a:cubicBezTo>
+                  <a:cubicBezTo>
+                    <a:pt x="586836" y="5280282"/>
+                    <a:pt x="620318" y="5329511"/>
+                    <a:pt x="660611" y="5387396"/>
+                  </a:cubicBezTo>
+                  <a:cubicBezTo>
+                    <a:pt x="698065" y="5440741"/>
+                    <a:pt x="737223" y="5493094"/>
+                    <a:pt x="774110" y="5542182"/>
+                  </a:cubicBezTo>
+                  <a:cubicBezTo>
+                    <a:pt x="821070" y="5604324"/>
+                    <a:pt x="870301" y="5667173"/>
+                    <a:pt x="917829" y="5727896"/>
+                  </a:cubicBezTo>
+                  <a:cubicBezTo>
+                    <a:pt x="949042" y="5767762"/>
+                    <a:pt x="979828" y="5807063"/>
+                    <a:pt x="1012885" y="5849767"/>
+                  </a:cubicBezTo>
+                  <a:cubicBezTo>
+                    <a:pt x="1045942" y="5892471"/>
+                    <a:pt x="1089497" y="5948796"/>
+                    <a:pt x="1133053" y="6006822"/>
+                  </a:cubicBezTo>
+                  <a:cubicBezTo>
+                    <a:pt x="1153624" y="6034345"/>
+                    <a:pt x="1175332" y="6063998"/>
+                    <a:pt x="1194343" y="6090245"/>
+                  </a:cubicBezTo>
+                  <a:cubicBezTo>
+                    <a:pt x="1213355" y="6116491"/>
+                    <a:pt x="1231372" y="6141178"/>
+                    <a:pt x="1249390" y="6165155"/>
+                  </a:cubicBezTo>
+                  <a:cubicBezTo>
+                    <a:pt x="1280461" y="6208000"/>
+                    <a:pt x="1313659" y="6250847"/>
+                    <a:pt x="1345724" y="6292132"/>
+                  </a:cubicBezTo>
+                  <a:lnTo>
+                    <a:pt x="1364310" y="6316251"/>
+                  </a:lnTo>
+                  <a:lnTo>
+                    <a:pt x="1373673" y="6327885"/>
+                  </a:lnTo>
+                  <a:cubicBezTo>
+                    <a:pt x="1409566" y="6372433"/>
+                    <a:pt x="1446738" y="6418542"/>
+                    <a:pt x="1484619" y="6462240"/>
+                  </a:cubicBezTo>
+                  <a:cubicBezTo>
+                    <a:pt x="1567899" y="6559850"/>
+                    <a:pt x="1653876" y="6652211"/>
+                    <a:pt x="1739000" y="6737335"/>
+                  </a:cubicBezTo>
+                  <a:lnTo>
+                    <a:pt x="1866801" y="6858001"/>
+                  </a:lnTo>
+                  <a:lnTo>
+                    <a:pt x="1144149" y="6858001"/>
+                  </a:lnTo>
+                  <a:lnTo>
+                    <a:pt x="1058349" y="6766452"/>
+                  </a:lnTo>
+                  <a:cubicBezTo>
+                    <a:pt x="878978" y="6562465"/>
+                    <a:pt x="718756" y="6341104"/>
+                    <a:pt x="580309" y="6105000"/>
+                  </a:cubicBezTo>
+                  <a:cubicBezTo>
+                    <a:pt x="200401" y="5454007"/>
+                    <a:pt x="146" y="4713831"/>
+                    <a:pt x="1" y="3960094"/>
+                  </a:cubicBezTo>
+                  <a:cubicBezTo>
+                    <a:pt x="-335" y="2196754"/>
+                    <a:pt x="1071479" y="683605"/>
+                    <a:pt x="2599292" y="37050"/>
+                  </a:cubicBezTo>
+                  <a:close/>
+                </a:path>
+              </a:pathLst>
+            </a:custGeom>
+            <a:gradFill>
+              <a:gsLst>
+                <a:gs pos="2000">
+                  <a:schemeClr val="bg1">
+                    <a:alpha val="10000"/>
+                  </a:schemeClr>
+                </a:gs>
+                <a:gs pos="16000">
+                  <a:schemeClr val="accent6">
+                    <a:alpha val="10000"/>
+                  </a:schemeClr>
+                </a:gs>
+                <a:gs pos="100000">
+                  <a:schemeClr val="bg1">
+                    <a:alpha val="10000"/>
+                  </a:schemeClr>
+                </a:gs>
+                <a:gs pos="85000">
+                  <a:schemeClr val="accent1">
+                    <a:alpha val="10000"/>
+                  </a:schemeClr>
+                </a:gs>
+              </a:gsLst>
+              <a:lin ang="12000000" scaled="0"/>
+            </a:gradFill>
+            <a:ln>
+              <a:noFill/>
+            </a:ln>
+          </p:spPr>
+          <p:style>
+            <a:lnRef idx="2">
+              <a:schemeClr val="accent1">
+                <a:shade val="50000"/>
+              </a:schemeClr>
+            </a:lnRef>
+            <a:fillRef idx="1">
+              <a:schemeClr val="accent1"/>
+            </a:fillRef>
+            <a:effectRef idx="0">
+              <a:schemeClr val="accent1"/>
+            </a:effectRef>
+            <a:fontRef idx="minor">
+              <a:schemeClr val="lt1"/>
+            </a:fontRef>
+          </p:style>
+          <p:txBody>
+            <a:bodyPr rtlCol="0" anchor="ctr"/>
+            <a:lstStyle/>
+            <a:p>
+              <a:pPr algn="ctr"/>
+              <a:endParaRPr lang="en-US" dirty="0"/>
+            </a:p>
+          </p:txBody>
+        </p:sp>
+        <p:sp>
+          <p:nvSpPr>
+            <p:cNvPr id="16" name="Freeform: Shape 15">
+              <a:extLst>
+                <a:ext uri="{FF2B5EF4-FFF2-40B4-BE49-F238E27FC236}">
+                  <a16:creationId xmlns:a16="http://schemas.microsoft.com/office/drawing/2014/main" id="{C093DC50-3BD7-46B1-A300-CD207E152FF4}"/>
+                </a:ext>
+                <a:ext uri="{C183D7F6-B498-43B3-948B-1728B52AA6E4}">
+                  <adec:decorative xmlns:adec="http://schemas.microsoft.com/office/drawing/2017/decorative" val="1"/>
+                </a:ext>
+              </a:extLst>
+            </p:cNvPr>
+            <p:cNvSpPr/>
+            <p:nvPr>
+              <p:extLst>
+                <p:ext uri="{386F3935-93C4-4BCD-93E2-E3B085C9AB24}">
+                  <p16:designElem xmlns:p16="http://schemas.microsoft.com/office/powerpoint/2015/main" val="1"/>
+                </p:ext>
+              </p:extLst>
+            </p:nvPr>
+          </p:nvSpPr>
+          <p:spPr>
+            <a:xfrm flipH="1">
+              <a:off x="305" y="-5977"/>
+              <a:ext cx="6238675" cy="6858001"/>
+            </a:xfrm>
+            <a:custGeom>
+              <a:avLst/>
+              <a:gdLst>
+                <a:gd name="connsiteX0" fmla="*/ 6264586 w 6264586"/>
+                <a:gd name="connsiteY0" fmla="*/ 6646464 h 6858001"/>
+                <a:gd name="connsiteX1" fmla="*/ 6264586 w 6264586"/>
+                <a:gd name="connsiteY1" fmla="*/ 6858001 h 6858001"/>
+                <a:gd name="connsiteX2" fmla="*/ 5997170 w 6264586"/>
+                <a:gd name="connsiteY2" fmla="*/ 6858001 h 6858001"/>
+                <a:gd name="connsiteX3" fmla="*/ 6121512 w 6264586"/>
+                <a:gd name="connsiteY3" fmla="*/ 6761029 h 6858001"/>
+                <a:gd name="connsiteX4" fmla="*/ 2693206 w 6264586"/>
+                <a:gd name="connsiteY4" fmla="*/ 0 h 6858001"/>
+                <a:gd name="connsiteX5" fmla="*/ 5872285 w 6264586"/>
+                <a:gd name="connsiteY5" fmla="*/ 0 h 6858001"/>
+                <a:gd name="connsiteX6" fmla="*/ 6024875 w 6264586"/>
+                <a:gd name="connsiteY6" fmla="*/ 68385 h 6858001"/>
+                <a:gd name="connsiteX7" fmla="*/ 6206432 w 6264586"/>
+                <a:gd name="connsiteY7" fmla="*/ 162336 h 6858001"/>
+                <a:gd name="connsiteX8" fmla="*/ 6264586 w 6264586"/>
+                <a:gd name="connsiteY8" fmla="*/ 196704 h 6858001"/>
+                <a:gd name="connsiteX9" fmla="*/ 6264586 w 6264586"/>
+                <a:gd name="connsiteY9" fmla="*/ 537242 h 6858001"/>
+                <a:gd name="connsiteX10" fmla="*/ 6230189 w 6264586"/>
+                <a:gd name="connsiteY10" fmla="*/ 517260 h 6858001"/>
+                <a:gd name="connsiteX11" fmla="*/ 5540536 w 6264586"/>
+                <a:gd name="connsiteY11" fmla="*/ 249543 h 6858001"/>
+                <a:gd name="connsiteX12" fmla="*/ 5178896 w 6264586"/>
+                <a:gd name="connsiteY12" fmla="*/ 178606 h 6858001"/>
+                <a:gd name="connsiteX13" fmla="*/ 4814279 w 6264586"/>
+                <a:gd name="connsiteY13" fmla="*/ 146683 h 6858001"/>
+                <a:gd name="connsiteX14" fmla="*/ 4655095 w 6264586"/>
+                <a:gd name="connsiteY14" fmla="*/ 143421 h 6858001"/>
+                <a:gd name="connsiteX15" fmla="*/ 4081069 w 6264586"/>
+                <a:gd name="connsiteY15" fmla="*/ 185983 h 6858001"/>
+                <a:gd name="connsiteX16" fmla="*/ 3720566 w 6264586"/>
+                <a:gd name="connsiteY16" fmla="*/ 256921 h 6858001"/>
+                <a:gd name="connsiteX17" fmla="*/ 3365879 w 6264586"/>
+                <a:gd name="connsiteY17" fmla="*/ 357651 h 6858001"/>
+                <a:gd name="connsiteX18" fmla="*/ 3020555 w 6264586"/>
+                <a:gd name="connsiteY18" fmla="*/ 486190 h 6858001"/>
+                <a:gd name="connsiteX19" fmla="*/ 2685163 w 6264586"/>
+                <a:gd name="connsiteY19" fmla="*/ 641542 h 6858001"/>
+                <a:gd name="connsiteX20" fmla="*/ 2047720 w 6264586"/>
+                <a:gd name="connsiteY20" fmla="*/ 1025030 h 6858001"/>
+                <a:gd name="connsiteX21" fmla="*/ 1897333 w 6264586"/>
+                <a:gd name="connsiteY21" fmla="*/ 1134983 h 6858001"/>
+                <a:gd name="connsiteX22" fmla="*/ 1835758 w 6264586"/>
+                <a:gd name="connsiteY22" fmla="*/ 1182227 h 6858001"/>
+                <a:gd name="connsiteX23" fmla="*/ 1823273 w 6264586"/>
+                <a:gd name="connsiteY23" fmla="*/ 1192016 h 6858001"/>
+                <a:gd name="connsiteX24" fmla="*/ 1750918 w 6264586"/>
+                <a:gd name="connsiteY24" fmla="*/ 1249760 h 6858001"/>
+                <a:gd name="connsiteX25" fmla="*/ 1469297 w 6264586"/>
+                <a:gd name="connsiteY25" fmla="*/ 1496906 h 6858001"/>
+                <a:gd name="connsiteX26" fmla="*/ 967769 w 6264586"/>
+                <a:gd name="connsiteY26" fmla="*/ 2056602 h 6858001"/>
+                <a:gd name="connsiteX27" fmla="*/ 754105 w 6264586"/>
+                <a:gd name="connsiteY27" fmla="*/ 2368727 h 6858001"/>
+                <a:gd name="connsiteX28" fmla="*/ 572364 w 6264586"/>
+                <a:gd name="connsiteY28" fmla="*/ 2701140 h 6858001"/>
+                <a:gd name="connsiteX29" fmla="*/ 532497 w 6264586"/>
+                <a:gd name="connsiteY29" fmla="*/ 2786265 h 6858001"/>
+                <a:gd name="connsiteX30" fmla="*/ 512918 w 6264586"/>
+                <a:gd name="connsiteY30" fmla="*/ 2828827 h 6858001"/>
+                <a:gd name="connsiteX31" fmla="*/ 494475 w 6264586"/>
+                <a:gd name="connsiteY31" fmla="*/ 2872240 h 6858001"/>
+                <a:gd name="connsiteX32" fmla="*/ 491637 w 6264586"/>
+                <a:gd name="connsiteY32" fmla="*/ 2878908 h 6858001"/>
+                <a:gd name="connsiteX33" fmla="*/ 459290 w 6264586"/>
+                <a:gd name="connsiteY33" fmla="*/ 2959635 h 6858001"/>
+                <a:gd name="connsiteX34" fmla="*/ 446805 w 6264586"/>
+                <a:gd name="connsiteY34" fmla="*/ 2992408 h 6858001"/>
+                <a:gd name="connsiteX35" fmla="*/ 426090 w 6264586"/>
+                <a:gd name="connsiteY35" fmla="*/ 3049158 h 6858001"/>
+                <a:gd name="connsiteX36" fmla="*/ 426090 w 6264586"/>
+                <a:gd name="connsiteY36" fmla="*/ 3049867 h 6858001"/>
+                <a:gd name="connsiteX37" fmla="*/ 318124 w 6264586"/>
+                <a:gd name="connsiteY37" fmla="*/ 3414202 h 6858001"/>
+                <a:gd name="connsiteX38" fmla="*/ 230729 w 6264586"/>
+                <a:gd name="connsiteY38" fmla="*/ 4169260 h 6858001"/>
+                <a:gd name="connsiteX39" fmla="*/ 268893 w 6264586"/>
+                <a:gd name="connsiteY39" fmla="*/ 4544236 h 6858001"/>
+                <a:gd name="connsiteX40" fmla="*/ 379840 w 6264586"/>
+                <a:gd name="connsiteY40" fmla="*/ 4900056 h 6858001"/>
+                <a:gd name="connsiteX41" fmla="*/ 406512 w 6264586"/>
+                <a:gd name="connsiteY41" fmla="*/ 4960211 h 6858001"/>
+                <a:gd name="connsiteX42" fmla="*/ 417862 w 6264586"/>
+                <a:gd name="connsiteY42" fmla="*/ 4984613 h 6858001"/>
+                <a:gd name="connsiteX43" fmla="*/ 428077 w 6264586"/>
+                <a:gd name="connsiteY43" fmla="*/ 5005043 h 6858001"/>
+                <a:gd name="connsiteX44" fmla="*/ 460140 w 6264586"/>
+                <a:gd name="connsiteY44" fmla="*/ 5067327 h 6858001"/>
+                <a:gd name="connsiteX45" fmla="*/ 555197 w 6264586"/>
+                <a:gd name="connsiteY45" fmla="*/ 5229773 h 6858001"/>
+                <a:gd name="connsiteX46" fmla="*/ 660611 w 6264586"/>
+                <a:gd name="connsiteY46" fmla="*/ 5387396 h 6858001"/>
+                <a:gd name="connsiteX47" fmla="*/ 774110 w 6264586"/>
+                <a:gd name="connsiteY47" fmla="*/ 5542182 h 6858001"/>
+                <a:gd name="connsiteX48" fmla="*/ 917829 w 6264586"/>
+                <a:gd name="connsiteY48" fmla="*/ 5727896 h 6858001"/>
+                <a:gd name="connsiteX49" fmla="*/ 1012885 w 6264586"/>
+                <a:gd name="connsiteY49" fmla="*/ 5849767 h 6858001"/>
+                <a:gd name="connsiteX50" fmla="*/ 1133053 w 6264586"/>
+                <a:gd name="connsiteY50" fmla="*/ 6006822 h 6858001"/>
+                <a:gd name="connsiteX51" fmla="*/ 1194343 w 6264586"/>
+                <a:gd name="connsiteY51" fmla="*/ 6090245 h 6858001"/>
+                <a:gd name="connsiteX52" fmla="*/ 1249390 w 6264586"/>
+                <a:gd name="connsiteY52" fmla="*/ 6165155 h 6858001"/>
+                <a:gd name="connsiteX53" fmla="*/ 1345724 w 6264586"/>
+                <a:gd name="connsiteY53" fmla="*/ 6292132 h 6858001"/>
+                <a:gd name="connsiteX54" fmla="*/ 1364310 w 6264586"/>
+                <a:gd name="connsiteY54" fmla="*/ 6316251 h 6858001"/>
+                <a:gd name="connsiteX55" fmla="*/ 1373673 w 6264586"/>
+                <a:gd name="connsiteY55" fmla="*/ 6327885 h 6858001"/>
+                <a:gd name="connsiteX56" fmla="*/ 1484619 w 6264586"/>
+                <a:gd name="connsiteY56" fmla="*/ 6462240 h 6858001"/>
+                <a:gd name="connsiteX57" fmla="*/ 1739000 w 6264586"/>
+                <a:gd name="connsiteY57" fmla="*/ 6737335 h 6858001"/>
+                <a:gd name="connsiteX58" fmla="*/ 1866801 w 6264586"/>
+                <a:gd name="connsiteY58" fmla="*/ 6858001 h 6858001"/>
+                <a:gd name="connsiteX59" fmla="*/ 1144149 w 6264586"/>
+                <a:gd name="connsiteY59" fmla="*/ 6858001 h 6858001"/>
+                <a:gd name="connsiteX60" fmla="*/ 1058349 w 6264586"/>
+                <a:gd name="connsiteY60" fmla="*/ 6766452 h 6858001"/>
+                <a:gd name="connsiteX61" fmla="*/ 580309 w 6264586"/>
+                <a:gd name="connsiteY61" fmla="*/ 6105000 h 6858001"/>
+                <a:gd name="connsiteX62" fmla="*/ 1 w 6264586"/>
+                <a:gd name="connsiteY62" fmla="*/ 3960094 h 6858001"/>
+                <a:gd name="connsiteX63" fmla="*/ 2599292 w 6264586"/>
+                <a:gd name="connsiteY63" fmla="*/ 37050 h 6858001"/>
+              </a:gdLst>
+              <a:ahLst/>
+              <a:cxnLst>
+                <a:cxn ang="0">
+                  <a:pos x="connsiteX0" y="connsiteY0"/>
+                </a:cxn>
+                <a:cxn ang="0">
+                  <a:pos x="connsiteX1" y="connsiteY1"/>
+                </a:cxn>
+                <a:cxn ang="0">
+                  <a:pos x="connsiteX2" y="connsiteY2"/>
+                </a:cxn>
+                <a:cxn ang="0">
+                  <a:pos x="connsiteX3" y="connsiteY3"/>
+                </a:cxn>
+                <a:cxn ang="0">
+                  <a:pos x="connsiteX4" y="connsiteY4"/>
+                </a:cxn>
+                <a:cxn ang="0">
+                  <a:pos x="connsiteX5" y="connsiteY5"/>
+                </a:cxn>
+                <a:cxn ang="0">
+                  <a:pos x="connsiteX6" y="connsiteY6"/>
+                </a:cxn>
+                <a:cxn ang="0">
+                  <a:pos x="connsiteX7" y="connsiteY7"/>
+                </a:cxn>
+                <a:cxn ang="0">
+                  <a:pos x="connsiteX8" y="connsiteY8"/>
+                </a:cxn>
+                <a:cxn ang="0">
+                  <a:pos x="connsiteX9" y="connsiteY9"/>
+                </a:cxn>
+                <a:cxn ang="0">
+                  <a:pos x="connsiteX10" y="connsiteY10"/>
+                </a:cxn>
+                <a:cxn ang="0">
+                  <a:pos x="connsiteX11" y="connsiteY11"/>
+                </a:cxn>
+                <a:cxn ang="0">
+                  <a:pos x="connsiteX12" y="connsiteY12"/>
+                </a:cxn>
+                <a:cxn ang="0">
+                  <a:pos x="connsiteX13" y="connsiteY13"/>
+                </a:cxn>
+                <a:cxn ang="0">
+                  <a:pos x="connsiteX14" y="connsiteY14"/>
+                </a:cxn>
+                <a:cxn ang="0">
+                  <a:pos x="connsiteX15" y="connsiteY15"/>
+                </a:cxn>
+                <a:cxn ang="0">
+                  <a:pos x="connsiteX16" y="connsiteY16"/>
+                </a:cxn>
+                <a:cxn ang="0">
+                  <a:pos x="connsiteX17" y="connsiteY17"/>
+                </a:cxn>
+                <a:cxn ang="0">
+                  <a:pos x="connsiteX18" y="connsiteY18"/>
+                </a:cxn>
+                <a:cxn ang="0">
+                  <a:pos x="connsiteX19" y="connsiteY19"/>
+                </a:cxn>
+                <a:cxn ang="0">
+                  <a:pos x="connsiteX20" y="connsiteY20"/>
+                </a:cxn>
+                <a:cxn ang="0">
+                  <a:pos x="connsiteX21" y="connsiteY21"/>
+                </a:cxn>
+                <a:cxn ang="0">
+                  <a:pos x="connsiteX22" y="connsiteY22"/>
+                </a:cxn>
+                <a:cxn ang="0">
+                  <a:pos x="connsiteX23" y="connsiteY23"/>
+                </a:cxn>
+                <a:cxn ang="0">
+                  <a:pos x="connsiteX24" y="connsiteY24"/>
+                </a:cxn>
+                <a:cxn ang="0">
+                  <a:pos x="connsiteX25" y="connsiteY25"/>
+                </a:cxn>
+                <a:cxn ang="0">
+                  <a:pos x="connsiteX26" y="connsiteY26"/>
+                </a:cxn>
+                <a:cxn ang="0">
+                  <a:pos x="connsiteX27" y="connsiteY27"/>
+                </a:cxn>
+                <a:cxn ang="0">
+                  <a:pos x="connsiteX28" y="connsiteY28"/>
+                </a:cxn>
+                <a:cxn ang="0">
+                  <a:pos x="connsiteX29" y="connsiteY29"/>
+                </a:cxn>
+                <a:cxn ang="0">
+                  <a:pos x="connsiteX30" y="connsiteY30"/>
+                </a:cxn>
+                <a:cxn ang="0">
+                  <a:pos x="connsiteX31" y="connsiteY31"/>
+                </a:cxn>
+                <a:cxn ang="0">
+                  <a:pos x="connsiteX32" y="connsiteY32"/>
+                </a:cxn>
+                <a:cxn ang="0">
+                  <a:pos x="connsiteX33" y="connsiteY33"/>
+                </a:cxn>
+                <a:cxn ang="0">
+                  <a:pos x="connsiteX34" y="connsiteY34"/>
+                </a:cxn>
+                <a:cxn ang="0">
+                  <a:pos x="connsiteX35" y="connsiteY35"/>
+                </a:cxn>
+                <a:cxn ang="0">
+                  <a:pos x="connsiteX36" y="connsiteY36"/>
+                </a:cxn>
+                <a:cxn ang="0">
+                  <a:pos x="connsiteX37" y="connsiteY37"/>
+                </a:cxn>
+                <a:cxn ang="0">
+                  <a:pos x="connsiteX38" y="connsiteY38"/>
+                </a:cxn>
+                <a:cxn ang="0">
+                  <a:pos x="connsiteX39" y="connsiteY39"/>
+                </a:cxn>
+                <a:cxn ang="0">
+                  <a:pos x="connsiteX40" y="connsiteY40"/>
+                </a:cxn>
+                <a:cxn ang="0">
+                  <a:pos x="connsiteX41" y="connsiteY41"/>
+                </a:cxn>
+                <a:cxn ang="0">
+                  <a:pos x="connsiteX42" y="connsiteY42"/>
+                </a:cxn>
+                <a:cxn ang="0">
+                  <a:pos x="connsiteX43" y="connsiteY43"/>
+                </a:cxn>
+                <a:cxn ang="0">
+                  <a:pos x="connsiteX44" y="connsiteY44"/>
+                </a:cxn>
+                <a:cxn ang="0">
+                  <a:pos x="connsiteX45" y="connsiteY45"/>
+                </a:cxn>
+                <a:cxn ang="0">
+                  <a:pos x="connsiteX46" y="connsiteY46"/>
+                </a:cxn>
+                <a:cxn ang="0">
+                  <a:pos x="connsiteX47" y="connsiteY47"/>
+                </a:cxn>
+                <a:cxn ang="0">
+                  <a:pos x="connsiteX48" y="connsiteY48"/>
+                </a:cxn>
+                <a:cxn ang="0">
+                  <a:pos x="connsiteX49" y="connsiteY49"/>
+                </a:cxn>
+                <a:cxn ang="0">
+                  <a:pos x="connsiteX50" y="connsiteY50"/>
+                </a:cxn>
+                <a:cxn ang="0">
+                  <a:pos x="connsiteX51" y="connsiteY51"/>
+                </a:cxn>
+                <a:cxn ang="0">
+                  <a:pos x="connsiteX52" y="connsiteY52"/>
+                </a:cxn>
+                <a:cxn ang="0">
+                  <a:pos x="connsiteX53" y="connsiteY53"/>
+                </a:cxn>
+                <a:cxn ang="0">
+                  <a:pos x="connsiteX54" y="connsiteY54"/>
+                </a:cxn>
+                <a:cxn ang="0">
+                  <a:pos x="connsiteX55" y="connsiteY55"/>
+                </a:cxn>
+                <a:cxn ang="0">
+                  <a:pos x="connsiteX56" y="connsiteY56"/>
+                </a:cxn>
+                <a:cxn ang="0">
+                  <a:pos x="connsiteX57" y="connsiteY57"/>
+                </a:cxn>
+                <a:cxn ang="0">
+                  <a:pos x="connsiteX58" y="connsiteY58"/>
+                </a:cxn>
+                <a:cxn ang="0">
+                  <a:pos x="connsiteX59" y="connsiteY59"/>
+                </a:cxn>
+                <a:cxn ang="0">
+                  <a:pos x="connsiteX60" y="connsiteY60"/>
+                </a:cxn>
+                <a:cxn ang="0">
+                  <a:pos x="connsiteX61" y="connsiteY61"/>
+                </a:cxn>
+                <a:cxn ang="0">
+                  <a:pos x="connsiteX62" y="connsiteY62"/>
+                </a:cxn>
+                <a:cxn ang="0">
+                  <a:pos x="connsiteX63" y="connsiteY63"/>
+                </a:cxn>
+              </a:cxnLst>
+              <a:rect l="l" t="t" r="r" b="b"/>
+              <a:pathLst>
+                <a:path w="6264586" h="6858001">
+                  <a:moveTo>
+                    <a:pt x="6264586" y="6646464"/>
+                  </a:moveTo>
+                  <a:lnTo>
+                    <a:pt x="6264586" y="6858001"/>
+                  </a:lnTo>
+                  <a:lnTo>
+                    <a:pt x="5997170" y="6858001"/>
+                  </a:lnTo>
+                  <a:lnTo>
+                    <a:pt x="6121512" y="6761029"/>
+                  </a:lnTo>
+                  <a:close/>
+                  <a:moveTo>
+                    <a:pt x="2693206" y="0"/>
+                  </a:moveTo>
+                  <a:lnTo>
+                    <a:pt x="5872285" y="0"/>
+                  </a:lnTo>
+                  <a:lnTo>
+                    <a:pt x="6024875" y="68385"/>
+                  </a:lnTo>
+                  <a:cubicBezTo>
+                    <a:pt x="6086250" y="97989"/>
+                    <a:pt x="6146793" y="129318"/>
+                    <a:pt x="6206432" y="162336"/>
+                  </a:cubicBezTo>
+                  <a:lnTo>
+                    <a:pt x="6264586" y="196704"/>
+                  </a:lnTo>
+                  <a:lnTo>
+                    <a:pt x="6264586" y="537242"/>
+                  </a:lnTo>
+                  <a:lnTo>
+                    <a:pt x="6230189" y="517260"/>
+                  </a:lnTo>
+                  <a:cubicBezTo>
+                    <a:pt x="6012226" y="399931"/>
+                    <a:pt x="5780573" y="310008"/>
+                    <a:pt x="5540536" y="249543"/>
+                  </a:cubicBezTo>
+                  <a:cubicBezTo>
+                    <a:pt x="5421375" y="219324"/>
+                    <a:pt x="5300641" y="195644"/>
+                    <a:pt x="5178896" y="178606"/>
+                  </a:cubicBezTo>
+                  <a:cubicBezTo>
+                    <a:pt x="5057977" y="161840"/>
+                    <a:pt x="4936276" y="151186"/>
+                    <a:pt x="4814279" y="146683"/>
+                  </a:cubicBezTo>
+                  <a:cubicBezTo>
+                    <a:pt x="4761501" y="144556"/>
+                    <a:pt x="4708015" y="143421"/>
+                    <a:pt x="4655095" y="143421"/>
+                  </a:cubicBezTo>
+                  <a:cubicBezTo>
+                    <a:pt x="4462968" y="143573"/>
+                    <a:pt x="4271111" y="157799"/>
+                    <a:pt x="4081069" y="185983"/>
+                  </a:cubicBezTo>
+                  <a:cubicBezTo>
+                    <a:pt x="3956361" y="205703"/>
+                    <a:pt x="3835058" y="229396"/>
+                    <a:pt x="3720566" y="256921"/>
+                  </a:cubicBezTo>
+                  <a:cubicBezTo>
+                    <a:pt x="3596708" y="286714"/>
+                    <a:pt x="3477677" y="320905"/>
+                    <a:pt x="3365879" y="357651"/>
+                  </a:cubicBezTo>
+                  <a:cubicBezTo>
+                    <a:pt x="3249257" y="395958"/>
+                    <a:pt x="3133487" y="438945"/>
+                    <a:pt x="3020555" y="486190"/>
+                  </a:cubicBezTo>
+                  <a:cubicBezTo>
+                    <a:pt x="2907623" y="533434"/>
+                    <a:pt x="2794832" y="585786"/>
+                    <a:pt x="2685163" y="641542"/>
+                  </a:cubicBezTo>
+                  <a:cubicBezTo>
+                    <a:pt x="2463995" y="754348"/>
+                    <a:pt x="2250998" y="882488"/>
+                    <a:pt x="2047720" y="1025030"/>
+                  </a:cubicBezTo>
+                  <a:cubicBezTo>
+                    <a:pt x="2006151" y="1054399"/>
+                    <a:pt x="1951528" y="1093415"/>
+                    <a:pt x="1897333" y="1134983"/>
+                  </a:cubicBezTo>
+                  <a:cubicBezTo>
+                    <a:pt x="1876761" y="1150164"/>
+                    <a:pt x="1855905" y="1166479"/>
+                    <a:pt x="1835758" y="1182227"/>
+                  </a:cubicBezTo>
+                  <a:lnTo>
+                    <a:pt x="1823273" y="1192016"/>
+                  </a:lnTo>
+                  <a:cubicBezTo>
+                    <a:pt x="1797027" y="1211879"/>
+                    <a:pt x="1772057" y="1232309"/>
+                    <a:pt x="1750918" y="1249760"/>
+                  </a:cubicBezTo>
+                  <a:cubicBezTo>
+                    <a:pt x="1645931" y="1335737"/>
+                    <a:pt x="1554422" y="1416605"/>
+                    <a:pt x="1469297" y="1496906"/>
+                  </a:cubicBezTo>
+                  <a:cubicBezTo>
+                    <a:pt x="1286595" y="1668957"/>
+                    <a:pt x="1118818" y="1856190"/>
+                    <a:pt x="967769" y="2056602"/>
+                  </a:cubicBezTo>
+                  <a:cubicBezTo>
+                    <a:pt x="890731" y="2159603"/>
+                    <a:pt x="818800" y="2264590"/>
+                    <a:pt x="754105" y="2368727"/>
+                  </a:cubicBezTo>
+                  <a:cubicBezTo>
+                    <a:pt x="681749" y="2488328"/>
+                    <a:pt x="622304" y="2596720"/>
+                    <a:pt x="572364" y="2701140"/>
+                  </a:cubicBezTo>
+                  <a:cubicBezTo>
+                    <a:pt x="557609" y="2730507"/>
+                    <a:pt x="543989" y="2760443"/>
+                    <a:pt x="532497" y="2786265"/>
+                  </a:cubicBezTo>
+                  <a:lnTo>
+                    <a:pt x="512918" y="2828827"/>
+                  </a:lnTo>
+                  <a:lnTo>
+                    <a:pt x="494475" y="2872240"/>
+                  </a:lnTo>
+                  <a:lnTo>
+                    <a:pt x="491637" y="2878908"/>
+                  </a:lnTo>
+                  <a:cubicBezTo>
+                    <a:pt x="480146" y="2906575"/>
+                    <a:pt x="469220" y="2932821"/>
+                    <a:pt x="459290" y="2959635"/>
+                  </a:cubicBezTo>
+                  <a:cubicBezTo>
+                    <a:pt x="455176" y="2970559"/>
+                    <a:pt x="451060" y="2981484"/>
+                    <a:pt x="446805" y="2992408"/>
+                  </a:cubicBezTo>
+                  <a:cubicBezTo>
+                    <a:pt x="439427" y="3012412"/>
+                    <a:pt x="432333" y="3030572"/>
+                    <a:pt x="426090" y="3049158"/>
+                  </a:cubicBezTo>
+                  <a:lnTo>
+                    <a:pt x="426090" y="3049867"/>
+                  </a:lnTo>
+                  <a:cubicBezTo>
+                    <a:pt x="383010" y="3169099"/>
+                    <a:pt x="346959" y="3290756"/>
+                    <a:pt x="318124" y="3414202"/>
+                  </a:cubicBezTo>
+                  <a:cubicBezTo>
+                    <a:pt x="260107" y="3661703"/>
+                    <a:pt x="230780" y="3915049"/>
+                    <a:pt x="230729" y="4169260"/>
+                  </a:cubicBezTo>
+                  <a:cubicBezTo>
+                    <a:pt x="231621" y="4295173"/>
+                    <a:pt x="244398" y="4420719"/>
+                    <a:pt x="268893" y="4544236"/>
+                  </a:cubicBezTo>
+                  <a:cubicBezTo>
+                    <a:pt x="293708" y="4666304"/>
+                    <a:pt x="330882" y="4785521"/>
+                    <a:pt x="379840" y="4900056"/>
+                  </a:cubicBezTo>
+                  <a:cubicBezTo>
+                    <a:pt x="387926" y="4919919"/>
+                    <a:pt x="397006" y="4939498"/>
+                    <a:pt x="406512" y="4960211"/>
+                  </a:cubicBezTo>
+                  <a:cubicBezTo>
+                    <a:pt x="410343" y="4968299"/>
+                    <a:pt x="414173" y="4976385"/>
+                    <a:pt x="417862" y="4984613"/>
+                  </a:cubicBezTo>
+                  <a:lnTo>
+                    <a:pt x="428077" y="5005043"/>
+                  </a:lnTo>
+                  <a:cubicBezTo>
+                    <a:pt x="438860" y="5026751"/>
+                    <a:pt x="449075" y="5047181"/>
+                    <a:pt x="460140" y="5067327"/>
+                  </a:cubicBezTo>
+                  <a:cubicBezTo>
+                    <a:pt x="485536" y="5116273"/>
+                    <a:pt x="514763" y="5165789"/>
+                    <a:pt x="555197" y="5229773"/>
+                  </a:cubicBezTo>
+                  <a:cubicBezTo>
+                    <a:pt x="586836" y="5280282"/>
+                    <a:pt x="620318" y="5329511"/>
+                    <a:pt x="660611" y="5387396"/>
+                  </a:cubicBezTo>
+                  <a:cubicBezTo>
+                    <a:pt x="698065" y="5440741"/>
+                    <a:pt x="737223" y="5493094"/>
+                    <a:pt x="774110" y="5542182"/>
+                  </a:cubicBezTo>
+                  <a:cubicBezTo>
+                    <a:pt x="821070" y="5604324"/>
+                    <a:pt x="870301" y="5667173"/>
+                    <a:pt x="917829" y="5727896"/>
+                  </a:cubicBezTo>
+                  <a:cubicBezTo>
+                    <a:pt x="949042" y="5767762"/>
+                    <a:pt x="979828" y="5807063"/>
+                    <a:pt x="1012885" y="5849767"/>
+                  </a:cubicBezTo>
+                  <a:cubicBezTo>
+                    <a:pt x="1045942" y="5892471"/>
+                    <a:pt x="1089497" y="5948796"/>
+                    <a:pt x="1133053" y="6006822"/>
+                  </a:cubicBezTo>
+                  <a:cubicBezTo>
+                    <a:pt x="1153624" y="6034345"/>
+                    <a:pt x="1175332" y="6063998"/>
+                    <a:pt x="1194343" y="6090245"/>
+                  </a:cubicBezTo>
+                  <a:cubicBezTo>
+                    <a:pt x="1213355" y="6116491"/>
+                    <a:pt x="1231372" y="6141178"/>
+                    <a:pt x="1249390" y="6165155"/>
+                  </a:cubicBezTo>
+                  <a:cubicBezTo>
+                    <a:pt x="1280461" y="6208000"/>
+                    <a:pt x="1313659" y="6250847"/>
+                    <a:pt x="1345724" y="6292132"/>
+                  </a:cubicBezTo>
+                  <a:lnTo>
+                    <a:pt x="1364310" y="6316251"/>
+                  </a:lnTo>
+                  <a:lnTo>
+                    <a:pt x="1373673" y="6327885"/>
+                  </a:lnTo>
+                  <a:cubicBezTo>
+                    <a:pt x="1409566" y="6372433"/>
+                    <a:pt x="1446738" y="6418542"/>
+                    <a:pt x="1484619" y="6462240"/>
+                  </a:cubicBezTo>
+                  <a:cubicBezTo>
+                    <a:pt x="1567899" y="6559850"/>
+                    <a:pt x="1653876" y="6652211"/>
+                    <a:pt x="1739000" y="6737335"/>
+                  </a:cubicBezTo>
+                  <a:lnTo>
+                    <a:pt x="1866801" y="6858001"/>
+                  </a:lnTo>
+                  <a:lnTo>
+                    <a:pt x="1144149" y="6858001"/>
+                  </a:lnTo>
+                  <a:lnTo>
+                    <a:pt x="1058349" y="6766452"/>
+                  </a:lnTo>
+                  <a:cubicBezTo>
+                    <a:pt x="878978" y="6562465"/>
+                    <a:pt x="718756" y="6341104"/>
+                    <a:pt x="580309" y="6105000"/>
+                  </a:cubicBezTo>
+                  <a:cubicBezTo>
+                    <a:pt x="200401" y="5454007"/>
+                    <a:pt x="146" y="4713831"/>
+                    <a:pt x="1" y="3960094"/>
+                  </a:cubicBezTo>
+                  <a:cubicBezTo>
+                    <a:pt x="-335" y="2196754"/>
+                    <a:pt x="1071479" y="683605"/>
+                    <a:pt x="2599292" y="37050"/>
+                  </a:cubicBezTo>
+                  <a:close/>
+                </a:path>
+              </a:pathLst>
+            </a:custGeom>
+            <a:gradFill>
+              <a:gsLst>
+                <a:gs pos="2000">
+                  <a:schemeClr val="bg1">
+                    <a:alpha val="10000"/>
+                  </a:schemeClr>
+                </a:gs>
+                <a:gs pos="16000">
+                  <a:schemeClr val="accent6">
+                    <a:alpha val="10000"/>
+                  </a:schemeClr>
+                </a:gs>
+                <a:gs pos="100000">
+                  <a:schemeClr val="bg1">
+                    <a:alpha val="10000"/>
+                  </a:schemeClr>
+                </a:gs>
+                <a:gs pos="85000">
+                  <a:schemeClr val="accent1">
+                    <a:alpha val="10000"/>
+                  </a:schemeClr>
+                </a:gs>
+              </a:gsLst>
+              <a:lin ang="12000000" scaled="0"/>
+            </a:gradFill>
+            <a:ln>
+              <a:noFill/>
+            </a:ln>
+          </p:spPr>
+          <p:style>
+            <a:lnRef idx="2">
+              <a:schemeClr val="accent1">
+                <a:shade val="50000"/>
+              </a:schemeClr>
+            </a:lnRef>
+            <a:fillRef idx="1">
+              <a:schemeClr val="accent1"/>
+            </a:fillRef>
+            <a:effectRef idx="0">
+              <a:schemeClr val="accent1"/>
+            </a:effectRef>
+            <a:fontRef idx="minor">
+              <a:schemeClr val="lt1"/>
+            </a:fontRef>
+          </p:style>
+          <p:txBody>
+            <a:bodyPr rtlCol="0" anchor="ctr"/>
+            <a:lstStyle/>
+            <a:p>
+              <a:pPr algn="ctr"/>
+              <a:endParaRPr lang="en-US" dirty="0"/>
+            </a:p>
+          </p:txBody>
+        </p:sp>
+      </p:grpSp>
+    </p:spTree>
+    <p:extLst>
+      <p:ext uri="{BB962C8B-B14F-4D97-AF65-F5344CB8AC3E}">
+        <p14:creationId xmlns:p14="http://schemas.microsoft.com/office/powerpoint/2010/main" val="3847547106"/>
       </p:ext>
     </p:extLst>
   </p:cSld>
